--- a/01-slides/W03-UML-Essentials-and-Modeling-Workflow.pptx
+++ b/01-slides/W03-UML-Essentials-and-Modeling-Workflow.pptx
@@ -2230,7 +2230,7 @@
   <p:cSld>
     <p:spTree>
       <p:nvGrpSpPr>
-        <p:cNvPr id="25" name="" descr="&lt;Slide style={{ background: '#FFFFFF', padding: 0 }}&gt;&#10;  &lt;Box style={{ height: 72, background: '#1E4FA8', padding: '0 40px', flexDirection: 'row', alignItems: 'center', justifyContent: 'space-between' }}&gt;&#10;    &lt;Text style={{ fontSize: 15, color: '#B9CDF0', letterSpacing: 1 }}&gt;ISAD · INFORMATION SYSTEMS ANALYSIS &amp;amp; DESIGN&lt;/Text&gt;&#10;    &lt;Text style={{ fontSize: 15, color: '#B9CDF0' }}&gt;W03 · NOTATION&lt;/Text&gt;&#10;  &lt;/Box&gt;&#10;  &lt;Box style={{ padding: '16px 40px 0 40px', flexDirection: 'row', alignItems: 'center', justifyContent: 'space-between' }}&gt;&#10;    &lt;Text style={{ fontSize: 30, fontWeight: 'bold', color: '#0E3F8C' }}&gt;Cheat Sheet — Use Case &amp;amp; Class&lt;/Text&gt;&#10;    &lt;Text style={{ fontSize: 14, color: '#1E4FA8', fontWeight: 'bold' }}&gt;11 / 38&lt;/Text&gt;&#10;  &lt;/Box&gt;&#10;  &lt;Box style={{ flex: 1, padding: '8px 40px 0 40px', flexDirection: 'row', gap: 26 }}&gt;&#10;    &lt;Box style={{ flex: 5, flexDirection: 'column', gap: 8, justifyContent: 'center' }}&gt;&#10;      &lt;Text style={{ fontSize: 18, fontWeight: 'bold', color: '#0E3F8C' }}&gt;Use case diagram — the outside view&lt;/Text&gt;&#10;      &lt;svg width={420} height={300} viewBox='0 0 420 300'&gt;&#10;        &lt;rect x='140' y='24' width='270' height='252' rx='8' fill='#FFFFFF' stroke='#3D7BD9' strokeWidth='1.5' /&gt;&#10;        &lt;text x='150' y='42' fill='#8B97A8' fontSize='11'&gt;CampusBites&lt;/text&gt;&#10;        &lt;circle cx='60' cy='80' r='10' fill='#FFFFFF' stroke='#1E4FA8' strokeWidth='1.8' /&gt;&#10;        &lt;line x1='60' y1='90' x2='60' y2='118' stroke='#1E4FA8' strokeWidth='1.8' /&gt;&#10;        &lt;line x1='46' y1='100' x2='74' y2='100' stroke='#1E4FA8' strokeWidth='1.8' /&gt;&#10;        &lt;line x1='60' y1='118' x2='50' y2='140' stroke='#1E4FA8' strokeWidth='1.8' /&gt;&#10;        &lt;line x1='60' y1='118' x2='70' y2='140' stroke='#1E4FA8' strokeWidth='1.8' /&gt;&#10;        &lt;text x='60' y='158' textAnchor='middle' fill='#1A2230' fontSize='12' fontWeight='bold'&gt;Customer&lt;/text&gt;&#10;        &lt;circle cx='60' cy='205' r='10' fill='#FFFFFF' stroke='#1E4FA8' strokeWidth='1.8' /&gt;&#10;        &lt;line x1='60' y1='215' x2='60' y2='243' stroke='#1E4FA8' strokeWidth='1.8' /&gt;&#10;        &lt;line x1='46' y1='225' x2='74' y2='225' stroke='#1E4FA8' strokeWidth='1.8' /&gt;&#10;        &lt;line x1='60' y1='243' x2='50' y2='265' stroke='#1E4FA8' strokeWidth='1.8' /&gt;&#10;        &lt;line x1='60' y1='243' x2='70' y2='265' stroke='#1E4FA8' strokeWidth='1.8' /&gt;&#10;        &lt;text x='60' y='283' textAnchor='middle' fill='#1A2230' fontSize='12' fontWeight='bold'&gt;Courier&lt;/text&gt;&#10;        &lt;ellipse cx='275' cy='95' rx='110' ry='28' fill='#E8EFF8' stroke='#1E4FA8' strokeWidth='1.8' /&gt;&#10;        &lt;text x='275' y='100' textAnchor='middle' fill='#0E3F8C' fontSize='13' fontWeight='bold'&gt;Place Order&lt;/text&gt;&#10;        &lt;ellipse cx='275' cy='215' rx='110' ry='28' fill='#E8EFF8' stroke='#1E4FA8' strokeWidth='1.8' /&gt;&#10;        &lt;text x='275' y='220' textAnchor='middle' fill='#0E3F8C' fontSize='13' fontWeight='bold'&gt;Track Delivery&lt;/text&gt;&#10;        &lt;line x1='78' y1='105' x2='163' y2='95' stroke='#1E4FA8' strokeWidth='1.5' /&gt;&#10;        &lt;line x1='78' y1='225' x2='163' y2='215' stroke='#1E4FA8' strokeWidth='1.5' /&gt;&#10;        &lt;line x1='275' y1='123' x2='275' y2='185' stroke='#3D7BD9' strokeWidth='1.5' strokeDasharray='5 3' markerEnd='url(#ar11)' /&gt;&#10;        &lt;text x='284' y='158' fill='#3D7BD9' fontSize='11'&gt;«include»&lt;/text&gt;&#10;        &lt;defs&gt;&#10;          &lt;marker id='ar11' markerWidth='8' markerHeight='8' refX='7' refY='4' orient='auto'&gt;&#10;            &lt;path d='M0,0 L8,4 L0,8 z' fill='#3D7BD9' /&gt;&#10;          &lt;/marker&gt;&#10;        &lt;/defs&gt;&#10;      &lt;/svg&gt;&#10;      &lt;Text style={{ fontSize: 13, color: '#8B97A8', lineHeight: 1.5 }}&gt;Actor (outside) · use case (inside the box) · association line · dashed «include».&lt;/Text&gt;&#10;    &lt;/Box&gt;&#10;    &lt;Box style={{ flex: 6, flexDirection: 'column', gap: 8, justifyContent: 'center' }}&gt;&#10;      &lt;Text style={{ fontSize: 18, fontWeight: 'bold', color: '#0E3F8C' }}&gt;Class diagram — the inside view&lt;/Text&gt;&#10;      &lt;svg width={460} height={300} viewBox='0 0 460 300'&gt;&#10;        &lt;rect x='24' y='30' width='196' height='126' rx='4' fill='#FFFFFF' stroke='#1E4FA8' strokeWidth='1.8' /&gt;&#10;        &lt;line x1='24' y1='58' x2='220' y2='58' stroke='#1E4FA8' strokeWidth='1.4' /&gt;&#10;        &lt;line x1='24' y1='118' x2='220' y2='118' stroke='#1E4FA8' strokeWidth='1.4' /&gt;&#10;        &lt;text x='122' y='50' textAnchor='middle' fill='#0E3F8C' fontSize='13' fontWeight='bold'&gt;Order&lt;/text&gt;&#10;        &lt;text x='34' y='74' fill='#4A5568' fontSize='10.5'&gt;- status : OrderStatus&lt;/text&gt;&#10;        &lt;text x='34' y='92' fill='#4A5568' fontSize='10.5'&gt;- placedAt : LocalDateTime&lt;/text&gt;&#10;        &lt;text x='34' y='110' fill='#4A5568' fontSize='10.5'&gt;- lines : List&lt;/text&gt;&#10;        &lt;text x='34' y='134' fill='#4A5568' fontSize='10.5'&gt;+ total() : Money&lt;/text&gt;&#10;        &lt;text x='34' y='150' fill='#4A5568' fontSize='10.5'&gt;+ addItem(i, qty)&lt;/text&gt;&#10;        &lt;rect x='300' y='30' width='146' height='76' rx='4' fill='#FFFFFF' stroke='#1E4FA8' strokeWidth='1.8' /&gt;&#10;        &lt;line x1='300' y1='58' x2='446' y2='58' stroke='#1E4FA8' strokeWidth='1.4' /&gt;&#10;        &lt;text x='373' y='50' textAnchor='middle' fill='#0E3F8C' fontSize='13' fontWeight='bold'&gt;Payment&lt;/text&gt;&#10;        &lt;text x='310' y='74' fill='#4A5568' fontSize='10.5'&gt;+ amount : Money&lt;/text&gt;&#10;        &lt;text x='310' y='92' fill='#4A5568' fontSize='10.5'&gt;+ method : String&lt;/text&gt;&#10;        &lt;line x1='220' y1='68' x2='298' y2='68' stroke='#1E4FA8' strokeWidth='1.6' /&gt;&#10;        &lt;text x='230' y='62' fill='#1E4FA8' fontSize='11' fontWeight='bold'&gt;1&lt;/text&gt;&#10;        &lt;text x='262' y='62' fill='#1E4FA8' fontSize='11' fontWeight='bold'&gt;pays&lt;/text&gt;&#10;        &lt;text x='272' y='84' fill='#1E4FA8' fontSize='11' fontWeight='bold'&gt;0..1&lt;/text&gt;&#10;        &lt;rect x='24' y='210' width='196' height='70' rx='4' fill='#FFFFFF' stroke='#1E4FA8' strokeWidth='1.8' /&gt;&#10;        &lt;line x1='24' y1='238' x2='220' y2='238' stroke='#1E4FA8' strokeWidth='1.4' /&gt;&#10;        &lt;text x='122' y='230' textAnchor='middle' fill='#0E3F8C' fontSize='13' fontWeight='bold'&gt;DeliveryOrder&lt;/text&gt;&#10;        &lt;text x='34' y='256' fill='#4A5568' fontSize='10.5'&gt;+ courier : Courier&lt;/text&gt;&#10;        &lt;text x='34' y='272' fill='#4A5568' fontSize='10.5'&gt;+ slot : TimeSlot&lt;/text&gt;&#10;        &lt;polygon points='122,156 112,176 132,176' fill='#FFFFFF' stroke='#1E4FA8' strokeWidth='1.6' /&gt;&#10;        &lt;line x1='122' y1='176' x2='122' y2='208' stroke='#1E4FA8' strokeWidth='1.6' /&gt;&#10;        &lt;text x='140' y='172' fill='#8B97A8' fontSize='11'&gt;hollow triangle = generalisation&lt;/text&gt;&#10;        &lt;text x='300' y='132' fill='#8B97A8' fontSize='11'&gt;solid line = association,&lt;/text&gt;&#10;        &lt;text x='300' y='148' fill='#8B97A8' fontSize='11'&gt;with a name and multiplicities&lt;/text&gt;&#10;      &lt;/svg&gt;&#10;      &lt;Text style={{ fontSize: 13, color: '#8B97A8', lineHeight: 1.5 }}&gt;Three compartments: name · attributes · operations. Sign visibility with + and −.&lt;/Text&gt;&#10;    &lt;/Box&gt;&#10;  &lt;/Box&gt;&#10;  &lt;Box style={{ height: 36, padding: '0 40px', flexDirection: 'row', alignItems: 'center', justifyContent: 'space-between' }}&gt;&#10;    &lt;Text style={{ fontSize: 13, color: '#8B97A8' }}&gt;ISAD · Fall 2026&lt;/Text&gt;&#10;    &lt;Text style={{ fontSize: 14, color: '#1E4FA8', fontWeight: 'bold' }}&gt;11 / 38&lt;/Text&gt;&#10;  &lt;/Box&gt;&#10;&lt;/Slide&gt;"/>
+        <p:cNvPr id="25" name="" descr="&lt;Slide style={{ background: '#FFFFFF', padding: 0 }}&gt;&#10;  &lt;Box style={{ height: 72, background: '#1E4FA8', padding: '0 40px', flexDirection: 'row', alignItems: 'center', justifyContent: 'space-between' }}&gt;&#10;    &lt;Text style={{ fontSize: 15, color: '#B9CDF0', letterSpacing: 1 }}&gt;ISAD · INFORMATION SYSTEMS ANALYSIS &amp;amp; DESIGN&lt;/Text&gt;&#10;    &lt;Text style={{ fontSize: 15, color: '#B9CDF0' }}&gt;W03 · NOTATION&lt;/Text&gt;&#10;  &lt;/Box&gt;&#10;  &lt;Box style={{ padding: '16px 40px 0 40px', flexDirection: 'row', alignItems: 'center', justifyContent: 'space-between' }}&gt;&#10;    &lt;Text style={{ fontSize: 30, fontWeight: 'bold', color: '#0E3F8C' }}&gt;Cheat Sheet — Use Case &amp;amp; Class&lt;/Text&gt;&#10;    &lt;Text style={{ fontSize: 14, color: '#1E4FA8', fontWeight: 'bold' }}&gt;11 / 38&lt;/Text&gt;&#10;  &lt;/Box&gt;&#10;  &lt;Box style={{ flex: 1, padding: '8px 40px 0 40px', flexDirection: 'row', gap: 26 }}&gt;&#10;    &lt;Box style={{ flex: 5, flexDirection: 'column', gap: 8, justifyContent: 'center' }}&gt;&#10;      &lt;Text style={{ fontSize: 18, fontWeight: 'bold', color: '#0E3F8C' }}&gt;Use case diagram — the outside view&lt;/Text&gt;&#10;      &lt;svg width={420} height={300} viewBox='0 0 420 300'&gt;&#10;        &lt;rect x='140' y='24' width='270' height='252' rx='8' fill='#FFFFFF' stroke='#3D7BD9' strokeWidth='1.5' /&gt;&#10;        &lt;text x='150' y='42' fill='#8B97A8' fontSize='11'&gt;CampusBites&lt;/text&gt;&#10;        &lt;circle cx='60' cy='80' r='10' fill='#FFFFFF' stroke='#1E4FA8' strokeWidth='1.8' /&gt;&#10;        &lt;line x1='60' y1='90' x2='60' y2='118' stroke='#1E4FA8' strokeWidth='1.8' /&gt;&#10;        &lt;line x1='46' y1='100' x2='74' y2='100' stroke='#1E4FA8' strokeWidth='1.8' /&gt;&#10;        &lt;line x1='60' y1='118' x2='50' y2='140' stroke='#1E4FA8' strokeWidth='1.8' /&gt;&#10;        &lt;line x1='60' y1='118' x2='70' y2='140' stroke='#1E4FA8' strokeWidth='1.8' /&gt;&#10;        &lt;text x='60' y='158' textAnchor='middle' fill='#1A2230' fontSize='12' fontWeight='bold'&gt;Customer&lt;/text&gt;&#10;        &lt;circle cx='60' cy='205' r='10' fill='#FFFFFF' stroke='#1E4FA8' strokeWidth='1.8' /&gt;&#10;        &lt;line x1='60' y1='215' x2='60' y2='243' stroke='#1E4FA8' strokeWidth='1.8' /&gt;&#10;        &lt;line x1='46' y1='225' x2='74' y2='225' stroke='#1E4FA8' strokeWidth='1.8' /&gt;&#10;        &lt;line x1='60' y1='243' x2='50' y2='265' stroke='#1E4FA8' strokeWidth='1.8' /&gt;&#10;        &lt;line x1='60' y1='243' x2='70' y2='265' stroke='#1E4FA8' strokeWidth='1.8' /&gt;&#10;        &lt;text x='60' y='283' textAnchor='middle' fill='#1A2230' fontSize='12' fontWeight='bold'&gt;Courier&lt;/text&gt;&#10;        &lt;ellipse cx='275' cy='95' rx='110' ry='28' fill='#E8EFF8' stroke='#1E4FA8' strokeWidth='1.8' /&gt;&#10;        &lt;text x='275' y='100' textAnchor='middle' fill='#0E3F8C' fontSize='13' fontWeight='bold'&gt;Place Order&lt;/text&gt;&#10;        &lt;ellipse cx='275' cy='215' rx='110' ry='28' fill='#E8EFF8' stroke='#1E4FA8' strokeWidth='1.8' /&gt;&#10;        &lt;text x='275' y='220' textAnchor='middle' fill='#0E3F8C' fontSize='13' fontWeight='bold'&gt;Track Delivery&lt;/text&gt;&#10;        &lt;line x1='78' y1='105' x2='163' y2='95' stroke='#1E4FA8' strokeWidth='1.5' /&gt;&#10;        &lt;line x1='78' y1='225' x2='163' y2='215' stroke='#1E4FA8' strokeWidth='1.5' /&gt;&#10;        &lt;line x1='275' y1='123' x2='275' y2='185' stroke='#3D7BD9' strokeWidth='1.5' strokeDasharray='5 3' markerEnd='url(#ar11)' /&gt;&#10;        &lt;text x='284' y='158' fill='#3D7BD9' fontSize='11'&gt;«include»&lt;/text&gt;&#10;        &lt;defs&gt;&#10;          &lt;marker id='ar11' markerWidth='8' markerHeight='8' refX='7' refY='4' orient='auto'&gt;&#10;            &lt;path d='M0,0 L8,4 L0,8 z' fill='#3D7BD9' /&gt;&#10;          &lt;/marker&gt;&#10;        &lt;/defs&gt;&#10;      &lt;/svg&gt;&#10;      &lt;Text style={{ fontSize: 13, color: '#8B97A8', lineHeight: 1.5 }}&gt;Actor (outside) · use case (inside the box) · association line · dashed «include».&lt;/Text&gt;&#10;    &lt;/Box&gt;&#10;    &lt;Box style={{ flex: 6, flexDirection: 'column', gap: 8, justifyContent: 'center' }}&gt;&#10;      &lt;Text style={{ fontSize: 18, fontWeight: 'bold', color: '#0E3F8C' }}&gt;Class diagram — the inside view&lt;/Text&gt;&#10;      &lt;svg width={460} height={300} viewBox='0 0 460 300'&gt;&#10;        &lt;rect x='24' y='30' width='196' height='126' rx='4' fill='#FFFFFF' stroke='#1E4FA8' strokeWidth='1.8' /&gt;&#10;        &lt;line x1='24' y1='58' x2='220' y2='58' stroke='#1E4FA8' strokeWidth='1.4' /&gt;&#10;        &lt;line x1='24' y1='118' x2='220' y2='118' stroke='#1E4FA8' strokeWidth='1.4' /&gt;&#10;        &lt;text x='122' y='50' textAnchor='middle' fill='#0E3F8C' fontSize='13' fontWeight='bold'&gt;Order&lt;/text&gt;&#10;        &lt;text x='34' y='74' fill='#4A5568' fontSize='10.5'&gt;- status : OrderStatus&lt;/text&gt;&#10;        &lt;text x='34' y='92' fill='#4A5568' fontSize='10.5'&gt;- placedAt : LocalDateTime&lt;/text&gt;&#10;        &lt;text x='34' y='110' fill='#4A5568' fontSize='10.5'&gt;- lines : OrderLine[0..*]&lt;/text&gt;&#10;        &lt;text x='34' y='134' fill='#4A5568' fontSize='10.5'&gt;+ total() : Money&lt;/text&gt;&#10;        &lt;text x='34' y='150' fill='#4A5568' fontSize='10.5'&gt;+ addItem(i, qty)&lt;/text&gt;&#10;        &lt;rect x='300' y='30' width='146' height='76' rx='4' fill='#FFFFFF' stroke='#1E4FA8' strokeWidth='1.8' /&gt;&#10;        &lt;line x1='300' y1='58' x2='446' y2='58' stroke='#1E4FA8' strokeWidth='1.4' /&gt;&#10;        &lt;text x='373' y='50' textAnchor='middle' fill='#0E3F8C' fontSize='13' fontWeight='bold'&gt;Payment&lt;/text&gt;&#10;        &lt;text x='310' y='74' fill='#4A5568' fontSize='10.5'&gt;+ amount : Money&lt;/text&gt;&#10;        &lt;text x='310' y='92' fill='#4A5568' fontSize='10.5'&gt;+ method : String&lt;/text&gt;&#10;        &lt;line x1='220' y1='68' x2='298' y2='68' stroke='#1E4FA8' strokeWidth='1.6' /&gt;&#10;        &lt;text x='230' y='62' fill='#1E4FA8' fontSize='11' fontWeight='bold'&gt;1&lt;/text&gt;&#10;        &lt;text x='262' y='62' fill='#1E4FA8' fontSize='11' fontWeight='bold'&gt;pays&lt;/text&gt;&#10;        &lt;text x='272' y='84' fill='#1E4FA8' fontSize='11' fontWeight='bold'&gt;0..1&lt;/text&gt;&#10;        &lt;rect x='24' y='210' width='196' height='70' rx='4' fill='#FFFFFF' stroke='#1E4FA8' strokeWidth='1.8' /&gt;&#10;        &lt;line x1='24' y1='238' x2='220' y2='238' stroke='#1E4FA8' strokeWidth='1.4' /&gt;&#10;        &lt;text x='122' y='230' textAnchor='middle' fill='#0E3F8C' fontSize='13' fontWeight='bold'&gt;DeliveryOrder&lt;/text&gt;&#10;        &lt;text x='34' y='256' fill='#4A5568' fontSize='10.5'&gt;+ courier : Courier&lt;/text&gt;&#10;        &lt;text x='34' y='272' fill='#4A5568' fontSize='10.5'&gt;+ slot : TimeSlot&lt;/text&gt;&#10;        &lt;polygon points='122,156 112,176 132,176' fill='#FFFFFF' stroke='#1E4FA8' strokeWidth='1.6' /&gt;&#10;        &lt;line x1='122' y1='176' x2='122' y2='208' stroke='#1E4FA8' strokeWidth='1.6' /&gt;&#10;        &lt;text x='140' y='172' fill='#8B97A8' fontSize='11'&gt;hollow triangle = generalisation&lt;/text&gt;&#10;        &lt;text x='300' y='132' fill='#8B97A8' fontSize='11'&gt;solid line = association,&lt;/text&gt;&#10;        &lt;text x='300' y='148' fill='#8B97A8' fontSize='11'&gt;with a name and multiplicities&lt;/text&gt;&#10;      &lt;/svg&gt;&#10;      &lt;Text style={{ fontSize: 13, color: '#8B97A8', lineHeight: 1.5 }}&gt;Three compartments: name · attributes · operations. Sign visibility with + and −.&lt;/Text&gt;&#10;    &lt;/Box&gt;&#10;  &lt;/Box&gt;&#10;  &lt;Box style={{ height: 36, padding: '0 40px', flexDirection: 'row', alignItems: 'center', justifyContent: 'space-between' }}&gt;&#10;    &lt;Text style={{ fontSize: 13, color: '#8B97A8' }}&gt;ISAD · Fall 2026&lt;/Text&gt;&#10;    &lt;Text style={{ fontSize: 14, color: '#1E4FA8', fontWeight: 'bold' }}&gt;11 / 38&lt;/Text&gt;&#10;  &lt;/Box&gt;&#10;&lt;/Slide&gt;"/>
         <p:cNvGrpSpPr/>
         <p:nvPr/>
       </p:nvGrpSpPr>
@@ -3976,7 +3976,7 @@
   <p:cSld>
     <p:spTree>
       <p:nvGrpSpPr>
-        <p:cNvPr id="80" name="" descr="&lt;Slide style={{ background: '#FFFFFF', padding: 0 }}&gt;&#10;  &lt;Box style={{ height: 72, background: '#1E4FA8', padding: '0 40px', flexDirection: 'row', alignItems: 'center', justifyContent: 'space-between' }}&gt;&#10;    &lt;Text style={{ fontSize: 15, color: '#B9CDF0', letterSpacing: 1 }}&gt;ISAD · INFORMATION SYSTEMS ANALYSIS &amp;amp; DESIGN&lt;/Text&gt;&#10;    &lt;Text style={{ fontSize: 15, color: '#B9CDF0' }}&gt;W03 · NOTATION&lt;/Text&gt;&#10;  &lt;/Box&gt;&#10;  &lt;Box style={{ padding: '16px 40px 0 40px' }}&gt;&#10;    &lt;Text style={{ fontSize: 30, fontWeight: 'bold', color: '#0E3F8C' }}&gt;Visibility Marks&lt;/Text&gt;&#10;  &lt;/Box&gt;&#10;  &lt;Box style={{ flex: 1, padding: '12px 40px 0 40px', flexDirection: 'row', gap: 16, alignItems: 'center' }}&gt;&#10;    {[&#10;      { m: '+', n: 'public', j: 'public', d: 'Part of the contract. Any class may call it.', hint: 'Use it for operations, rarely for fields.' },&#10;      { m: '−', n: 'private', j: 'private', d: 'Visible only inside this class. The default choice.', hint: 'If a field has no reason to be public, this is its mark.' },&#10;      { m: '#', n: 'protected', j: 'protected', d: 'This class and its subclasses.', hint: 'Legitimate — but it couples you to the hierarchy.' },&#10;      { m: '~', n: 'package', j: '(no modifier)', d: 'Everything in the same package.', hint: 'Rare in analysis models; appears in code-level diagrams.' },&#10;    ].map((v) =&gt; (&#10;      &lt;Box key={v.n} style={{ flex: 1, padding: '18px 18px', background: '#F7F9FC', borderRadius: 10, border: '1px solid #E5E7EB', flexDirection: 'column', gap: 8, alignItems: 'center' }}&gt;&#10;        &lt;Text style={{ fontSize: 62, fontWeight: 'bold', color: '#1E4FA8', fontFamily: 'Georgia, serif', lineHeight: 1 }}&gt;{v.m}&lt;/Text&gt;&#10;        &lt;Text style={{ fontSize: 19, fontWeight: 'bold', color: '#0E3F8C' }}&gt;{v.n}&lt;/Text&gt;&#10;        &lt;Box style={{ padding: '4px 12px', background: '#E8EFF8', borderRadius: 12 }}&gt;&#10;          &lt;Text style={{ fontSize: 12.5, color: '#1E4FA8', fontWeight: 'bold' }}&gt;Java: {v.j}&lt;/Text&gt;&#10;        &lt;/Box&gt;&#10;        &lt;Text style={{ fontSize: 13.5, color: '#4A5568', lineHeight: 1.5, textAlign: 'center' }}&gt;{v.d}&lt;/Text&gt;&#10;        &lt;Text style={{ fontSize: 12.5, color: '#8B97A8', lineHeight: 1.45, textAlign: 'center', fontStyle: 'italic' }}&gt;{v.hint}&lt;/Text&gt;&#10;      &lt;/Box&gt;&#10;    ))}&#10;  &lt;/Box&gt;&#10;  &lt;Box style={{ height: 46, background: '#0E3F8C', padding: '0 40px', flexDirection: 'row', alignItems: 'center', justifyContent: 'center' }}&gt;&#10;    &lt;Text style={{ fontSize: 17, color: '#FFFFFF', fontWeight: '600' }}&gt;Default to − and open up only with a reason. Encapsulation is a visibility decision before it is anything else.&lt;/Text&gt;&#10;  &lt;/Box&gt;&#10;&lt;/Slide&gt;"/>
+        <p:cNvPr id="80" name="" descr="&lt;Slide style={{ background: '#FFFFFF', padding: 0 }}&gt;&#10;  &lt;Box style={{ height: 72, background: '#1E4FA8', padding: '0 40px', flexDirection: 'row', alignItems: 'center', justifyContent: 'space-between' }}&gt;&#10;    &lt;Text style={{ fontSize: 15, color: '#B9CDF0', letterSpacing: 1 }}&gt;ISAD · INFORMATION SYSTEMS ANALYSIS &amp;amp; DESIGN&lt;/Text&gt;&#10;    &lt;Text style={{ fontSize: 15, color: '#B9CDF0' }}&gt;W03 · NOTATION&lt;/Text&gt;&#10;  &lt;/Box&gt;&#10;  &lt;Box style={{ padding: '16px 40px 0 40px' }}&gt;&#10;    &lt;Text style={{ fontSize: 30, fontWeight: 'bold', color: '#0E3F8C' }}&gt;Visibility Marks&lt;/Text&gt;&#10;  &lt;/Box&gt;&#10;  &lt;Box style={{ flex: 1, padding: '12px 40px 0 40px', flexDirection: 'row', gap: 16, alignItems: 'center' }}&gt;&#10;    {[&#10;      { m: '+', n: 'public', j: 'public', d: 'Part of the contract. Any class may call it.', hint: 'Use it for operations, rarely for fields.' },&#10;      { m: '−', n: 'private', j: 'private', d: 'Visible only inside this class. The default choice.', hint: 'If a field has no reason to be public, this is its mark.' },&#10;      { m: '#', n: 'protected', j: 'protected', d: 'This class and its subclasses.', hint: 'Legitimate — but it couples you to the hierarchy.' },&#10;      { m: '~', n: 'package', j: '(no keyword)', d: 'Everything in the same package.', hint: 'Rare in analysis models; appears in code-level diagrams.' },&#10;    ].map((v) =&gt; (&#10;      &lt;Box key={v.n} style={{ flex: 1, padding: '18px 18px', background: '#F7F9FC', borderRadius: 10, border: '1px solid #E5E7EB', flexDirection: 'column', gap: 8, alignItems: 'center' }}&gt;&#10;        &lt;Text style={{ fontSize: 62, fontWeight: 'bold', color: '#1E4FA8', fontFamily: 'Georgia, serif', lineHeight: 1 }}&gt;{v.m}&lt;/Text&gt;&#10;        &lt;Text style={{ fontSize: 19, fontWeight: 'bold', color: '#0E3F8C' }}&gt;{v.n}&lt;/Text&gt;&#10;        &lt;Box style={{ padding: '4px 12px', background: '#E8EFF8', borderRadius: 12 }}&gt;&#10;          &lt;Text style={{ fontSize: 12.5, color: '#1E4FA8', fontWeight: 'bold' }}&gt;In code: {v.j}&lt;/Text&gt;&#10;        &lt;/Box&gt;&#10;        &lt;Text style={{ fontSize: 13.5, color: '#4A5568', lineHeight: 1.5, textAlign: 'center' }}&gt;{v.d}&lt;/Text&gt;&#10;        &lt;Text style={{ fontSize: 12.5, color: '#8B97A8', lineHeight: 1.45, textAlign: 'center', fontStyle: 'italic' }}&gt;{v.hint}&lt;/Text&gt;&#10;      &lt;/Box&gt;&#10;    ))}&#10;  &lt;/Box&gt;&#10;  &lt;Box style={{ height: 46, background: '#0E3F8C', padding: '0 40px', flexDirection: 'row', alignItems: 'center', justifyContent: 'center' }}&gt;&#10;    &lt;Text style={{ fontSize: 17, color: '#FFFFFF', fontWeight: '600' }}&gt;Default to − and open up only with a reason. Encapsulation is a visibility decision before it is anything else.&lt;/Text&gt;&#10;  &lt;/Box&gt;&#10;&lt;/Slide&gt;"/>
         <p:cNvGrpSpPr/>
         <p:nvPr/>
       </p:nvGrpSpPr>
@@ -4250,8 +4250,8 @@
         </p:nvSpPr>
         <p:spPr>
           <a:xfrm rot="0" flipH="0" flipV="0">
-            <a:off x="1295400" y="3990975"/>
-            <a:ext cx="923925" cy="219075"/>
+            <a:off x="1219200" y="3990975"/>
+            <a:ext cx="1076325" cy="219075"/>
           </a:xfrm>
           <a:prstGeom prst="roundRect">
             <a:avLst>
@@ -4276,8 +4276,8 @@
         </p:nvSpPr>
         <p:spPr>
           <a:xfrm rot="0" flipH="0" flipV="0">
-            <a:off x="1409700" y="4029075"/>
-            <a:ext cx="695325" cy="142875"/>
+            <a:off x="1333500" y="4029075"/>
+            <a:ext cx="847725" cy="142875"/>
           </a:xfrm>
           <a:prstGeom prst="rect"/>
         </p:spPr>
@@ -4297,7 +4297,7 @@
                 <a:latin typeface="Microsoft YaHei"/>
                 <a:ea typeface="Microsoft YaHei"/>
               </a:rPr>
-              <a:t>Java: </a:t>
+              <a:t>In code: </a:t>
             </a:r>
             <a:r>
               <a:rPr lang="en-US" sz="938" b="1">
@@ -4492,8 +4492,8 @@
         </p:nvSpPr>
         <p:spPr>
           <a:xfrm rot="0" flipH="0" flipV="0">
-            <a:off x="4171950" y="3771900"/>
-            <a:ext cx="962025" cy="219075"/>
+            <a:off x="4095750" y="3771900"/>
+            <a:ext cx="1114425" cy="219075"/>
           </a:xfrm>
           <a:prstGeom prst="roundRect">
             <a:avLst>
@@ -4518,8 +4518,8 @@
         </p:nvSpPr>
         <p:spPr>
           <a:xfrm rot="0" flipH="0" flipV="0">
-            <a:off x="4286250" y="3810000"/>
-            <a:ext cx="733425" cy="142875"/>
+            <a:off x="4210050" y="3810000"/>
+            <a:ext cx="885825" cy="142875"/>
           </a:xfrm>
           <a:prstGeom prst="rect"/>
         </p:spPr>
@@ -4539,7 +4539,7 @@
                 <a:latin typeface="Microsoft YaHei"/>
                 <a:ea typeface="Microsoft YaHei"/>
               </a:rPr>
-              <a:t>Java: </a:t>
+              <a:t>In code: </a:t>
             </a:r>
             <a:r>
               <a:rPr lang="en-US" sz="938" b="1">
@@ -4738,8 +4738,8 @@
         </p:nvSpPr>
         <p:spPr>
           <a:xfrm rot="0" flipH="0" flipV="0">
-            <a:off x="6991350" y="3886200"/>
-            <a:ext cx="1114425" cy="219075"/>
+            <a:off x="6915150" y="3886200"/>
+            <a:ext cx="1266825" cy="219075"/>
           </a:xfrm>
           <a:prstGeom prst="roundRect">
             <a:avLst>
@@ -4764,8 +4764,8 @@
         </p:nvSpPr>
         <p:spPr>
           <a:xfrm rot="0" flipH="0" flipV="0">
-            <a:off x="7105650" y="3924300"/>
-            <a:ext cx="885825" cy="142875"/>
+            <a:off x="7029450" y="3924300"/>
+            <a:ext cx="1038225" cy="142875"/>
           </a:xfrm>
           <a:prstGeom prst="rect"/>
         </p:spPr>
@@ -4785,7 +4785,7 @@
                 <a:latin typeface="Microsoft YaHei"/>
                 <a:ea typeface="Microsoft YaHei"/>
               </a:rPr>
-              <a:t>Java: </a:t>
+              <a:t>In code: </a:t>
             </a:r>
             <a:r>
               <a:rPr lang="en-US" sz="938" b="1">
@@ -4982,8 +4982,8 @@
         </p:nvSpPr>
         <p:spPr>
           <a:xfrm rot="0" flipH="0" flipV="0">
-            <a:off x="9791700" y="3886200"/>
-            <a:ext cx="1295400" cy="219075"/>
+            <a:off x="9705975" y="3886200"/>
+            <a:ext cx="1466850" cy="219075"/>
           </a:xfrm>
           <a:prstGeom prst="roundRect">
             <a:avLst>
@@ -5008,8 +5008,8 @@
         </p:nvSpPr>
         <p:spPr>
           <a:xfrm rot="0" flipH="0" flipV="0">
-            <a:off x="9906000" y="3924300"/>
-            <a:ext cx="1066800" cy="142875"/>
+            <a:off x="9820275" y="3924300"/>
+            <a:ext cx="1238250" cy="142875"/>
           </a:xfrm>
           <a:prstGeom prst="rect"/>
         </p:spPr>
@@ -5029,7 +5029,7 @@
                 <a:latin typeface="Microsoft YaHei"/>
                 <a:ea typeface="Microsoft YaHei"/>
               </a:rPr>
-              <a:t>Java: </a:t>
+              <a:t>In code: </a:t>
             </a:r>
             <a:r>
               <a:rPr lang="en-US" sz="938" b="1">
@@ -5039,7 +5039,7 @@
                 <a:latin typeface="Microsoft YaHei"/>
                 <a:ea typeface="Microsoft YaHei"/>
               </a:rPr>
-              <a:t>(no modifier)</a:t>
+              <a:t>(no keyword)</a:t>
             </a:r>
             <a:endParaRPr/>
           </a:p>
@@ -12106,7 +12106,7 @@
   <p:cSld>
     <p:spTree>
       <p:nvGrpSpPr>
-        <p:cNvPr id="326" name="" descr="&lt;Slide style={{ background: '#FFFFFF', padding: 0 }}&gt;&#10;  &lt;Box style={{ height: 72, background: '#1E4FA8', padding: '0 40px', flexDirection: 'row', alignItems: 'center', justifyContent: 'space-between' }}&gt;&#10;    &lt;Text style={{ fontSize: 15, color: '#B9CDF0', letterSpacing: 1 }}&gt;ISAD · INFORMATION SYSTEMS ANALYSIS &amp;amp; DESIGN&lt;/Text&gt;&#10;    &lt;Text style={{ fontSize: 15, color: '#B9CDF0' }}&gt;W03 · WORKFLOW&lt;/Text&gt;&#10;  &lt;/Box&gt;&#10;  &lt;Box style={{ padding: '14px 40px 0 40px', flexDirection: 'row', alignItems: 'center', justifyContent: 'space-between' }}&gt;&#10;    &lt;Text style={{ fontSize: 30, fontWeight: 'bold', color: '#0E3F8C' }}&gt;Step 3 — Sequence Drives Design&lt;/Text&gt;&#10;    &lt;Text style={{ fontSize: 14, color: '#1E4FA8', fontWeight: 'bold' }}&gt;23 / 38&lt;/Text&gt;&#10;  &lt;/Box&gt;&#10;  &lt;Box style={{ flex: 1, padding: '10px 40px 0 40px', flexDirection: 'row', gap: 26 }}&gt;&#10;    &lt;Box style={{ flex: 5, justifyContent: 'center' }}&gt;&#10;      &lt;CodeBlock code={`// Draw the arrow, then write the method.&#10;// Every message on the diagram is one&#10;// method on the class at the arrow head.&#10;&#10;:OrderController  -&gt;  :Order&#10;        submit(cart)&#10;&#10;public class OrderController {&#10;    public void submit(Cart cart) { ... }&#10;}&#10;&#10;:Order  -&gt;  :OrderLine&#10;        create(item, qty)&#10;&#10;public class Order {&#10;    public OrderLine create(MenuItem item,&#10;                            int qty) { ... }&#10;}&#10;&#10;:Order  -&gt;  :Order&#10;        total() : Money&#10;&#10;public class Order {&#10;    public Money total() { ... }&#10;}`} language='java' width={620} fontSize={11.5} /&gt;&#10;    &lt;/Box&gt;&#10;    &lt;Box style={{ flex: 4, flexDirection: 'column', gap: 11, justifyContent: 'center' }}&gt;&#10;      &lt;Box style={{ padding: '16px 18px', background: '#F0F5FC', borderRadius: 10, borderLeft: '4px solid #1E4FA8' }}&gt;&#10;        &lt;Text style={{ fontSize: 17, fontWeight: 'bold', color: '#0E3F8C', lineHeight: 1.45 }}&gt;One arrow, one method. That is the whole trick.&lt;/Text&gt;&#10;      &lt;/Box&gt;&#10;      {[&#10;        ['sign-in-alt', 'Receiver decides the class', 'The arrow head lands on a lifeline — that class must own the method.'],&#10;        ['font', 'Name and parameters come free', 'A message is already a signature; you are transcribing, not inventing.'],&#10;        ['reply', 'The return becomes the type', 'If you drew a dashed reply with a name, the method returns it.'],&#10;      ].map(([icon, t, d]) =&gt; (&#10;        &lt;Box key={t} style={{ flexDirection: 'row', gap: 12, alignItems: 'flex-start', padding: '13px 16px', background: '#F7F9FC', borderRadius: 10, border: '1px solid #E5E7EB' }}&gt;&#10;          &lt;Box style={{ width: 36, height: 36, borderRadius: 9, background: '#E8EFF8', justifyContent: 'center', alignItems: 'center' }}&gt;&#10;            &lt;FAIcon name={icon} style={{ fill: '#1E4FA8', width: 17, height: 17 }} /&gt;&#10;          &lt;/Box&gt;&#10;          &lt;Box style={{ flex: 1, flexDirection: 'column', gap: 2 }}&gt;&#10;            &lt;Text style={{ fontSize: 15.5, fontWeight: 'bold', color: '#0E3F8C' }}&gt;{t}&lt;/Text&gt;&#10;            &lt;Text style={{ fontSize: 13.5, color: '#4A5568', lineHeight: 1.45 }}&gt;{d}&lt;/Text&gt;&#10;          &lt;/Box&gt;&#10;        &lt;/Box&gt;&#10;      ))}&#10;      &lt;Box style={{ padding: '12px 16px', background: '#FFFFFF', borderRadius: 9, border: '1px dashed #D6DCE5' }}&gt;&#10;        &lt;Text style={{ fontSize: 13.5, color: '#8B97A8', lineHeight: 1.5 }}&gt;This is why the sequence diagram is drawn &lt;Text style={{ fontWeight: 'bold', color: '#4A5568' }}&gt;before&lt;/Text&gt; the design class diagram — the methods are discovered, not guessed.&lt;/Text&gt;&#10;      &lt;/Box&gt;&#10;    &lt;/Box&gt;&#10;  &lt;/Box&gt;&#10;  &lt;Box style={{ height: 40, padding: '0 40px', flexDirection: 'row', alignItems: 'center', justifyContent: 'space-between' }}&gt;&#10;    &lt;Text style={{ fontSize: 13, color: '#8B97A8' }}&gt;ISAD · Fall 2026&lt;/Text&gt;&#10;    &lt;Text style={{ fontSize: 14, color: '#1E4FA8', fontWeight: 'bold' }}&gt;23 / 38&lt;/Text&gt;&#10;  &lt;/Box&gt;&#10;&lt;/Slide&gt;"/>
+        <p:cNvPr id="326" name="" descr="&lt;Slide style={{ background: '#FFFFFF', padding: 0 }}&gt;&#10;  &lt;Box style={{ height: 72, background: '#1E4FA8', padding: '0 40px', flexDirection: 'row', alignItems: 'center', justifyContent: 'space-between' }}&gt;&#10;    &lt;Text style={{ fontSize: 15, color: '#B9CDF0', letterSpacing: 1 }}&gt;ISAD · INFORMATION SYSTEMS ANALYSIS &amp;amp; DESIGN&lt;/Text&gt;&#10;    &lt;Text style={{ fontSize: 15, color: '#B9CDF0' }}&gt;W03 · WORKFLOW&lt;/Text&gt;&#10;  &lt;/Box&gt;&#10;  &lt;Box style={{ padding: '14px 40px 0 40px', flexDirection: 'row', alignItems: 'center', justifyContent: 'space-between' }}&gt;&#10;    &lt;Text style={{ fontSize: 30, fontWeight: 'bold', color: '#0E3F8C' }}&gt;Step 3 — Sequence Drives Design&lt;/Text&gt;&#10;    &lt;Text style={{ fontSize: 14, color: '#1E4FA8', fontWeight: 'bold' }}&gt;23 / 38&lt;/Text&gt;&#10;  &lt;/Box&gt;&#10;  &lt;Box style={{ flex: 1, padding: '10px 40px 0 40px', flexDirection: 'row', gap: 26 }}&gt;&#10;    &lt;Box style={{ flex: 5, justifyContent: 'center' }}&gt;&#10;      &lt;CodeBlock code={`# Draw the arrow, then write the operation.&#10;# Every message on the diagram is one&#10;# operation on the class at the arrow head.&#10;&#10;:OrderController  -&gt;  :Order&#10;        submit(cart)&#10;&#10;Class OrderController&#10;    + submit(cart)&#10;&#10;:Order  -&gt;  :OrderLine&#10;        create(item, qty)&#10;&#10;Class Order&#10;    + create(item, qty) : OrderLine&#10;&#10;:Order  -&gt;  :Order&#10;        total() : Money&#10;&#10;Class Order&#10;    + total() : Money`} language='text' width={620} fontSize={11.5} /&gt;&#10;    &lt;/Box&gt;&#10;    &lt;Box style={{ flex: 4, flexDirection: 'column', gap: 11, justifyContent: 'center' }}&gt;&#10;      &lt;Box style={{ padding: '16px 18px', background: '#F0F5FC', borderRadius: 10, borderLeft: '4px solid #1E4FA8' }}&gt;&#10;        &lt;Text style={{ fontSize: 17, fontWeight: 'bold', color: '#0E3F8C', lineHeight: 1.45 }}&gt;One arrow, one method. That is the whole trick.&lt;/Text&gt;&#10;      &lt;/Box&gt;&#10;      {[&#10;        ['sign-in-alt', 'Receiver decides the class', 'The arrow head lands on a lifeline — that class must own the method.'],&#10;        ['font', 'Name and parameters come free', 'A message is already a signature; you are transcribing, not inventing.'],&#10;        ['reply', 'The return becomes the type', 'If you drew a dashed reply with a name, the method returns it.'],&#10;      ].map(([icon, t, d]) =&gt; (&#10;        &lt;Box key={t} style={{ flexDirection: 'row', gap: 12, alignItems: 'flex-start', padding: '13px 16px', background: '#F7F9FC', borderRadius: 10, border: '1px solid #E5E7EB' }}&gt;&#10;          &lt;Box style={{ width: 36, height: 36, borderRadius: 9, background: '#E8EFF8', justifyContent: 'center', alignItems: 'center' }}&gt;&#10;            &lt;FAIcon name={icon} style={{ fill: '#1E4FA8', width: 17, height: 17 }} /&gt;&#10;          &lt;/Box&gt;&#10;          &lt;Box style={{ flex: 1, flexDirection: 'column', gap: 2 }}&gt;&#10;            &lt;Text style={{ fontSize: 15.5, fontWeight: 'bold', color: '#0E3F8C' }}&gt;{t}&lt;/Text&gt;&#10;            &lt;Text style={{ fontSize: 13.5, color: '#4A5568', lineHeight: 1.45 }}&gt;{d}&lt;/Text&gt;&#10;          &lt;/Box&gt;&#10;        &lt;/Box&gt;&#10;      ))}&#10;      &lt;Box style={{ padding: '12px 16px', background: '#FFFFFF', borderRadius: 9, border: '1px dashed #D6DCE5' }}&gt;&#10;        &lt;Text style={{ fontSize: 13.5, color: '#8B97A8', lineHeight: 1.5 }}&gt;This is why the sequence diagram is drawn &lt;Text style={{ fontWeight: 'bold', color: '#4A5568' }}&gt;before&lt;/Text&gt; the design class diagram — the methods are discovered, not guessed.&lt;/Text&gt;&#10;      &lt;/Box&gt;&#10;    &lt;/Box&gt;&#10;  &lt;/Box&gt;&#10;  &lt;Box style={{ height: 40, padding: '0 40px', flexDirection: 'row', alignItems: 'center', justifyContent: 'space-between' }}&gt;&#10;    &lt;Text style={{ fontSize: 13, color: '#8B97A8' }}&gt;ISAD · Fall 2026&lt;/Text&gt;&#10;    &lt;Text style={{ fontSize: 14, color: '#1E4FA8', fontWeight: 'bold' }}&gt;23 / 38&lt;/Text&gt;&#10;  &lt;/Box&gt;&#10;&lt;/Slide&gt;"/>
         <p:cNvGrpSpPr/>
         <p:nvPr/>
       </p:nvGrpSpPr>
@@ -13064,12 +13064,12 @@
         </p:nvSpPr>
         <p:spPr>
           <a:xfrm rot="0" flipH="0" flipV="0">
-            <a:off x="381000" y="1428750"/>
-            <a:ext cx="6210300" cy="4876800"/>
+            <a:off x="381000" y="1800225"/>
+            <a:ext cx="6210300" cy="4133850"/>
           </a:xfrm>
           <a:prstGeom prst="roundRect">
             <a:avLst>
-              <a:gd name="adj" fmla="val 1563"/>
+              <a:gd name="adj" fmla="val 1843"/>
             </a:avLst>
           </a:prstGeom>
           <a:solidFill>
@@ -13090,8 +13090,8 @@
         </p:nvSpPr>
         <p:spPr>
           <a:xfrm rot="0" flipH="0" flipV="0">
-            <a:off x="533400" y="1562100"/>
-            <a:ext cx="5905500" cy="4610100"/>
+            <a:off x="533400" y="1933575"/>
+            <a:ext cx="5905500" cy="3867150"/>
           </a:xfrm>
           <a:prstGeom prst="rect"/>
         </p:spPr>
@@ -13108,12 +13108,12 @@
             <a:r>
               <a:rPr sz="863">
                 <a:solidFill>
-                  <a:srgbClr val="6A737D"/>
+                  <a:srgbClr val="E5E7EB"/>
                 </a:solidFill>
                 <a:latin typeface="Menlo"/>
                 <a:ea typeface="Menlo"/>
               </a:rPr>
-              <a:t>// Draw the arrow, then write the method.</a:t>
+              <a:t># Draw the arrow, then write the operation.</a:t>
             </a:r>
             <a:endParaRPr/>
           </a:p>
@@ -13126,12 +13126,12 @@
             <a:r>
               <a:rPr sz="863">
                 <a:solidFill>
-                  <a:srgbClr val="6A737D"/>
+                  <a:srgbClr val="E5E7EB"/>
                 </a:solidFill>
                 <a:latin typeface="Menlo"/>
                 <a:ea typeface="Menlo"/>
               </a:rPr>
-              <a:t>// Every message on the diagram is one</a:t>
+              <a:t># Every message on the diagram is one</a:t>
             </a:r>
             <a:endParaRPr/>
           </a:p>
@@ -13144,13 +13144,21 @@
             <a:r>
               <a:rPr sz="863">
                 <a:solidFill>
-                  <a:srgbClr val="6A737D"/>
+                  <a:srgbClr val="E5E7EB"/>
                 </a:solidFill>
                 <a:latin typeface="Menlo"/>
                 <a:ea typeface="Menlo"/>
               </a:rPr>
-              <a:t>// method on the class at the arrow head.</a:t>
-            </a:r>
+              <a:t># operation on the class at the arrow head.</a:t>
+            </a:r>
+            <a:endParaRPr/>
+          </a:p>
+          <a:p>
+            <a:pPr>
+              <a:lnSpc>
+                <a:spcPct val="140000"/>
+              </a:lnSpc>
+            </a:pPr>
             <a:endParaRPr/>
           </a:p>
           <a:p>
@@ -13167,7 +13175,7 @@
                 <a:latin typeface="Menlo"/>
                 <a:ea typeface="Menlo"/>
               </a:rPr>
-              <a:t> </a:t>
+              <a:t>:OrderController  -&gt;  :Order</a:t>
             </a:r>
             <a:endParaRPr/>
           </a:p>
@@ -13180,62 +13188,126 @@
             <a:r>
               <a:rPr sz="863">
                 <a:solidFill>
-                  <a:srgbClr val="D73A49"/>
+                  <a:srgbClr val="E5E7EB"/>
                 </a:solidFill>
                 <a:latin typeface="Menlo"/>
                 <a:ea typeface="Menlo"/>
               </a:rPr>
-              <a:t>:</a:t>
-            </a:r>
+              <a:t>        submit(cart)</a:t>
+            </a:r>
+            <a:endParaRPr/>
+          </a:p>
+          <a:p>
+            <a:pPr>
+              <a:lnSpc>
+                <a:spcPct val="140000"/>
+              </a:lnSpc>
+            </a:pPr>
+            <a:endParaRPr/>
+          </a:p>
+          <a:p>
+            <a:pPr>
+              <a:lnSpc>
+                <a:spcPct val="140000"/>
+              </a:lnSpc>
+            </a:pPr>
             <a:r>
               <a:rPr sz="863">
                 <a:solidFill>
-                  <a:srgbClr val="24292E"/>
+                  <a:srgbClr val="E5E7EB"/>
                 </a:solidFill>
                 <a:latin typeface="Menlo"/>
                 <a:ea typeface="Menlo"/>
               </a:rPr>
-              <a:t>OrderController  </a:t>
-            </a:r>
+              <a:t>Class OrderController</a:t>
+            </a:r>
+            <a:endParaRPr/>
+          </a:p>
+          <a:p>
+            <a:pPr>
+              <a:lnSpc>
+                <a:spcPct val="140000"/>
+              </a:lnSpc>
+            </a:pPr>
             <a:r>
               <a:rPr sz="863">
                 <a:solidFill>
-                  <a:srgbClr val="D73A49"/>
+                  <a:srgbClr val="E5E7EB"/>
                 </a:solidFill>
                 <a:latin typeface="Menlo"/>
                 <a:ea typeface="Menlo"/>
               </a:rPr>
-              <a:t>-&gt;</a:t>
-            </a:r>
+              <a:t>    + submit(cart)</a:t>
+            </a:r>
+            <a:endParaRPr/>
+          </a:p>
+          <a:p>
+            <a:pPr>
+              <a:lnSpc>
+                <a:spcPct val="140000"/>
+              </a:lnSpc>
+            </a:pPr>
+            <a:endParaRPr/>
+          </a:p>
+          <a:p>
+            <a:pPr>
+              <a:lnSpc>
+                <a:spcPct val="140000"/>
+              </a:lnSpc>
+            </a:pPr>
             <a:r>
               <a:rPr sz="863">
                 <a:solidFill>
-                  <a:srgbClr val="24292E"/>
+                  <a:srgbClr val="E5E7EB"/>
                 </a:solidFill>
                 <a:latin typeface="Menlo"/>
                 <a:ea typeface="Menlo"/>
               </a:rPr>
-              <a:t>  </a:t>
-            </a:r>
+              <a:t>:Order  -&gt;  :OrderLine</a:t>
+            </a:r>
+            <a:endParaRPr/>
+          </a:p>
+          <a:p>
+            <a:pPr>
+              <a:lnSpc>
+                <a:spcPct val="140000"/>
+              </a:lnSpc>
+            </a:pPr>
             <a:r>
               <a:rPr sz="863">
                 <a:solidFill>
-                  <a:srgbClr val="D73A49"/>
+                  <a:srgbClr val="E5E7EB"/>
                 </a:solidFill>
                 <a:latin typeface="Menlo"/>
                 <a:ea typeface="Menlo"/>
               </a:rPr>
-              <a:t>:</a:t>
-            </a:r>
+              <a:t>        create(item, qty)</a:t>
+            </a:r>
+            <a:endParaRPr/>
+          </a:p>
+          <a:p>
+            <a:pPr>
+              <a:lnSpc>
+                <a:spcPct val="140000"/>
+              </a:lnSpc>
+            </a:pPr>
+            <a:endParaRPr/>
+          </a:p>
+          <a:p>
+            <a:pPr>
+              <a:lnSpc>
+                <a:spcPct val="140000"/>
+              </a:lnSpc>
+            </a:pPr>
             <a:r>
               <a:rPr sz="863">
                 <a:solidFill>
-                  <a:srgbClr val="24292E"/>
+                  <a:srgbClr val="E5E7EB"/>
                 </a:solidFill>
                 <a:latin typeface="Menlo"/>
                 <a:ea typeface="Menlo"/>
               </a:rPr>
-              <a:t>Order</a:t>
+              <a:t>Class Order</a:t>
             </a:r>
             <a:endParaRPr/>
           </a:p>
@@ -13248,33 +13320,65 @@
             <a:r>
               <a:rPr sz="863">
                 <a:solidFill>
-                  <a:srgbClr val="24292E"/>
+                  <a:srgbClr val="E5E7EB"/>
                 </a:solidFill>
                 <a:latin typeface="Menlo"/>
                 <a:ea typeface="Menlo"/>
               </a:rPr>
-              <a:t>        </a:t>
-            </a:r>
+              <a:t>    + create(item, qty) : OrderLine</a:t>
+            </a:r>
+            <a:endParaRPr/>
+          </a:p>
+          <a:p>
+            <a:pPr>
+              <a:lnSpc>
+                <a:spcPct val="140000"/>
+              </a:lnSpc>
+            </a:pPr>
+            <a:endParaRPr/>
+          </a:p>
+          <a:p>
+            <a:pPr>
+              <a:lnSpc>
+                <a:spcPct val="140000"/>
+              </a:lnSpc>
+            </a:pPr>
             <a:r>
               <a:rPr sz="863">
                 <a:solidFill>
-                  <a:srgbClr val="6F42C1"/>
+                  <a:srgbClr val="E5E7EB"/>
                 </a:solidFill>
                 <a:latin typeface="Menlo"/>
                 <a:ea typeface="Menlo"/>
               </a:rPr>
-              <a:t>submit</a:t>
-            </a:r>
+              <a:t>:Order  -&gt;  :Order</a:t>
+            </a:r>
+            <a:endParaRPr/>
+          </a:p>
+          <a:p>
+            <a:pPr>
+              <a:lnSpc>
+                <a:spcPct val="140000"/>
+              </a:lnSpc>
+            </a:pPr>
             <a:r>
               <a:rPr sz="863">
                 <a:solidFill>
-                  <a:srgbClr val="24292E"/>
+                  <a:srgbClr val="E5E7EB"/>
                 </a:solidFill>
                 <a:latin typeface="Menlo"/>
                 <a:ea typeface="Menlo"/>
               </a:rPr>
-              <a:t>(cart)</a:t>
-            </a:r>
+              <a:t>        total() : Money</a:t>
+            </a:r>
+            <a:endParaRPr/>
+          </a:p>
+          <a:p>
+            <a:pPr>
+              <a:lnSpc>
+                <a:spcPct val="140000"/>
+              </a:lnSpc>
+            </a:pPr>
             <a:endParaRPr/>
           </a:p>
           <a:p>
@@ -13291,7 +13395,7 @@
                 <a:latin typeface="Menlo"/>
                 <a:ea typeface="Menlo"/>
               </a:rPr>
-              <a:t> </a:t>
+              <a:t>Class Order</a:t>
             </a:r>
             <a:endParaRPr/>
           </a:p>
@@ -13304,848 +13408,12 @@
             <a:r>
               <a:rPr sz="863">
                 <a:solidFill>
-                  <a:srgbClr val="D73A49"/>
+                  <a:srgbClr val="E5E7EB"/>
                 </a:solidFill>
                 <a:latin typeface="Menlo"/>
                 <a:ea typeface="Menlo"/>
               </a:rPr>
-              <a:t>public</a:t>
-            </a:r>
-            <a:r>
-              <a:rPr sz="863">
-                <a:solidFill>
-                  <a:srgbClr val="24292E"/>
-                </a:solidFill>
-                <a:latin typeface="Menlo"/>
-                <a:ea typeface="Menlo"/>
-              </a:rPr>
-              <a:t> </a:t>
-            </a:r>
-            <a:r>
-              <a:rPr sz="863">
-                <a:solidFill>
-                  <a:srgbClr val="D73A49"/>
-                </a:solidFill>
-                <a:latin typeface="Menlo"/>
-                <a:ea typeface="Menlo"/>
-              </a:rPr>
-              <a:t>class</a:t>
-            </a:r>
-            <a:r>
-              <a:rPr sz="863">
-                <a:solidFill>
-                  <a:srgbClr val="24292E"/>
-                </a:solidFill>
-                <a:latin typeface="Menlo"/>
-                <a:ea typeface="Menlo"/>
-              </a:rPr>
-              <a:t> </a:t>
-            </a:r>
-            <a:r>
-              <a:rPr sz="863">
-                <a:solidFill>
-                  <a:srgbClr val="6F42C1"/>
-                </a:solidFill>
-                <a:latin typeface="Menlo"/>
-                <a:ea typeface="Menlo"/>
-              </a:rPr>
-              <a:t>OrderController</a:t>
-            </a:r>
-            <a:r>
-              <a:rPr sz="863">
-                <a:solidFill>
-                  <a:srgbClr val="24292E"/>
-                </a:solidFill>
-                <a:latin typeface="Menlo"/>
-                <a:ea typeface="Menlo"/>
-              </a:rPr>
-              <a:t> {</a:t>
-            </a:r>
-            <a:endParaRPr/>
-          </a:p>
-          <a:p>
-            <a:pPr>
-              <a:lnSpc>
-                <a:spcPct val="140000"/>
-              </a:lnSpc>
-            </a:pPr>
-            <a:r>
-              <a:rPr sz="863">
-                <a:solidFill>
-                  <a:srgbClr val="24292E"/>
-                </a:solidFill>
-                <a:latin typeface="Menlo"/>
-                <a:ea typeface="Menlo"/>
-              </a:rPr>
-              <a:t>    </a:t>
-            </a:r>
-            <a:r>
-              <a:rPr sz="863">
-                <a:solidFill>
-                  <a:srgbClr val="D73A49"/>
-                </a:solidFill>
-                <a:latin typeface="Menlo"/>
-                <a:ea typeface="Menlo"/>
-              </a:rPr>
-              <a:t>public</a:t>
-            </a:r>
-            <a:r>
-              <a:rPr sz="863">
-                <a:solidFill>
-                  <a:srgbClr val="24292E"/>
-                </a:solidFill>
-                <a:latin typeface="Menlo"/>
-                <a:ea typeface="Menlo"/>
-              </a:rPr>
-              <a:t> </a:t>
-            </a:r>
-            <a:r>
-              <a:rPr sz="863">
-                <a:solidFill>
-                  <a:srgbClr val="D73A49"/>
-                </a:solidFill>
-                <a:latin typeface="Menlo"/>
-                <a:ea typeface="Menlo"/>
-              </a:rPr>
-              <a:t>void</a:t>
-            </a:r>
-            <a:r>
-              <a:rPr sz="863">
-                <a:solidFill>
-                  <a:srgbClr val="24292E"/>
-                </a:solidFill>
-                <a:latin typeface="Menlo"/>
-                <a:ea typeface="Menlo"/>
-              </a:rPr>
-              <a:t> </a:t>
-            </a:r>
-            <a:r>
-              <a:rPr sz="863">
-                <a:solidFill>
-                  <a:srgbClr val="6F42C1"/>
-                </a:solidFill>
-                <a:latin typeface="Menlo"/>
-                <a:ea typeface="Menlo"/>
-              </a:rPr>
-              <a:t>submit</a:t>
-            </a:r>
-            <a:r>
-              <a:rPr sz="863">
-                <a:solidFill>
-                  <a:srgbClr val="24292E"/>
-                </a:solidFill>
-                <a:latin typeface="Menlo"/>
-                <a:ea typeface="Menlo"/>
-              </a:rPr>
-              <a:t>(Cart </a:t>
-            </a:r>
-            <a:r>
-              <a:rPr sz="863">
-                <a:solidFill>
-                  <a:srgbClr val="E36209"/>
-                </a:solidFill>
-                <a:latin typeface="Menlo"/>
-                <a:ea typeface="Menlo"/>
-              </a:rPr>
-              <a:t>cart</a:t>
-            </a:r>
-            <a:r>
-              <a:rPr sz="863">
-                <a:solidFill>
-                  <a:srgbClr val="24292E"/>
-                </a:solidFill>
-                <a:latin typeface="Menlo"/>
-                <a:ea typeface="Menlo"/>
-              </a:rPr>
-              <a:t>) { ... }</a:t>
-            </a:r>
-            <a:endParaRPr/>
-          </a:p>
-          <a:p>
-            <a:pPr>
-              <a:lnSpc>
-                <a:spcPct val="140000"/>
-              </a:lnSpc>
-            </a:pPr>
-            <a:r>
-              <a:rPr sz="863">
-                <a:solidFill>
-                  <a:srgbClr val="24292E"/>
-                </a:solidFill>
-                <a:latin typeface="Menlo"/>
-                <a:ea typeface="Menlo"/>
-              </a:rPr>
-              <a:t>}</a:t>
-            </a:r>
-            <a:endParaRPr/>
-          </a:p>
-          <a:p>
-            <a:pPr>
-              <a:lnSpc>
-                <a:spcPct val="140000"/>
-              </a:lnSpc>
-            </a:pPr>
-            <a:r>
-              <a:rPr sz="863">
-                <a:solidFill>
-                  <a:srgbClr val="E5E7EB"/>
-                </a:solidFill>
-                <a:latin typeface="Menlo"/>
-                <a:ea typeface="Menlo"/>
-              </a:rPr>
-              <a:t> </a:t>
-            </a:r>
-            <a:endParaRPr/>
-          </a:p>
-          <a:p>
-            <a:pPr>
-              <a:lnSpc>
-                <a:spcPct val="140000"/>
-              </a:lnSpc>
-            </a:pPr>
-            <a:r>
-              <a:rPr sz="863">
-                <a:solidFill>
-                  <a:srgbClr val="D73A49"/>
-                </a:solidFill>
-                <a:latin typeface="Menlo"/>
-                <a:ea typeface="Menlo"/>
-              </a:rPr>
-              <a:t>:</a:t>
-            </a:r>
-            <a:r>
-              <a:rPr sz="863">
-                <a:solidFill>
-                  <a:srgbClr val="24292E"/>
-                </a:solidFill>
-                <a:latin typeface="Menlo"/>
-                <a:ea typeface="Menlo"/>
-              </a:rPr>
-              <a:t>Order  </a:t>
-            </a:r>
-            <a:r>
-              <a:rPr sz="863">
-                <a:solidFill>
-                  <a:srgbClr val="D73A49"/>
-                </a:solidFill>
-                <a:latin typeface="Menlo"/>
-                <a:ea typeface="Menlo"/>
-              </a:rPr>
-              <a:t>-&gt;</a:t>
-            </a:r>
-            <a:r>
-              <a:rPr sz="863">
-                <a:solidFill>
-                  <a:srgbClr val="24292E"/>
-                </a:solidFill>
-                <a:latin typeface="Menlo"/>
-                <a:ea typeface="Menlo"/>
-              </a:rPr>
-              <a:t>  </a:t>
-            </a:r>
-            <a:r>
-              <a:rPr sz="863">
-                <a:solidFill>
-                  <a:srgbClr val="D73A49"/>
-                </a:solidFill>
-                <a:latin typeface="Menlo"/>
-                <a:ea typeface="Menlo"/>
-              </a:rPr>
-              <a:t>:</a:t>
-            </a:r>
-            <a:r>
-              <a:rPr sz="863">
-                <a:solidFill>
-                  <a:srgbClr val="24292E"/>
-                </a:solidFill>
-                <a:latin typeface="Menlo"/>
-                <a:ea typeface="Menlo"/>
-              </a:rPr>
-              <a:t>OrderLine</a:t>
-            </a:r>
-            <a:endParaRPr/>
-          </a:p>
-          <a:p>
-            <a:pPr>
-              <a:lnSpc>
-                <a:spcPct val="140000"/>
-              </a:lnSpc>
-            </a:pPr>
-            <a:r>
-              <a:rPr sz="863">
-                <a:solidFill>
-                  <a:srgbClr val="24292E"/>
-                </a:solidFill>
-                <a:latin typeface="Menlo"/>
-                <a:ea typeface="Menlo"/>
-              </a:rPr>
-              <a:t>        </a:t>
-            </a:r>
-            <a:r>
-              <a:rPr sz="863">
-                <a:solidFill>
-                  <a:srgbClr val="6F42C1"/>
-                </a:solidFill>
-                <a:latin typeface="Menlo"/>
-                <a:ea typeface="Menlo"/>
-              </a:rPr>
-              <a:t>create</a:t>
-            </a:r>
-            <a:r>
-              <a:rPr sz="863">
-                <a:solidFill>
-                  <a:srgbClr val="24292E"/>
-                </a:solidFill>
-                <a:latin typeface="Menlo"/>
-                <a:ea typeface="Menlo"/>
-              </a:rPr>
-              <a:t>(item, qty)</a:t>
-            </a:r>
-            <a:endParaRPr/>
-          </a:p>
-          <a:p>
-            <a:pPr>
-              <a:lnSpc>
-                <a:spcPct val="140000"/>
-              </a:lnSpc>
-            </a:pPr>
-            <a:r>
-              <a:rPr sz="863">
-                <a:solidFill>
-                  <a:srgbClr val="E5E7EB"/>
-                </a:solidFill>
-                <a:latin typeface="Menlo"/>
-                <a:ea typeface="Menlo"/>
-              </a:rPr>
-              <a:t> </a:t>
-            </a:r>
-            <a:endParaRPr/>
-          </a:p>
-          <a:p>
-            <a:pPr>
-              <a:lnSpc>
-                <a:spcPct val="140000"/>
-              </a:lnSpc>
-            </a:pPr>
-            <a:r>
-              <a:rPr sz="863">
-                <a:solidFill>
-                  <a:srgbClr val="D73A49"/>
-                </a:solidFill>
-                <a:latin typeface="Menlo"/>
-                <a:ea typeface="Menlo"/>
-              </a:rPr>
-              <a:t>public</a:t>
-            </a:r>
-            <a:r>
-              <a:rPr sz="863">
-                <a:solidFill>
-                  <a:srgbClr val="24292E"/>
-                </a:solidFill>
-                <a:latin typeface="Menlo"/>
-                <a:ea typeface="Menlo"/>
-              </a:rPr>
-              <a:t> </a:t>
-            </a:r>
-            <a:r>
-              <a:rPr sz="863">
-                <a:solidFill>
-                  <a:srgbClr val="D73A49"/>
-                </a:solidFill>
-                <a:latin typeface="Menlo"/>
-                <a:ea typeface="Menlo"/>
-              </a:rPr>
-              <a:t>class</a:t>
-            </a:r>
-            <a:r>
-              <a:rPr sz="863">
-                <a:solidFill>
-                  <a:srgbClr val="24292E"/>
-                </a:solidFill>
-                <a:latin typeface="Menlo"/>
-                <a:ea typeface="Menlo"/>
-              </a:rPr>
-              <a:t> </a:t>
-            </a:r>
-            <a:r>
-              <a:rPr sz="863">
-                <a:solidFill>
-                  <a:srgbClr val="6F42C1"/>
-                </a:solidFill>
-                <a:latin typeface="Menlo"/>
-                <a:ea typeface="Menlo"/>
-              </a:rPr>
-              <a:t>Order</a:t>
-            </a:r>
-            <a:r>
-              <a:rPr sz="863">
-                <a:solidFill>
-                  <a:srgbClr val="24292E"/>
-                </a:solidFill>
-                <a:latin typeface="Menlo"/>
-                <a:ea typeface="Menlo"/>
-              </a:rPr>
-              <a:t> {</a:t>
-            </a:r>
-            <a:endParaRPr/>
-          </a:p>
-          <a:p>
-            <a:pPr>
-              <a:lnSpc>
-                <a:spcPct val="140000"/>
-              </a:lnSpc>
-            </a:pPr>
-            <a:r>
-              <a:rPr sz="863">
-                <a:solidFill>
-                  <a:srgbClr val="24292E"/>
-                </a:solidFill>
-                <a:latin typeface="Menlo"/>
-                <a:ea typeface="Menlo"/>
-              </a:rPr>
-              <a:t>    </a:t>
-            </a:r>
-            <a:r>
-              <a:rPr sz="863">
-                <a:solidFill>
-                  <a:srgbClr val="D73A49"/>
-                </a:solidFill>
-                <a:latin typeface="Menlo"/>
-                <a:ea typeface="Menlo"/>
-              </a:rPr>
-              <a:t>public</a:t>
-            </a:r>
-            <a:r>
-              <a:rPr sz="863">
-                <a:solidFill>
-                  <a:srgbClr val="24292E"/>
-                </a:solidFill>
-                <a:latin typeface="Menlo"/>
-                <a:ea typeface="Menlo"/>
-              </a:rPr>
-              <a:t> OrderLine </a:t>
-            </a:r>
-            <a:r>
-              <a:rPr sz="863">
-                <a:solidFill>
-                  <a:srgbClr val="6F42C1"/>
-                </a:solidFill>
-                <a:latin typeface="Menlo"/>
-                <a:ea typeface="Menlo"/>
-              </a:rPr>
-              <a:t>create</a:t>
-            </a:r>
-            <a:r>
-              <a:rPr sz="863">
-                <a:solidFill>
-                  <a:srgbClr val="24292E"/>
-                </a:solidFill>
-                <a:latin typeface="Menlo"/>
-                <a:ea typeface="Menlo"/>
-              </a:rPr>
-              <a:t>(MenuItem </a:t>
-            </a:r>
-            <a:r>
-              <a:rPr sz="863">
-                <a:solidFill>
-                  <a:srgbClr val="E36209"/>
-                </a:solidFill>
-                <a:latin typeface="Menlo"/>
-                <a:ea typeface="Menlo"/>
-              </a:rPr>
-              <a:t>item</a:t>
-            </a:r>
-            <a:r>
-              <a:rPr sz="863">
-                <a:solidFill>
-                  <a:srgbClr val="24292E"/>
-                </a:solidFill>
-                <a:latin typeface="Menlo"/>
-                <a:ea typeface="Menlo"/>
-              </a:rPr>
-              <a:t>,</a:t>
-            </a:r>
-            <a:endParaRPr/>
-          </a:p>
-          <a:p>
-            <a:pPr>
-              <a:lnSpc>
-                <a:spcPct val="140000"/>
-              </a:lnSpc>
-            </a:pPr>
-            <a:r>
-              <a:rPr sz="863">
-                <a:solidFill>
-                  <a:srgbClr val="24292E"/>
-                </a:solidFill>
-                <a:latin typeface="Menlo"/>
-                <a:ea typeface="Menlo"/>
-              </a:rPr>
-              <a:t>                            </a:t>
-            </a:r>
-            <a:r>
-              <a:rPr sz="863">
-                <a:solidFill>
-                  <a:srgbClr val="D73A49"/>
-                </a:solidFill>
-                <a:latin typeface="Menlo"/>
-                <a:ea typeface="Menlo"/>
-              </a:rPr>
-              <a:t>int</a:t>
-            </a:r>
-            <a:r>
-              <a:rPr sz="863">
-                <a:solidFill>
-                  <a:srgbClr val="24292E"/>
-                </a:solidFill>
-                <a:latin typeface="Menlo"/>
-                <a:ea typeface="Menlo"/>
-              </a:rPr>
-              <a:t> </a:t>
-            </a:r>
-            <a:r>
-              <a:rPr sz="863">
-                <a:solidFill>
-                  <a:srgbClr val="E36209"/>
-                </a:solidFill>
-                <a:latin typeface="Menlo"/>
-                <a:ea typeface="Menlo"/>
-              </a:rPr>
-              <a:t>qty</a:t>
-            </a:r>
-            <a:r>
-              <a:rPr sz="863">
-                <a:solidFill>
-                  <a:srgbClr val="24292E"/>
-                </a:solidFill>
-                <a:latin typeface="Menlo"/>
-                <a:ea typeface="Menlo"/>
-              </a:rPr>
-              <a:t>) { ... }</a:t>
-            </a:r>
-            <a:endParaRPr/>
-          </a:p>
-          <a:p>
-            <a:pPr>
-              <a:lnSpc>
-                <a:spcPct val="140000"/>
-              </a:lnSpc>
-            </a:pPr>
-            <a:r>
-              <a:rPr sz="863">
-                <a:solidFill>
-                  <a:srgbClr val="24292E"/>
-                </a:solidFill>
-                <a:latin typeface="Menlo"/>
-                <a:ea typeface="Menlo"/>
-              </a:rPr>
-              <a:t>}</a:t>
-            </a:r>
-            <a:endParaRPr/>
-          </a:p>
-          <a:p>
-            <a:pPr>
-              <a:lnSpc>
-                <a:spcPct val="140000"/>
-              </a:lnSpc>
-            </a:pPr>
-            <a:r>
-              <a:rPr sz="863">
-                <a:solidFill>
-                  <a:srgbClr val="E5E7EB"/>
-                </a:solidFill>
-                <a:latin typeface="Menlo"/>
-                <a:ea typeface="Menlo"/>
-              </a:rPr>
-              <a:t> </a:t>
-            </a:r>
-            <a:endParaRPr/>
-          </a:p>
-          <a:p>
-            <a:pPr>
-              <a:lnSpc>
-                <a:spcPct val="140000"/>
-              </a:lnSpc>
-            </a:pPr>
-            <a:r>
-              <a:rPr sz="863">
-                <a:solidFill>
-                  <a:srgbClr val="D73A49"/>
-                </a:solidFill>
-                <a:latin typeface="Menlo"/>
-                <a:ea typeface="Menlo"/>
-              </a:rPr>
-              <a:t>:</a:t>
-            </a:r>
-            <a:r>
-              <a:rPr sz="863">
-                <a:solidFill>
-                  <a:srgbClr val="24292E"/>
-                </a:solidFill>
-                <a:latin typeface="Menlo"/>
-                <a:ea typeface="Menlo"/>
-              </a:rPr>
-              <a:t>Order  </a:t>
-            </a:r>
-            <a:r>
-              <a:rPr sz="863">
-                <a:solidFill>
-                  <a:srgbClr val="D73A49"/>
-                </a:solidFill>
-                <a:latin typeface="Menlo"/>
-                <a:ea typeface="Menlo"/>
-              </a:rPr>
-              <a:t>-&gt;</a:t>
-            </a:r>
-            <a:r>
-              <a:rPr sz="863">
-                <a:solidFill>
-                  <a:srgbClr val="24292E"/>
-                </a:solidFill>
-                <a:latin typeface="Menlo"/>
-                <a:ea typeface="Menlo"/>
-              </a:rPr>
-              <a:t>  </a:t>
-            </a:r>
-            <a:r>
-              <a:rPr sz="863">
-                <a:solidFill>
-                  <a:srgbClr val="D73A49"/>
-                </a:solidFill>
-                <a:latin typeface="Menlo"/>
-                <a:ea typeface="Menlo"/>
-              </a:rPr>
-              <a:t>:</a:t>
-            </a:r>
-            <a:r>
-              <a:rPr sz="863">
-                <a:solidFill>
-                  <a:srgbClr val="24292E"/>
-                </a:solidFill>
-                <a:latin typeface="Menlo"/>
-                <a:ea typeface="Menlo"/>
-              </a:rPr>
-              <a:t>Order</a:t>
-            </a:r>
-            <a:endParaRPr/>
-          </a:p>
-          <a:p>
-            <a:pPr>
-              <a:lnSpc>
-                <a:spcPct val="140000"/>
-              </a:lnSpc>
-            </a:pPr>
-            <a:r>
-              <a:rPr sz="863">
-                <a:solidFill>
-                  <a:srgbClr val="24292E"/>
-                </a:solidFill>
-                <a:latin typeface="Menlo"/>
-                <a:ea typeface="Menlo"/>
-              </a:rPr>
-              <a:t>        </a:t>
-            </a:r>
-            <a:r>
-              <a:rPr sz="863">
-                <a:solidFill>
-                  <a:srgbClr val="6F42C1"/>
-                </a:solidFill>
-                <a:latin typeface="Menlo"/>
-                <a:ea typeface="Menlo"/>
-              </a:rPr>
-              <a:t>total</a:t>
-            </a:r>
-            <a:r>
-              <a:rPr sz="863">
-                <a:solidFill>
-                  <a:srgbClr val="24292E"/>
-                </a:solidFill>
-                <a:latin typeface="Menlo"/>
-                <a:ea typeface="Menlo"/>
-              </a:rPr>
-              <a:t>() </a:t>
-            </a:r>
-            <a:r>
-              <a:rPr sz="863">
-                <a:solidFill>
-                  <a:srgbClr val="D73A49"/>
-                </a:solidFill>
-                <a:latin typeface="Menlo"/>
-                <a:ea typeface="Menlo"/>
-              </a:rPr>
-              <a:t>:</a:t>
-            </a:r>
-            <a:r>
-              <a:rPr sz="863">
-                <a:solidFill>
-                  <a:srgbClr val="24292E"/>
-                </a:solidFill>
-                <a:latin typeface="Menlo"/>
-                <a:ea typeface="Menlo"/>
-              </a:rPr>
-              <a:t> Money</a:t>
-            </a:r>
-            <a:endParaRPr/>
-          </a:p>
-          <a:p>
-            <a:pPr>
-              <a:lnSpc>
-                <a:spcPct val="140000"/>
-              </a:lnSpc>
-            </a:pPr>
-            <a:r>
-              <a:rPr sz="863">
-                <a:solidFill>
-                  <a:srgbClr val="E5E7EB"/>
-                </a:solidFill>
-                <a:latin typeface="Menlo"/>
-                <a:ea typeface="Menlo"/>
-              </a:rPr>
-              <a:t> </a:t>
-            </a:r>
-            <a:endParaRPr/>
-          </a:p>
-          <a:p>
-            <a:pPr>
-              <a:lnSpc>
-                <a:spcPct val="140000"/>
-              </a:lnSpc>
-            </a:pPr>
-            <a:r>
-              <a:rPr sz="863">
-                <a:solidFill>
-                  <a:srgbClr val="D73A49"/>
-                </a:solidFill>
-                <a:latin typeface="Menlo"/>
-                <a:ea typeface="Menlo"/>
-              </a:rPr>
-              <a:t>public</a:t>
-            </a:r>
-            <a:r>
-              <a:rPr sz="863">
-                <a:solidFill>
-                  <a:srgbClr val="24292E"/>
-                </a:solidFill>
-                <a:latin typeface="Menlo"/>
-                <a:ea typeface="Menlo"/>
-              </a:rPr>
-              <a:t> </a:t>
-            </a:r>
-            <a:r>
-              <a:rPr sz="863">
-                <a:solidFill>
-                  <a:srgbClr val="D73A49"/>
-                </a:solidFill>
-                <a:latin typeface="Menlo"/>
-                <a:ea typeface="Menlo"/>
-              </a:rPr>
-              <a:t>class</a:t>
-            </a:r>
-            <a:r>
-              <a:rPr sz="863">
-                <a:solidFill>
-                  <a:srgbClr val="24292E"/>
-                </a:solidFill>
-                <a:latin typeface="Menlo"/>
-                <a:ea typeface="Menlo"/>
-              </a:rPr>
-              <a:t> </a:t>
-            </a:r>
-            <a:r>
-              <a:rPr sz="863">
-                <a:solidFill>
-                  <a:srgbClr val="6F42C1"/>
-                </a:solidFill>
-                <a:latin typeface="Menlo"/>
-                <a:ea typeface="Menlo"/>
-              </a:rPr>
-              <a:t>Order</a:t>
-            </a:r>
-            <a:r>
-              <a:rPr sz="863">
-                <a:solidFill>
-                  <a:srgbClr val="24292E"/>
-                </a:solidFill>
-                <a:latin typeface="Menlo"/>
-                <a:ea typeface="Menlo"/>
-              </a:rPr>
-              <a:t> {</a:t>
-            </a:r>
-            <a:endParaRPr/>
-          </a:p>
-          <a:p>
-            <a:pPr>
-              <a:lnSpc>
-                <a:spcPct val="140000"/>
-              </a:lnSpc>
-            </a:pPr>
-            <a:r>
-              <a:rPr sz="863">
-                <a:solidFill>
-                  <a:srgbClr val="24292E"/>
-                </a:solidFill>
-                <a:latin typeface="Menlo"/>
-                <a:ea typeface="Menlo"/>
-              </a:rPr>
-              <a:t>    </a:t>
-            </a:r>
-            <a:r>
-              <a:rPr sz="863">
-                <a:solidFill>
-                  <a:srgbClr val="D73A49"/>
-                </a:solidFill>
-                <a:latin typeface="Menlo"/>
-                <a:ea typeface="Menlo"/>
-              </a:rPr>
-              <a:t>public</a:t>
-            </a:r>
-            <a:r>
-              <a:rPr sz="863">
-                <a:solidFill>
-                  <a:srgbClr val="24292E"/>
-                </a:solidFill>
-                <a:latin typeface="Menlo"/>
-                <a:ea typeface="Menlo"/>
-              </a:rPr>
-              <a:t> Money </a:t>
-            </a:r>
-            <a:r>
-              <a:rPr sz="863">
-                <a:solidFill>
-                  <a:srgbClr val="6F42C1"/>
-                </a:solidFill>
-                <a:latin typeface="Menlo"/>
-                <a:ea typeface="Menlo"/>
-              </a:rPr>
-              <a:t>total</a:t>
-            </a:r>
-            <a:r>
-              <a:rPr sz="863">
-                <a:solidFill>
-                  <a:srgbClr val="24292E"/>
-                </a:solidFill>
-                <a:latin typeface="Menlo"/>
-                <a:ea typeface="Menlo"/>
-              </a:rPr>
-              <a:t>() { ... }</a:t>
-            </a:r>
-            <a:endParaRPr/>
-          </a:p>
-          <a:p>
-            <a:pPr>
-              <a:lnSpc>
-                <a:spcPct val="140000"/>
-              </a:lnSpc>
-            </a:pPr>
-            <a:r>
-              <a:rPr sz="863">
-                <a:solidFill>
-                  <a:srgbClr val="24292E"/>
-                </a:solidFill>
-                <a:latin typeface="Menlo"/>
-                <a:ea typeface="Menlo"/>
-              </a:rPr>
-              <a:t>}</a:t>
+              <a:t>    + total() : Money</a:t>
             </a:r>
             <a:endParaRPr/>
           </a:p>
@@ -17654,7 +16922,7 @@
   <p:cSld>
     <p:spTree>
       <p:nvGrpSpPr>
-        <p:cNvPr id="432" name="" descr="&lt;Slide style={{ background: '#FFFFFF', padding: 0 }}&gt;&#10;  &lt;Box style={{ height: 72, background: '#1E4FA8', padding: '0 40px', flexDirection: 'row', alignItems: 'center', justifyContent: 'space-between' }}&gt;&#10;    &lt;Text style={{ fontSize: 15, color: '#B9CDF0', letterSpacing: 1 }}&gt;ISAD · INFORMATION SYSTEMS ANALYSIS &amp;amp; DESIGN&lt;/Text&gt;&#10;    &lt;Text style={{ fontSize: 15, color: '#B9CDF0' }}&gt;W03 · TOOLCHAIN&lt;/Text&gt;&#10;  &lt;/Box&gt;&#10;  &lt;Box style={{ padding: '14px 40px 0 40px', flexDirection: 'row', alignItems: 'center', justifyContent: 'space-between' }}&gt;&#10;    &lt;Text style={{ fontSize: 30, fontWeight: 'bold', color: '#0E3F8C' }}&gt;PlantUML by Example&lt;/Text&gt;&#10;    &lt;Text style={{ fontSize: 14, color: '#1E4FA8', fontWeight: 'bold' }}&gt;28 / 38&lt;/Text&gt;&#10;  &lt;/Box&gt;&#10;  &lt;Box style={{ flex: 1, padding: '8px 40px 0 40px', flexDirection: 'row', gap: 26 }}&gt;&#10;    &lt;Box style={{ flex: 5, justifyContent: 'center' }}&gt;&#10;      &lt;CodeBlock code={`@startuml&#10;class Library {&#10;  - name : String&#10;  + addBook(b : Book) : void&#10;  + findByIsbn(isbn : String) : Book&#10;}&#10;&#10;class Book {&#10;  - isbn : String&#10;  - title : String&#10;  + isAvailable() : boolean&#10;}&#10;&#10;class Member {&#10;  - id : String&#10;  - name : String&#10;  + borrow(b : Book) : void&#10;}&#10;&#10;Library &quot;1&quot; *-- &quot;0..*&quot; Book : holds&#10;Library &quot;1&quot; o-- &quot;0..*&quot; Member : registers&#10;@enduml`} language='java' width={600} fontSize={12.5} /&gt;&#10;    &lt;/Box&gt;&#10;    &lt;Box style={{ flex: 4, flexDirection: 'column', gap: 11, justifyContent: 'center' }}&gt;&#10;      {[&#10;        ['cube', 'class Name { ... }', 'Everything between the braces is the class box — name, attributes, operations, in that order.'],&#10;        ['grip-lines', 'The line between classes', 'Read it left to right: multiplicity, the line style, multiplicity, then a colon and the association name.'],&#10;        ['shapes', '*-- and o--', 'A filled diamond is composition: the parts die with the whole. A hollow one is aggregation. A bare -- is a plain association.'],&#10;      ].map(([icon, t, d]) =&gt; (&#10;        &lt;Box key={t} style={{ flexDirection: 'row', gap: 12, alignItems: 'flex-start', padding: '14px 16px', background: '#F7F9FC', borderRadius: 10, border: '1px solid #E5E7EB' }}&gt;&#10;          &lt;Box style={{ width: 38, height: 38, borderRadius: 9, background: '#E8EFF8', justifyContent: 'center', alignItems: 'center' }}&gt;&#10;            &lt;FAIcon name={icon} style={{ fill: '#1E4FA8', width: 18, height: 18 }} /&gt;&#10;          &lt;/Box&gt;&#10;          &lt;Box style={{ flex: 1, flexDirection: 'column', gap: 3 }}&gt;&#10;            &lt;Text style={{ fontSize: 15.5, fontWeight: 'bold', color: '#0E3F8C' }}&gt;{t}&lt;/Text&gt;&#10;            &lt;Text style={{ fontSize: 13.5, color: '#4A5568', lineHeight: 1.5 }}&gt;{d}&lt;/Text&gt;&#10;          &lt;/Box&gt;&#10;        &lt;/Box&gt;&#10;      ))}&#10;      &lt;Box style={{ padding: '12px 16px', background: '#F0F5FC', borderRadius: 9, borderLeft: '4px solid #1E4FA8' }}&gt;&#10;        &lt;Text style={{ fontSize: 13.5, color: '#0E3F8C', lineHeight: 1.5, fontWeight: 'bold' }}&gt;You will write exactly this file in Exercise 3.2 — with two lines left blank for you to fill in.&lt;/Text&gt;&#10;      &lt;/Box&gt;&#10;    &lt;/Box&gt;&#10;  &lt;/Box&gt;&#10;  &lt;Box style={{ height: 34, padding: '0 40px', flexDirection: 'row', alignItems: 'center', justifyContent: 'space-between' }}&gt;&#10;    &lt;Text style={{ fontSize: 13, color: '#8B97A8' }}&gt;ISAD · Fall 2026 · PlantUML renders in VS Code and on plantuml.com/plantuml&lt;/Text&gt;&#10;    &lt;Text style={{ fontSize: 14, color: '#1E4FA8', fontWeight: 'bold' }}&gt;28 / 38&lt;/Text&gt;&#10;  &lt;/Box&gt;&#10;&lt;/Slide&gt;"/>
+        <p:cNvPr id="432" name="" descr="&lt;Slide style={{ background: '#FFFFFF', padding: 0 }}&gt;&#10;  &lt;Box style={{ height: 72, background: '#1E4FA8', padding: '0 40px', flexDirection: 'row', alignItems: 'center', justifyContent: 'space-between' }}&gt;&#10;    &lt;Text style={{ fontSize: 15, color: '#B9CDF0', letterSpacing: 1 }}&gt;ISAD · INFORMATION SYSTEMS ANALYSIS &amp;amp; DESIGN&lt;/Text&gt;&#10;    &lt;Text style={{ fontSize: 15, color: '#B9CDF0' }}&gt;W03 · TOOLCHAIN&lt;/Text&gt;&#10;  &lt;/Box&gt;&#10;  &lt;Box style={{ padding: '14px 40px 0 40px', flexDirection: 'row', alignItems: 'center', justifyContent: 'space-between' }}&gt;&#10;    &lt;Text style={{ fontSize: 30, fontWeight: 'bold', color: '#0E3F8C' }}&gt;PlantUML by Example&lt;/Text&gt;&#10;    &lt;Text style={{ fontSize: 14, color: '#1E4FA8', fontWeight: 'bold' }}&gt;28 / 38&lt;/Text&gt;&#10;  &lt;/Box&gt;&#10;  &lt;Box style={{ flex: 1, padding: '8px 40px 0 40px', flexDirection: 'row', gap: 26 }}&gt;&#10;    &lt;Box style={{ flex: 5, justifyContent: 'center' }}&gt;&#10;      &lt;CodeBlock code={`@startuml&#10;class Library {&#10;  - name : String&#10;  + addBook(b : Book) : void&#10;  + findByIsbn(isbn : String) : Book&#10;}&#10;&#10;class Book {&#10;  - isbn : String&#10;  - title : String&#10;  + isAvailable() : boolean&#10;}&#10;&#10;class Member {&#10;  - id : String&#10;  - name : String&#10;  + borrow(b : Book) : void&#10;}&#10;&#10;Library &quot;1&quot; *-- &quot;0..*&quot; Book : holds&#10;Library &quot;1&quot; o-- &quot;0..*&quot; Member : registers&#10;@enduml`} language='text' width={600} fontSize={12.5} /&gt;&#10;    &lt;/Box&gt;&#10;    &lt;Box style={{ flex: 4, flexDirection: 'column', gap: 11, justifyContent: 'center' }}&gt;&#10;      {[&#10;        ['cube', 'class Name { ... }', 'Everything between the braces is the class box — name, attributes, operations, in that order.'],&#10;        ['grip-lines', 'The line between classes', 'Read it left to right: multiplicity, the line style, multiplicity, then a colon and the association name.'],&#10;        ['shapes', '*-- and o--', 'A filled diamond is composition: the parts die with the whole. A hollow one is aggregation. A bare -- is a plain association.'],&#10;      ].map(([icon, t, d]) =&gt; (&#10;        &lt;Box key={t} style={{ flexDirection: 'row', gap: 12, alignItems: 'flex-start', padding: '14px 16px', background: '#F7F9FC', borderRadius: 10, border: '1px solid #E5E7EB' }}&gt;&#10;          &lt;Box style={{ width: 38, height: 38, borderRadius: 9, background: '#E8EFF8', justifyContent: 'center', alignItems: 'center' }}&gt;&#10;            &lt;FAIcon name={icon} style={{ fill: '#1E4FA8', width: 18, height: 18 }} /&gt;&#10;          &lt;/Box&gt;&#10;          &lt;Box style={{ flex: 1, flexDirection: 'column', gap: 3 }}&gt;&#10;            &lt;Text style={{ fontSize: 15.5, fontWeight: 'bold', color: '#0E3F8C' }}&gt;{t}&lt;/Text&gt;&#10;            &lt;Text style={{ fontSize: 13.5, color: '#4A5568', lineHeight: 1.5 }}&gt;{d}&lt;/Text&gt;&#10;          &lt;/Box&gt;&#10;        &lt;/Box&gt;&#10;      ))}&#10;      &lt;Box style={{ padding: '12px 16px', background: '#F0F5FC', borderRadius: 9, borderLeft: '4px solid #1E4FA8' }}&gt;&#10;        &lt;Text style={{ fontSize: 13.5, color: '#0E3F8C', lineHeight: 1.5, fontWeight: 'bold' }}&gt;You will write exactly this file in Exercise 3.2 — with two lines left blank for you to fill in.&lt;/Text&gt;&#10;      &lt;/Box&gt;&#10;    &lt;/Box&gt;&#10;  &lt;/Box&gt;&#10;  &lt;Box style={{ height: 34, padding: '0 40px', flexDirection: 'row', alignItems: 'center', justifyContent: 'space-between' }}&gt;&#10;    &lt;Text style={{ fontSize: 13, color: '#8B97A8' }}&gt;ISAD · Fall 2026 · PlantUML renders in VS Code and on plantuml.com/plantuml&lt;/Text&gt;&#10;    &lt;Text style={{ fontSize: 14, color: '#1E4FA8', fontWeight: 'bold' }}&gt;28 / 38&lt;/Text&gt;&#10;  &lt;/Box&gt;&#10;&lt;/Slide&gt;"/>
         <p:cNvGrpSpPr/>
         <p:nvPr/>
       </p:nvGrpSpPr>
@@ -18576,22 +17844,30 @@
             <a:r>
               <a:rPr sz="938">
                 <a:solidFill>
-                  <a:srgbClr val="24292E"/>
+                  <a:srgbClr val="E5E7EB"/>
                 </a:solidFill>
                 <a:latin typeface="Menlo"/>
                 <a:ea typeface="Menlo"/>
               </a:rPr>
-              <a:t>@</a:t>
-            </a:r>
+              <a:t>@startuml</a:t>
+            </a:r>
+            <a:endParaRPr/>
+          </a:p>
+          <a:p>
+            <a:pPr>
+              <a:lnSpc>
+                <a:spcPct val="140000"/>
+              </a:lnSpc>
+            </a:pPr>
             <a:r>
               <a:rPr sz="938">
                 <a:solidFill>
-                  <a:srgbClr val="D73A49"/>
+                  <a:srgbClr val="E5E7EB"/>
                 </a:solidFill>
                 <a:latin typeface="Menlo"/>
                 <a:ea typeface="Menlo"/>
               </a:rPr>
-              <a:t>startuml</a:t>
+              <a:t>class Library {</a:t>
             </a:r>
             <a:endParaRPr/>
           </a:p>
@@ -18604,42 +17880,66 @@
             <a:r>
               <a:rPr sz="938">
                 <a:solidFill>
-                  <a:srgbClr val="D73A49"/>
+                  <a:srgbClr val="E5E7EB"/>
                 </a:solidFill>
                 <a:latin typeface="Menlo"/>
                 <a:ea typeface="Menlo"/>
               </a:rPr>
-              <a:t>class</a:t>
-            </a:r>
+              <a:t>  - name : String</a:t>
+            </a:r>
+            <a:endParaRPr/>
+          </a:p>
+          <a:p>
+            <a:pPr>
+              <a:lnSpc>
+                <a:spcPct val="140000"/>
+              </a:lnSpc>
+            </a:pPr>
             <a:r>
               <a:rPr sz="938">
                 <a:solidFill>
-                  <a:srgbClr val="24292E"/>
+                  <a:srgbClr val="E5E7EB"/>
                 </a:solidFill>
                 <a:latin typeface="Menlo"/>
                 <a:ea typeface="Menlo"/>
               </a:rPr>
-              <a:t> </a:t>
-            </a:r>
+              <a:t>  + addBook(b : Book) : void</a:t>
+            </a:r>
+            <a:endParaRPr/>
+          </a:p>
+          <a:p>
+            <a:pPr>
+              <a:lnSpc>
+                <a:spcPct val="140000"/>
+              </a:lnSpc>
+            </a:pPr>
             <a:r>
               <a:rPr sz="938">
                 <a:solidFill>
-                  <a:srgbClr val="6F42C1"/>
+                  <a:srgbClr val="E5E7EB"/>
                 </a:solidFill>
                 <a:latin typeface="Menlo"/>
                 <a:ea typeface="Menlo"/>
               </a:rPr>
-              <a:t>Library</a:t>
-            </a:r>
+              <a:t>  + findByIsbn(isbn : String) : Book</a:t>
+            </a:r>
+            <a:endParaRPr/>
+          </a:p>
+          <a:p>
+            <a:pPr>
+              <a:lnSpc>
+                <a:spcPct val="140000"/>
+              </a:lnSpc>
+            </a:pPr>
             <a:r>
               <a:rPr sz="938">
                 <a:solidFill>
-                  <a:srgbClr val="24292E"/>
+                  <a:srgbClr val="E5E7EB"/>
                 </a:solidFill>
                 <a:latin typeface="Menlo"/>
                 <a:ea typeface="Menlo"/>
               </a:rPr>
-              <a:t> {</a:t>
+              <a:t>}</a:t>
             </a:r>
             <a:endParaRPr/>
           </a:p>
@@ -18649,55 +17949,95 @@
                 <a:spcPct val="140000"/>
               </a:lnSpc>
             </a:pPr>
+            <a:endParaRPr/>
+          </a:p>
+          <a:p>
+            <a:pPr>
+              <a:lnSpc>
+                <a:spcPct val="140000"/>
+              </a:lnSpc>
+            </a:pPr>
             <a:r>
               <a:rPr sz="938">
                 <a:solidFill>
-                  <a:srgbClr val="24292E"/>
+                  <a:srgbClr val="E5E7EB"/>
                 </a:solidFill>
                 <a:latin typeface="Menlo"/>
                 <a:ea typeface="Menlo"/>
               </a:rPr>
-              <a:t>  </a:t>
-            </a:r>
+              <a:t>class Book {</a:t>
+            </a:r>
+            <a:endParaRPr/>
+          </a:p>
+          <a:p>
+            <a:pPr>
+              <a:lnSpc>
+                <a:spcPct val="140000"/>
+              </a:lnSpc>
+            </a:pPr>
             <a:r>
               <a:rPr sz="938">
                 <a:solidFill>
-                  <a:srgbClr val="D73A49"/>
+                  <a:srgbClr val="E5E7EB"/>
                 </a:solidFill>
                 <a:latin typeface="Menlo"/>
                 <a:ea typeface="Menlo"/>
               </a:rPr>
-              <a:t>-</a:t>
-            </a:r>
+              <a:t>  - isbn : String</a:t>
+            </a:r>
+            <a:endParaRPr/>
+          </a:p>
+          <a:p>
+            <a:pPr>
+              <a:lnSpc>
+                <a:spcPct val="140000"/>
+              </a:lnSpc>
+            </a:pPr>
             <a:r>
               <a:rPr sz="938">
                 <a:solidFill>
-                  <a:srgbClr val="24292E"/>
+                  <a:srgbClr val="E5E7EB"/>
                 </a:solidFill>
                 <a:latin typeface="Menlo"/>
                 <a:ea typeface="Menlo"/>
               </a:rPr>
-              <a:t> name </a:t>
-            </a:r>
+              <a:t>  - title : String</a:t>
+            </a:r>
+            <a:endParaRPr/>
+          </a:p>
+          <a:p>
+            <a:pPr>
+              <a:lnSpc>
+                <a:spcPct val="140000"/>
+              </a:lnSpc>
+            </a:pPr>
             <a:r>
               <a:rPr sz="938">
                 <a:solidFill>
-                  <a:srgbClr val="D73A49"/>
+                  <a:srgbClr val="E5E7EB"/>
                 </a:solidFill>
                 <a:latin typeface="Menlo"/>
                 <a:ea typeface="Menlo"/>
               </a:rPr>
-              <a:t>:</a:t>
-            </a:r>
+              <a:t>  + isAvailable() : boolean</a:t>
+            </a:r>
+            <a:endParaRPr/>
+          </a:p>
+          <a:p>
+            <a:pPr>
+              <a:lnSpc>
+                <a:spcPct val="140000"/>
+              </a:lnSpc>
+            </a:pPr>
             <a:r>
               <a:rPr sz="938">
                 <a:solidFill>
-                  <a:srgbClr val="24292E"/>
+                  <a:srgbClr val="E5E7EB"/>
                 </a:solidFill>
                 <a:latin typeface="Menlo"/>
                 <a:ea typeface="Menlo"/>
               </a:rPr>
-              <a:t> String</a:t>
+              <a:t>}</a:t>
             </a:r>
             <a:endParaRPr/>
           </a:p>
@@ -18707,989 +18047,157 @@
                 <a:spcPct val="140000"/>
               </a:lnSpc>
             </a:pPr>
+            <a:endParaRPr/>
+          </a:p>
+          <a:p>
+            <a:pPr>
+              <a:lnSpc>
+                <a:spcPct val="140000"/>
+              </a:lnSpc>
+            </a:pPr>
             <a:r>
               <a:rPr sz="938">
                 <a:solidFill>
-                  <a:srgbClr val="24292E"/>
+                  <a:srgbClr val="E5E7EB"/>
                 </a:solidFill>
                 <a:latin typeface="Menlo"/>
                 <a:ea typeface="Menlo"/>
               </a:rPr>
-              <a:t>  </a:t>
-            </a:r>
+              <a:t>class Member {</a:t>
+            </a:r>
+            <a:endParaRPr/>
+          </a:p>
+          <a:p>
+            <a:pPr>
+              <a:lnSpc>
+                <a:spcPct val="140000"/>
+              </a:lnSpc>
+            </a:pPr>
             <a:r>
               <a:rPr sz="938">
                 <a:solidFill>
-                  <a:srgbClr val="D73A49"/>
+                  <a:srgbClr val="E5E7EB"/>
                 </a:solidFill>
                 <a:latin typeface="Menlo"/>
                 <a:ea typeface="Menlo"/>
               </a:rPr>
-              <a:t>+</a:t>
-            </a:r>
+              <a:t>  - id : String</a:t>
+            </a:r>
+            <a:endParaRPr/>
+          </a:p>
+          <a:p>
+            <a:pPr>
+              <a:lnSpc>
+                <a:spcPct val="140000"/>
+              </a:lnSpc>
+            </a:pPr>
             <a:r>
               <a:rPr sz="938">
                 <a:solidFill>
-                  <a:srgbClr val="24292E"/>
+                  <a:srgbClr val="E5E7EB"/>
                 </a:solidFill>
                 <a:latin typeface="Menlo"/>
                 <a:ea typeface="Menlo"/>
               </a:rPr>
-              <a:t> </a:t>
-            </a:r>
+              <a:t>  - name : String</a:t>
+            </a:r>
+            <a:endParaRPr/>
+          </a:p>
+          <a:p>
+            <a:pPr>
+              <a:lnSpc>
+                <a:spcPct val="140000"/>
+              </a:lnSpc>
+            </a:pPr>
             <a:r>
               <a:rPr sz="938">
                 <a:solidFill>
-                  <a:srgbClr val="6F42C1"/>
+                  <a:srgbClr val="E5E7EB"/>
                 </a:solidFill>
                 <a:latin typeface="Menlo"/>
                 <a:ea typeface="Menlo"/>
               </a:rPr>
-              <a:t>addBook</a:t>
-            </a:r>
+              <a:t>  + borrow(b : Book) : void</a:t>
+            </a:r>
+            <a:endParaRPr/>
+          </a:p>
+          <a:p>
+            <a:pPr>
+              <a:lnSpc>
+                <a:spcPct val="140000"/>
+              </a:lnSpc>
+            </a:pPr>
             <a:r>
               <a:rPr sz="938">
                 <a:solidFill>
-                  <a:srgbClr val="24292E"/>
+                  <a:srgbClr val="E5E7EB"/>
                 </a:solidFill>
                 <a:latin typeface="Menlo"/>
                 <a:ea typeface="Menlo"/>
               </a:rPr>
-              <a:t>(</a:t>
-            </a:r>
+              <a:t>}</a:t>
+            </a:r>
+            <a:endParaRPr/>
+          </a:p>
+          <a:p>
+            <a:pPr>
+              <a:lnSpc>
+                <a:spcPct val="140000"/>
+              </a:lnSpc>
+            </a:pPr>
+            <a:endParaRPr/>
+          </a:p>
+          <a:p>
+            <a:pPr>
+              <a:lnSpc>
+                <a:spcPct val="140000"/>
+              </a:lnSpc>
+            </a:pPr>
             <a:r>
               <a:rPr sz="938">
                 <a:solidFill>
-                  <a:srgbClr val="E36209"/>
+                  <a:srgbClr val="E5E7EB"/>
                 </a:solidFill>
                 <a:latin typeface="Menlo"/>
                 <a:ea typeface="Menlo"/>
               </a:rPr>
-              <a:t>b</a:t>
-            </a:r>
+              <a:t>Library "1" *-- "0..*" Book : holds</a:t>
+            </a:r>
+            <a:endParaRPr/>
+          </a:p>
+          <a:p>
+            <a:pPr>
+              <a:lnSpc>
+                <a:spcPct val="140000"/>
+              </a:lnSpc>
+            </a:pPr>
             <a:r>
               <a:rPr sz="938">
                 <a:solidFill>
-                  <a:srgbClr val="24292E"/>
+                  <a:srgbClr val="E5E7EB"/>
                 </a:solidFill>
                 <a:latin typeface="Menlo"/>
                 <a:ea typeface="Menlo"/>
               </a:rPr>
-              <a:t> : </a:t>
-            </a:r>
+              <a:t>Library "1" o-- "0..*" Member : registers</a:t>
+            </a:r>
+            <a:endParaRPr/>
+          </a:p>
+          <a:p>
+            <a:pPr>
+              <a:lnSpc>
+                <a:spcPct val="140000"/>
+              </a:lnSpc>
+            </a:pPr>
             <a:r>
               <a:rPr sz="938">
                 <a:solidFill>
-                  <a:srgbClr val="E36209"/>
+                  <a:srgbClr val="E5E7EB"/>
                 </a:solidFill>
                 <a:latin typeface="Menlo"/>
                 <a:ea typeface="Menlo"/>
               </a:rPr>
-              <a:t>Book</a:t>
-            </a:r>
-            <a:r>
-              <a:rPr sz="938">
-                <a:solidFill>
-                  <a:srgbClr val="24292E"/>
-                </a:solidFill>
-                <a:latin typeface="Menlo"/>
-                <a:ea typeface="Menlo"/>
-              </a:rPr>
-              <a:t>) : void</a:t>
-            </a:r>
-            <a:endParaRPr/>
-          </a:p>
-          <a:p>
-            <a:pPr>
-              <a:lnSpc>
-                <a:spcPct val="140000"/>
-              </a:lnSpc>
-            </a:pPr>
-            <a:r>
-              <a:rPr sz="938">
-                <a:solidFill>
-                  <a:srgbClr val="24292E"/>
-                </a:solidFill>
-                <a:latin typeface="Menlo"/>
-                <a:ea typeface="Menlo"/>
-              </a:rPr>
-              <a:t>  + </a:t>
-            </a:r>
-            <a:r>
-              <a:rPr sz="938">
-                <a:solidFill>
-                  <a:srgbClr val="6F42C1"/>
-                </a:solidFill>
-                <a:latin typeface="Menlo"/>
-                <a:ea typeface="Menlo"/>
-              </a:rPr>
-              <a:t>findByIsbn</a:t>
-            </a:r>
-            <a:r>
-              <a:rPr sz="938">
-                <a:solidFill>
-                  <a:srgbClr val="24292E"/>
-                </a:solidFill>
-                <a:latin typeface="Menlo"/>
-                <a:ea typeface="Menlo"/>
-              </a:rPr>
-              <a:t>(</a:t>
-            </a:r>
-            <a:r>
-              <a:rPr sz="938">
-                <a:solidFill>
-                  <a:srgbClr val="E36209"/>
-                </a:solidFill>
-                <a:latin typeface="Menlo"/>
-                <a:ea typeface="Menlo"/>
-              </a:rPr>
-              <a:t>isbn</a:t>
-            </a:r>
-            <a:r>
-              <a:rPr sz="938">
-                <a:solidFill>
-                  <a:srgbClr val="24292E"/>
-                </a:solidFill>
-                <a:latin typeface="Menlo"/>
-                <a:ea typeface="Menlo"/>
-              </a:rPr>
-              <a:t> : </a:t>
-            </a:r>
-            <a:r>
-              <a:rPr sz="938">
-                <a:solidFill>
-                  <a:srgbClr val="E36209"/>
-                </a:solidFill>
-                <a:latin typeface="Menlo"/>
-                <a:ea typeface="Menlo"/>
-              </a:rPr>
-              <a:t>String</a:t>
-            </a:r>
-            <a:r>
-              <a:rPr sz="938">
-                <a:solidFill>
-                  <a:srgbClr val="24292E"/>
-                </a:solidFill>
-                <a:latin typeface="Menlo"/>
-                <a:ea typeface="Menlo"/>
-              </a:rPr>
-              <a:t>) : Book</a:t>
-            </a:r>
-            <a:endParaRPr/>
-          </a:p>
-          <a:p>
-            <a:pPr>
-              <a:lnSpc>
-                <a:spcPct val="140000"/>
-              </a:lnSpc>
-            </a:pPr>
-            <a:r>
-              <a:rPr sz="938">
-                <a:solidFill>
-                  <a:srgbClr val="24292E"/>
-                </a:solidFill>
-                <a:latin typeface="Menlo"/>
-                <a:ea typeface="Menlo"/>
-              </a:rPr>
-              <a:t>}</a:t>
-            </a:r>
-            <a:endParaRPr/>
-          </a:p>
-          <a:p>
-            <a:pPr>
-              <a:lnSpc>
-                <a:spcPct val="140000"/>
-              </a:lnSpc>
-            </a:pPr>
-            <a:r>
-              <a:rPr sz="938">
-                <a:solidFill>
-                  <a:srgbClr val="E5E7EB"/>
-                </a:solidFill>
-                <a:latin typeface="Menlo"/>
-                <a:ea typeface="Menlo"/>
-              </a:rPr>
-              <a:t> </a:t>
-            </a:r>
-            <a:endParaRPr/>
-          </a:p>
-          <a:p>
-            <a:pPr>
-              <a:lnSpc>
-                <a:spcPct val="140000"/>
-              </a:lnSpc>
-            </a:pPr>
-            <a:r>
-              <a:rPr sz="938">
-                <a:solidFill>
-                  <a:srgbClr val="D73A49"/>
-                </a:solidFill>
-                <a:latin typeface="Menlo"/>
-                <a:ea typeface="Menlo"/>
-              </a:rPr>
-              <a:t>class</a:t>
-            </a:r>
-            <a:r>
-              <a:rPr sz="938">
-                <a:solidFill>
-                  <a:srgbClr val="24292E"/>
-                </a:solidFill>
-                <a:latin typeface="Menlo"/>
-                <a:ea typeface="Menlo"/>
-              </a:rPr>
-              <a:t> </a:t>
-            </a:r>
-            <a:r>
-              <a:rPr sz="938">
-                <a:solidFill>
-                  <a:srgbClr val="6F42C1"/>
-                </a:solidFill>
-                <a:latin typeface="Menlo"/>
-                <a:ea typeface="Menlo"/>
-              </a:rPr>
-              <a:t>Book</a:t>
-            </a:r>
-            <a:r>
-              <a:rPr sz="938">
-                <a:solidFill>
-                  <a:srgbClr val="24292E"/>
-                </a:solidFill>
-                <a:latin typeface="Menlo"/>
-                <a:ea typeface="Menlo"/>
-              </a:rPr>
-              <a:t> {</a:t>
-            </a:r>
-            <a:endParaRPr/>
-          </a:p>
-          <a:p>
-            <a:pPr>
-              <a:lnSpc>
-                <a:spcPct val="140000"/>
-              </a:lnSpc>
-            </a:pPr>
-            <a:r>
-              <a:rPr sz="938">
-                <a:solidFill>
-                  <a:srgbClr val="24292E"/>
-                </a:solidFill>
-                <a:latin typeface="Menlo"/>
-                <a:ea typeface="Menlo"/>
-              </a:rPr>
-              <a:t>  </a:t>
-            </a:r>
-            <a:r>
-              <a:rPr sz="938">
-                <a:solidFill>
-                  <a:srgbClr val="D73A49"/>
-                </a:solidFill>
-                <a:latin typeface="Menlo"/>
-                <a:ea typeface="Menlo"/>
-              </a:rPr>
-              <a:t>-</a:t>
-            </a:r>
-            <a:r>
-              <a:rPr sz="938">
-                <a:solidFill>
-                  <a:srgbClr val="24292E"/>
-                </a:solidFill>
-                <a:latin typeface="Menlo"/>
-                <a:ea typeface="Menlo"/>
-              </a:rPr>
-              <a:t> isbn </a:t>
-            </a:r>
-            <a:r>
-              <a:rPr sz="938">
-                <a:solidFill>
-                  <a:srgbClr val="D73A49"/>
-                </a:solidFill>
-                <a:latin typeface="Menlo"/>
-                <a:ea typeface="Menlo"/>
-              </a:rPr>
-              <a:t>:</a:t>
-            </a:r>
-            <a:r>
-              <a:rPr sz="938">
-                <a:solidFill>
-                  <a:srgbClr val="24292E"/>
-                </a:solidFill>
-                <a:latin typeface="Menlo"/>
-                <a:ea typeface="Menlo"/>
-              </a:rPr>
-              <a:t> String</a:t>
-            </a:r>
-            <a:endParaRPr/>
-          </a:p>
-          <a:p>
-            <a:pPr>
-              <a:lnSpc>
-                <a:spcPct val="140000"/>
-              </a:lnSpc>
-            </a:pPr>
-            <a:r>
-              <a:rPr sz="938">
-                <a:solidFill>
-                  <a:srgbClr val="24292E"/>
-                </a:solidFill>
-                <a:latin typeface="Menlo"/>
-                <a:ea typeface="Menlo"/>
-              </a:rPr>
-              <a:t>  </a:t>
-            </a:r>
-            <a:r>
-              <a:rPr sz="938">
-                <a:solidFill>
-                  <a:srgbClr val="D73A49"/>
-                </a:solidFill>
-                <a:latin typeface="Menlo"/>
-                <a:ea typeface="Menlo"/>
-              </a:rPr>
-              <a:t>-</a:t>
-            </a:r>
-            <a:r>
-              <a:rPr sz="938">
-                <a:solidFill>
-                  <a:srgbClr val="24292E"/>
-                </a:solidFill>
-                <a:latin typeface="Menlo"/>
-                <a:ea typeface="Menlo"/>
-              </a:rPr>
-              <a:t> title </a:t>
-            </a:r>
-            <a:r>
-              <a:rPr sz="938">
-                <a:solidFill>
-                  <a:srgbClr val="D73A49"/>
-                </a:solidFill>
-                <a:latin typeface="Menlo"/>
-                <a:ea typeface="Menlo"/>
-              </a:rPr>
-              <a:t>:</a:t>
-            </a:r>
-            <a:r>
-              <a:rPr sz="938">
-                <a:solidFill>
-                  <a:srgbClr val="24292E"/>
-                </a:solidFill>
-                <a:latin typeface="Menlo"/>
-                <a:ea typeface="Menlo"/>
-              </a:rPr>
-              <a:t> String</a:t>
-            </a:r>
-            <a:endParaRPr/>
-          </a:p>
-          <a:p>
-            <a:pPr>
-              <a:lnSpc>
-                <a:spcPct val="140000"/>
-              </a:lnSpc>
-            </a:pPr>
-            <a:r>
-              <a:rPr sz="938">
-                <a:solidFill>
-                  <a:srgbClr val="24292E"/>
-                </a:solidFill>
-                <a:latin typeface="Menlo"/>
-                <a:ea typeface="Menlo"/>
-              </a:rPr>
-              <a:t>  </a:t>
-            </a:r>
-            <a:r>
-              <a:rPr sz="938">
-                <a:solidFill>
-                  <a:srgbClr val="D73A49"/>
-                </a:solidFill>
-                <a:latin typeface="Menlo"/>
-                <a:ea typeface="Menlo"/>
-              </a:rPr>
-              <a:t>+</a:t>
-            </a:r>
-            <a:r>
-              <a:rPr sz="938">
-                <a:solidFill>
-                  <a:srgbClr val="24292E"/>
-                </a:solidFill>
-                <a:latin typeface="Menlo"/>
-                <a:ea typeface="Menlo"/>
-              </a:rPr>
-              <a:t> </a:t>
-            </a:r>
-            <a:r>
-              <a:rPr sz="938">
-                <a:solidFill>
-                  <a:srgbClr val="6F42C1"/>
-                </a:solidFill>
-                <a:latin typeface="Menlo"/>
-                <a:ea typeface="Menlo"/>
-              </a:rPr>
-              <a:t>isAvailable</a:t>
-            </a:r>
-            <a:r>
-              <a:rPr sz="938">
-                <a:solidFill>
-                  <a:srgbClr val="24292E"/>
-                </a:solidFill>
-                <a:latin typeface="Menlo"/>
-                <a:ea typeface="Menlo"/>
-              </a:rPr>
-              <a:t>() : boolean</a:t>
-            </a:r>
-            <a:endParaRPr/>
-          </a:p>
-          <a:p>
-            <a:pPr>
-              <a:lnSpc>
-                <a:spcPct val="140000"/>
-              </a:lnSpc>
-            </a:pPr>
-            <a:r>
-              <a:rPr sz="938">
-                <a:solidFill>
-                  <a:srgbClr val="24292E"/>
-                </a:solidFill>
-                <a:latin typeface="Menlo"/>
-                <a:ea typeface="Menlo"/>
-              </a:rPr>
-              <a:t>}</a:t>
-            </a:r>
-            <a:endParaRPr/>
-          </a:p>
-          <a:p>
-            <a:pPr>
-              <a:lnSpc>
-                <a:spcPct val="140000"/>
-              </a:lnSpc>
-            </a:pPr>
-            <a:r>
-              <a:rPr sz="938">
-                <a:solidFill>
-                  <a:srgbClr val="E5E7EB"/>
-                </a:solidFill>
-                <a:latin typeface="Menlo"/>
-                <a:ea typeface="Menlo"/>
-              </a:rPr>
-              <a:t> </a:t>
-            </a:r>
-            <a:endParaRPr/>
-          </a:p>
-          <a:p>
-            <a:pPr>
-              <a:lnSpc>
-                <a:spcPct val="140000"/>
-              </a:lnSpc>
-            </a:pPr>
-            <a:r>
-              <a:rPr sz="938">
-                <a:solidFill>
-                  <a:srgbClr val="D73A49"/>
-                </a:solidFill>
-                <a:latin typeface="Menlo"/>
-                <a:ea typeface="Menlo"/>
-              </a:rPr>
-              <a:t>class</a:t>
-            </a:r>
-            <a:r>
-              <a:rPr sz="938">
-                <a:solidFill>
-                  <a:srgbClr val="24292E"/>
-                </a:solidFill>
-                <a:latin typeface="Menlo"/>
-                <a:ea typeface="Menlo"/>
-              </a:rPr>
-              <a:t> </a:t>
-            </a:r>
-            <a:r>
-              <a:rPr sz="938">
-                <a:solidFill>
-                  <a:srgbClr val="6F42C1"/>
-                </a:solidFill>
-                <a:latin typeface="Menlo"/>
-                <a:ea typeface="Menlo"/>
-              </a:rPr>
-              <a:t>Member</a:t>
-            </a:r>
-            <a:r>
-              <a:rPr sz="938">
-                <a:solidFill>
-                  <a:srgbClr val="24292E"/>
-                </a:solidFill>
-                <a:latin typeface="Menlo"/>
-                <a:ea typeface="Menlo"/>
-              </a:rPr>
-              <a:t> {</a:t>
-            </a:r>
-            <a:endParaRPr/>
-          </a:p>
-          <a:p>
-            <a:pPr>
-              <a:lnSpc>
-                <a:spcPct val="140000"/>
-              </a:lnSpc>
-            </a:pPr>
-            <a:r>
-              <a:rPr sz="938">
-                <a:solidFill>
-                  <a:srgbClr val="24292E"/>
-                </a:solidFill>
-                <a:latin typeface="Menlo"/>
-                <a:ea typeface="Menlo"/>
-              </a:rPr>
-              <a:t>  </a:t>
-            </a:r>
-            <a:r>
-              <a:rPr sz="938">
-                <a:solidFill>
-                  <a:srgbClr val="D73A49"/>
-                </a:solidFill>
-                <a:latin typeface="Menlo"/>
-                <a:ea typeface="Menlo"/>
-              </a:rPr>
-              <a:t>-</a:t>
-            </a:r>
-            <a:r>
-              <a:rPr sz="938">
-                <a:solidFill>
-                  <a:srgbClr val="24292E"/>
-                </a:solidFill>
-                <a:latin typeface="Menlo"/>
-                <a:ea typeface="Menlo"/>
-              </a:rPr>
-              <a:t> id </a:t>
-            </a:r>
-            <a:r>
-              <a:rPr sz="938">
-                <a:solidFill>
-                  <a:srgbClr val="D73A49"/>
-                </a:solidFill>
-                <a:latin typeface="Menlo"/>
-                <a:ea typeface="Menlo"/>
-              </a:rPr>
-              <a:t>:</a:t>
-            </a:r>
-            <a:r>
-              <a:rPr sz="938">
-                <a:solidFill>
-                  <a:srgbClr val="24292E"/>
-                </a:solidFill>
-                <a:latin typeface="Menlo"/>
-                <a:ea typeface="Menlo"/>
-              </a:rPr>
-              <a:t> String</a:t>
-            </a:r>
-            <a:endParaRPr/>
-          </a:p>
-          <a:p>
-            <a:pPr>
-              <a:lnSpc>
-                <a:spcPct val="140000"/>
-              </a:lnSpc>
-            </a:pPr>
-            <a:r>
-              <a:rPr sz="938">
-                <a:solidFill>
-                  <a:srgbClr val="24292E"/>
-                </a:solidFill>
-                <a:latin typeface="Menlo"/>
-                <a:ea typeface="Menlo"/>
-              </a:rPr>
-              <a:t>  </a:t>
-            </a:r>
-            <a:r>
-              <a:rPr sz="938">
-                <a:solidFill>
-                  <a:srgbClr val="D73A49"/>
-                </a:solidFill>
-                <a:latin typeface="Menlo"/>
-                <a:ea typeface="Menlo"/>
-              </a:rPr>
-              <a:t>-</a:t>
-            </a:r>
-            <a:r>
-              <a:rPr sz="938">
-                <a:solidFill>
-                  <a:srgbClr val="24292E"/>
-                </a:solidFill>
-                <a:latin typeface="Menlo"/>
-                <a:ea typeface="Menlo"/>
-              </a:rPr>
-              <a:t> name </a:t>
-            </a:r>
-            <a:r>
-              <a:rPr sz="938">
-                <a:solidFill>
-                  <a:srgbClr val="D73A49"/>
-                </a:solidFill>
-                <a:latin typeface="Menlo"/>
-                <a:ea typeface="Menlo"/>
-              </a:rPr>
-              <a:t>:</a:t>
-            </a:r>
-            <a:r>
-              <a:rPr sz="938">
-                <a:solidFill>
-                  <a:srgbClr val="24292E"/>
-                </a:solidFill>
-                <a:latin typeface="Menlo"/>
-                <a:ea typeface="Menlo"/>
-              </a:rPr>
-              <a:t> String</a:t>
-            </a:r>
-            <a:endParaRPr/>
-          </a:p>
-          <a:p>
-            <a:pPr>
-              <a:lnSpc>
-                <a:spcPct val="140000"/>
-              </a:lnSpc>
-            </a:pPr>
-            <a:r>
-              <a:rPr sz="938">
-                <a:solidFill>
-                  <a:srgbClr val="24292E"/>
-                </a:solidFill>
-                <a:latin typeface="Menlo"/>
-                <a:ea typeface="Menlo"/>
-              </a:rPr>
-              <a:t>  </a:t>
-            </a:r>
-            <a:r>
-              <a:rPr sz="938">
-                <a:solidFill>
-                  <a:srgbClr val="D73A49"/>
-                </a:solidFill>
-                <a:latin typeface="Menlo"/>
-                <a:ea typeface="Menlo"/>
-              </a:rPr>
-              <a:t>+</a:t>
-            </a:r>
-            <a:r>
-              <a:rPr sz="938">
-                <a:solidFill>
-                  <a:srgbClr val="24292E"/>
-                </a:solidFill>
-                <a:latin typeface="Menlo"/>
-                <a:ea typeface="Menlo"/>
-              </a:rPr>
-              <a:t> </a:t>
-            </a:r>
-            <a:r>
-              <a:rPr sz="938">
-                <a:solidFill>
-                  <a:srgbClr val="6F42C1"/>
-                </a:solidFill>
-                <a:latin typeface="Menlo"/>
-                <a:ea typeface="Menlo"/>
-              </a:rPr>
-              <a:t>borrow</a:t>
-            </a:r>
-            <a:r>
-              <a:rPr sz="938">
-                <a:solidFill>
-                  <a:srgbClr val="24292E"/>
-                </a:solidFill>
-                <a:latin typeface="Menlo"/>
-                <a:ea typeface="Menlo"/>
-              </a:rPr>
-              <a:t>(</a:t>
-            </a:r>
-            <a:r>
-              <a:rPr sz="938">
-                <a:solidFill>
-                  <a:srgbClr val="E36209"/>
-                </a:solidFill>
-                <a:latin typeface="Menlo"/>
-                <a:ea typeface="Menlo"/>
-              </a:rPr>
-              <a:t>b</a:t>
-            </a:r>
-            <a:r>
-              <a:rPr sz="938">
-                <a:solidFill>
-                  <a:srgbClr val="24292E"/>
-                </a:solidFill>
-                <a:latin typeface="Menlo"/>
-                <a:ea typeface="Menlo"/>
-              </a:rPr>
-              <a:t> : </a:t>
-            </a:r>
-            <a:r>
-              <a:rPr sz="938">
-                <a:solidFill>
-                  <a:srgbClr val="E36209"/>
-                </a:solidFill>
-                <a:latin typeface="Menlo"/>
-                <a:ea typeface="Menlo"/>
-              </a:rPr>
-              <a:t>Book</a:t>
-            </a:r>
-            <a:r>
-              <a:rPr sz="938">
-                <a:solidFill>
-                  <a:srgbClr val="24292E"/>
-                </a:solidFill>
-                <a:latin typeface="Menlo"/>
-                <a:ea typeface="Menlo"/>
-              </a:rPr>
-              <a:t>) : void</a:t>
-            </a:r>
-            <a:endParaRPr/>
-          </a:p>
-          <a:p>
-            <a:pPr>
-              <a:lnSpc>
-                <a:spcPct val="140000"/>
-              </a:lnSpc>
-            </a:pPr>
-            <a:r>
-              <a:rPr sz="938">
-                <a:solidFill>
-                  <a:srgbClr val="24292E"/>
-                </a:solidFill>
-                <a:latin typeface="Menlo"/>
-                <a:ea typeface="Menlo"/>
-              </a:rPr>
-              <a:t>}</a:t>
-            </a:r>
-            <a:endParaRPr/>
-          </a:p>
-          <a:p>
-            <a:pPr>
-              <a:lnSpc>
-                <a:spcPct val="140000"/>
-              </a:lnSpc>
-            </a:pPr>
-            <a:r>
-              <a:rPr sz="938">
-                <a:solidFill>
-                  <a:srgbClr val="E5E7EB"/>
-                </a:solidFill>
-                <a:latin typeface="Menlo"/>
-                <a:ea typeface="Menlo"/>
-              </a:rPr>
-              <a:t> </a:t>
-            </a:r>
-            <a:endParaRPr/>
-          </a:p>
-          <a:p>
-            <a:pPr>
-              <a:lnSpc>
-                <a:spcPct val="140000"/>
-              </a:lnSpc>
-            </a:pPr>
-            <a:r>
-              <a:rPr sz="938">
-                <a:solidFill>
-                  <a:srgbClr val="24292E"/>
-                </a:solidFill>
-                <a:latin typeface="Menlo"/>
-                <a:ea typeface="Menlo"/>
-              </a:rPr>
-              <a:t>Library </a:t>
-            </a:r>
-            <a:r>
-              <a:rPr sz="938">
-                <a:solidFill>
-                  <a:srgbClr val="032F62"/>
-                </a:solidFill>
-                <a:latin typeface="Menlo"/>
-                <a:ea typeface="Menlo"/>
-              </a:rPr>
-              <a:t>"1"</a:t>
-            </a:r>
-            <a:r>
-              <a:rPr sz="938">
-                <a:solidFill>
-                  <a:srgbClr val="24292E"/>
-                </a:solidFill>
-                <a:latin typeface="Menlo"/>
-                <a:ea typeface="Menlo"/>
-              </a:rPr>
-              <a:t> </a:t>
-            </a:r>
-            <a:r>
-              <a:rPr sz="938">
-                <a:solidFill>
-                  <a:srgbClr val="D73A49"/>
-                </a:solidFill>
-                <a:latin typeface="Menlo"/>
-                <a:ea typeface="Menlo"/>
-              </a:rPr>
-              <a:t>*--</a:t>
-            </a:r>
-            <a:r>
-              <a:rPr sz="938">
-                <a:solidFill>
-                  <a:srgbClr val="24292E"/>
-                </a:solidFill>
-                <a:latin typeface="Menlo"/>
-                <a:ea typeface="Menlo"/>
-              </a:rPr>
-              <a:t> </a:t>
-            </a:r>
-            <a:r>
-              <a:rPr sz="938">
-                <a:solidFill>
-                  <a:srgbClr val="032F62"/>
-                </a:solidFill>
-                <a:latin typeface="Menlo"/>
-                <a:ea typeface="Menlo"/>
-              </a:rPr>
-              <a:t>"0..*"</a:t>
-            </a:r>
-            <a:r>
-              <a:rPr sz="938">
-                <a:solidFill>
-                  <a:srgbClr val="24292E"/>
-                </a:solidFill>
-                <a:latin typeface="Menlo"/>
-                <a:ea typeface="Menlo"/>
-              </a:rPr>
-              <a:t> Book </a:t>
-            </a:r>
-            <a:r>
-              <a:rPr sz="938">
-                <a:solidFill>
-                  <a:srgbClr val="D73A49"/>
-                </a:solidFill>
-                <a:latin typeface="Menlo"/>
-                <a:ea typeface="Menlo"/>
-              </a:rPr>
-              <a:t>:</a:t>
-            </a:r>
-            <a:r>
-              <a:rPr sz="938">
-                <a:solidFill>
-                  <a:srgbClr val="24292E"/>
-                </a:solidFill>
-                <a:latin typeface="Menlo"/>
-                <a:ea typeface="Menlo"/>
-              </a:rPr>
-              <a:t> holds</a:t>
-            </a:r>
-            <a:endParaRPr/>
-          </a:p>
-          <a:p>
-            <a:pPr>
-              <a:lnSpc>
-                <a:spcPct val="140000"/>
-              </a:lnSpc>
-            </a:pPr>
-            <a:r>
-              <a:rPr sz="938">
-                <a:solidFill>
-                  <a:srgbClr val="24292E"/>
-                </a:solidFill>
-                <a:latin typeface="Menlo"/>
-                <a:ea typeface="Menlo"/>
-              </a:rPr>
-              <a:t>Library </a:t>
-            </a:r>
-            <a:r>
-              <a:rPr sz="938">
-                <a:solidFill>
-                  <a:srgbClr val="032F62"/>
-                </a:solidFill>
-                <a:latin typeface="Menlo"/>
-                <a:ea typeface="Menlo"/>
-              </a:rPr>
-              <a:t>"1"</a:t>
-            </a:r>
-            <a:r>
-              <a:rPr sz="938">
-                <a:solidFill>
-                  <a:srgbClr val="24292E"/>
-                </a:solidFill>
-                <a:latin typeface="Menlo"/>
-                <a:ea typeface="Menlo"/>
-              </a:rPr>
-              <a:t> o</a:t>
-            </a:r>
-            <a:r>
-              <a:rPr sz="938">
-                <a:solidFill>
-                  <a:srgbClr val="D73A49"/>
-                </a:solidFill>
-                <a:latin typeface="Menlo"/>
-                <a:ea typeface="Menlo"/>
-              </a:rPr>
-              <a:t>--</a:t>
-            </a:r>
-            <a:r>
-              <a:rPr sz="938">
-                <a:solidFill>
-                  <a:srgbClr val="24292E"/>
-                </a:solidFill>
-                <a:latin typeface="Menlo"/>
-                <a:ea typeface="Menlo"/>
-              </a:rPr>
-              <a:t> </a:t>
-            </a:r>
-            <a:r>
-              <a:rPr sz="938">
-                <a:solidFill>
-                  <a:srgbClr val="032F62"/>
-                </a:solidFill>
-                <a:latin typeface="Menlo"/>
-                <a:ea typeface="Menlo"/>
-              </a:rPr>
-              <a:t>"0..*"</a:t>
-            </a:r>
-            <a:r>
-              <a:rPr sz="938">
-                <a:solidFill>
-                  <a:srgbClr val="24292E"/>
-                </a:solidFill>
-                <a:latin typeface="Menlo"/>
-                <a:ea typeface="Menlo"/>
-              </a:rPr>
-              <a:t> Member </a:t>
-            </a:r>
-            <a:r>
-              <a:rPr sz="938">
-                <a:solidFill>
-                  <a:srgbClr val="D73A49"/>
-                </a:solidFill>
-                <a:latin typeface="Menlo"/>
-                <a:ea typeface="Menlo"/>
-              </a:rPr>
-              <a:t>:</a:t>
-            </a:r>
-            <a:r>
-              <a:rPr sz="938">
-                <a:solidFill>
-                  <a:srgbClr val="24292E"/>
-                </a:solidFill>
-                <a:latin typeface="Menlo"/>
-                <a:ea typeface="Menlo"/>
-              </a:rPr>
-              <a:t> registers</a:t>
-            </a:r>
-            <a:endParaRPr/>
-          </a:p>
-          <a:p>
-            <a:pPr>
-              <a:lnSpc>
-                <a:spcPct val="140000"/>
-              </a:lnSpc>
-            </a:pPr>
-            <a:r>
-              <a:rPr sz="938">
-                <a:solidFill>
-                  <a:srgbClr val="24292E"/>
-                </a:solidFill>
-                <a:latin typeface="Menlo"/>
-                <a:ea typeface="Menlo"/>
-              </a:rPr>
-              <a:t>@</a:t>
-            </a:r>
-            <a:r>
-              <a:rPr sz="938">
-                <a:solidFill>
-                  <a:srgbClr val="D73A49"/>
-                </a:solidFill>
-                <a:latin typeface="Menlo"/>
-                <a:ea typeface="Menlo"/>
-              </a:rPr>
-              <a:t>enduml</a:t>
+              <a:t>@enduml</a:t>
             </a:r>
             <a:endParaRPr/>
           </a:p>
@@ -19705,7 +18213,7 @@
   <p:cSld>
     <p:spTree>
       <p:nvGrpSpPr>
-        <p:cNvPr id="461" name="" descr="&lt;Slide style={{ background: '#FFFFFF', padding: 0 }}&gt;&#10;  &lt;Box style={{ height: 72, background: '#1E4FA8', padding: '0 40px', flexDirection: 'row', alignItems: 'center', justifyContent: 'space-between' }}&gt;&#10;    &lt;Text style={{ fontSize: 15, color: '#B9CDF0', letterSpacing: 1 }}&gt;ISAD · INFORMATION SYSTEMS ANALYSIS &amp;amp; DESIGN&lt;/Text&gt;&#10;    &lt;Text style={{ fontSize: 15, color: '#B9CDF0' }}&gt;W03 · TOOLCHAIN&lt;/Text&gt;&#10;  &lt;/Box&gt;&#10;  &lt;Box style={{ padding: '14px 40px 0 40px', flexDirection: 'row', alignItems: 'center', justifyContent: 'space-between' }}&gt;&#10;    &lt;Text style={{ fontSize: 30, fontWeight: 'bold', color: '#0E3F8C' }}&gt;Version-Controlling Diagrams&lt;/Text&gt;&#10;    &lt;Text style={{ fontSize: 14, color: '#1E4FA8', fontWeight: 'bold' }}&gt;29 / 38&lt;/Text&gt;&#10;  &lt;/Box&gt;&#10;  &lt;Box style={{ flex: 1, padding: '8px 40px 0 40px', flexDirection: 'row', gap: 24 }}&gt;&#10;    &lt;Box style={{ flex: 5, flexDirection: 'column', gap: 8, justifyContent: 'center' }}&gt;&#10;      &lt;Box style={{ flexDirection: 'row', alignItems: 'center', gap: 8 }}&gt;&#10;        &lt;Box style={{ padding: '3px 10px', background: '#FDF3F3', borderRadius: 6, border: '1px solid #F0C9C7' }}&gt;&#10;          &lt;Text style={{ fontSize: 12, color: '#D9534F', fontWeight: 'bold' }}&gt;.drawio&lt;/Text&gt;&#10;        &lt;/Box&gt;&#10;        &lt;Text style={{ fontSize: 12.5, color: '#8B97A8' }}&gt;one box moved — 340 lines rewritten&lt;/Text&gt;&#10;      &lt;/Box&gt;&#10;      &lt;CodeBlock code={`-  &lt;mxCell id=&quot;9&quot; value=&quot;Book&quot; style=&quot;rounded=0;&#10;-     whiteSpace=wrap;html=1;&quot; vertex=&quot;1&quot; parent=&quot;1&quot;&gt;&#10;-    &lt;mxGeometry x=&quot;320&quot; y=&quot;80&quot; width=&quot;160&quot;&#10;-       height=&quot;60&quot; as=&quot;geometry&quot; /&gt;&#10;+  &lt;mxCell id=&quot;9&quot; value=&quot;Book&quot; style=&quot;rounded=0;&#10;+     whiteSpace=wrap;html=1;fillColor=#E8EFF8;&quot;&#10;+     vertex=&quot;1&quot; parent=&quot;1&quot;&gt;&#10;+    &lt;mxGeometry x=&quot;320&quot; y=&quot;80&quot; width=&quot;160&quot;&#10;+       height=&quot;86&quot; as=&quot;geometry&quot; /&gt;`} language='java' width={600} fontSize={10.5} /&gt;&#10;      &lt;Box style={{ flexDirection: 'row', alignItems: 'center', gap: 8 }}&gt;&#10;        &lt;Box style={{ padding: '3px 10px', background: '#E8EFF8', borderRadius: 6, border: '1px solid #C9D9F2' }}&gt;&#10;          &lt;Text style={{ fontSize: 12, color: '#1E4FA8', fontWeight: 'bold' }}&gt;.puml&lt;/Text&gt;&#10;        &lt;/Box&gt;&#10;        &lt;Text style={{ fontSize: 12.5, color: '#8B97A8' }}&gt;the same edit — two lines&lt;/Text&gt;&#10;      &lt;/Box&gt;&#10;      &lt;CodeBlock code={`- Member &quot;1&quot;     -- &quot;0..*&quot; Book : borrows&#10;+ Member &quot;0..1&quot;  -- &quot;0..*&quot; Book : borrows&#10;+ Member &quot;1&quot;     -- &quot;0..1&quot; Library : registers`} language='java' width={600} fontSize={11.5} /&gt;&#10;    &lt;/Box&gt;&#10;    &lt;Box style={{ flex: 4, flexDirection: 'column', gap: 11, justifyContent: 'center' }}&gt;&#10;      {[&#10;        ['code-branch', 'A diff you can actually read', 'Two lines instead of three hundred. A reviewer can see what changed and disagree with it in writing.'],&#10;        ['user-clock', 'History becomes evidence', 'The log shows who added the multiplicity and when. That is what makes the contribution review possible at all.'],&#10;        ['users', 'This is why it touches your grade', 'Individual work is 40% of the mark and is assessed from the repository. If your edit is invisible, it cannot be counted.'],&#10;      ].map(([icon, t, d]) =&gt; (&#10;        &lt;Box key={t} style={{ flexDirection: 'row', gap: 12, alignItems: 'flex-start', padding: '13px 16px', background: '#F7F9FC', borderRadius: 10, border: '1px solid #E5E7EB' }}&gt;&#10;          &lt;Box style={{ width: 36, height: 36, borderRadius: 9, background: '#E8EFF8', justifyContent: 'center', alignItems: 'center' }}&gt;&#10;            &lt;FAIcon name={icon} style={{ fill: '#1E4FA8', width: 17, height: 17 }} /&gt;&#10;          &lt;/Box&gt;&#10;          &lt;Box style={{ flex: 1, flexDirection: 'column', gap: 2 }}&gt;&#10;            &lt;Text style={{ fontSize: 15, fontWeight: 'bold', color: '#0E3F8C' }}&gt;{t}&lt;/Text&gt;&#10;            &lt;Text style={{ fontSize: 13, color: '#4A5568', lineHeight: 1.45 }}&gt;{d}&lt;/Text&gt;&#10;          &lt;/Box&gt;&#10;        &lt;/Box&gt;&#10;      ))}&#10;      &lt;Box style={{ padding: '12px 16px', background: '#0E3F8C', borderRadius: 9 }}&gt;&#10;        &lt;Text style={{ fontSize: 13.5, color: '#FFFFFF', lineHeight: 1.5 }}&gt;A PNG with no source file is worth zero. The source is the deliverable; the image is only its shadow.&lt;/Text&gt;&#10;      &lt;/Box&gt;&#10;    &lt;/Box&gt;&#10;  &lt;/Box&gt;&#10;  &lt;Box style={{ height: 32, padding: '0 40px', flexDirection: 'row', alignItems: 'center', justifyContent: 'space-between' }}&gt;&#10;    &lt;Text style={{ fontSize: 13, color: '#8B97A8' }}&gt;ISAD · Fall 2026&lt;/Text&gt;&#10;    &lt;Text style={{ fontSize: 14, color: '#1E4FA8', fontWeight: 'bold' }}&gt;29 / 38&lt;/Text&gt;&#10;  &lt;/Box&gt;&#10;&lt;/Slide&gt;"/>
+        <p:cNvPr id="461" name="" descr="&lt;Slide style={{ background: '#FFFFFF', padding: 0 }}&gt;&#10;  &lt;Box style={{ height: 72, background: '#1E4FA8', padding: '0 40px', flexDirection: 'row', alignItems: 'center', justifyContent: 'space-between' }}&gt;&#10;    &lt;Text style={{ fontSize: 15, color: '#B9CDF0', letterSpacing: 1 }}&gt;ISAD · INFORMATION SYSTEMS ANALYSIS &amp;amp; DESIGN&lt;/Text&gt;&#10;    &lt;Text style={{ fontSize: 15, color: '#B9CDF0' }}&gt;W03 · TOOLCHAIN&lt;/Text&gt;&#10;  &lt;/Box&gt;&#10;  &lt;Box style={{ padding: '14px 40px 0 40px', flexDirection: 'row', alignItems: 'center', justifyContent: 'space-between' }}&gt;&#10;    &lt;Text style={{ fontSize: 30, fontWeight: 'bold', color: '#0E3F8C' }}&gt;Version-Controlling Diagrams&lt;/Text&gt;&#10;    &lt;Text style={{ fontSize: 14, color: '#1E4FA8', fontWeight: 'bold' }}&gt;29 / 38&lt;/Text&gt;&#10;  &lt;/Box&gt;&#10;  &lt;Box style={{ flex: 1, padding: '8px 40px 0 40px', flexDirection: 'row', gap: 24 }}&gt;&#10;    &lt;Box style={{ flex: 5, flexDirection: 'column', gap: 8, justifyContent: 'center' }}&gt;&#10;      &lt;Box style={{ flexDirection: 'row', alignItems: 'center', gap: 8 }}&gt;&#10;        &lt;Box style={{ padding: '3px 10px', background: '#FDF3F3', borderRadius: 6, border: '1px solid #F0C9C7' }}&gt;&#10;          &lt;Text style={{ fontSize: 12, color: '#D9534F', fontWeight: 'bold' }}&gt;.drawio&lt;/Text&gt;&#10;        &lt;/Box&gt;&#10;        &lt;Text style={{ fontSize: 12.5, color: '#8B97A8' }}&gt;one box moved — 340 lines rewritten&lt;/Text&gt;&#10;      &lt;/Box&gt;&#10;      &lt;CodeBlock code={`-  &lt;mxCell id=&quot;9&quot; value=&quot;Book&quot; style=&quot;rounded=0;&#10;-     whiteSpace=wrap;html=1;&quot; vertex=&quot;1&quot; parent=&quot;1&quot;&gt;&#10;-    &lt;mxGeometry x=&quot;320&quot; y=&quot;80&quot; width=&quot;160&quot;&#10;-       height=&quot;60&quot; as=&quot;geometry&quot; /&gt;&#10;+  &lt;mxCell id=&quot;9&quot; value=&quot;Book&quot; style=&quot;rounded=0;&#10;+     whiteSpace=wrap;html=1;fillColor=#E8EFF8;&quot;&#10;+     vertex=&quot;1&quot; parent=&quot;1&quot;&gt;&#10;+    &lt;mxGeometry x=&quot;320&quot; y=&quot;80&quot; width=&quot;160&quot;&#10;+       height=&quot;86&quot; as=&quot;geometry&quot; /&gt;`} language='text' width={600} fontSize={10.5} /&gt;&#10;      &lt;Box style={{ flexDirection: 'row', alignItems: 'center', gap: 8 }}&gt;&#10;        &lt;Box style={{ padding: '3px 10px', background: '#E8EFF8', borderRadius: 6, border: '1px solid #C9D9F2' }}&gt;&#10;          &lt;Text style={{ fontSize: 12, color: '#1E4FA8', fontWeight: 'bold' }}&gt;.puml&lt;/Text&gt;&#10;        &lt;/Box&gt;&#10;        &lt;Text style={{ fontSize: 12.5, color: '#8B97A8' }}&gt;the same edit — two lines&lt;/Text&gt;&#10;      &lt;/Box&gt;&#10;      &lt;CodeBlock code={`- Member &quot;1&quot;     -- &quot;0..*&quot; Book : borrows&#10;+ Member &quot;0..1&quot;  -- &quot;0..*&quot; Book : borrows&#10;+ Member &quot;1&quot;     -- &quot;0..1&quot; Library : registers`} language='text' width={600} fontSize={11.5} /&gt;&#10;    &lt;/Box&gt;&#10;    &lt;Box style={{ flex: 4, flexDirection: 'column', gap: 11, justifyContent: 'center' }}&gt;&#10;      {[&#10;        ['code-branch', 'A diff you can actually read', 'Two lines instead of three hundred. A reviewer can see what changed and disagree with it in writing.'],&#10;        ['user-clock', 'History becomes evidence', 'The log shows who added the multiplicity and when. That is what makes the contribution review possible at all.'],&#10;        ['users', 'This is why it touches your grade', 'Individual work is 40% of the mark and is assessed from the repository. If your edit is invisible, it cannot be counted.'],&#10;      ].map(([icon, t, d]) =&gt; (&#10;        &lt;Box key={t} style={{ flexDirection: 'row', gap: 12, alignItems: 'flex-start', padding: '13px 16px', background: '#F7F9FC', borderRadius: 10, border: '1px solid #E5E7EB' }}&gt;&#10;          &lt;Box style={{ width: 36, height: 36, borderRadius: 9, background: '#E8EFF8', justifyContent: 'center', alignItems: 'center' }}&gt;&#10;            &lt;FAIcon name={icon} style={{ fill: '#1E4FA8', width: 17, height: 17 }} /&gt;&#10;          &lt;/Box&gt;&#10;          &lt;Box style={{ flex: 1, flexDirection: 'column', gap: 2 }}&gt;&#10;            &lt;Text style={{ fontSize: 15, fontWeight: 'bold', color: '#0E3F8C' }}&gt;{t}&lt;/Text&gt;&#10;            &lt;Text style={{ fontSize: 13, color: '#4A5568', lineHeight: 1.45 }}&gt;{d}&lt;/Text&gt;&#10;          &lt;/Box&gt;&#10;        &lt;/Box&gt;&#10;      ))}&#10;      &lt;Box style={{ padding: '12px 16px', background: '#0E3F8C', borderRadius: 9 }}&gt;&#10;        &lt;Text style={{ fontSize: 13.5, color: '#FFFFFF', lineHeight: 1.5 }}&gt;A PNG with no source file is worth zero. The source is the deliverable; the image is only its shadow.&lt;/Text&gt;&#10;      &lt;/Box&gt;&#10;    &lt;/Box&gt;&#10;  &lt;/Box&gt;&#10;  &lt;Box style={{ height: 32, padding: '0 40px', flexDirection: 'row', alignItems: 'center', justifyContent: 'space-between' }}&gt;&#10;    &lt;Text style={{ fontSize: 13, color: '#8B97A8' }}&gt;ISAD · Fall 2026&lt;/Text&gt;&#10;    &lt;Text style={{ fontSize: 14, color: '#1E4FA8', fontWeight: 'bold' }}&gt;29 / 38&lt;/Text&gt;&#10;  &lt;/Box&gt;&#10;&lt;/Slide&gt;"/>
         <p:cNvGrpSpPr/>
         <p:nvPr/>
       </p:nvGrpSpPr>
@@ -20772,896 +19280,156 @@
             <a:r>
               <a:rPr sz="788">
                 <a:solidFill>
-                  <a:srgbClr val="D73A49"/>
+                  <a:srgbClr val="E5E7EB"/>
                 </a:solidFill>
                 <a:latin typeface="Menlo"/>
                 <a:ea typeface="Menlo"/>
               </a:rPr>
-              <a:t>-</a:t>
-            </a:r>
+              <a:t>-  &lt;mxCell id="9" value="Book" style="rounded=0;</a:t>
+            </a:r>
+            <a:endParaRPr/>
+          </a:p>
+          <a:p>
+            <a:pPr>
+              <a:lnSpc>
+                <a:spcPct val="140000"/>
+              </a:lnSpc>
+            </a:pPr>
             <a:r>
               <a:rPr sz="788">
                 <a:solidFill>
-                  <a:srgbClr val="24292E"/>
+                  <a:srgbClr val="E5E7EB"/>
                 </a:solidFill>
                 <a:latin typeface="Menlo"/>
                 <a:ea typeface="Menlo"/>
               </a:rPr>
-              <a:t>  </a:t>
-            </a:r>
+              <a:t>-     whiteSpace=wrap;html=1;" vertex="1" parent="1"&gt;</a:t>
+            </a:r>
+            <a:endParaRPr/>
+          </a:p>
+          <a:p>
+            <a:pPr>
+              <a:lnSpc>
+                <a:spcPct val="140000"/>
+              </a:lnSpc>
+            </a:pPr>
             <a:r>
               <a:rPr sz="788">
                 <a:solidFill>
-                  <a:srgbClr val="D73A49"/>
+                  <a:srgbClr val="E5E7EB"/>
                 </a:solidFill>
                 <a:latin typeface="Menlo"/>
                 <a:ea typeface="Menlo"/>
               </a:rPr>
-              <a:t>&lt;</a:t>
-            </a:r>
+              <a:t>-    &lt;mxGeometry x="320" y="80" width="160"</a:t>
+            </a:r>
+            <a:endParaRPr/>
+          </a:p>
+          <a:p>
+            <a:pPr>
+              <a:lnSpc>
+                <a:spcPct val="140000"/>
+              </a:lnSpc>
+            </a:pPr>
             <a:r>
               <a:rPr sz="788">
                 <a:solidFill>
-                  <a:srgbClr val="24292E"/>
+                  <a:srgbClr val="E5E7EB"/>
                 </a:solidFill>
                 <a:latin typeface="Menlo"/>
                 <a:ea typeface="Menlo"/>
               </a:rPr>
-              <a:t>mxCell id</a:t>
-            </a:r>
+              <a:t>-       height="60" as="geometry" /&gt;</a:t>
+            </a:r>
+            <a:endParaRPr/>
+          </a:p>
+          <a:p>
+            <a:pPr>
+              <a:lnSpc>
+                <a:spcPct val="140000"/>
+              </a:lnSpc>
+            </a:pPr>
             <a:r>
               <a:rPr sz="788">
                 <a:solidFill>
-                  <a:srgbClr val="D73A49"/>
+                  <a:srgbClr val="E5E7EB"/>
                 </a:solidFill>
                 <a:latin typeface="Menlo"/>
                 <a:ea typeface="Menlo"/>
               </a:rPr>
-              <a:t>=</a:t>
-            </a:r>
+              <a:t>+  &lt;mxCell id="9" value="Book" style="rounded=0;</a:t>
+            </a:r>
+            <a:endParaRPr/>
+          </a:p>
+          <a:p>
+            <a:pPr>
+              <a:lnSpc>
+                <a:spcPct val="140000"/>
+              </a:lnSpc>
+            </a:pPr>
             <a:r>
               <a:rPr sz="788">
                 <a:solidFill>
-                  <a:srgbClr val="032F62"/>
+                  <a:srgbClr val="E5E7EB"/>
                 </a:solidFill>
                 <a:latin typeface="Menlo"/>
                 <a:ea typeface="Menlo"/>
               </a:rPr>
-              <a:t>"9"</a:t>
-            </a:r>
+              <a:t>+     whiteSpace=wrap;html=1;fillColor=#E8EFF8;"</a:t>
+            </a:r>
+            <a:endParaRPr/>
+          </a:p>
+          <a:p>
+            <a:pPr>
+              <a:lnSpc>
+                <a:spcPct val="140000"/>
+              </a:lnSpc>
+            </a:pPr>
             <a:r>
               <a:rPr sz="788">
                 <a:solidFill>
-                  <a:srgbClr val="24292E"/>
+                  <a:srgbClr val="E5E7EB"/>
                 </a:solidFill>
                 <a:latin typeface="Menlo"/>
                 <a:ea typeface="Menlo"/>
               </a:rPr>
-              <a:t> value</a:t>
-            </a:r>
+              <a:t>+     vertex="1" parent="1"&gt;</a:t>
+            </a:r>
+            <a:endParaRPr/>
+          </a:p>
+          <a:p>
+            <a:pPr>
+              <a:lnSpc>
+                <a:spcPct val="140000"/>
+              </a:lnSpc>
+            </a:pPr>
             <a:r>
               <a:rPr sz="788">
                 <a:solidFill>
-                  <a:srgbClr val="D73A49"/>
+                  <a:srgbClr val="E5E7EB"/>
                 </a:solidFill>
                 <a:latin typeface="Menlo"/>
                 <a:ea typeface="Menlo"/>
               </a:rPr>
-              <a:t>=</a:t>
-            </a:r>
+              <a:t>+    &lt;mxGeometry x="320" y="80" width="160"</a:t>
+            </a:r>
+            <a:endParaRPr/>
+          </a:p>
+          <a:p>
+            <a:pPr>
+              <a:lnSpc>
+                <a:spcPct val="140000"/>
+              </a:lnSpc>
+            </a:pPr>
             <a:r>
               <a:rPr sz="788">
                 <a:solidFill>
-                  <a:srgbClr val="032F62"/>
+                  <a:srgbClr val="E5E7EB"/>
                 </a:solidFill>
                 <a:latin typeface="Menlo"/>
                 <a:ea typeface="Menlo"/>
               </a:rPr>
-              <a:t>"Book"</a:t>
-            </a:r>
-            <a:r>
-              <a:rPr sz="788">
-                <a:solidFill>
-                  <a:srgbClr val="24292E"/>
-                </a:solidFill>
-                <a:latin typeface="Menlo"/>
-                <a:ea typeface="Menlo"/>
-              </a:rPr>
-              <a:t> style</a:t>
-            </a:r>
-            <a:r>
-              <a:rPr sz="788">
-                <a:solidFill>
-                  <a:srgbClr val="D73A49"/>
-                </a:solidFill>
-                <a:latin typeface="Menlo"/>
-                <a:ea typeface="Menlo"/>
-              </a:rPr>
-              <a:t>=</a:t>
-            </a:r>
-            <a:r>
-              <a:rPr sz="788">
-                <a:solidFill>
-                  <a:srgbClr val="032F62"/>
-                </a:solidFill>
-                <a:latin typeface="Menlo"/>
-                <a:ea typeface="Menlo"/>
-              </a:rPr>
-              <a:t>"rounded=0;</a:t>
-            </a:r>
-            <a:endParaRPr/>
-          </a:p>
-          <a:p>
-            <a:pPr>
-              <a:lnSpc>
-                <a:spcPct val="140000"/>
-              </a:lnSpc>
-            </a:pPr>
-            <a:r>
-              <a:rPr sz="788">
-                <a:solidFill>
-                  <a:srgbClr val="032F62"/>
-                </a:solidFill>
-                <a:latin typeface="Menlo"/>
-                <a:ea typeface="Menlo"/>
-              </a:rPr>
-              <a:t>-     whiteSpace=wrap;html=1;"</a:t>
-            </a:r>
-            <a:r>
-              <a:rPr sz="788">
-                <a:solidFill>
-                  <a:srgbClr val="24292E"/>
-                </a:solidFill>
-                <a:latin typeface="Menlo"/>
-                <a:ea typeface="Menlo"/>
-              </a:rPr>
-              <a:t> vertex</a:t>
-            </a:r>
-            <a:r>
-              <a:rPr sz="788">
-                <a:solidFill>
-                  <a:srgbClr val="D73A49"/>
-                </a:solidFill>
-                <a:latin typeface="Menlo"/>
-                <a:ea typeface="Menlo"/>
-              </a:rPr>
-              <a:t>=</a:t>
-            </a:r>
-            <a:r>
-              <a:rPr sz="788">
-                <a:solidFill>
-                  <a:srgbClr val="032F62"/>
-                </a:solidFill>
-                <a:latin typeface="Menlo"/>
-                <a:ea typeface="Menlo"/>
-              </a:rPr>
-              <a:t>"1"</a:t>
-            </a:r>
-            <a:r>
-              <a:rPr sz="788">
-                <a:solidFill>
-                  <a:srgbClr val="24292E"/>
-                </a:solidFill>
-                <a:latin typeface="Menlo"/>
-                <a:ea typeface="Menlo"/>
-              </a:rPr>
-              <a:t> parent</a:t>
-            </a:r>
-            <a:r>
-              <a:rPr sz="788">
-                <a:solidFill>
-                  <a:srgbClr val="D73A49"/>
-                </a:solidFill>
-                <a:latin typeface="Menlo"/>
-                <a:ea typeface="Menlo"/>
-              </a:rPr>
-              <a:t>=</a:t>
-            </a:r>
-            <a:r>
-              <a:rPr sz="788">
-                <a:solidFill>
-                  <a:srgbClr val="032F62"/>
-                </a:solidFill>
-                <a:latin typeface="Menlo"/>
-                <a:ea typeface="Menlo"/>
-              </a:rPr>
-              <a:t>"1"</a:t>
-            </a:r>
-            <a:r>
-              <a:rPr sz="788">
-                <a:solidFill>
-                  <a:srgbClr val="D73A49"/>
-                </a:solidFill>
-                <a:latin typeface="Menlo"/>
-                <a:ea typeface="Menlo"/>
-              </a:rPr>
-              <a:t>&gt;</a:t>
-            </a:r>
-            <a:endParaRPr/>
-          </a:p>
-          <a:p>
-            <a:pPr>
-              <a:lnSpc>
-                <a:spcPct val="140000"/>
-              </a:lnSpc>
-            </a:pPr>
-            <a:r>
-              <a:rPr sz="788">
-                <a:solidFill>
-                  <a:srgbClr val="D73A49"/>
-                </a:solidFill>
-                <a:latin typeface="Menlo"/>
-                <a:ea typeface="Menlo"/>
-              </a:rPr>
-              <a:t>-</a:t>
-            </a:r>
-            <a:r>
-              <a:rPr sz="788">
-                <a:solidFill>
-                  <a:srgbClr val="24292E"/>
-                </a:solidFill>
-                <a:latin typeface="Menlo"/>
-                <a:ea typeface="Menlo"/>
-              </a:rPr>
-              <a:t>    </a:t>
-            </a:r>
-            <a:r>
-              <a:rPr sz="788">
-                <a:solidFill>
-                  <a:srgbClr val="D73A49"/>
-                </a:solidFill>
-                <a:latin typeface="Menlo"/>
-                <a:ea typeface="Menlo"/>
-              </a:rPr>
-              <a:t>&lt;</a:t>
-            </a:r>
-            <a:r>
-              <a:rPr sz="788">
-                <a:solidFill>
-                  <a:srgbClr val="24292E"/>
-                </a:solidFill>
-                <a:latin typeface="Menlo"/>
-                <a:ea typeface="Menlo"/>
-              </a:rPr>
-              <a:t>mxGeometry x</a:t>
-            </a:r>
-            <a:r>
-              <a:rPr sz="788">
-                <a:solidFill>
-                  <a:srgbClr val="D73A49"/>
-                </a:solidFill>
-                <a:latin typeface="Menlo"/>
-                <a:ea typeface="Menlo"/>
-              </a:rPr>
-              <a:t>=</a:t>
-            </a:r>
-            <a:r>
-              <a:rPr sz="788">
-                <a:solidFill>
-                  <a:srgbClr val="032F62"/>
-                </a:solidFill>
-                <a:latin typeface="Menlo"/>
-                <a:ea typeface="Menlo"/>
-              </a:rPr>
-              <a:t>"320"</a:t>
-            </a:r>
-            <a:r>
-              <a:rPr sz="788">
-                <a:solidFill>
-                  <a:srgbClr val="24292E"/>
-                </a:solidFill>
-                <a:latin typeface="Menlo"/>
-                <a:ea typeface="Menlo"/>
-              </a:rPr>
-              <a:t> y</a:t>
-            </a:r>
-            <a:r>
-              <a:rPr sz="788">
-                <a:solidFill>
-                  <a:srgbClr val="D73A49"/>
-                </a:solidFill>
-                <a:latin typeface="Menlo"/>
-                <a:ea typeface="Menlo"/>
-              </a:rPr>
-              <a:t>=</a:t>
-            </a:r>
-            <a:r>
-              <a:rPr sz="788">
-                <a:solidFill>
-                  <a:srgbClr val="032F62"/>
-                </a:solidFill>
-                <a:latin typeface="Menlo"/>
-                <a:ea typeface="Menlo"/>
-              </a:rPr>
-              <a:t>"80"</a:t>
-            </a:r>
-            <a:r>
-              <a:rPr sz="788">
-                <a:solidFill>
-                  <a:srgbClr val="24292E"/>
-                </a:solidFill>
-                <a:latin typeface="Menlo"/>
-                <a:ea typeface="Menlo"/>
-              </a:rPr>
-              <a:t> width</a:t>
-            </a:r>
-            <a:r>
-              <a:rPr sz="788">
-                <a:solidFill>
-                  <a:srgbClr val="D73A49"/>
-                </a:solidFill>
-                <a:latin typeface="Menlo"/>
-                <a:ea typeface="Menlo"/>
-              </a:rPr>
-              <a:t>=</a:t>
-            </a:r>
-            <a:r>
-              <a:rPr sz="788">
-                <a:solidFill>
-                  <a:srgbClr val="032F62"/>
-                </a:solidFill>
-                <a:latin typeface="Menlo"/>
-                <a:ea typeface="Menlo"/>
-              </a:rPr>
-              <a:t>"160"</a:t>
-            </a:r>
-            <a:endParaRPr/>
-          </a:p>
-          <a:p>
-            <a:pPr>
-              <a:lnSpc>
-                <a:spcPct val="140000"/>
-              </a:lnSpc>
-            </a:pPr>
-            <a:r>
-              <a:rPr sz="788">
-                <a:solidFill>
-                  <a:srgbClr val="D73A49"/>
-                </a:solidFill>
-                <a:latin typeface="Menlo"/>
-                <a:ea typeface="Menlo"/>
-              </a:rPr>
-              <a:t>-</a:t>
-            </a:r>
-            <a:r>
-              <a:rPr sz="788">
-                <a:solidFill>
-                  <a:srgbClr val="24292E"/>
-                </a:solidFill>
-                <a:latin typeface="Menlo"/>
-                <a:ea typeface="Menlo"/>
-              </a:rPr>
-              <a:t>       height</a:t>
-            </a:r>
-            <a:r>
-              <a:rPr sz="788">
-                <a:solidFill>
-                  <a:srgbClr val="D73A49"/>
-                </a:solidFill>
-                <a:latin typeface="Menlo"/>
-                <a:ea typeface="Menlo"/>
-              </a:rPr>
-              <a:t>=</a:t>
-            </a:r>
-            <a:r>
-              <a:rPr sz="788">
-                <a:solidFill>
-                  <a:srgbClr val="032F62"/>
-                </a:solidFill>
-                <a:latin typeface="Menlo"/>
-                <a:ea typeface="Menlo"/>
-              </a:rPr>
-              <a:t>"60"</a:t>
-            </a:r>
-            <a:r>
-              <a:rPr sz="788">
-                <a:solidFill>
-                  <a:srgbClr val="24292E"/>
-                </a:solidFill>
-                <a:latin typeface="Menlo"/>
-                <a:ea typeface="Menlo"/>
-              </a:rPr>
-              <a:t> as</a:t>
-            </a:r>
-            <a:r>
-              <a:rPr sz="788">
-                <a:solidFill>
-                  <a:srgbClr val="D73A49"/>
-                </a:solidFill>
-                <a:latin typeface="Menlo"/>
-                <a:ea typeface="Menlo"/>
-              </a:rPr>
-              <a:t>=</a:t>
-            </a:r>
-            <a:r>
-              <a:rPr sz="788">
-                <a:solidFill>
-                  <a:srgbClr val="032F62"/>
-                </a:solidFill>
-                <a:latin typeface="Menlo"/>
-                <a:ea typeface="Menlo"/>
-              </a:rPr>
-              <a:t>"geometry"</a:t>
-            </a:r>
-            <a:r>
-              <a:rPr sz="788">
-                <a:solidFill>
-                  <a:srgbClr val="24292E"/>
-                </a:solidFill>
-                <a:latin typeface="Menlo"/>
-                <a:ea typeface="Menlo"/>
-              </a:rPr>
-              <a:t> </a:t>
-            </a:r>
-            <a:r>
-              <a:rPr sz="788">
-                <a:solidFill>
-                  <a:srgbClr val="D73A49"/>
-                </a:solidFill>
-                <a:latin typeface="Menlo"/>
-                <a:ea typeface="Menlo"/>
-              </a:rPr>
-              <a:t>/&gt;</a:t>
-            </a:r>
-            <a:endParaRPr/>
-          </a:p>
-          <a:p>
-            <a:pPr>
-              <a:lnSpc>
-                <a:spcPct val="140000"/>
-              </a:lnSpc>
-            </a:pPr>
-            <a:r>
-              <a:rPr sz="788">
-                <a:solidFill>
-                  <a:srgbClr val="D73A49"/>
-                </a:solidFill>
-                <a:latin typeface="Menlo"/>
-                <a:ea typeface="Menlo"/>
-              </a:rPr>
-              <a:t>+</a:t>
-            </a:r>
-            <a:r>
-              <a:rPr sz="788">
-                <a:solidFill>
-                  <a:srgbClr val="24292E"/>
-                </a:solidFill>
-                <a:latin typeface="Menlo"/>
-                <a:ea typeface="Menlo"/>
-              </a:rPr>
-              <a:t>  </a:t>
-            </a:r>
-            <a:r>
-              <a:rPr sz="788">
-                <a:solidFill>
-                  <a:srgbClr val="D73A49"/>
-                </a:solidFill>
-                <a:latin typeface="Menlo"/>
-                <a:ea typeface="Menlo"/>
-              </a:rPr>
-              <a:t>&lt;</a:t>
-            </a:r>
-            <a:r>
-              <a:rPr sz="788">
-                <a:solidFill>
-                  <a:srgbClr val="24292E"/>
-                </a:solidFill>
-                <a:latin typeface="Menlo"/>
-                <a:ea typeface="Menlo"/>
-              </a:rPr>
-              <a:t>mxCell id</a:t>
-            </a:r>
-            <a:r>
-              <a:rPr sz="788">
-                <a:solidFill>
-                  <a:srgbClr val="D73A49"/>
-                </a:solidFill>
-                <a:latin typeface="Menlo"/>
-                <a:ea typeface="Menlo"/>
-              </a:rPr>
-              <a:t>=</a:t>
-            </a:r>
-            <a:r>
-              <a:rPr sz="788">
-                <a:solidFill>
-                  <a:srgbClr val="032F62"/>
-                </a:solidFill>
-                <a:latin typeface="Menlo"/>
-                <a:ea typeface="Menlo"/>
-              </a:rPr>
-              <a:t>"9"</a:t>
-            </a:r>
-            <a:r>
-              <a:rPr sz="788">
-                <a:solidFill>
-                  <a:srgbClr val="24292E"/>
-                </a:solidFill>
-                <a:latin typeface="Menlo"/>
-                <a:ea typeface="Menlo"/>
-              </a:rPr>
-              <a:t> value</a:t>
-            </a:r>
-            <a:r>
-              <a:rPr sz="788">
-                <a:solidFill>
-                  <a:srgbClr val="D73A49"/>
-                </a:solidFill>
-                <a:latin typeface="Menlo"/>
-                <a:ea typeface="Menlo"/>
-              </a:rPr>
-              <a:t>=</a:t>
-            </a:r>
-            <a:r>
-              <a:rPr sz="788">
-                <a:solidFill>
-                  <a:srgbClr val="032F62"/>
-                </a:solidFill>
-                <a:latin typeface="Menlo"/>
-                <a:ea typeface="Menlo"/>
-              </a:rPr>
-              <a:t>"Book"</a:t>
-            </a:r>
-            <a:r>
-              <a:rPr sz="788">
-                <a:solidFill>
-                  <a:srgbClr val="24292E"/>
-                </a:solidFill>
-                <a:latin typeface="Menlo"/>
-                <a:ea typeface="Menlo"/>
-              </a:rPr>
-              <a:t> style</a:t>
-            </a:r>
-            <a:r>
-              <a:rPr sz="788">
-                <a:solidFill>
-                  <a:srgbClr val="D73A49"/>
-                </a:solidFill>
-                <a:latin typeface="Menlo"/>
-                <a:ea typeface="Menlo"/>
-              </a:rPr>
-              <a:t>=</a:t>
-            </a:r>
-            <a:r>
-              <a:rPr sz="788">
-                <a:solidFill>
-                  <a:srgbClr val="032F62"/>
-                </a:solidFill>
-                <a:latin typeface="Menlo"/>
-                <a:ea typeface="Menlo"/>
-              </a:rPr>
-              <a:t>"rounded=0;</a:t>
-            </a:r>
-            <a:endParaRPr/>
-          </a:p>
-          <a:p>
-            <a:pPr>
-              <a:lnSpc>
-                <a:spcPct val="140000"/>
-              </a:lnSpc>
-            </a:pPr>
-            <a:r>
-              <a:rPr sz="788">
-                <a:solidFill>
-                  <a:srgbClr val="032F62"/>
-                </a:solidFill>
-                <a:latin typeface="Menlo"/>
-                <a:ea typeface="Menlo"/>
-              </a:rPr>
-              <a:t>+     whiteSpace=wrap;html=1;fillColor=#E8EFF8;"</a:t>
-            </a:r>
-            <a:endParaRPr/>
-          </a:p>
-          <a:p>
-            <a:pPr>
-              <a:lnSpc>
-                <a:spcPct val="140000"/>
-              </a:lnSpc>
-            </a:pPr>
-            <a:r>
-              <a:rPr sz="788">
-                <a:solidFill>
-                  <a:srgbClr val="D73A49"/>
-                </a:solidFill>
-                <a:latin typeface="Menlo"/>
-                <a:ea typeface="Menlo"/>
-              </a:rPr>
-              <a:t>+</a:t>
-            </a:r>
-            <a:r>
-              <a:rPr sz="788">
-                <a:solidFill>
-                  <a:srgbClr val="24292E"/>
-                </a:solidFill>
-                <a:latin typeface="Menlo"/>
-                <a:ea typeface="Menlo"/>
-              </a:rPr>
-              <a:t>     vertex</a:t>
-            </a:r>
-            <a:r>
-              <a:rPr sz="788">
-                <a:solidFill>
-                  <a:srgbClr val="D73A49"/>
-                </a:solidFill>
-                <a:latin typeface="Menlo"/>
-                <a:ea typeface="Menlo"/>
-              </a:rPr>
-              <a:t>=</a:t>
-            </a:r>
-            <a:r>
-              <a:rPr sz="788">
-                <a:solidFill>
-                  <a:srgbClr val="032F62"/>
-                </a:solidFill>
-                <a:latin typeface="Menlo"/>
-                <a:ea typeface="Menlo"/>
-              </a:rPr>
-              <a:t>"1"</a:t>
-            </a:r>
-            <a:r>
-              <a:rPr sz="788">
-                <a:solidFill>
-                  <a:srgbClr val="24292E"/>
-                </a:solidFill>
-                <a:latin typeface="Menlo"/>
-                <a:ea typeface="Menlo"/>
-              </a:rPr>
-              <a:t> parent</a:t>
-            </a:r>
-            <a:r>
-              <a:rPr sz="788">
-                <a:solidFill>
-                  <a:srgbClr val="D73A49"/>
-                </a:solidFill>
-                <a:latin typeface="Menlo"/>
-                <a:ea typeface="Menlo"/>
-              </a:rPr>
-              <a:t>=</a:t>
-            </a:r>
-            <a:r>
-              <a:rPr sz="788">
-                <a:solidFill>
-                  <a:srgbClr val="032F62"/>
-                </a:solidFill>
-                <a:latin typeface="Menlo"/>
-                <a:ea typeface="Menlo"/>
-              </a:rPr>
-              <a:t>"1"</a:t>
-            </a:r>
-            <a:r>
-              <a:rPr sz="788">
-                <a:solidFill>
-                  <a:srgbClr val="D73A49"/>
-                </a:solidFill>
-                <a:latin typeface="Menlo"/>
-                <a:ea typeface="Menlo"/>
-              </a:rPr>
-              <a:t>&gt;</a:t>
-            </a:r>
-            <a:endParaRPr/>
-          </a:p>
-          <a:p>
-            <a:pPr>
-              <a:lnSpc>
-                <a:spcPct val="140000"/>
-              </a:lnSpc>
-            </a:pPr>
-            <a:r>
-              <a:rPr sz="788">
-                <a:solidFill>
-                  <a:srgbClr val="D73A49"/>
-                </a:solidFill>
-                <a:latin typeface="Menlo"/>
-                <a:ea typeface="Menlo"/>
-              </a:rPr>
-              <a:t>+</a:t>
-            </a:r>
-            <a:r>
-              <a:rPr sz="788">
-                <a:solidFill>
-                  <a:srgbClr val="24292E"/>
-                </a:solidFill>
-                <a:latin typeface="Menlo"/>
-                <a:ea typeface="Menlo"/>
-              </a:rPr>
-              <a:t>    </a:t>
-            </a:r>
-            <a:r>
-              <a:rPr sz="788">
-                <a:solidFill>
-                  <a:srgbClr val="D73A49"/>
-                </a:solidFill>
-                <a:latin typeface="Menlo"/>
-                <a:ea typeface="Menlo"/>
-              </a:rPr>
-              <a:t>&lt;</a:t>
-            </a:r>
-            <a:r>
-              <a:rPr sz="788">
-                <a:solidFill>
-                  <a:srgbClr val="24292E"/>
-                </a:solidFill>
-                <a:latin typeface="Menlo"/>
-                <a:ea typeface="Menlo"/>
-              </a:rPr>
-              <a:t>mxGeometry x</a:t>
-            </a:r>
-            <a:r>
-              <a:rPr sz="788">
-                <a:solidFill>
-                  <a:srgbClr val="D73A49"/>
-                </a:solidFill>
-                <a:latin typeface="Menlo"/>
-                <a:ea typeface="Menlo"/>
-              </a:rPr>
-              <a:t>=</a:t>
-            </a:r>
-            <a:r>
-              <a:rPr sz="788">
-                <a:solidFill>
-                  <a:srgbClr val="032F62"/>
-                </a:solidFill>
-                <a:latin typeface="Menlo"/>
-                <a:ea typeface="Menlo"/>
-              </a:rPr>
-              <a:t>"320"</a:t>
-            </a:r>
-            <a:r>
-              <a:rPr sz="788">
-                <a:solidFill>
-                  <a:srgbClr val="24292E"/>
-                </a:solidFill>
-                <a:latin typeface="Menlo"/>
-                <a:ea typeface="Menlo"/>
-              </a:rPr>
-              <a:t> y</a:t>
-            </a:r>
-            <a:r>
-              <a:rPr sz="788">
-                <a:solidFill>
-                  <a:srgbClr val="D73A49"/>
-                </a:solidFill>
-                <a:latin typeface="Menlo"/>
-                <a:ea typeface="Menlo"/>
-              </a:rPr>
-              <a:t>=</a:t>
-            </a:r>
-            <a:r>
-              <a:rPr sz="788">
-                <a:solidFill>
-                  <a:srgbClr val="032F62"/>
-                </a:solidFill>
-                <a:latin typeface="Menlo"/>
-                <a:ea typeface="Menlo"/>
-              </a:rPr>
-              <a:t>"80"</a:t>
-            </a:r>
-            <a:r>
-              <a:rPr sz="788">
-                <a:solidFill>
-                  <a:srgbClr val="24292E"/>
-                </a:solidFill>
-                <a:latin typeface="Menlo"/>
-                <a:ea typeface="Menlo"/>
-              </a:rPr>
-              <a:t> width</a:t>
-            </a:r>
-            <a:r>
-              <a:rPr sz="788">
-                <a:solidFill>
-                  <a:srgbClr val="D73A49"/>
-                </a:solidFill>
-                <a:latin typeface="Menlo"/>
-                <a:ea typeface="Menlo"/>
-              </a:rPr>
-              <a:t>=</a:t>
-            </a:r>
-            <a:r>
-              <a:rPr sz="788">
-                <a:solidFill>
-                  <a:srgbClr val="032F62"/>
-                </a:solidFill>
-                <a:latin typeface="Menlo"/>
-                <a:ea typeface="Menlo"/>
-              </a:rPr>
-              <a:t>"160"</a:t>
-            </a:r>
-            <a:endParaRPr/>
-          </a:p>
-          <a:p>
-            <a:pPr>
-              <a:lnSpc>
-                <a:spcPct val="140000"/>
-              </a:lnSpc>
-            </a:pPr>
-            <a:r>
-              <a:rPr sz="788">
-                <a:solidFill>
-                  <a:srgbClr val="D73A49"/>
-                </a:solidFill>
-                <a:latin typeface="Menlo"/>
-                <a:ea typeface="Menlo"/>
-              </a:rPr>
-              <a:t>+</a:t>
-            </a:r>
-            <a:r>
-              <a:rPr sz="788">
-                <a:solidFill>
-                  <a:srgbClr val="24292E"/>
-                </a:solidFill>
-                <a:latin typeface="Menlo"/>
-                <a:ea typeface="Menlo"/>
-              </a:rPr>
-              <a:t>       height</a:t>
-            </a:r>
-            <a:r>
-              <a:rPr sz="788">
-                <a:solidFill>
-                  <a:srgbClr val="D73A49"/>
-                </a:solidFill>
-                <a:latin typeface="Menlo"/>
-                <a:ea typeface="Menlo"/>
-              </a:rPr>
-              <a:t>=</a:t>
-            </a:r>
-            <a:r>
-              <a:rPr sz="788">
-                <a:solidFill>
-                  <a:srgbClr val="032F62"/>
-                </a:solidFill>
-                <a:latin typeface="Menlo"/>
-                <a:ea typeface="Menlo"/>
-              </a:rPr>
-              <a:t>"86"</a:t>
-            </a:r>
-            <a:r>
-              <a:rPr sz="788">
-                <a:solidFill>
-                  <a:srgbClr val="24292E"/>
-                </a:solidFill>
-                <a:latin typeface="Menlo"/>
-                <a:ea typeface="Menlo"/>
-              </a:rPr>
-              <a:t> as</a:t>
-            </a:r>
-            <a:r>
-              <a:rPr sz="788">
-                <a:solidFill>
-                  <a:srgbClr val="D73A49"/>
-                </a:solidFill>
-                <a:latin typeface="Menlo"/>
-                <a:ea typeface="Menlo"/>
-              </a:rPr>
-              <a:t>=</a:t>
-            </a:r>
-            <a:r>
-              <a:rPr sz="788">
-                <a:solidFill>
-                  <a:srgbClr val="032F62"/>
-                </a:solidFill>
-                <a:latin typeface="Menlo"/>
-                <a:ea typeface="Menlo"/>
-              </a:rPr>
-              <a:t>"geometry"</a:t>
-            </a:r>
-            <a:r>
-              <a:rPr sz="788">
-                <a:solidFill>
-                  <a:srgbClr val="24292E"/>
-                </a:solidFill>
-                <a:latin typeface="Menlo"/>
-                <a:ea typeface="Menlo"/>
-              </a:rPr>
-              <a:t> </a:t>
-            </a:r>
-            <a:r>
-              <a:rPr sz="788">
-                <a:solidFill>
-                  <a:srgbClr val="D73A49"/>
-                </a:solidFill>
-                <a:latin typeface="Menlo"/>
-                <a:ea typeface="Menlo"/>
-              </a:rPr>
-              <a:t>/&gt;</a:t>
+              <a:t>+       height="86" as="geometry" /&gt;</a:t>
             </a:r>
             <a:endParaRPr/>
           </a:p>
@@ -21719,318 +19487,48 @@
             <a:r>
               <a:rPr sz="863">
                 <a:solidFill>
-                  <a:srgbClr val="D73A49"/>
+                  <a:srgbClr val="E5E7EB"/>
                 </a:solidFill>
                 <a:latin typeface="Menlo"/>
                 <a:ea typeface="Menlo"/>
               </a:rPr>
-              <a:t>-</a:t>
-            </a:r>
+              <a:t>- Member "1"     -- "0..*" Book : borrows</a:t>
+            </a:r>
+            <a:endParaRPr/>
+          </a:p>
+          <a:p>
+            <a:pPr>
+              <a:lnSpc>
+                <a:spcPct val="140000"/>
+              </a:lnSpc>
+            </a:pPr>
             <a:r>
               <a:rPr sz="863">
                 <a:solidFill>
-                  <a:srgbClr val="24292E"/>
+                  <a:srgbClr val="E5E7EB"/>
                 </a:solidFill>
                 <a:latin typeface="Menlo"/>
                 <a:ea typeface="Menlo"/>
               </a:rPr>
-              <a:t> Member </a:t>
-            </a:r>
+              <a:t>+ Member "0..1"  -- "0..*" Book : borrows</a:t>
+            </a:r>
+            <a:endParaRPr/>
+          </a:p>
+          <a:p>
+            <a:pPr>
+              <a:lnSpc>
+                <a:spcPct val="140000"/>
+              </a:lnSpc>
+            </a:pPr>
             <a:r>
               <a:rPr sz="863">
                 <a:solidFill>
-                  <a:srgbClr val="032F62"/>
+                  <a:srgbClr val="E5E7EB"/>
                 </a:solidFill>
                 <a:latin typeface="Menlo"/>
                 <a:ea typeface="Menlo"/>
               </a:rPr>
-              <a:t>"1"</a:t>
-            </a:r>
-            <a:r>
-              <a:rPr sz="863">
-                <a:solidFill>
-                  <a:srgbClr val="24292E"/>
-                </a:solidFill>
-                <a:latin typeface="Menlo"/>
-                <a:ea typeface="Menlo"/>
-              </a:rPr>
-              <a:t>     </a:t>
-            </a:r>
-            <a:r>
-              <a:rPr sz="863">
-                <a:solidFill>
-                  <a:srgbClr val="D73A49"/>
-                </a:solidFill>
-                <a:latin typeface="Menlo"/>
-                <a:ea typeface="Menlo"/>
-              </a:rPr>
-              <a:t>--</a:t>
-            </a:r>
-            <a:r>
-              <a:rPr sz="863">
-                <a:solidFill>
-                  <a:srgbClr val="24292E"/>
-                </a:solidFill>
-                <a:latin typeface="Menlo"/>
-                <a:ea typeface="Menlo"/>
-              </a:rPr>
-              <a:t> </a:t>
-            </a:r>
-            <a:r>
-              <a:rPr sz="863">
-                <a:solidFill>
-                  <a:srgbClr val="032F62"/>
-                </a:solidFill>
-                <a:latin typeface="Menlo"/>
-                <a:ea typeface="Menlo"/>
-              </a:rPr>
-              <a:t>"0..*"</a:t>
-            </a:r>
-            <a:r>
-              <a:rPr sz="863">
-                <a:solidFill>
-                  <a:srgbClr val="24292E"/>
-                </a:solidFill>
-                <a:latin typeface="Menlo"/>
-                <a:ea typeface="Menlo"/>
-              </a:rPr>
-              <a:t> Book </a:t>
-            </a:r>
-            <a:r>
-              <a:rPr sz="863">
-                <a:solidFill>
-                  <a:srgbClr val="D73A49"/>
-                </a:solidFill>
-                <a:latin typeface="Menlo"/>
-                <a:ea typeface="Menlo"/>
-              </a:rPr>
-              <a:t>:</a:t>
-            </a:r>
-            <a:r>
-              <a:rPr sz="863">
-                <a:solidFill>
-                  <a:srgbClr val="24292E"/>
-                </a:solidFill>
-                <a:latin typeface="Menlo"/>
-                <a:ea typeface="Menlo"/>
-              </a:rPr>
-              <a:t> borrows</a:t>
-            </a:r>
-            <a:endParaRPr/>
-          </a:p>
-          <a:p>
-            <a:pPr>
-              <a:lnSpc>
-                <a:spcPct val="140000"/>
-              </a:lnSpc>
-            </a:pPr>
-            <a:r>
-              <a:rPr sz="863">
-                <a:solidFill>
-                  <a:srgbClr val="D73A49"/>
-                </a:solidFill>
-                <a:latin typeface="Menlo"/>
-                <a:ea typeface="Menlo"/>
-              </a:rPr>
-              <a:t>+</a:t>
-            </a:r>
-            <a:r>
-              <a:rPr sz="863">
-                <a:solidFill>
-                  <a:srgbClr val="24292E"/>
-                </a:solidFill>
-                <a:latin typeface="Menlo"/>
-                <a:ea typeface="Menlo"/>
-              </a:rPr>
-              <a:t> Member </a:t>
-            </a:r>
-            <a:r>
-              <a:rPr sz="863">
-                <a:solidFill>
-                  <a:srgbClr val="032F62"/>
-                </a:solidFill>
-                <a:latin typeface="Menlo"/>
-                <a:ea typeface="Menlo"/>
-              </a:rPr>
-              <a:t>"0..1"</a:t>
-            </a:r>
-            <a:r>
-              <a:rPr sz="863">
-                <a:solidFill>
-                  <a:srgbClr val="24292E"/>
-                </a:solidFill>
-                <a:latin typeface="Menlo"/>
-                <a:ea typeface="Menlo"/>
-              </a:rPr>
-              <a:t>  </a:t>
-            </a:r>
-            <a:r>
-              <a:rPr sz="863">
-                <a:solidFill>
-                  <a:srgbClr val="D73A49"/>
-                </a:solidFill>
-                <a:latin typeface="Menlo"/>
-                <a:ea typeface="Menlo"/>
-              </a:rPr>
-              <a:t>--</a:t>
-            </a:r>
-            <a:r>
-              <a:rPr sz="863">
-                <a:solidFill>
-                  <a:srgbClr val="24292E"/>
-                </a:solidFill>
-                <a:latin typeface="Menlo"/>
-                <a:ea typeface="Menlo"/>
-              </a:rPr>
-              <a:t> </a:t>
-            </a:r>
-            <a:r>
-              <a:rPr sz="863">
-                <a:solidFill>
-                  <a:srgbClr val="032F62"/>
-                </a:solidFill>
-                <a:latin typeface="Menlo"/>
-                <a:ea typeface="Menlo"/>
-              </a:rPr>
-              <a:t>"0..*"</a:t>
-            </a:r>
-            <a:r>
-              <a:rPr sz="863">
-                <a:solidFill>
-                  <a:srgbClr val="24292E"/>
-                </a:solidFill>
-                <a:latin typeface="Menlo"/>
-                <a:ea typeface="Menlo"/>
-              </a:rPr>
-              <a:t> Book </a:t>
-            </a:r>
-            <a:r>
-              <a:rPr sz="863">
-                <a:solidFill>
-                  <a:srgbClr val="D73A49"/>
-                </a:solidFill>
-                <a:latin typeface="Menlo"/>
-                <a:ea typeface="Menlo"/>
-              </a:rPr>
-              <a:t>:</a:t>
-            </a:r>
-            <a:r>
-              <a:rPr sz="863">
-                <a:solidFill>
-                  <a:srgbClr val="24292E"/>
-                </a:solidFill>
-                <a:latin typeface="Menlo"/>
-                <a:ea typeface="Menlo"/>
-              </a:rPr>
-              <a:t> borrows</a:t>
-            </a:r>
-            <a:endParaRPr/>
-          </a:p>
-          <a:p>
-            <a:pPr>
-              <a:lnSpc>
-                <a:spcPct val="140000"/>
-              </a:lnSpc>
-            </a:pPr>
-            <a:r>
-              <a:rPr sz="863">
-                <a:solidFill>
-                  <a:srgbClr val="D73A49"/>
-                </a:solidFill>
-                <a:latin typeface="Menlo"/>
-                <a:ea typeface="Menlo"/>
-              </a:rPr>
-              <a:t>+</a:t>
-            </a:r>
-            <a:r>
-              <a:rPr sz="863">
-                <a:solidFill>
-                  <a:srgbClr val="24292E"/>
-                </a:solidFill>
-                <a:latin typeface="Menlo"/>
-                <a:ea typeface="Menlo"/>
-              </a:rPr>
-              <a:t> Member </a:t>
-            </a:r>
-            <a:r>
-              <a:rPr sz="863">
-                <a:solidFill>
-                  <a:srgbClr val="032F62"/>
-                </a:solidFill>
-                <a:latin typeface="Menlo"/>
-                <a:ea typeface="Menlo"/>
-              </a:rPr>
-              <a:t>"1"</a:t>
-            </a:r>
-            <a:r>
-              <a:rPr sz="863">
-                <a:solidFill>
-                  <a:srgbClr val="24292E"/>
-                </a:solidFill>
-                <a:latin typeface="Menlo"/>
-                <a:ea typeface="Menlo"/>
-              </a:rPr>
-              <a:t>     </a:t>
-            </a:r>
-            <a:r>
-              <a:rPr sz="863">
-                <a:solidFill>
-                  <a:srgbClr val="D73A49"/>
-                </a:solidFill>
-                <a:latin typeface="Menlo"/>
-                <a:ea typeface="Menlo"/>
-              </a:rPr>
-              <a:t>--</a:t>
-            </a:r>
-            <a:r>
-              <a:rPr sz="863">
-                <a:solidFill>
-                  <a:srgbClr val="24292E"/>
-                </a:solidFill>
-                <a:latin typeface="Menlo"/>
-                <a:ea typeface="Menlo"/>
-              </a:rPr>
-              <a:t> </a:t>
-            </a:r>
-            <a:r>
-              <a:rPr sz="863">
-                <a:solidFill>
-                  <a:srgbClr val="032F62"/>
-                </a:solidFill>
-                <a:latin typeface="Menlo"/>
-                <a:ea typeface="Menlo"/>
-              </a:rPr>
-              <a:t>"0..1"</a:t>
-            </a:r>
-            <a:r>
-              <a:rPr sz="863">
-                <a:solidFill>
-                  <a:srgbClr val="24292E"/>
-                </a:solidFill>
-                <a:latin typeface="Menlo"/>
-                <a:ea typeface="Menlo"/>
-              </a:rPr>
-              <a:t> Library </a:t>
-            </a:r>
-            <a:r>
-              <a:rPr sz="863">
-                <a:solidFill>
-                  <a:srgbClr val="D73A49"/>
-                </a:solidFill>
-                <a:latin typeface="Menlo"/>
-                <a:ea typeface="Menlo"/>
-              </a:rPr>
-              <a:t>:</a:t>
-            </a:r>
-            <a:r>
-              <a:rPr sz="863">
-                <a:solidFill>
-                  <a:srgbClr val="24292E"/>
-                </a:solidFill>
-                <a:latin typeface="Menlo"/>
-                <a:ea typeface="Menlo"/>
-              </a:rPr>
-              <a:t> registers</a:t>
+              <a:t>+ Member "1"     -- "0..1" Library : registers</a:t>
             </a:r>
             <a:endParaRPr/>
           </a:p>
@@ -26911,7 +24409,7 @@
   <p:cSld>
     <p:spTree>
       <p:nvGrpSpPr>
-        <p:cNvPr id="621" name="" descr="&lt;Slide style={{ background: '#FFFFFF', padding: 0 }}&gt;&#10;  &lt;Box style={{ height: 72, background: '#1E4FA8', padding: '0 40px', flexDirection: 'row', alignItems: 'center', justifyContent: 'space-between' }}&gt;&#10;    &lt;Text style={{ fontSize: 15, color: '#B9CDF0', letterSpacing: 1 }}&gt;ISAD · INFORMATION SYSTEMS ANALYSIS &amp;amp; DESIGN&lt;/Text&gt;&#10;    &lt;Text style={{ fontSize: 15, color: '#B9CDF0' }}&gt;W03 · LAB&lt;/Text&gt;&#10;  &lt;/Box&gt;&#10;  &lt;Box style={{ padding: '14px 40px 0 40px', flexDirection: 'row', alignItems: 'center', justifyContent: 'space-between' }}&gt;&#10;    &lt;Text style={{ fontSize: 30, fontWeight: 'bold', color: '#0E3F8C' }}&gt;Exercise 3.2 — Library Model&lt;/Text&gt;&#10;    &lt;Text style={{ fontSize: 14, color: '#1E4FA8', fontWeight: 'bold' }}&gt;34 / 38&lt;/Text&gt;&#10;  &lt;/Box&gt;&#10;  &lt;Box style={{ flex: 1, padding: '8px 40px 0 40px', flexDirection: 'row', gap: 26 }}&gt;&#10;    &lt;Box style={{ flex: 5, justifyContent: 'center' }}&gt;&#10;      &lt;CodeBlock code={`@startuml&#10;class Library {&#10;  - name : String&#10;  + addBook(b : Book) : void&#10;}&#10;&#10;class Book {&#10;  - isbn : String&#10;  + isAvailable() : boolean&#10;}&#10;&#10;class Member {&#10;  - name : String&#10;  + borrow(b : Book) : void&#10;}&#10;&#10;' TODO 1  Library holds Books -- a&#10;'         composition. One library,&#10;'         many books. Fill the ???&#10;Library &quot;1&quot; *-- &quot;???&quot; Book : holds&#10;&#10;' TODO 2  A Member may hold zero or more&#10;'         Books. A plain link, no diamond.&#10;Member &quot;???&quot; -- &quot;???&quot; Book : borrows&#10;@enduml`} language='java' width={600} fontSize={11.5} /&gt;&#10;    &lt;/Box&gt;&#10;    &lt;Box style={{ flex: 4, flexDirection: 'column', gap: 9, justifyContent: 'center' }}&gt;&#10;      &lt;Box style={{ padding: '13px 16px', background: '#F0F5FC', borderRadius: 10, borderLeft: '4px solid #1E4FA8' }}&gt;&#10;        &lt;Text style={{ fontSize: 16, fontWeight: 'bold', color: '#0E3F8C', lineHeight: 1.4 }}&gt;Fill in the two question marks — and be ready to defend each number.&lt;/Text&gt;&#10;      &lt;/Box&gt;&#10;      {[&#10;        ['list-ol', 'Work in pairs, one file', 'Pair on the keyboard, not on the conversation. The driver types; the navigator argues about multiplicities.'],&#10;        ['comments', 'A comment is allowed', 'Use a line starting with an apostrophe to record the decision you could not settle. That is worth marks.'],&#10;        ['eye', 'Render before you submit', 'A .puml file that does not render is not a model. Check it in VS Code or on the web renderer first.'],&#10;      ].map(([icon, t, d]) =&gt; (&#10;        &lt;Box key={t} style={{ flexDirection: 'row', gap: 12, alignItems: 'flex-start', padding: '11px 14px', background: '#F7F9FC', borderRadius: 10, border: '1px solid #E5E7EB' }}&gt;&#10;          &lt;Box style={{ width: 33, height: 33, borderRadius: 9, background: '#E8EFF8', justifyContent: 'center', alignItems: 'center' }}&gt;&#10;            &lt;FAIcon name={icon} style={{ fill: '#1E4FA8', width: 16, height: 16 }} /&gt;&#10;          &lt;/Box&gt;&#10;          &lt;Box style={{ flex: 1, flexDirection: 'column', gap: 2 }}&gt;&#10;            &lt;Text style={{ fontSize: 14.5, fontWeight: 'bold', color: '#0E3F8C' }}&gt;{t}&lt;/Text&gt;&#10;            &lt;Text style={{ fontSize: 13, color: '#4A5568', lineHeight: 1.4 }}&gt;{d}&lt;/Text&gt;&#10;          &lt;/Box&gt;&#10;        &lt;/Box&gt;&#10;      ))}&#10;      &lt;Box style={{ padding: '10px 14px', background: '#FFFFFF', borderRadius: 9, border: '1px dashed #D6DCE5' }}&gt;&#10;        &lt;Text style={{ fontSize: 12.5, color: '#8B97A8', lineHeight: 1.45 }}&gt;Submit &lt;Text style={{ fontWeight: 'bold', color: '#0E3F8C' }}&gt;library.puml&lt;/Text&gt; plus the exported PNG, in &lt;Text style={{ fontWeight: 'bold', color: '#0E3F8C' }}&gt;docs/diagrams/&lt;/Text&gt;. Twenty-five minutes.&lt;/Text&gt;&#10;      &lt;/Box&gt;&#10;    &lt;/Box&gt;&#10;  &lt;/Box&gt;&#10;  &lt;Box style={{ height: 34, padding: '0 40px', flexDirection: 'row', alignItems: 'center', justifyContent: 'space-between' }}&gt;&#10;    &lt;Text style={{ fontSize: 13, color: '#8B97A8' }}&gt;ISAD · Fall 2026&lt;/Text&gt;&#10;    &lt;Text style={{ fontSize: 14, color: '#1E4FA8', fontWeight: 'bold' }}&gt;34 / 38&lt;/Text&gt;&#10;  &lt;/Box&gt;&#10;&lt;/Slide&gt;"/>
+        <p:cNvPr id="621" name="" descr="&lt;Slide style={{ background: '#FFFFFF', padding: 0 }}&gt;&#10;  &lt;Box style={{ height: 72, background: '#1E4FA8', padding: '0 40px', flexDirection: 'row', alignItems: 'center', justifyContent: 'space-between' }}&gt;&#10;    &lt;Text style={{ fontSize: 15, color: '#B9CDF0', letterSpacing: 1 }}&gt;ISAD · INFORMATION SYSTEMS ANALYSIS &amp;amp; DESIGN&lt;/Text&gt;&#10;    &lt;Text style={{ fontSize: 15, color: '#B9CDF0' }}&gt;W03 · LAB&lt;/Text&gt;&#10;  &lt;/Box&gt;&#10;  &lt;Box style={{ padding: '14px 40px 0 40px', flexDirection: 'row', alignItems: 'center', justifyContent: 'space-between' }}&gt;&#10;    &lt;Text style={{ fontSize: 30, fontWeight: 'bold', color: '#0E3F8C' }}&gt;Exercise 3.2 — Library Model&lt;/Text&gt;&#10;    &lt;Text style={{ fontSize: 14, color: '#1E4FA8', fontWeight: 'bold' }}&gt;34 / 38&lt;/Text&gt;&#10;  &lt;/Box&gt;&#10;  &lt;Box style={{ flex: 1, padding: '8px 40px 0 40px', flexDirection: 'row', gap: 26 }}&gt;&#10;    &lt;Box style={{ flex: 5, justifyContent: 'center' }}&gt;&#10;      &lt;CodeBlock code={`@startuml&#10;class Library {&#10;  - name : String&#10;  + addBook(b : Book) : void&#10;}&#10;&#10;class Book {&#10;  - isbn : String&#10;  + isAvailable() : boolean&#10;}&#10;&#10;class Member {&#10;  - name : String&#10;  + borrow(b : Book) : void&#10;}&#10;&#10;' TODO 1  Library holds Books -- a&#10;'         composition. One library,&#10;'         many books. Fill the ???&#10;Library &quot;1&quot; *-- &quot;???&quot; Book : holds&#10;&#10;' TODO 2  A Member may hold zero or more&#10;'         Books. A plain link, no diamond.&#10;Member &quot;???&quot; -- &quot;???&quot; Book : borrows&#10;@enduml`} language='text' width={600} fontSize={11.5} /&gt;&#10;    &lt;/Box&gt;&#10;    &lt;Box style={{ flex: 4, flexDirection: 'column', gap: 9, justifyContent: 'center' }}&gt;&#10;      &lt;Box style={{ padding: '13px 16px', background: '#F0F5FC', borderRadius: 10, borderLeft: '4px solid #1E4FA8' }}&gt;&#10;        &lt;Text style={{ fontSize: 16, fontWeight: 'bold', color: '#0E3F8C', lineHeight: 1.4 }}&gt;Fill in the two question marks — and be ready to defend each number.&lt;/Text&gt;&#10;      &lt;/Box&gt;&#10;      {[&#10;        ['list-ol', 'Work in pairs, one file', 'Pair on the keyboard, not on the conversation. The driver types; the navigator argues about multiplicities.'],&#10;        ['comments', 'A comment is allowed', 'Use a line starting with an apostrophe to record the decision you could not settle. That is worth marks.'],&#10;        ['eye', 'Render before you submit', 'A .puml file that does not render is not a model. Check it in VS Code or on the web renderer first.'],&#10;      ].map(([icon, t, d]) =&gt; (&#10;        &lt;Box key={t} style={{ flexDirection: 'row', gap: 12, alignItems: 'flex-start', padding: '11px 14px', background: '#F7F9FC', borderRadius: 10, border: '1px solid #E5E7EB' }}&gt;&#10;          &lt;Box style={{ width: 33, height: 33, borderRadius: 9, background: '#E8EFF8', justifyContent: 'center', alignItems: 'center' }}&gt;&#10;            &lt;FAIcon name={icon} style={{ fill: '#1E4FA8', width: 16, height: 16 }} /&gt;&#10;          &lt;/Box&gt;&#10;          &lt;Box style={{ flex: 1, flexDirection: 'column', gap: 2 }}&gt;&#10;            &lt;Text style={{ fontSize: 14.5, fontWeight: 'bold', color: '#0E3F8C' }}&gt;{t}&lt;/Text&gt;&#10;            &lt;Text style={{ fontSize: 13, color: '#4A5568', lineHeight: 1.4 }}&gt;{d}&lt;/Text&gt;&#10;          &lt;/Box&gt;&#10;        &lt;/Box&gt;&#10;      ))}&#10;      &lt;Box style={{ padding: '10px 14px', background: '#FFFFFF', borderRadius: 9, border: '1px dashed #D6DCE5' }}&gt;&#10;        &lt;Text style={{ fontSize: 12.5, color: '#8B97A8', lineHeight: 1.45 }}&gt;Submit &lt;Text style={{ fontWeight: 'bold', color: '#0E3F8C' }}&gt;library.puml&lt;/Text&gt; plus the exported PNG, in &lt;Text style={{ fontWeight: 'bold', color: '#0E3F8C' }}&gt;docs/diagrams/&lt;/Text&gt;. Twenty-five minutes.&lt;/Text&gt;&#10;      &lt;/Box&gt;&#10;    &lt;/Box&gt;&#10;  &lt;/Box&gt;&#10;  &lt;Box style={{ height: 34, padding: '0 40px', flexDirection: 'row', alignItems: 'center', justifyContent: 'space-between' }}&gt;&#10;    &lt;Text style={{ fontSize: 13, color: '#8B97A8' }}&gt;ISAD · Fall 2026&lt;/Text&gt;&#10;    &lt;Text style={{ fontSize: 14, color: '#1E4FA8', fontWeight: 'bold' }}&gt;34 / 38&lt;/Text&gt;&#10;  &lt;/Box&gt;&#10;&lt;/Slide&gt;"/>
         <p:cNvGrpSpPr/>
         <p:nvPr/>
       </p:nvGrpSpPr>
@@ -27939,22 +25437,30 @@
             <a:r>
               <a:rPr sz="863">
                 <a:solidFill>
-                  <a:srgbClr val="24292E"/>
+                  <a:srgbClr val="E5E7EB"/>
                 </a:solidFill>
                 <a:latin typeface="Menlo"/>
                 <a:ea typeface="Menlo"/>
               </a:rPr>
-              <a:t>@</a:t>
-            </a:r>
+              <a:t>@startuml</a:t>
+            </a:r>
+            <a:endParaRPr/>
+          </a:p>
+          <a:p>
+            <a:pPr>
+              <a:lnSpc>
+                <a:spcPct val="140000"/>
+              </a:lnSpc>
+            </a:pPr>
             <a:r>
               <a:rPr sz="863">
                 <a:solidFill>
-                  <a:srgbClr val="D73A49"/>
+                  <a:srgbClr val="E5E7EB"/>
                 </a:solidFill>
                 <a:latin typeface="Menlo"/>
                 <a:ea typeface="Menlo"/>
               </a:rPr>
-              <a:t>startuml</a:t>
+              <a:t>class Library {</a:t>
             </a:r>
             <a:endParaRPr/>
           </a:p>
@@ -27967,42 +25473,74 @@
             <a:r>
               <a:rPr sz="863">
                 <a:solidFill>
-                  <a:srgbClr val="D73A49"/>
+                  <a:srgbClr val="E5E7EB"/>
                 </a:solidFill>
                 <a:latin typeface="Menlo"/>
                 <a:ea typeface="Menlo"/>
               </a:rPr>
-              <a:t>class</a:t>
-            </a:r>
+              <a:t>  - name : String</a:t>
+            </a:r>
+            <a:endParaRPr/>
+          </a:p>
+          <a:p>
+            <a:pPr>
+              <a:lnSpc>
+                <a:spcPct val="140000"/>
+              </a:lnSpc>
+            </a:pPr>
             <a:r>
               <a:rPr sz="863">
                 <a:solidFill>
-                  <a:srgbClr val="24292E"/>
+                  <a:srgbClr val="E5E7EB"/>
                 </a:solidFill>
                 <a:latin typeface="Menlo"/>
                 <a:ea typeface="Menlo"/>
               </a:rPr>
-              <a:t> </a:t>
-            </a:r>
+              <a:t>  + addBook(b : Book) : void</a:t>
+            </a:r>
+            <a:endParaRPr/>
+          </a:p>
+          <a:p>
+            <a:pPr>
+              <a:lnSpc>
+                <a:spcPct val="140000"/>
+              </a:lnSpc>
+            </a:pPr>
             <a:r>
               <a:rPr sz="863">
                 <a:solidFill>
-                  <a:srgbClr val="6F42C1"/>
+                  <a:srgbClr val="E5E7EB"/>
                 </a:solidFill>
                 <a:latin typeface="Menlo"/>
                 <a:ea typeface="Menlo"/>
               </a:rPr>
-              <a:t>Library</a:t>
-            </a:r>
+              <a:t>}</a:t>
+            </a:r>
+            <a:endParaRPr/>
+          </a:p>
+          <a:p>
+            <a:pPr>
+              <a:lnSpc>
+                <a:spcPct val="140000"/>
+              </a:lnSpc>
+            </a:pPr>
+            <a:endParaRPr/>
+          </a:p>
+          <a:p>
+            <a:pPr>
+              <a:lnSpc>
+                <a:spcPct val="140000"/>
+              </a:lnSpc>
+            </a:pPr>
             <a:r>
               <a:rPr sz="863">
                 <a:solidFill>
-                  <a:srgbClr val="24292E"/>
+                  <a:srgbClr val="E5E7EB"/>
                 </a:solidFill>
                 <a:latin typeface="Menlo"/>
                 <a:ea typeface="Menlo"/>
               </a:rPr>
-              <a:t> {</a:t>
+              <a:t>class Book {</a:t>
             </a:r>
             <a:endParaRPr/>
           </a:p>
@@ -28015,52 +25553,92 @@
             <a:r>
               <a:rPr sz="863">
                 <a:solidFill>
-                  <a:srgbClr val="24292E"/>
+                  <a:srgbClr val="E5E7EB"/>
                 </a:solidFill>
                 <a:latin typeface="Menlo"/>
                 <a:ea typeface="Menlo"/>
               </a:rPr>
-              <a:t>  </a:t>
-            </a:r>
+              <a:t>  - isbn : String</a:t>
+            </a:r>
+            <a:endParaRPr/>
+          </a:p>
+          <a:p>
+            <a:pPr>
+              <a:lnSpc>
+                <a:spcPct val="140000"/>
+              </a:lnSpc>
+            </a:pPr>
             <a:r>
               <a:rPr sz="863">
                 <a:solidFill>
-                  <a:srgbClr val="D73A49"/>
+                  <a:srgbClr val="E5E7EB"/>
                 </a:solidFill>
                 <a:latin typeface="Menlo"/>
                 <a:ea typeface="Menlo"/>
               </a:rPr>
-              <a:t>-</a:t>
-            </a:r>
+              <a:t>  + isAvailable() : boolean</a:t>
+            </a:r>
+            <a:endParaRPr/>
+          </a:p>
+          <a:p>
+            <a:pPr>
+              <a:lnSpc>
+                <a:spcPct val="140000"/>
+              </a:lnSpc>
+            </a:pPr>
             <a:r>
               <a:rPr sz="863">
                 <a:solidFill>
-                  <a:srgbClr val="24292E"/>
+                  <a:srgbClr val="E5E7EB"/>
                 </a:solidFill>
                 <a:latin typeface="Menlo"/>
                 <a:ea typeface="Menlo"/>
               </a:rPr>
-              <a:t> name </a:t>
-            </a:r>
+              <a:t>}</a:t>
+            </a:r>
+            <a:endParaRPr/>
+          </a:p>
+          <a:p>
+            <a:pPr>
+              <a:lnSpc>
+                <a:spcPct val="140000"/>
+              </a:lnSpc>
+            </a:pPr>
+            <a:endParaRPr/>
+          </a:p>
+          <a:p>
+            <a:pPr>
+              <a:lnSpc>
+                <a:spcPct val="140000"/>
+              </a:lnSpc>
+            </a:pPr>
             <a:r>
               <a:rPr sz="863">
                 <a:solidFill>
-                  <a:srgbClr val="D73A49"/>
+                  <a:srgbClr val="E5E7EB"/>
                 </a:solidFill>
                 <a:latin typeface="Menlo"/>
                 <a:ea typeface="Menlo"/>
               </a:rPr>
-              <a:t>:</a:t>
-            </a:r>
+              <a:t>class Member {</a:t>
+            </a:r>
+            <a:endParaRPr/>
+          </a:p>
+          <a:p>
+            <a:pPr>
+              <a:lnSpc>
+                <a:spcPct val="140000"/>
+              </a:lnSpc>
+            </a:pPr>
             <a:r>
               <a:rPr sz="863">
                 <a:solidFill>
-                  <a:srgbClr val="24292E"/>
+                  <a:srgbClr val="E5E7EB"/>
                 </a:solidFill>
                 <a:latin typeface="Menlo"/>
                 <a:ea typeface="Menlo"/>
               </a:rPr>
-              <a:t> String</a:t>
+              <a:t>  - name : String</a:t>
             </a:r>
             <a:endParaRPr/>
           </a:p>
@@ -28073,92 +25651,172 @@
             <a:r>
               <a:rPr sz="863">
                 <a:solidFill>
-                  <a:srgbClr val="24292E"/>
+                  <a:srgbClr val="E5E7EB"/>
                 </a:solidFill>
                 <a:latin typeface="Menlo"/>
                 <a:ea typeface="Menlo"/>
               </a:rPr>
-              <a:t>  </a:t>
-            </a:r>
+              <a:t>  + borrow(b : Book) : void</a:t>
+            </a:r>
+            <a:endParaRPr/>
+          </a:p>
+          <a:p>
+            <a:pPr>
+              <a:lnSpc>
+                <a:spcPct val="140000"/>
+              </a:lnSpc>
+            </a:pPr>
             <a:r>
               <a:rPr sz="863">
                 <a:solidFill>
-                  <a:srgbClr val="D73A49"/>
+                  <a:srgbClr val="E5E7EB"/>
                 </a:solidFill>
                 <a:latin typeface="Menlo"/>
                 <a:ea typeface="Menlo"/>
               </a:rPr>
-              <a:t>+</a:t>
-            </a:r>
+              <a:t>}</a:t>
+            </a:r>
+            <a:endParaRPr/>
+          </a:p>
+          <a:p>
+            <a:pPr>
+              <a:lnSpc>
+                <a:spcPct val="140000"/>
+              </a:lnSpc>
+            </a:pPr>
+            <a:endParaRPr/>
+          </a:p>
+          <a:p>
+            <a:pPr>
+              <a:lnSpc>
+                <a:spcPct val="140000"/>
+              </a:lnSpc>
+            </a:pPr>
             <a:r>
               <a:rPr sz="863">
                 <a:solidFill>
-                  <a:srgbClr val="24292E"/>
+                  <a:srgbClr val="E5E7EB"/>
                 </a:solidFill>
                 <a:latin typeface="Menlo"/>
                 <a:ea typeface="Menlo"/>
               </a:rPr>
-              <a:t> </a:t>
-            </a:r>
+              <a:t>' TODO 1  Library holds Books -- a</a:t>
+            </a:r>
+            <a:endParaRPr/>
+          </a:p>
+          <a:p>
+            <a:pPr>
+              <a:lnSpc>
+                <a:spcPct val="140000"/>
+              </a:lnSpc>
+            </a:pPr>
             <a:r>
               <a:rPr sz="863">
                 <a:solidFill>
-                  <a:srgbClr val="6F42C1"/>
+                  <a:srgbClr val="E5E7EB"/>
                 </a:solidFill>
                 <a:latin typeface="Menlo"/>
                 <a:ea typeface="Menlo"/>
               </a:rPr>
-              <a:t>addBook</a:t>
-            </a:r>
+              <a:t>'         composition. One library,</a:t>
+            </a:r>
+            <a:endParaRPr/>
+          </a:p>
+          <a:p>
+            <a:pPr>
+              <a:lnSpc>
+                <a:spcPct val="140000"/>
+              </a:lnSpc>
+            </a:pPr>
             <a:r>
               <a:rPr sz="863">
                 <a:solidFill>
-                  <a:srgbClr val="24292E"/>
+                  <a:srgbClr val="E5E7EB"/>
                 </a:solidFill>
                 <a:latin typeface="Menlo"/>
                 <a:ea typeface="Menlo"/>
               </a:rPr>
-              <a:t>(</a:t>
-            </a:r>
+              <a:t>'         many books. Fill the ???</a:t>
+            </a:r>
+            <a:endParaRPr/>
+          </a:p>
+          <a:p>
+            <a:pPr>
+              <a:lnSpc>
+                <a:spcPct val="140000"/>
+              </a:lnSpc>
+            </a:pPr>
             <a:r>
               <a:rPr sz="863">
                 <a:solidFill>
-                  <a:srgbClr val="E36209"/>
+                  <a:srgbClr val="E5E7EB"/>
                 </a:solidFill>
                 <a:latin typeface="Menlo"/>
                 <a:ea typeface="Menlo"/>
               </a:rPr>
-              <a:t>b</a:t>
-            </a:r>
+              <a:t>Library "1" *-- "???" Book : holds</a:t>
+            </a:r>
+            <a:endParaRPr/>
+          </a:p>
+          <a:p>
+            <a:pPr>
+              <a:lnSpc>
+                <a:spcPct val="140000"/>
+              </a:lnSpc>
+            </a:pPr>
+            <a:endParaRPr/>
+          </a:p>
+          <a:p>
+            <a:pPr>
+              <a:lnSpc>
+                <a:spcPct val="140000"/>
+              </a:lnSpc>
+            </a:pPr>
             <a:r>
               <a:rPr sz="863">
                 <a:solidFill>
-                  <a:srgbClr val="24292E"/>
+                  <a:srgbClr val="E5E7EB"/>
                 </a:solidFill>
                 <a:latin typeface="Menlo"/>
                 <a:ea typeface="Menlo"/>
               </a:rPr>
-              <a:t> : </a:t>
-            </a:r>
+              <a:t>' TODO 2  A Member may hold zero or more</a:t>
+            </a:r>
+            <a:endParaRPr/>
+          </a:p>
+          <a:p>
+            <a:pPr>
+              <a:lnSpc>
+                <a:spcPct val="140000"/>
+              </a:lnSpc>
+            </a:pPr>
             <a:r>
               <a:rPr sz="863">
                 <a:solidFill>
-                  <a:srgbClr val="E36209"/>
+                  <a:srgbClr val="E5E7EB"/>
                 </a:solidFill>
                 <a:latin typeface="Menlo"/>
                 <a:ea typeface="Menlo"/>
               </a:rPr>
-              <a:t>Book</a:t>
-            </a:r>
+              <a:t>'         Books. A plain link, no diamond.</a:t>
+            </a:r>
+            <a:endParaRPr/>
+          </a:p>
+          <a:p>
+            <a:pPr>
+              <a:lnSpc>
+                <a:spcPct val="140000"/>
+              </a:lnSpc>
+            </a:pPr>
             <a:r>
               <a:rPr sz="863">
                 <a:solidFill>
-                  <a:srgbClr val="24292E"/>
+                  <a:srgbClr val="E5E7EB"/>
                 </a:solidFill>
                 <a:latin typeface="Menlo"/>
                 <a:ea typeface="Menlo"/>
               </a:rPr>
-              <a:t>) : void</a:t>
+              <a:t>Member "???" -- "???" Book : borrows</a:t>
             </a:r>
             <a:endParaRPr/>
           </a:p>
@@ -28171,667 +25829,7 @@
             <a:r>
               <a:rPr sz="863">
                 <a:solidFill>
-                  <a:srgbClr val="24292E"/>
-                </a:solidFill>
-                <a:latin typeface="Menlo"/>
-                <a:ea typeface="Menlo"/>
-              </a:rPr>
-              <a:t>}</a:t>
-            </a:r>
-            <a:endParaRPr/>
-          </a:p>
-          <a:p>
-            <a:pPr>
-              <a:lnSpc>
-                <a:spcPct val="140000"/>
-              </a:lnSpc>
-            </a:pPr>
-            <a:r>
-              <a:rPr sz="863">
-                <a:solidFill>
                   <a:srgbClr val="E5E7EB"/>
-                </a:solidFill>
-                <a:latin typeface="Menlo"/>
-                <a:ea typeface="Menlo"/>
-              </a:rPr>
-              <a:t> </a:t>
-            </a:r>
-            <a:endParaRPr/>
-          </a:p>
-          <a:p>
-            <a:pPr>
-              <a:lnSpc>
-                <a:spcPct val="140000"/>
-              </a:lnSpc>
-            </a:pPr>
-            <a:r>
-              <a:rPr sz="863">
-                <a:solidFill>
-                  <a:srgbClr val="D73A49"/>
-                </a:solidFill>
-                <a:latin typeface="Menlo"/>
-                <a:ea typeface="Menlo"/>
-              </a:rPr>
-              <a:t>class</a:t>
-            </a:r>
-            <a:r>
-              <a:rPr sz="863">
-                <a:solidFill>
-                  <a:srgbClr val="24292E"/>
-                </a:solidFill>
-                <a:latin typeface="Menlo"/>
-                <a:ea typeface="Menlo"/>
-              </a:rPr>
-              <a:t> </a:t>
-            </a:r>
-            <a:r>
-              <a:rPr sz="863">
-                <a:solidFill>
-                  <a:srgbClr val="6F42C1"/>
-                </a:solidFill>
-                <a:latin typeface="Menlo"/>
-                <a:ea typeface="Menlo"/>
-              </a:rPr>
-              <a:t>Book</a:t>
-            </a:r>
-            <a:r>
-              <a:rPr sz="863">
-                <a:solidFill>
-                  <a:srgbClr val="24292E"/>
-                </a:solidFill>
-                <a:latin typeface="Menlo"/>
-                <a:ea typeface="Menlo"/>
-              </a:rPr>
-              <a:t> {</a:t>
-            </a:r>
-            <a:endParaRPr/>
-          </a:p>
-          <a:p>
-            <a:pPr>
-              <a:lnSpc>
-                <a:spcPct val="140000"/>
-              </a:lnSpc>
-            </a:pPr>
-            <a:r>
-              <a:rPr sz="863">
-                <a:solidFill>
-                  <a:srgbClr val="24292E"/>
-                </a:solidFill>
-                <a:latin typeface="Menlo"/>
-                <a:ea typeface="Menlo"/>
-              </a:rPr>
-              <a:t>  </a:t>
-            </a:r>
-            <a:r>
-              <a:rPr sz="863">
-                <a:solidFill>
-                  <a:srgbClr val="D73A49"/>
-                </a:solidFill>
-                <a:latin typeface="Menlo"/>
-                <a:ea typeface="Menlo"/>
-              </a:rPr>
-              <a:t>-</a:t>
-            </a:r>
-            <a:r>
-              <a:rPr sz="863">
-                <a:solidFill>
-                  <a:srgbClr val="24292E"/>
-                </a:solidFill>
-                <a:latin typeface="Menlo"/>
-                <a:ea typeface="Menlo"/>
-              </a:rPr>
-              <a:t> isbn </a:t>
-            </a:r>
-            <a:r>
-              <a:rPr sz="863">
-                <a:solidFill>
-                  <a:srgbClr val="D73A49"/>
-                </a:solidFill>
-                <a:latin typeface="Menlo"/>
-                <a:ea typeface="Menlo"/>
-              </a:rPr>
-              <a:t>:</a:t>
-            </a:r>
-            <a:r>
-              <a:rPr sz="863">
-                <a:solidFill>
-                  <a:srgbClr val="24292E"/>
-                </a:solidFill>
-                <a:latin typeface="Menlo"/>
-                <a:ea typeface="Menlo"/>
-              </a:rPr>
-              <a:t> String</a:t>
-            </a:r>
-            <a:endParaRPr/>
-          </a:p>
-          <a:p>
-            <a:pPr>
-              <a:lnSpc>
-                <a:spcPct val="140000"/>
-              </a:lnSpc>
-            </a:pPr>
-            <a:r>
-              <a:rPr sz="863">
-                <a:solidFill>
-                  <a:srgbClr val="24292E"/>
-                </a:solidFill>
-                <a:latin typeface="Menlo"/>
-                <a:ea typeface="Menlo"/>
-              </a:rPr>
-              <a:t>  </a:t>
-            </a:r>
-            <a:r>
-              <a:rPr sz="863">
-                <a:solidFill>
-                  <a:srgbClr val="D73A49"/>
-                </a:solidFill>
-                <a:latin typeface="Menlo"/>
-                <a:ea typeface="Menlo"/>
-              </a:rPr>
-              <a:t>+</a:t>
-            </a:r>
-            <a:r>
-              <a:rPr sz="863">
-                <a:solidFill>
-                  <a:srgbClr val="24292E"/>
-                </a:solidFill>
-                <a:latin typeface="Menlo"/>
-                <a:ea typeface="Menlo"/>
-              </a:rPr>
-              <a:t> </a:t>
-            </a:r>
-            <a:r>
-              <a:rPr sz="863">
-                <a:solidFill>
-                  <a:srgbClr val="6F42C1"/>
-                </a:solidFill>
-                <a:latin typeface="Menlo"/>
-                <a:ea typeface="Menlo"/>
-              </a:rPr>
-              <a:t>isAvailable</a:t>
-            </a:r>
-            <a:r>
-              <a:rPr sz="863">
-                <a:solidFill>
-                  <a:srgbClr val="24292E"/>
-                </a:solidFill>
-                <a:latin typeface="Menlo"/>
-                <a:ea typeface="Menlo"/>
-              </a:rPr>
-              <a:t>() : boolean</a:t>
-            </a:r>
-            <a:endParaRPr/>
-          </a:p>
-          <a:p>
-            <a:pPr>
-              <a:lnSpc>
-                <a:spcPct val="140000"/>
-              </a:lnSpc>
-            </a:pPr>
-            <a:r>
-              <a:rPr sz="863">
-                <a:solidFill>
-                  <a:srgbClr val="24292E"/>
-                </a:solidFill>
-                <a:latin typeface="Menlo"/>
-                <a:ea typeface="Menlo"/>
-              </a:rPr>
-              <a:t>}</a:t>
-            </a:r>
-            <a:endParaRPr/>
-          </a:p>
-          <a:p>
-            <a:pPr>
-              <a:lnSpc>
-                <a:spcPct val="140000"/>
-              </a:lnSpc>
-            </a:pPr>
-            <a:r>
-              <a:rPr sz="863">
-                <a:solidFill>
-                  <a:srgbClr val="E5E7EB"/>
-                </a:solidFill>
-                <a:latin typeface="Menlo"/>
-                <a:ea typeface="Menlo"/>
-              </a:rPr>
-              <a:t> </a:t>
-            </a:r>
-            <a:endParaRPr/>
-          </a:p>
-          <a:p>
-            <a:pPr>
-              <a:lnSpc>
-                <a:spcPct val="140000"/>
-              </a:lnSpc>
-            </a:pPr>
-            <a:r>
-              <a:rPr sz="863">
-                <a:solidFill>
-                  <a:srgbClr val="D73A49"/>
-                </a:solidFill>
-                <a:latin typeface="Menlo"/>
-                <a:ea typeface="Menlo"/>
-              </a:rPr>
-              <a:t>class</a:t>
-            </a:r>
-            <a:r>
-              <a:rPr sz="863">
-                <a:solidFill>
-                  <a:srgbClr val="24292E"/>
-                </a:solidFill>
-                <a:latin typeface="Menlo"/>
-                <a:ea typeface="Menlo"/>
-              </a:rPr>
-              <a:t> </a:t>
-            </a:r>
-            <a:r>
-              <a:rPr sz="863">
-                <a:solidFill>
-                  <a:srgbClr val="6F42C1"/>
-                </a:solidFill>
-                <a:latin typeface="Menlo"/>
-                <a:ea typeface="Menlo"/>
-              </a:rPr>
-              <a:t>Member</a:t>
-            </a:r>
-            <a:r>
-              <a:rPr sz="863">
-                <a:solidFill>
-                  <a:srgbClr val="24292E"/>
-                </a:solidFill>
-                <a:latin typeface="Menlo"/>
-                <a:ea typeface="Menlo"/>
-              </a:rPr>
-              <a:t> {</a:t>
-            </a:r>
-            <a:endParaRPr/>
-          </a:p>
-          <a:p>
-            <a:pPr>
-              <a:lnSpc>
-                <a:spcPct val="140000"/>
-              </a:lnSpc>
-            </a:pPr>
-            <a:r>
-              <a:rPr sz="863">
-                <a:solidFill>
-                  <a:srgbClr val="24292E"/>
-                </a:solidFill>
-                <a:latin typeface="Menlo"/>
-                <a:ea typeface="Menlo"/>
-              </a:rPr>
-              <a:t>  </a:t>
-            </a:r>
-            <a:r>
-              <a:rPr sz="863">
-                <a:solidFill>
-                  <a:srgbClr val="D73A49"/>
-                </a:solidFill>
-                <a:latin typeface="Menlo"/>
-                <a:ea typeface="Menlo"/>
-              </a:rPr>
-              <a:t>-</a:t>
-            </a:r>
-            <a:r>
-              <a:rPr sz="863">
-                <a:solidFill>
-                  <a:srgbClr val="24292E"/>
-                </a:solidFill>
-                <a:latin typeface="Menlo"/>
-                <a:ea typeface="Menlo"/>
-              </a:rPr>
-              <a:t> name </a:t>
-            </a:r>
-            <a:r>
-              <a:rPr sz="863">
-                <a:solidFill>
-                  <a:srgbClr val="D73A49"/>
-                </a:solidFill>
-                <a:latin typeface="Menlo"/>
-                <a:ea typeface="Menlo"/>
-              </a:rPr>
-              <a:t>:</a:t>
-            </a:r>
-            <a:r>
-              <a:rPr sz="863">
-                <a:solidFill>
-                  <a:srgbClr val="24292E"/>
-                </a:solidFill>
-                <a:latin typeface="Menlo"/>
-                <a:ea typeface="Menlo"/>
-              </a:rPr>
-              <a:t> String</a:t>
-            </a:r>
-            <a:endParaRPr/>
-          </a:p>
-          <a:p>
-            <a:pPr>
-              <a:lnSpc>
-                <a:spcPct val="140000"/>
-              </a:lnSpc>
-            </a:pPr>
-            <a:r>
-              <a:rPr sz="863">
-                <a:solidFill>
-                  <a:srgbClr val="24292E"/>
-                </a:solidFill>
-                <a:latin typeface="Menlo"/>
-                <a:ea typeface="Menlo"/>
-              </a:rPr>
-              <a:t>  </a:t>
-            </a:r>
-            <a:r>
-              <a:rPr sz="863">
-                <a:solidFill>
-                  <a:srgbClr val="D73A49"/>
-                </a:solidFill>
-                <a:latin typeface="Menlo"/>
-                <a:ea typeface="Menlo"/>
-              </a:rPr>
-              <a:t>+</a:t>
-            </a:r>
-            <a:r>
-              <a:rPr sz="863">
-                <a:solidFill>
-                  <a:srgbClr val="24292E"/>
-                </a:solidFill>
-                <a:latin typeface="Menlo"/>
-                <a:ea typeface="Menlo"/>
-              </a:rPr>
-              <a:t> </a:t>
-            </a:r>
-            <a:r>
-              <a:rPr sz="863">
-                <a:solidFill>
-                  <a:srgbClr val="6F42C1"/>
-                </a:solidFill>
-                <a:latin typeface="Menlo"/>
-                <a:ea typeface="Menlo"/>
-              </a:rPr>
-              <a:t>borrow</a:t>
-            </a:r>
-            <a:r>
-              <a:rPr sz="863">
-                <a:solidFill>
-                  <a:srgbClr val="24292E"/>
-                </a:solidFill>
-                <a:latin typeface="Menlo"/>
-                <a:ea typeface="Menlo"/>
-              </a:rPr>
-              <a:t>(</a:t>
-            </a:r>
-            <a:r>
-              <a:rPr sz="863">
-                <a:solidFill>
-                  <a:srgbClr val="E36209"/>
-                </a:solidFill>
-                <a:latin typeface="Menlo"/>
-                <a:ea typeface="Menlo"/>
-              </a:rPr>
-              <a:t>b</a:t>
-            </a:r>
-            <a:r>
-              <a:rPr sz="863">
-                <a:solidFill>
-                  <a:srgbClr val="24292E"/>
-                </a:solidFill>
-                <a:latin typeface="Menlo"/>
-                <a:ea typeface="Menlo"/>
-              </a:rPr>
-              <a:t> : </a:t>
-            </a:r>
-            <a:r>
-              <a:rPr sz="863">
-                <a:solidFill>
-                  <a:srgbClr val="E36209"/>
-                </a:solidFill>
-                <a:latin typeface="Menlo"/>
-                <a:ea typeface="Menlo"/>
-              </a:rPr>
-              <a:t>Book</a:t>
-            </a:r>
-            <a:r>
-              <a:rPr sz="863">
-                <a:solidFill>
-                  <a:srgbClr val="24292E"/>
-                </a:solidFill>
-                <a:latin typeface="Menlo"/>
-                <a:ea typeface="Menlo"/>
-              </a:rPr>
-              <a:t>) : void</a:t>
-            </a:r>
-            <a:endParaRPr/>
-          </a:p>
-          <a:p>
-            <a:pPr>
-              <a:lnSpc>
-                <a:spcPct val="140000"/>
-              </a:lnSpc>
-            </a:pPr>
-            <a:r>
-              <a:rPr sz="863">
-                <a:solidFill>
-                  <a:srgbClr val="24292E"/>
-                </a:solidFill>
-                <a:latin typeface="Menlo"/>
-                <a:ea typeface="Menlo"/>
-              </a:rPr>
-              <a:t>}</a:t>
-            </a:r>
-            <a:endParaRPr/>
-          </a:p>
-          <a:p>
-            <a:pPr>
-              <a:lnSpc>
-                <a:spcPct val="140000"/>
-              </a:lnSpc>
-            </a:pPr>
-            <a:r>
-              <a:rPr sz="863">
-                <a:solidFill>
-                  <a:srgbClr val="E5E7EB"/>
-                </a:solidFill>
-                <a:latin typeface="Menlo"/>
-                <a:ea typeface="Menlo"/>
-              </a:rPr>
-              <a:t> </a:t>
-            </a:r>
-            <a:endParaRPr/>
-          </a:p>
-          <a:p>
-            <a:pPr>
-              <a:lnSpc>
-                <a:spcPct val="140000"/>
-              </a:lnSpc>
-            </a:pPr>
-            <a:r>
-              <a:rPr sz="863">
-                <a:solidFill>
-                  <a:srgbClr val="032F62"/>
-                </a:solidFill>
-                <a:latin typeface="Menlo"/>
-                <a:ea typeface="Menlo"/>
-              </a:rPr>
-              <a:t>' TODO 1  Library holds Books -- a</a:t>
-            </a:r>
-            <a:endParaRPr/>
-          </a:p>
-          <a:p>
-            <a:pPr>
-              <a:lnSpc>
-                <a:spcPct val="140000"/>
-              </a:lnSpc>
-            </a:pPr>
-            <a:r>
-              <a:rPr sz="863">
-                <a:solidFill>
-                  <a:srgbClr val="032F62"/>
-                </a:solidFill>
-                <a:latin typeface="Menlo"/>
-                <a:ea typeface="Menlo"/>
-              </a:rPr>
-              <a:t>'</a:t>
-            </a:r>
-            <a:r>
-              <a:rPr sz="863">
-                <a:solidFill>
-                  <a:srgbClr val="24292E"/>
-                </a:solidFill>
-                <a:latin typeface="Menlo"/>
-                <a:ea typeface="Menlo"/>
-              </a:rPr>
-              <a:t>         composition. One library,</a:t>
-            </a:r>
-            <a:endParaRPr/>
-          </a:p>
-          <a:p>
-            <a:pPr>
-              <a:lnSpc>
-                <a:spcPct val="140000"/>
-              </a:lnSpc>
-            </a:pPr>
-            <a:r>
-              <a:rPr sz="863">
-                <a:solidFill>
-                  <a:srgbClr val="032F62"/>
-                </a:solidFill>
-                <a:latin typeface="Menlo"/>
-                <a:ea typeface="Menlo"/>
-              </a:rPr>
-              <a:t>'         many books. Fill the ???</a:t>
-            </a:r>
-            <a:endParaRPr/>
-          </a:p>
-          <a:p>
-            <a:pPr>
-              <a:lnSpc>
-                <a:spcPct val="140000"/>
-              </a:lnSpc>
-            </a:pPr>
-            <a:r>
-              <a:rPr sz="863">
-                <a:solidFill>
-                  <a:srgbClr val="032F62"/>
-                </a:solidFill>
-                <a:latin typeface="Menlo"/>
-                <a:ea typeface="Menlo"/>
-              </a:rPr>
-              <a:t>Library "1" *-- "???" Book : holds</a:t>
-            </a:r>
-            <a:endParaRPr/>
-          </a:p>
-          <a:p>
-            <a:pPr>
-              <a:lnSpc>
-                <a:spcPct val="140000"/>
-              </a:lnSpc>
-            </a:pPr>
-            <a:r>
-              <a:rPr sz="863">
-                <a:solidFill>
-                  <a:srgbClr val="E5E7EB"/>
-                </a:solidFill>
-                <a:latin typeface="Menlo"/>
-                <a:ea typeface="Menlo"/>
-              </a:rPr>
-              <a:t> </a:t>
-            </a:r>
-            <a:endParaRPr/>
-          </a:p>
-          <a:p>
-            <a:pPr>
-              <a:lnSpc>
-                <a:spcPct val="140000"/>
-              </a:lnSpc>
-            </a:pPr>
-            <a:r>
-              <a:rPr sz="863">
-                <a:solidFill>
-                  <a:srgbClr val="032F62"/>
-                </a:solidFill>
-                <a:latin typeface="Menlo"/>
-                <a:ea typeface="Menlo"/>
-              </a:rPr>
-              <a:t>'</a:t>
-            </a:r>
-            <a:r>
-              <a:rPr sz="863">
-                <a:solidFill>
-                  <a:srgbClr val="24292E"/>
-                </a:solidFill>
-                <a:latin typeface="Menlo"/>
-                <a:ea typeface="Menlo"/>
-              </a:rPr>
-              <a:t> TODO </a:t>
-            </a:r>
-            <a:r>
-              <a:rPr sz="863">
-                <a:solidFill>
-                  <a:srgbClr val="005CC5"/>
-                </a:solidFill>
-                <a:latin typeface="Menlo"/>
-                <a:ea typeface="Menlo"/>
-              </a:rPr>
-              <a:t>2</a:t>
-            </a:r>
-            <a:r>
-              <a:rPr sz="863">
-                <a:solidFill>
-                  <a:srgbClr val="24292E"/>
-                </a:solidFill>
-                <a:latin typeface="Menlo"/>
-                <a:ea typeface="Menlo"/>
-              </a:rPr>
-              <a:t>  A Member may hold zero or more</a:t>
-            </a:r>
-            <a:endParaRPr/>
-          </a:p>
-          <a:p>
-            <a:pPr>
-              <a:lnSpc>
-                <a:spcPct val="140000"/>
-              </a:lnSpc>
-            </a:pPr>
-            <a:r>
-              <a:rPr sz="863">
-                <a:solidFill>
-                  <a:srgbClr val="032F62"/>
-                </a:solidFill>
-                <a:latin typeface="Menlo"/>
-                <a:ea typeface="Menlo"/>
-              </a:rPr>
-              <a:t>'         Books. A plain link, no diamond.</a:t>
-            </a:r>
-            <a:endParaRPr/>
-          </a:p>
-          <a:p>
-            <a:pPr>
-              <a:lnSpc>
-                <a:spcPct val="140000"/>
-              </a:lnSpc>
-            </a:pPr>
-            <a:r>
-              <a:rPr sz="863">
-                <a:solidFill>
-                  <a:srgbClr val="032F62"/>
-                </a:solidFill>
-                <a:latin typeface="Menlo"/>
-                <a:ea typeface="Menlo"/>
-              </a:rPr>
-              <a:t>Member "???" -- "???" Book : borrows</a:t>
-            </a:r>
-            <a:endParaRPr/>
-          </a:p>
-          <a:p>
-            <a:pPr>
-              <a:lnSpc>
-                <a:spcPct val="140000"/>
-              </a:lnSpc>
-            </a:pPr>
-            <a:r>
-              <a:rPr sz="863">
-                <a:solidFill>
-                  <a:srgbClr val="032F62"/>
                 </a:solidFill>
                 <a:latin typeface="Menlo"/>
                 <a:ea typeface="Menlo"/>
@@ -28852,7 +25850,7 @@
   <p:cSld>
     <p:spTree>
       <p:nvGrpSpPr>
-        <p:cNvPr id="652" name="" descr="&lt;Slide style={{ background: '#FFFFFF', padding: 0 }}&gt;&#10;  &lt;Box style={{ height: 72, background: '#1E4FA8', padding: '0 40px', flexDirection: 'row', alignItems: 'center', justifyContent: 'space-between' }}&gt;&#10;    &lt;Text style={{ fontSize: 15, color: '#B9CDF0', letterSpacing: 1 }}&gt;ISAD · INFORMATION SYSTEMS ANALYSIS &amp;amp; DESIGN&lt;/Text&gt;&#10;    &lt;Text style={{ fontSize: 15, color: '#B9CDF0' }}&gt;W03 · LAB&lt;/Text&gt;&#10;  &lt;/Box&gt;&#10;  &lt;Box style={{ padding: '14px 40px 0 40px', flexDirection: 'row', alignItems: 'center', justifyContent: 'space-between' }}&gt;&#10;    &lt;Text style={{ fontSize: 30, fontWeight: 'bold', color: '#0E3F8C' }}&gt;Exercise 3.2 — Reference Solution&lt;/Text&gt;&#10;    &lt;Text style={{ fontSize: 14, color: '#1E4FA8', fontWeight: 'bold' }}&gt;35 / 38&lt;/Text&gt;&#10;  &lt;/Box&gt;&#10;  &lt;Box style={{ flex: 1, padding: '8px 40px 0 40px', flexDirection: 'row', gap: 26 }}&gt;&#10;    &lt;Box style={{ flex: 5, justifyContent: 'center' }}&gt;&#10;      &lt;CodeBlock code={`@startuml&#10;class Library {&#10;  - name : String&#10;  + addBook(b : Book) : void&#10;  + findByIsbn(isbn : String) : Book&#10;}&#10;&#10;class Book {&#10;  - isbn : String&#10;  - title : String&#10;  + isAvailable() : boolean&#10;}&#10;&#10;class Member {&#10;  - id : String&#10;  - name : String&#10;  + borrow(b : Book) : void&#10;}&#10;&#10;Library &quot;1&quot; *-- &quot;0..*&quot; Book : holds&#10;Member &quot;0..1&quot; -- &quot;0..*&quot; Book : borrows&#10;@enduml`} language='java' width={600} fontSize={12} /&gt;&#10;    &lt;/Box&gt;&#10;    &lt;Box style={{ flex: 4, flexDirection: 'column', gap: 10, justifyContent: 'center' }}&gt;&#10;      {[&#10;        ['1', '0..* at the Book end', 'A library with no books yet is still a legal library. Writing 1..* here would force a fake Book into every new branch — that is the kind of error that reaches production.'],&#10;        ['2', '0..1 at the Member end', 'The Book side of a loan is optional: a Book on the shelf is borrowed by nobody. Write 1 and no Book can ever sit on a shelf.'],&#10;        ['3', '*-- and not o--', 'Composition says the Books go when the Library record goes. If your pair disagreed, write the disagreement in the README — the argument is the deliverable, not the symbol.'],&#10;      ].map(([n, t, d]) =&gt; (&#10;        &lt;Box key={n} style={{ flexDirection: 'row', gap: 13, alignItems: 'flex-start', padding: '13px 16px', background: '#F7F9FC', borderRadius: 10, border: '1px solid #E5E7EB' }}&gt;&#10;          &lt;Box style={{ width: 28, height: 28, borderRadius: 14, background: '#1E4FA8', justifyContent: 'center', alignItems: 'center' }}&gt;&#10;            &lt;Text style={{ fontSize: 14, fontWeight: 'bold', color: '#FFFFFF' }}&gt;{n}&lt;/Text&gt;&#10;          &lt;/Box&gt;&#10;          &lt;Box style={{ flex: 1, flexDirection: 'column', gap: 3 }}&gt;&#10;            &lt;Text style={{ fontSize: 15, fontWeight: 'bold', color: '#0E3F8C' }}&gt;{t}&lt;/Text&gt;&#10;            &lt;Text style={{ fontSize: 13, color: '#4A5568', lineHeight: 1.45 }}&gt;{d}&lt;/Text&gt;&#10;          &lt;/Box&gt;&#10;        &lt;/Box&gt;&#10;      ))}&#10;      &lt;Box style={{ padding: '12px 16px', background: '#F0F5FC', borderRadius: 9, borderLeft: '4px solid #1E4FA8' }}&gt;&#10;        &lt;Text style={{ fontSize: 13.5, color: '#0E3F8C', lineHeight: 1.5, fontWeight: 'bold' }}&gt;A different answer can be correct. It stops being correct the moment you cannot say why.&lt;/Text&gt;&#10;      &lt;/Box&gt;&#10;    &lt;/Box&gt;&#10;  &lt;/Box&gt;&#10;  &lt;Box style={{ height: 34, padding: '0 40px', flexDirection: 'row', alignItems: 'center', justifyContent: 'space-between' }}&gt;&#10;    &lt;Text style={{ fontSize: 13, color: '#8B97A8' }}&gt;ISAD · Fall 2026&lt;/Text&gt;&#10;    &lt;Text style={{ fontSize: 14, color: '#1E4FA8', fontWeight: 'bold' }}&gt;35 / 38&lt;/Text&gt;&#10;  &lt;/Box&gt;&#10;&lt;/Slide&gt;"/>
+        <p:cNvPr id="652" name="" descr="&lt;Slide style={{ background: '#FFFFFF', padding: 0 }}&gt;&#10;  &lt;Box style={{ height: 72, background: '#1E4FA8', padding: '0 40px', flexDirection: 'row', alignItems: 'center', justifyContent: 'space-between' }}&gt;&#10;    &lt;Text style={{ fontSize: 15, color: '#B9CDF0', letterSpacing: 1 }}&gt;ISAD · INFORMATION SYSTEMS ANALYSIS &amp;amp; DESIGN&lt;/Text&gt;&#10;    &lt;Text style={{ fontSize: 15, color: '#B9CDF0' }}&gt;W03 · LAB&lt;/Text&gt;&#10;  &lt;/Box&gt;&#10;  &lt;Box style={{ padding: '14px 40px 0 40px', flexDirection: 'row', alignItems: 'center', justifyContent: 'space-between' }}&gt;&#10;    &lt;Text style={{ fontSize: 30, fontWeight: 'bold', color: '#0E3F8C' }}&gt;Exercise 3.2 — Reference Solution&lt;/Text&gt;&#10;    &lt;Text style={{ fontSize: 14, color: '#1E4FA8', fontWeight: 'bold' }}&gt;35 / 38&lt;/Text&gt;&#10;  &lt;/Box&gt;&#10;  &lt;Box style={{ flex: 1, padding: '8px 40px 0 40px', flexDirection: 'row', gap: 26 }}&gt;&#10;    &lt;Box style={{ flex: 5, justifyContent: 'center' }}&gt;&#10;      &lt;CodeBlock code={`@startuml&#10;class Library {&#10;  - name : String&#10;  + addBook(b : Book) : void&#10;  + findByIsbn(isbn : String) : Book&#10;}&#10;&#10;class Book {&#10;  - isbn : String&#10;  - title : String&#10;  + isAvailable() : boolean&#10;}&#10;&#10;class Member {&#10;  - id : String&#10;  - name : String&#10;  + borrow(b : Book) : void&#10;}&#10;&#10;Library &quot;1&quot; *-- &quot;0..*&quot; Book : holds&#10;Member &quot;0..1&quot; -- &quot;0..*&quot; Book : borrows&#10;@enduml`} language='text' width={600} fontSize={12} /&gt;&#10;    &lt;/Box&gt;&#10;    &lt;Box style={{ flex: 4, flexDirection: 'column', gap: 10, justifyContent: 'center' }}&gt;&#10;      {[&#10;        ['1', '0..* at the Book end', 'A library with no books yet is still a legal library. Writing 1..* here would force a fake Book into every new branch — that is the kind of error that reaches production.'],&#10;        ['2', '0..1 at the Member end', 'The Book side of a loan is optional: a Book on the shelf is borrowed by nobody. Write 1 and no Book can ever sit on a shelf.'],&#10;        ['3', '*-- and not o--', 'Composition says the Books go when the Library record goes. If your pair disagreed, write the disagreement in the README — the argument is the deliverable, not the symbol.'],&#10;      ].map(([n, t, d]) =&gt; (&#10;        &lt;Box key={n} style={{ flexDirection: 'row', gap: 13, alignItems: 'flex-start', padding: '13px 16px', background: '#F7F9FC', borderRadius: 10, border: '1px solid #E5E7EB' }}&gt;&#10;          &lt;Box style={{ width: 28, height: 28, borderRadius: 14, background: '#1E4FA8', justifyContent: 'center', alignItems: 'center' }}&gt;&#10;            &lt;Text style={{ fontSize: 14, fontWeight: 'bold', color: '#FFFFFF' }}&gt;{n}&lt;/Text&gt;&#10;          &lt;/Box&gt;&#10;          &lt;Box style={{ flex: 1, flexDirection: 'column', gap: 3 }}&gt;&#10;            &lt;Text style={{ fontSize: 15, fontWeight: 'bold', color: '#0E3F8C' }}&gt;{t}&lt;/Text&gt;&#10;            &lt;Text style={{ fontSize: 13, color: '#4A5568', lineHeight: 1.45 }}&gt;{d}&lt;/Text&gt;&#10;          &lt;/Box&gt;&#10;        &lt;/Box&gt;&#10;      ))}&#10;      &lt;Box style={{ padding: '12px 16px', background: '#F0F5FC', borderRadius: 9, borderLeft: '4px solid #1E4FA8' }}&gt;&#10;        &lt;Text style={{ fontSize: 13.5, color: '#0E3F8C', lineHeight: 1.5, fontWeight: 'bold' }}&gt;A different answer can be correct. It stops being correct the moment you cannot say why.&lt;/Text&gt;&#10;      &lt;/Box&gt;&#10;    &lt;/Box&gt;&#10;  &lt;/Box&gt;&#10;  &lt;Box style={{ height: 34, padding: '0 40px', flexDirection: 'row', alignItems: 'center', justifyContent: 'space-between' }}&gt;&#10;    &lt;Text style={{ fontSize: 13, color: '#8B97A8' }}&gt;ISAD · Fall 2026&lt;/Text&gt;&#10;    &lt;Text style={{ fontSize: 14, color: '#1E4FA8', fontWeight: 'bold' }}&gt;35 / 38&lt;/Text&gt;&#10;  &lt;/Box&gt;&#10;&lt;/Slide&gt;"/>
         <p:cNvGrpSpPr/>
         <p:nvPr/>
       </p:nvGrpSpPr>
@@ -29786,22 +26784,30 @@
             <a:r>
               <a:rPr sz="900">
                 <a:solidFill>
-                  <a:srgbClr val="24292E"/>
+                  <a:srgbClr val="E5E7EB"/>
                 </a:solidFill>
                 <a:latin typeface="Menlo"/>
                 <a:ea typeface="Menlo"/>
               </a:rPr>
-              <a:t>@</a:t>
-            </a:r>
+              <a:t>@startuml</a:t>
+            </a:r>
+            <a:endParaRPr/>
+          </a:p>
+          <a:p>
+            <a:pPr>
+              <a:lnSpc>
+                <a:spcPct val="140000"/>
+              </a:lnSpc>
+            </a:pPr>
             <a:r>
               <a:rPr sz="900">
                 <a:solidFill>
-                  <a:srgbClr val="D73A49"/>
+                  <a:srgbClr val="E5E7EB"/>
                 </a:solidFill>
                 <a:latin typeface="Menlo"/>
                 <a:ea typeface="Menlo"/>
               </a:rPr>
-              <a:t>startuml</a:t>
+              <a:t>class Library {</a:t>
             </a:r>
             <a:endParaRPr/>
           </a:p>
@@ -29814,42 +26820,66 @@
             <a:r>
               <a:rPr sz="900">
                 <a:solidFill>
-                  <a:srgbClr val="D73A49"/>
+                  <a:srgbClr val="E5E7EB"/>
                 </a:solidFill>
                 <a:latin typeface="Menlo"/>
                 <a:ea typeface="Menlo"/>
               </a:rPr>
-              <a:t>class</a:t>
-            </a:r>
+              <a:t>  - name : String</a:t>
+            </a:r>
+            <a:endParaRPr/>
+          </a:p>
+          <a:p>
+            <a:pPr>
+              <a:lnSpc>
+                <a:spcPct val="140000"/>
+              </a:lnSpc>
+            </a:pPr>
             <a:r>
               <a:rPr sz="900">
                 <a:solidFill>
-                  <a:srgbClr val="24292E"/>
+                  <a:srgbClr val="E5E7EB"/>
                 </a:solidFill>
                 <a:latin typeface="Menlo"/>
                 <a:ea typeface="Menlo"/>
               </a:rPr>
-              <a:t> </a:t>
-            </a:r>
+              <a:t>  + addBook(b : Book) : void</a:t>
+            </a:r>
+            <a:endParaRPr/>
+          </a:p>
+          <a:p>
+            <a:pPr>
+              <a:lnSpc>
+                <a:spcPct val="140000"/>
+              </a:lnSpc>
+            </a:pPr>
             <a:r>
               <a:rPr sz="900">
                 <a:solidFill>
-                  <a:srgbClr val="6F42C1"/>
+                  <a:srgbClr val="E5E7EB"/>
                 </a:solidFill>
                 <a:latin typeface="Menlo"/>
                 <a:ea typeface="Menlo"/>
               </a:rPr>
-              <a:t>Library</a:t>
-            </a:r>
+              <a:t>  + findByIsbn(isbn : String) : Book</a:t>
+            </a:r>
+            <a:endParaRPr/>
+          </a:p>
+          <a:p>
+            <a:pPr>
+              <a:lnSpc>
+                <a:spcPct val="140000"/>
+              </a:lnSpc>
+            </a:pPr>
             <a:r>
               <a:rPr sz="900">
                 <a:solidFill>
-                  <a:srgbClr val="24292E"/>
+                  <a:srgbClr val="E5E7EB"/>
                 </a:solidFill>
                 <a:latin typeface="Menlo"/>
                 <a:ea typeface="Menlo"/>
               </a:rPr>
-              <a:t> {</a:t>
+              <a:t>}</a:t>
             </a:r>
             <a:endParaRPr/>
           </a:p>
@@ -29859,55 +26889,95 @@
                 <a:spcPct val="140000"/>
               </a:lnSpc>
             </a:pPr>
+            <a:endParaRPr/>
+          </a:p>
+          <a:p>
+            <a:pPr>
+              <a:lnSpc>
+                <a:spcPct val="140000"/>
+              </a:lnSpc>
+            </a:pPr>
             <a:r>
               <a:rPr sz="900">
                 <a:solidFill>
-                  <a:srgbClr val="24292E"/>
+                  <a:srgbClr val="E5E7EB"/>
                 </a:solidFill>
                 <a:latin typeface="Menlo"/>
                 <a:ea typeface="Menlo"/>
               </a:rPr>
-              <a:t>  </a:t>
-            </a:r>
+              <a:t>class Book {</a:t>
+            </a:r>
+            <a:endParaRPr/>
+          </a:p>
+          <a:p>
+            <a:pPr>
+              <a:lnSpc>
+                <a:spcPct val="140000"/>
+              </a:lnSpc>
+            </a:pPr>
             <a:r>
               <a:rPr sz="900">
                 <a:solidFill>
-                  <a:srgbClr val="D73A49"/>
+                  <a:srgbClr val="E5E7EB"/>
                 </a:solidFill>
                 <a:latin typeface="Menlo"/>
                 <a:ea typeface="Menlo"/>
               </a:rPr>
-              <a:t>-</a:t>
-            </a:r>
+              <a:t>  - isbn : String</a:t>
+            </a:r>
+            <a:endParaRPr/>
+          </a:p>
+          <a:p>
+            <a:pPr>
+              <a:lnSpc>
+                <a:spcPct val="140000"/>
+              </a:lnSpc>
+            </a:pPr>
             <a:r>
               <a:rPr sz="900">
                 <a:solidFill>
-                  <a:srgbClr val="24292E"/>
+                  <a:srgbClr val="E5E7EB"/>
                 </a:solidFill>
                 <a:latin typeface="Menlo"/>
                 <a:ea typeface="Menlo"/>
               </a:rPr>
-              <a:t> name </a:t>
-            </a:r>
+              <a:t>  - title : String</a:t>
+            </a:r>
+            <a:endParaRPr/>
+          </a:p>
+          <a:p>
+            <a:pPr>
+              <a:lnSpc>
+                <a:spcPct val="140000"/>
+              </a:lnSpc>
+            </a:pPr>
             <a:r>
               <a:rPr sz="900">
                 <a:solidFill>
-                  <a:srgbClr val="D73A49"/>
+                  <a:srgbClr val="E5E7EB"/>
                 </a:solidFill>
                 <a:latin typeface="Menlo"/>
                 <a:ea typeface="Menlo"/>
               </a:rPr>
-              <a:t>:</a:t>
-            </a:r>
+              <a:t>  + isAvailable() : boolean</a:t>
+            </a:r>
+            <a:endParaRPr/>
+          </a:p>
+          <a:p>
+            <a:pPr>
+              <a:lnSpc>
+                <a:spcPct val="140000"/>
+              </a:lnSpc>
+            </a:pPr>
             <a:r>
               <a:rPr sz="900">
                 <a:solidFill>
-                  <a:srgbClr val="24292E"/>
+                  <a:srgbClr val="E5E7EB"/>
                 </a:solidFill>
                 <a:latin typeface="Menlo"/>
                 <a:ea typeface="Menlo"/>
               </a:rPr>
-              <a:t> String</a:t>
+              <a:t>}</a:t>
             </a:r>
             <a:endParaRPr/>
           </a:p>
@@ -29917,989 +26987,157 @@
                 <a:spcPct val="140000"/>
               </a:lnSpc>
             </a:pPr>
+            <a:endParaRPr/>
+          </a:p>
+          <a:p>
+            <a:pPr>
+              <a:lnSpc>
+                <a:spcPct val="140000"/>
+              </a:lnSpc>
+            </a:pPr>
             <a:r>
               <a:rPr sz="900">
                 <a:solidFill>
-                  <a:srgbClr val="24292E"/>
+                  <a:srgbClr val="E5E7EB"/>
                 </a:solidFill>
                 <a:latin typeface="Menlo"/>
                 <a:ea typeface="Menlo"/>
               </a:rPr>
-              <a:t>  </a:t>
-            </a:r>
+              <a:t>class Member {</a:t>
+            </a:r>
+            <a:endParaRPr/>
+          </a:p>
+          <a:p>
+            <a:pPr>
+              <a:lnSpc>
+                <a:spcPct val="140000"/>
+              </a:lnSpc>
+            </a:pPr>
             <a:r>
               <a:rPr sz="900">
                 <a:solidFill>
-                  <a:srgbClr val="D73A49"/>
+                  <a:srgbClr val="E5E7EB"/>
                 </a:solidFill>
                 <a:latin typeface="Menlo"/>
                 <a:ea typeface="Menlo"/>
               </a:rPr>
-              <a:t>+</a:t>
-            </a:r>
+              <a:t>  - id : String</a:t>
+            </a:r>
+            <a:endParaRPr/>
+          </a:p>
+          <a:p>
+            <a:pPr>
+              <a:lnSpc>
+                <a:spcPct val="140000"/>
+              </a:lnSpc>
+            </a:pPr>
             <a:r>
               <a:rPr sz="900">
                 <a:solidFill>
-                  <a:srgbClr val="24292E"/>
+                  <a:srgbClr val="E5E7EB"/>
                 </a:solidFill>
                 <a:latin typeface="Menlo"/>
                 <a:ea typeface="Menlo"/>
               </a:rPr>
-              <a:t> </a:t>
-            </a:r>
+              <a:t>  - name : String</a:t>
+            </a:r>
+            <a:endParaRPr/>
+          </a:p>
+          <a:p>
+            <a:pPr>
+              <a:lnSpc>
+                <a:spcPct val="140000"/>
+              </a:lnSpc>
+            </a:pPr>
             <a:r>
               <a:rPr sz="900">
                 <a:solidFill>
-                  <a:srgbClr val="6F42C1"/>
+                  <a:srgbClr val="E5E7EB"/>
                 </a:solidFill>
                 <a:latin typeface="Menlo"/>
                 <a:ea typeface="Menlo"/>
               </a:rPr>
-              <a:t>addBook</a:t>
-            </a:r>
+              <a:t>  + borrow(b : Book) : void</a:t>
+            </a:r>
+            <a:endParaRPr/>
+          </a:p>
+          <a:p>
+            <a:pPr>
+              <a:lnSpc>
+                <a:spcPct val="140000"/>
+              </a:lnSpc>
+            </a:pPr>
             <a:r>
               <a:rPr sz="900">
                 <a:solidFill>
-                  <a:srgbClr val="24292E"/>
+                  <a:srgbClr val="E5E7EB"/>
                 </a:solidFill>
                 <a:latin typeface="Menlo"/>
                 <a:ea typeface="Menlo"/>
               </a:rPr>
-              <a:t>(</a:t>
-            </a:r>
+              <a:t>}</a:t>
+            </a:r>
+            <a:endParaRPr/>
+          </a:p>
+          <a:p>
+            <a:pPr>
+              <a:lnSpc>
+                <a:spcPct val="140000"/>
+              </a:lnSpc>
+            </a:pPr>
+            <a:endParaRPr/>
+          </a:p>
+          <a:p>
+            <a:pPr>
+              <a:lnSpc>
+                <a:spcPct val="140000"/>
+              </a:lnSpc>
+            </a:pPr>
             <a:r>
               <a:rPr sz="900">
                 <a:solidFill>
-                  <a:srgbClr val="E36209"/>
+                  <a:srgbClr val="E5E7EB"/>
                 </a:solidFill>
                 <a:latin typeface="Menlo"/>
                 <a:ea typeface="Menlo"/>
               </a:rPr>
-              <a:t>b</a:t>
-            </a:r>
+              <a:t>Library "1" *-- "0..*" Book : holds</a:t>
+            </a:r>
+            <a:endParaRPr/>
+          </a:p>
+          <a:p>
+            <a:pPr>
+              <a:lnSpc>
+                <a:spcPct val="140000"/>
+              </a:lnSpc>
+            </a:pPr>
             <a:r>
               <a:rPr sz="900">
                 <a:solidFill>
-                  <a:srgbClr val="24292E"/>
+                  <a:srgbClr val="E5E7EB"/>
                 </a:solidFill>
                 <a:latin typeface="Menlo"/>
                 <a:ea typeface="Menlo"/>
               </a:rPr>
-              <a:t> : </a:t>
-            </a:r>
+              <a:t>Member "0..1" -- "0..*" Book : borrows</a:t>
+            </a:r>
+            <a:endParaRPr/>
+          </a:p>
+          <a:p>
+            <a:pPr>
+              <a:lnSpc>
+                <a:spcPct val="140000"/>
+              </a:lnSpc>
+            </a:pPr>
             <a:r>
               <a:rPr sz="900">
                 <a:solidFill>
-                  <a:srgbClr val="E36209"/>
+                  <a:srgbClr val="E5E7EB"/>
                 </a:solidFill>
                 <a:latin typeface="Menlo"/>
                 <a:ea typeface="Menlo"/>
               </a:rPr>
-              <a:t>Book</a:t>
-            </a:r>
-            <a:r>
-              <a:rPr sz="900">
-                <a:solidFill>
-                  <a:srgbClr val="24292E"/>
-                </a:solidFill>
-                <a:latin typeface="Menlo"/>
-                <a:ea typeface="Menlo"/>
-              </a:rPr>
-              <a:t>) : void</a:t>
-            </a:r>
-            <a:endParaRPr/>
-          </a:p>
-          <a:p>
-            <a:pPr>
-              <a:lnSpc>
-                <a:spcPct val="140000"/>
-              </a:lnSpc>
-            </a:pPr>
-            <a:r>
-              <a:rPr sz="900">
-                <a:solidFill>
-                  <a:srgbClr val="24292E"/>
-                </a:solidFill>
-                <a:latin typeface="Menlo"/>
-                <a:ea typeface="Menlo"/>
-              </a:rPr>
-              <a:t>  + </a:t>
-            </a:r>
-            <a:r>
-              <a:rPr sz="900">
-                <a:solidFill>
-                  <a:srgbClr val="6F42C1"/>
-                </a:solidFill>
-                <a:latin typeface="Menlo"/>
-                <a:ea typeface="Menlo"/>
-              </a:rPr>
-              <a:t>findByIsbn</a:t>
-            </a:r>
-            <a:r>
-              <a:rPr sz="900">
-                <a:solidFill>
-                  <a:srgbClr val="24292E"/>
-                </a:solidFill>
-                <a:latin typeface="Menlo"/>
-                <a:ea typeface="Menlo"/>
-              </a:rPr>
-              <a:t>(</a:t>
-            </a:r>
-            <a:r>
-              <a:rPr sz="900">
-                <a:solidFill>
-                  <a:srgbClr val="E36209"/>
-                </a:solidFill>
-                <a:latin typeface="Menlo"/>
-                <a:ea typeface="Menlo"/>
-              </a:rPr>
-              <a:t>isbn</a:t>
-            </a:r>
-            <a:r>
-              <a:rPr sz="900">
-                <a:solidFill>
-                  <a:srgbClr val="24292E"/>
-                </a:solidFill>
-                <a:latin typeface="Menlo"/>
-                <a:ea typeface="Menlo"/>
-              </a:rPr>
-              <a:t> : </a:t>
-            </a:r>
-            <a:r>
-              <a:rPr sz="900">
-                <a:solidFill>
-                  <a:srgbClr val="E36209"/>
-                </a:solidFill>
-                <a:latin typeface="Menlo"/>
-                <a:ea typeface="Menlo"/>
-              </a:rPr>
-              <a:t>String</a:t>
-            </a:r>
-            <a:r>
-              <a:rPr sz="900">
-                <a:solidFill>
-                  <a:srgbClr val="24292E"/>
-                </a:solidFill>
-                <a:latin typeface="Menlo"/>
-                <a:ea typeface="Menlo"/>
-              </a:rPr>
-              <a:t>) : Book</a:t>
-            </a:r>
-            <a:endParaRPr/>
-          </a:p>
-          <a:p>
-            <a:pPr>
-              <a:lnSpc>
-                <a:spcPct val="140000"/>
-              </a:lnSpc>
-            </a:pPr>
-            <a:r>
-              <a:rPr sz="900">
-                <a:solidFill>
-                  <a:srgbClr val="24292E"/>
-                </a:solidFill>
-                <a:latin typeface="Menlo"/>
-                <a:ea typeface="Menlo"/>
-              </a:rPr>
-              <a:t>}</a:t>
-            </a:r>
-            <a:endParaRPr/>
-          </a:p>
-          <a:p>
-            <a:pPr>
-              <a:lnSpc>
-                <a:spcPct val="140000"/>
-              </a:lnSpc>
-            </a:pPr>
-            <a:r>
-              <a:rPr sz="900">
-                <a:solidFill>
-                  <a:srgbClr val="E5E7EB"/>
-                </a:solidFill>
-                <a:latin typeface="Menlo"/>
-                <a:ea typeface="Menlo"/>
-              </a:rPr>
-              <a:t> </a:t>
-            </a:r>
-            <a:endParaRPr/>
-          </a:p>
-          <a:p>
-            <a:pPr>
-              <a:lnSpc>
-                <a:spcPct val="140000"/>
-              </a:lnSpc>
-            </a:pPr>
-            <a:r>
-              <a:rPr sz="900">
-                <a:solidFill>
-                  <a:srgbClr val="D73A49"/>
-                </a:solidFill>
-                <a:latin typeface="Menlo"/>
-                <a:ea typeface="Menlo"/>
-              </a:rPr>
-              <a:t>class</a:t>
-            </a:r>
-            <a:r>
-              <a:rPr sz="900">
-                <a:solidFill>
-                  <a:srgbClr val="24292E"/>
-                </a:solidFill>
-                <a:latin typeface="Menlo"/>
-                <a:ea typeface="Menlo"/>
-              </a:rPr>
-              <a:t> </a:t>
-            </a:r>
-            <a:r>
-              <a:rPr sz="900">
-                <a:solidFill>
-                  <a:srgbClr val="6F42C1"/>
-                </a:solidFill>
-                <a:latin typeface="Menlo"/>
-                <a:ea typeface="Menlo"/>
-              </a:rPr>
-              <a:t>Book</a:t>
-            </a:r>
-            <a:r>
-              <a:rPr sz="900">
-                <a:solidFill>
-                  <a:srgbClr val="24292E"/>
-                </a:solidFill>
-                <a:latin typeface="Menlo"/>
-                <a:ea typeface="Menlo"/>
-              </a:rPr>
-              <a:t> {</a:t>
-            </a:r>
-            <a:endParaRPr/>
-          </a:p>
-          <a:p>
-            <a:pPr>
-              <a:lnSpc>
-                <a:spcPct val="140000"/>
-              </a:lnSpc>
-            </a:pPr>
-            <a:r>
-              <a:rPr sz="900">
-                <a:solidFill>
-                  <a:srgbClr val="24292E"/>
-                </a:solidFill>
-                <a:latin typeface="Menlo"/>
-                <a:ea typeface="Menlo"/>
-              </a:rPr>
-              <a:t>  </a:t>
-            </a:r>
-            <a:r>
-              <a:rPr sz="900">
-                <a:solidFill>
-                  <a:srgbClr val="D73A49"/>
-                </a:solidFill>
-                <a:latin typeface="Menlo"/>
-                <a:ea typeface="Menlo"/>
-              </a:rPr>
-              <a:t>-</a:t>
-            </a:r>
-            <a:r>
-              <a:rPr sz="900">
-                <a:solidFill>
-                  <a:srgbClr val="24292E"/>
-                </a:solidFill>
-                <a:latin typeface="Menlo"/>
-                <a:ea typeface="Menlo"/>
-              </a:rPr>
-              <a:t> isbn </a:t>
-            </a:r>
-            <a:r>
-              <a:rPr sz="900">
-                <a:solidFill>
-                  <a:srgbClr val="D73A49"/>
-                </a:solidFill>
-                <a:latin typeface="Menlo"/>
-                <a:ea typeface="Menlo"/>
-              </a:rPr>
-              <a:t>:</a:t>
-            </a:r>
-            <a:r>
-              <a:rPr sz="900">
-                <a:solidFill>
-                  <a:srgbClr val="24292E"/>
-                </a:solidFill>
-                <a:latin typeface="Menlo"/>
-                <a:ea typeface="Menlo"/>
-              </a:rPr>
-              <a:t> String</a:t>
-            </a:r>
-            <a:endParaRPr/>
-          </a:p>
-          <a:p>
-            <a:pPr>
-              <a:lnSpc>
-                <a:spcPct val="140000"/>
-              </a:lnSpc>
-            </a:pPr>
-            <a:r>
-              <a:rPr sz="900">
-                <a:solidFill>
-                  <a:srgbClr val="24292E"/>
-                </a:solidFill>
-                <a:latin typeface="Menlo"/>
-                <a:ea typeface="Menlo"/>
-              </a:rPr>
-              <a:t>  </a:t>
-            </a:r>
-            <a:r>
-              <a:rPr sz="900">
-                <a:solidFill>
-                  <a:srgbClr val="D73A49"/>
-                </a:solidFill>
-                <a:latin typeface="Menlo"/>
-                <a:ea typeface="Menlo"/>
-              </a:rPr>
-              <a:t>-</a:t>
-            </a:r>
-            <a:r>
-              <a:rPr sz="900">
-                <a:solidFill>
-                  <a:srgbClr val="24292E"/>
-                </a:solidFill>
-                <a:latin typeface="Menlo"/>
-                <a:ea typeface="Menlo"/>
-              </a:rPr>
-              <a:t> title </a:t>
-            </a:r>
-            <a:r>
-              <a:rPr sz="900">
-                <a:solidFill>
-                  <a:srgbClr val="D73A49"/>
-                </a:solidFill>
-                <a:latin typeface="Menlo"/>
-                <a:ea typeface="Menlo"/>
-              </a:rPr>
-              <a:t>:</a:t>
-            </a:r>
-            <a:r>
-              <a:rPr sz="900">
-                <a:solidFill>
-                  <a:srgbClr val="24292E"/>
-                </a:solidFill>
-                <a:latin typeface="Menlo"/>
-                <a:ea typeface="Menlo"/>
-              </a:rPr>
-              <a:t> String</a:t>
-            </a:r>
-            <a:endParaRPr/>
-          </a:p>
-          <a:p>
-            <a:pPr>
-              <a:lnSpc>
-                <a:spcPct val="140000"/>
-              </a:lnSpc>
-            </a:pPr>
-            <a:r>
-              <a:rPr sz="900">
-                <a:solidFill>
-                  <a:srgbClr val="24292E"/>
-                </a:solidFill>
-                <a:latin typeface="Menlo"/>
-                <a:ea typeface="Menlo"/>
-              </a:rPr>
-              <a:t>  </a:t>
-            </a:r>
-            <a:r>
-              <a:rPr sz="900">
-                <a:solidFill>
-                  <a:srgbClr val="D73A49"/>
-                </a:solidFill>
-                <a:latin typeface="Menlo"/>
-                <a:ea typeface="Menlo"/>
-              </a:rPr>
-              <a:t>+</a:t>
-            </a:r>
-            <a:r>
-              <a:rPr sz="900">
-                <a:solidFill>
-                  <a:srgbClr val="24292E"/>
-                </a:solidFill>
-                <a:latin typeface="Menlo"/>
-                <a:ea typeface="Menlo"/>
-              </a:rPr>
-              <a:t> </a:t>
-            </a:r>
-            <a:r>
-              <a:rPr sz="900">
-                <a:solidFill>
-                  <a:srgbClr val="6F42C1"/>
-                </a:solidFill>
-                <a:latin typeface="Menlo"/>
-                <a:ea typeface="Menlo"/>
-              </a:rPr>
-              <a:t>isAvailable</a:t>
-            </a:r>
-            <a:r>
-              <a:rPr sz="900">
-                <a:solidFill>
-                  <a:srgbClr val="24292E"/>
-                </a:solidFill>
-                <a:latin typeface="Menlo"/>
-                <a:ea typeface="Menlo"/>
-              </a:rPr>
-              <a:t>() : boolean</a:t>
-            </a:r>
-            <a:endParaRPr/>
-          </a:p>
-          <a:p>
-            <a:pPr>
-              <a:lnSpc>
-                <a:spcPct val="140000"/>
-              </a:lnSpc>
-            </a:pPr>
-            <a:r>
-              <a:rPr sz="900">
-                <a:solidFill>
-                  <a:srgbClr val="24292E"/>
-                </a:solidFill>
-                <a:latin typeface="Menlo"/>
-                <a:ea typeface="Menlo"/>
-              </a:rPr>
-              <a:t>}</a:t>
-            </a:r>
-            <a:endParaRPr/>
-          </a:p>
-          <a:p>
-            <a:pPr>
-              <a:lnSpc>
-                <a:spcPct val="140000"/>
-              </a:lnSpc>
-            </a:pPr>
-            <a:r>
-              <a:rPr sz="900">
-                <a:solidFill>
-                  <a:srgbClr val="E5E7EB"/>
-                </a:solidFill>
-                <a:latin typeface="Menlo"/>
-                <a:ea typeface="Menlo"/>
-              </a:rPr>
-              <a:t> </a:t>
-            </a:r>
-            <a:endParaRPr/>
-          </a:p>
-          <a:p>
-            <a:pPr>
-              <a:lnSpc>
-                <a:spcPct val="140000"/>
-              </a:lnSpc>
-            </a:pPr>
-            <a:r>
-              <a:rPr sz="900">
-                <a:solidFill>
-                  <a:srgbClr val="D73A49"/>
-                </a:solidFill>
-                <a:latin typeface="Menlo"/>
-                <a:ea typeface="Menlo"/>
-              </a:rPr>
-              <a:t>class</a:t>
-            </a:r>
-            <a:r>
-              <a:rPr sz="900">
-                <a:solidFill>
-                  <a:srgbClr val="24292E"/>
-                </a:solidFill>
-                <a:latin typeface="Menlo"/>
-                <a:ea typeface="Menlo"/>
-              </a:rPr>
-              <a:t> </a:t>
-            </a:r>
-            <a:r>
-              <a:rPr sz="900">
-                <a:solidFill>
-                  <a:srgbClr val="6F42C1"/>
-                </a:solidFill>
-                <a:latin typeface="Menlo"/>
-                <a:ea typeface="Menlo"/>
-              </a:rPr>
-              <a:t>Member</a:t>
-            </a:r>
-            <a:r>
-              <a:rPr sz="900">
-                <a:solidFill>
-                  <a:srgbClr val="24292E"/>
-                </a:solidFill>
-                <a:latin typeface="Menlo"/>
-                <a:ea typeface="Menlo"/>
-              </a:rPr>
-              <a:t> {</a:t>
-            </a:r>
-            <a:endParaRPr/>
-          </a:p>
-          <a:p>
-            <a:pPr>
-              <a:lnSpc>
-                <a:spcPct val="140000"/>
-              </a:lnSpc>
-            </a:pPr>
-            <a:r>
-              <a:rPr sz="900">
-                <a:solidFill>
-                  <a:srgbClr val="24292E"/>
-                </a:solidFill>
-                <a:latin typeface="Menlo"/>
-                <a:ea typeface="Menlo"/>
-              </a:rPr>
-              <a:t>  </a:t>
-            </a:r>
-            <a:r>
-              <a:rPr sz="900">
-                <a:solidFill>
-                  <a:srgbClr val="D73A49"/>
-                </a:solidFill>
-                <a:latin typeface="Menlo"/>
-                <a:ea typeface="Menlo"/>
-              </a:rPr>
-              <a:t>-</a:t>
-            </a:r>
-            <a:r>
-              <a:rPr sz="900">
-                <a:solidFill>
-                  <a:srgbClr val="24292E"/>
-                </a:solidFill>
-                <a:latin typeface="Menlo"/>
-                <a:ea typeface="Menlo"/>
-              </a:rPr>
-              <a:t> id </a:t>
-            </a:r>
-            <a:r>
-              <a:rPr sz="900">
-                <a:solidFill>
-                  <a:srgbClr val="D73A49"/>
-                </a:solidFill>
-                <a:latin typeface="Menlo"/>
-                <a:ea typeface="Menlo"/>
-              </a:rPr>
-              <a:t>:</a:t>
-            </a:r>
-            <a:r>
-              <a:rPr sz="900">
-                <a:solidFill>
-                  <a:srgbClr val="24292E"/>
-                </a:solidFill>
-                <a:latin typeface="Menlo"/>
-                <a:ea typeface="Menlo"/>
-              </a:rPr>
-              <a:t> String</a:t>
-            </a:r>
-            <a:endParaRPr/>
-          </a:p>
-          <a:p>
-            <a:pPr>
-              <a:lnSpc>
-                <a:spcPct val="140000"/>
-              </a:lnSpc>
-            </a:pPr>
-            <a:r>
-              <a:rPr sz="900">
-                <a:solidFill>
-                  <a:srgbClr val="24292E"/>
-                </a:solidFill>
-                <a:latin typeface="Menlo"/>
-                <a:ea typeface="Menlo"/>
-              </a:rPr>
-              <a:t>  </a:t>
-            </a:r>
-            <a:r>
-              <a:rPr sz="900">
-                <a:solidFill>
-                  <a:srgbClr val="D73A49"/>
-                </a:solidFill>
-                <a:latin typeface="Menlo"/>
-                <a:ea typeface="Menlo"/>
-              </a:rPr>
-              <a:t>-</a:t>
-            </a:r>
-            <a:r>
-              <a:rPr sz="900">
-                <a:solidFill>
-                  <a:srgbClr val="24292E"/>
-                </a:solidFill>
-                <a:latin typeface="Menlo"/>
-                <a:ea typeface="Menlo"/>
-              </a:rPr>
-              <a:t> name </a:t>
-            </a:r>
-            <a:r>
-              <a:rPr sz="900">
-                <a:solidFill>
-                  <a:srgbClr val="D73A49"/>
-                </a:solidFill>
-                <a:latin typeface="Menlo"/>
-                <a:ea typeface="Menlo"/>
-              </a:rPr>
-              <a:t>:</a:t>
-            </a:r>
-            <a:r>
-              <a:rPr sz="900">
-                <a:solidFill>
-                  <a:srgbClr val="24292E"/>
-                </a:solidFill>
-                <a:latin typeface="Menlo"/>
-                <a:ea typeface="Menlo"/>
-              </a:rPr>
-              <a:t> String</a:t>
-            </a:r>
-            <a:endParaRPr/>
-          </a:p>
-          <a:p>
-            <a:pPr>
-              <a:lnSpc>
-                <a:spcPct val="140000"/>
-              </a:lnSpc>
-            </a:pPr>
-            <a:r>
-              <a:rPr sz="900">
-                <a:solidFill>
-                  <a:srgbClr val="24292E"/>
-                </a:solidFill>
-                <a:latin typeface="Menlo"/>
-                <a:ea typeface="Menlo"/>
-              </a:rPr>
-              <a:t>  </a:t>
-            </a:r>
-            <a:r>
-              <a:rPr sz="900">
-                <a:solidFill>
-                  <a:srgbClr val="D73A49"/>
-                </a:solidFill>
-                <a:latin typeface="Menlo"/>
-                <a:ea typeface="Menlo"/>
-              </a:rPr>
-              <a:t>+</a:t>
-            </a:r>
-            <a:r>
-              <a:rPr sz="900">
-                <a:solidFill>
-                  <a:srgbClr val="24292E"/>
-                </a:solidFill>
-                <a:latin typeface="Menlo"/>
-                <a:ea typeface="Menlo"/>
-              </a:rPr>
-              <a:t> </a:t>
-            </a:r>
-            <a:r>
-              <a:rPr sz="900">
-                <a:solidFill>
-                  <a:srgbClr val="6F42C1"/>
-                </a:solidFill>
-                <a:latin typeface="Menlo"/>
-                <a:ea typeface="Menlo"/>
-              </a:rPr>
-              <a:t>borrow</a:t>
-            </a:r>
-            <a:r>
-              <a:rPr sz="900">
-                <a:solidFill>
-                  <a:srgbClr val="24292E"/>
-                </a:solidFill>
-                <a:latin typeface="Menlo"/>
-                <a:ea typeface="Menlo"/>
-              </a:rPr>
-              <a:t>(</a:t>
-            </a:r>
-            <a:r>
-              <a:rPr sz="900">
-                <a:solidFill>
-                  <a:srgbClr val="E36209"/>
-                </a:solidFill>
-                <a:latin typeface="Menlo"/>
-                <a:ea typeface="Menlo"/>
-              </a:rPr>
-              <a:t>b</a:t>
-            </a:r>
-            <a:r>
-              <a:rPr sz="900">
-                <a:solidFill>
-                  <a:srgbClr val="24292E"/>
-                </a:solidFill>
-                <a:latin typeface="Menlo"/>
-                <a:ea typeface="Menlo"/>
-              </a:rPr>
-              <a:t> : </a:t>
-            </a:r>
-            <a:r>
-              <a:rPr sz="900">
-                <a:solidFill>
-                  <a:srgbClr val="E36209"/>
-                </a:solidFill>
-                <a:latin typeface="Menlo"/>
-                <a:ea typeface="Menlo"/>
-              </a:rPr>
-              <a:t>Book</a:t>
-            </a:r>
-            <a:r>
-              <a:rPr sz="900">
-                <a:solidFill>
-                  <a:srgbClr val="24292E"/>
-                </a:solidFill>
-                <a:latin typeface="Menlo"/>
-                <a:ea typeface="Menlo"/>
-              </a:rPr>
-              <a:t>) : void</a:t>
-            </a:r>
-            <a:endParaRPr/>
-          </a:p>
-          <a:p>
-            <a:pPr>
-              <a:lnSpc>
-                <a:spcPct val="140000"/>
-              </a:lnSpc>
-            </a:pPr>
-            <a:r>
-              <a:rPr sz="900">
-                <a:solidFill>
-                  <a:srgbClr val="24292E"/>
-                </a:solidFill>
-                <a:latin typeface="Menlo"/>
-                <a:ea typeface="Menlo"/>
-              </a:rPr>
-              <a:t>}</a:t>
-            </a:r>
-            <a:endParaRPr/>
-          </a:p>
-          <a:p>
-            <a:pPr>
-              <a:lnSpc>
-                <a:spcPct val="140000"/>
-              </a:lnSpc>
-            </a:pPr>
-            <a:r>
-              <a:rPr sz="900">
-                <a:solidFill>
-                  <a:srgbClr val="E5E7EB"/>
-                </a:solidFill>
-                <a:latin typeface="Menlo"/>
-                <a:ea typeface="Menlo"/>
-              </a:rPr>
-              <a:t> </a:t>
-            </a:r>
-            <a:endParaRPr/>
-          </a:p>
-          <a:p>
-            <a:pPr>
-              <a:lnSpc>
-                <a:spcPct val="140000"/>
-              </a:lnSpc>
-            </a:pPr>
-            <a:r>
-              <a:rPr sz="900">
-                <a:solidFill>
-                  <a:srgbClr val="24292E"/>
-                </a:solidFill>
-                <a:latin typeface="Menlo"/>
-                <a:ea typeface="Menlo"/>
-              </a:rPr>
-              <a:t>Library </a:t>
-            </a:r>
-            <a:r>
-              <a:rPr sz="900">
-                <a:solidFill>
-                  <a:srgbClr val="032F62"/>
-                </a:solidFill>
-                <a:latin typeface="Menlo"/>
-                <a:ea typeface="Menlo"/>
-              </a:rPr>
-              <a:t>"1"</a:t>
-            </a:r>
-            <a:r>
-              <a:rPr sz="900">
-                <a:solidFill>
-                  <a:srgbClr val="24292E"/>
-                </a:solidFill>
-                <a:latin typeface="Menlo"/>
-                <a:ea typeface="Menlo"/>
-              </a:rPr>
-              <a:t> </a:t>
-            </a:r>
-            <a:r>
-              <a:rPr sz="900">
-                <a:solidFill>
-                  <a:srgbClr val="D73A49"/>
-                </a:solidFill>
-                <a:latin typeface="Menlo"/>
-                <a:ea typeface="Menlo"/>
-              </a:rPr>
-              <a:t>*--</a:t>
-            </a:r>
-            <a:r>
-              <a:rPr sz="900">
-                <a:solidFill>
-                  <a:srgbClr val="24292E"/>
-                </a:solidFill>
-                <a:latin typeface="Menlo"/>
-                <a:ea typeface="Menlo"/>
-              </a:rPr>
-              <a:t> </a:t>
-            </a:r>
-            <a:r>
-              <a:rPr sz="900">
-                <a:solidFill>
-                  <a:srgbClr val="032F62"/>
-                </a:solidFill>
-                <a:latin typeface="Menlo"/>
-                <a:ea typeface="Menlo"/>
-              </a:rPr>
-              <a:t>"0..*"</a:t>
-            </a:r>
-            <a:r>
-              <a:rPr sz="900">
-                <a:solidFill>
-                  <a:srgbClr val="24292E"/>
-                </a:solidFill>
-                <a:latin typeface="Menlo"/>
-                <a:ea typeface="Menlo"/>
-              </a:rPr>
-              <a:t> Book </a:t>
-            </a:r>
-            <a:r>
-              <a:rPr sz="900">
-                <a:solidFill>
-                  <a:srgbClr val="D73A49"/>
-                </a:solidFill>
-                <a:latin typeface="Menlo"/>
-                <a:ea typeface="Menlo"/>
-              </a:rPr>
-              <a:t>:</a:t>
-            </a:r>
-            <a:r>
-              <a:rPr sz="900">
-                <a:solidFill>
-                  <a:srgbClr val="24292E"/>
-                </a:solidFill>
-                <a:latin typeface="Menlo"/>
-                <a:ea typeface="Menlo"/>
-              </a:rPr>
-              <a:t> holds</a:t>
-            </a:r>
-            <a:endParaRPr/>
-          </a:p>
-          <a:p>
-            <a:pPr>
-              <a:lnSpc>
-                <a:spcPct val="140000"/>
-              </a:lnSpc>
-            </a:pPr>
-            <a:r>
-              <a:rPr sz="900">
-                <a:solidFill>
-                  <a:srgbClr val="24292E"/>
-                </a:solidFill>
-                <a:latin typeface="Menlo"/>
-                <a:ea typeface="Menlo"/>
-              </a:rPr>
-              <a:t>Member </a:t>
-            </a:r>
-            <a:r>
-              <a:rPr sz="900">
-                <a:solidFill>
-                  <a:srgbClr val="032F62"/>
-                </a:solidFill>
-                <a:latin typeface="Menlo"/>
-                <a:ea typeface="Menlo"/>
-              </a:rPr>
-              <a:t>"0..1"</a:t>
-            </a:r>
-            <a:r>
-              <a:rPr sz="900">
-                <a:solidFill>
-                  <a:srgbClr val="24292E"/>
-                </a:solidFill>
-                <a:latin typeface="Menlo"/>
-                <a:ea typeface="Menlo"/>
-              </a:rPr>
-              <a:t> </a:t>
-            </a:r>
-            <a:r>
-              <a:rPr sz="900">
-                <a:solidFill>
-                  <a:srgbClr val="D73A49"/>
-                </a:solidFill>
-                <a:latin typeface="Menlo"/>
-                <a:ea typeface="Menlo"/>
-              </a:rPr>
-              <a:t>--</a:t>
-            </a:r>
-            <a:r>
-              <a:rPr sz="900">
-                <a:solidFill>
-                  <a:srgbClr val="24292E"/>
-                </a:solidFill>
-                <a:latin typeface="Menlo"/>
-                <a:ea typeface="Menlo"/>
-              </a:rPr>
-              <a:t> </a:t>
-            </a:r>
-            <a:r>
-              <a:rPr sz="900">
-                <a:solidFill>
-                  <a:srgbClr val="032F62"/>
-                </a:solidFill>
-                <a:latin typeface="Menlo"/>
-                <a:ea typeface="Menlo"/>
-              </a:rPr>
-              <a:t>"0..*"</a:t>
-            </a:r>
-            <a:r>
-              <a:rPr sz="900">
-                <a:solidFill>
-                  <a:srgbClr val="24292E"/>
-                </a:solidFill>
-                <a:latin typeface="Menlo"/>
-                <a:ea typeface="Menlo"/>
-              </a:rPr>
-              <a:t> Book </a:t>
-            </a:r>
-            <a:r>
-              <a:rPr sz="900">
-                <a:solidFill>
-                  <a:srgbClr val="D73A49"/>
-                </a:solidFill>
-                <a:latin typeface="Menlo"/>
-                <a:ea typeface="Menlo"/>
-              </a:rPr>
-              <a:t>:</a:t>
-            </a:r>
-            <a:r>
-              <a:rPr sz="900">
-                <a:solidFill>
-                  <a:srgbClr val="24292E"/>
-                </a:solidFill>
-                <a:latin typeface="Menlo"/>
-                <a:ea typeface="Menlo"/>
-              </a:rPr>
-              <a:t> borrows</a:t>
-            </a:r>
-            <a:endParaRPr/>
-          </a:p>
-          <a:p>
-            <a:pPr>
-              <a:lnSpc>
-                <a:spcPct val="140000"/>
-              </a:lnSpc>
-            </a:pPr>
-            <a:r>
-              <a:rPr sz="900">
-                <a:solidFill>
-                  <a:srgbClr val="24292E"/>
-                </a:solidFill>
-                <a:latin typeface="Menlo"/>
-                <a:ea typeface="Menlo"/>
-              </a:rPr>
-              <a:t>@</a:t>
-            </a:r>
-            <a:r>
-              <a:rPr sz="900">
-                <a:solidFill>
-                  <a:srgbClr val="D73A49"/>
-                </a:solidFill>
-                <a:latin typeface="Menlo"/>
-                <a:ea typeface="Menlo"/>
-              </a:rPr>
-              <a:t>enduml</a:t>
+              <a:t>@enduml</a:t>
             </a:r>
             <a:endParaRPr/>
           </a:p>

--- a/01-slides/W03-UML-Essentials-and-Modeling-Workflow.pptx
+++ b/01-slides/W03-UML-Essentials-and-Modeling-Workflow.pptx
@@ -12106,7 +12106,7 @@
   <p:cSld>
     <p:spTree>
       <p:nvGrpSpPr>
-        <p:cNvPr id="326" name="" descr="&lt;Slide style={{ background: '#FFFFFF', padding: 0 }}&gt;&#10;  &lt;Box style={{ height: 72, background: '#1E4FA8', padding: '0 40px', flexDirection: 'row', alignItems: 'center', justifyContent: 'space-between' }}&gt;&#10;    &lt;Text style={{ fontSize: 15, color: '#B9CDF0', letterSpacing: 1 }}&gt;ISAD · INFORMATION SYSTEMS ANALYSIS &amp;amp; DESIGN&lt;/Text&gt;&#10;    &lt;Text style={{ fontSize: 15, color: '#B9CDF0' }}&gt;W03 · WORKFLOW&lt;/Text&gt;&#10;  &lt;/Box&gt;&#10;  &lt;Box style={{ padding: '14px 40px 0 40px', flexDirection: 'row', alignItems: 'center', justifyContent: 'space-between' }}&gt;&#10;    &lt;Text style={{ fontSize: 30, fontWeight: 'bold', color: '#0E3F8C' }}&gt;Step 3 — Sequence Drives Design&lt;/Text&gt;&#10;    &lt;Text style={{ fontSize: 14, color: '#1E4FA8', fontWeight: 'bold' }}&gt;23 / 38&lt;/Text&gt;&#10;  &lt;/Box&gt;&#10;  &lt;Box style={{ flex: 1, padding: '10px 40px 0 40px', flexDirection: 'row', gap: 26 }}&gt;&#10;    &lt;Box style={{ flex: 5, justifyContent: 'center' }}&gt;&#10;      &lt;CodeBlock code={`# Draw the arrow, then write the operation.&#10;# Every message on the diagram is one&#10;# operation on the class at the arrow head.&#10;&#10;:OrderController  -&gt;  :Order&#10;        submit(cart)&#10;&#10;Class OrderController&#10;    + submit(cart)&#10;&#10;:Order  -&gt;  :OrderLine&#10;        create(item, qty)&#10;&#10;Class Order&#10;    + create(item, qty) : OrderLine&#10;&#10;:Order  -&gt;  :Order&#10;        total() : Money&#10;&#10;Class Order&#10;    + total() : Money`} language='text' width={620} fontSize={11.5} /&gt;&#10;    &lt;/Box&gt;&#10;    &lt;Box style={{ flex: 4, flexDirection: 'column', gap: 11, justifyContent: 'center' }}&gt;&#10;      &lt;Box style={{ padding: '16px 18px', background: '#F0F5FC', borderRadius: 10, borderLeft: '4px solid #1E4FA8' }}&gt;&#10;        &lt;Text style={{ fontSize: 17, fontWeight: 'bold', color: '#0E3F8C', lineHeight: 1.45 }}&gt;One arrow, one method. That is the whole trick.&lt;/Text&gt;&#10;      &lt;/Box&gt;&#10;      {[&#10;        ['sign-in-alt', 'Receiver decides the class', 'The arrow head lands on a lifeline — that class must own the method.'],&#10;        ['font', 'Name and parameters come free', 'A message is already a signature; you are transcribing, not inventing.'],&#10;        ['reply', 'The return becomes the type', 'If you drew a dashed reply with a name, the method returns it.'],&#10;      ].map(([icon, t, d]) =&gt; (&#10;        &lt;Box key={t} style={{ flexDirection: 'row', gap: 12, alignItems: 'flex-start', padding: '13px 16px', background: '#F7F9FC', borderRadius: 10, border: '1px solid #E5E7EB' }}&gt;&#10;          &lt;Box style={{ width: 36, height: 36, borderRadius: 9, background: '#E8EFF8', justifyContent: 'center', alignItems: 'center' }}&gt;&#10;            &lt;FAIcon name={icon} style={{ fill: '#1E4FA8', width: 17, height: 17 }} /&gt;&#10;          &lt;/Box&gt;&#10;          &lt;Box style={{ flex: 1, flexDirection: 'column', gap: 2 }}&gt;&#10;            &lt;Text style={{ fontSize: 15.5, fontWeight: 'bold', color: '#0E3F8C' }}&gt;{t}&lt;/Text&gt;&#10;            &lt;Text style={{ fontSize: 13.5, color: '#4A5568', lineHeight: 1.45 }}&gt;{d}&lt;/Text&gt;&#10;          &lt;/Box&gt;&#10;        &lt;/Box&gt;&#10;      ))}&#10;      &lt;Box style={{ padding: '12px 16px', background: '#FFFFFF', borderRadius: 9, border: '1px dashed #D6DCE5' }}&gt;&#10;        &lt;Text style={{ fontSize: 13.5, color: '#8B97A8', lineHeight: 1.5 }}&gt;This is why the sequence diagram is drawn &lt;Text style={{ fontWeight: 'bold', color: '#4A5568' }}&gt;before&lt;/Text&gt; the design class diagram — the methods are discovered, not guessed.&lt;/Text&gt;&#10;      &lt;/Box&gt;&#10;    &lt;/Box&gt;&#10;  &lt;/Box&gt;&#10;  &lt;Box style={{ height: 40, padding: '0 40px', flexDirection: 'row', alignItems: 'center', justifyContent: 'space-between' }}&gt;&#10;    &lt;Text style={{ fontSize: 13, color: '#8B97A8' }}&gt;ISAD · Fall 2026&lt;/Text&gt;&#10;    &lt;Text style={{ fontSize: 14, color: '#1E4FA8', fontWeight: 'bold' }}&gt;23 / 38&lt;/Text&gt;&#10;  &lt;/Box&gt;&#10;&lt;/Slide&gt;"/>
+        <p:cNvPr id="326" name="" descr="&lt;Slide style={{ background: '#FFFFFF', padding: 0 }}&gt;&#10;  &lt;Box style={{ height: 72, background: '#1E4FA8', padding: '0 40px', flexDirection: 'row', alignItems: 'center', justifyContent: 'space-between' }}&gt;&#10;    &lt;Text style={{ fontSize: 15, color: '#B9CDF0', letterSpacing: 1 }}&gt;ISAD · INFORMATION SYSTEMS ANALYSIS &amp;amp; DESIGN&lt;/Text&gt;&#10;    &lt;Text style={{ fontSize: 15, color: '#B9CDF0' }}&gt;W03 · WORKFLOW&lt;/Text&gt;&#10;  &lt;/Box&gt;&#10;  &lt;Box style={{ padding: '14px 40px 0 40px', flexDirection: 'row', alignItems: 'center', justifyContent: 'space-between' }}&gt;&#10;    &lt;Text style={{ fontSize: 30, fontWeight: 'bold', color: '#0E3F8C' }}&gt;Step 3 — Sequence Drives Design&lt;/Text&gt;&#10;    &lt;Text style={{ fontSize: 14, color: '#1E4FA8', fontWeight: 'bold' }}&gt;23 / 38&lt;/Text&gt;&#10;  &lt;/Box&gt;&#10;  &lt;Box style={{ flex: 1, padding: '10px 40px 0 40px', flexDirection: 'row', gap: 26 }}&gt;&#10;    &lt;Box style={{ flex: 5, justifyContent: 'center' }}&gt;&#10;      &lt;CodeBlock theme='one-dark-pro' code={`# Draw the arrow, then write the operation.&#10;# Every message on the diagram is one&#10;# operation on the class at the arrow head.&#10;&#10;:OrderController  -&gt;  :Order&#10;        submit(cart)&#10;&#10;Class OrderController&#10;    + submit(cart)&#10;&#10;:Order  -&gt;  :OrderLine&#10;        create(item, qty)&#10;&#10;Class Order&#10;    + create(item, qty) : OrderLine&#10;&#10;:Order  -&gt;  :Order&#10;        total() : Money&#10;&#10;Class Order&#10;    + total() : Money`} language='text' width={620} fontSize={11.5} /&gt;&#10;    &lt;/Box&gt;&#10;    &lt;Box style={{ flex: 4, flexDirection: 'column', gap: 11, justifyContent: 'center' }}&gt;&#10;      &lt;Box style={{ padding: '16px 18px', background: '#F0F5FC', borderRadius: 10, borderLeft: '4px solid #1E4FA8' }}&gt;&#10;        &lt;Text style={{ fontSize: 17, fontWeight: 'bold', color: '#0E3F8C', lineHeight: 1.45 }}&gt;One arrow, one method. That is the whole trick.&lt;/Text&gt;&#10;      &lt;/Box&gt;&#10;      {[&#10;        ['sign-in-alt', 'Receiver decides the class', 'The arrow head lands on a lifeline — that class must own the method.'],&#10;        ['font', 'Name and parameters come free', 'A message is already a signature; you are transcribing, not inventing.'],&#10;        ['reply', 'The return becomes the type', 'If you drew a dashed reply with a name, the method returns it.'],&#10;      ].map(([icon, t, d]) =&gt; (&#10;        &lt;Box key={t} style={{ flexDirection: 'row', gap: 12, alignItems: 'flex-start', padding: '13px 16px', background: '#F7F9FC', borderRadius: 10, border: '1px solid #E5E7EB' }}&gt;&#10;          &lt;Box style={{ width: 36, height: 36, borderRadius: 9, background: '#E8EFF8', justifyContent: 'center', alignItems: 'center' }}&gt;&#10;            &lt;FAIcon name={icon} style={{ fill: '#1E4FA8', width: 17, height: 17 }} /&gt;&#10;          &lt;/Box&gt;&#10;          &lt;Box style={{ flex: 1, flexDirection: 'column', gap: 2 }}&gt;&#10;            &lt;Text style={{ fontSize: 15.5, fontWeight: 'bold', color: '#0E3F8C' }}&gt;{t}&lt;/Text&gt;&#10;            &lt;Text style={{ fontSize: 13.5, color: '#4A5568', lineHeight: 1.45 }}&gt;{d}&lt;/Text&gt;&#10;          &lt;/Box&gt;&#10;        &lt;/Box&gt;&#10;      ))}&#10;      &lt;Box style={{ padding: '12px 16px', background: '#FFFFFF', borderRadius: 9, border: '1px dashed #D6DCE5' }}&gt;&#10;        &lt;Text style={{ fontSize: 13.5, color: '#8B97A8', lineHeight: 1.5 }}&gt;This is why the sequence diagram is drawn &lt;Text style={{ fontWeight: 'bold', color: '#4A5568' }}&gt;before&lt;/Text&gt; the design class diagram — the methods are discovered, not guessed.&lt;/Text&gt;&#10;      &lt;/Box&gt;&#10;    &lt;/Box&gt;&#10;  &lt;/Box&gt;&#10;  &lt;Box style={{ height: 40, padding: '0 40px', flexDirection: 'row', alignItems: 'center', justifyContent: 'space-between' }}&gt;&#10;    &lt;Text style={{ fontSize: 13, color: '#8B97A8' }}&gt;ISAD · Fall 2026&lt;/Text&gt;&#10;    &lt;Text style={{ fontSize: 14, color: '#1E4FA8', fontWeight: 'bold' }}&gt;23 / 38&lt;/Text&gt;&#10;  &lt;/Box&gt;&#10;&lt;/Slide&gt;"/>
         <p:cNvGrpSpPr/>
         <p:nvPr/>
       </p:nvGrpSpPr>
@@ -13064,16 +13064,16 @@
         </p:nvSpPr>
         <p:spPr>
           <a:xfrm rot="0" flipH="0" flipV="0">
-            <a:off x="381000" y="1800225"/>
-            <a:ext cx="6210300" cy="4133850"/>
+            <a:off x="381000" y="2352675"/>
+            <a:ext cx="6210300" cy="3028950"/>
           </a:xfrm>
           <a:prstGeom prst="roundRect">
             <a:avLst>
-              <a:gd name="adj" fmla="val 1843"/>
+              <a:gd name="adj" fmla="val 2516"/>
             </a:avLst>
           </a:prstGeom>
           <a:solidFill>
-            <a:srgbClr val="F6F8FA"/>
+            <a:srgbClr val="0E1116"/>
           </a:solidFill>
           <a:ln/>
         </p:spPr>
@@ -13090,8 +13090,8 @@
         </p:nvSpPr>
         <p:spPr>
           <a:xfrm rot="0" flipH="0" flipV="0">
-            <a:off x="533400" y="1933575"/>
-            <a:ext cx="5905500" cy="3867150"/>
+            <a:off x="533400" y="2486025"/>
+            <a:ext cx="5905500" cy="2762250"/>
           </a:xfrm>
           <a:prstGeom prst="rect"/>
         </p:spPr>
@@ -13100,11 +13100,7 @@
             <a:normAutofit/>
           </a:bodyPr>
           <a:p>
-            <a:pPr>
-              <a:lnSpc>
-                <a:spcPct val="140000"/>
-              </a:lnSpc>
-            </a:pPr>
+            <a:pPr/>
             <a:r>
               <a:rPr sz="863">
                 <a:solidFill>
@@ -13113,307 +13109,21 @@
                 <a:latin typeface="Menlo"/>
                 <a:ea typeface="Menlo"/>
               </a:rPr>
-              <a:t># Draw the arrow, then write the operation.</a:t>
-            </a:r>
-            <a:endParaRPr/>
-          </a:p>
-          <a:p>
-            <a:pPr>
-              <a:lnSpc>
-                <a:spcPct val="140000"/>
-              </a:lnSpc>
-            </a:pPr>
-            <a:r>
-              <a:rPr sz="863">
-                <a:solidFill>
-                  <a:srgbClr val="E5E7EB"/>
-                </a:solidFill>
-                <a:latin typeface="Menlo"/>
-                <a:ea typeface="Menlo"/>
-              </a:rPr>
-              <a:t># Every message on the diagram is one</a:t>
-            </a:r>
-            <a:endParaRPr/>
-          </a:p>
-          <a:p>
-            <a:pPr>
-              <a:lnSpc>
-                <a:spcPct val="140000"/>
-              </a:lnSpc>
-            </a:pPr>
-            <a:r>
-              <a:rPr sz="863">
-                <a:solidFill>
-                  <a:srgbClr val="E5E7EB"/>
-                </a:solidFill>
-                <a:latin typeface="Menlo"/>
-                <a:ea typeface="Menlo"/>
-              </a:rPr>
-              <a:t># operation on the class at the arrow head.</a:t>
-            </a:r>
-            <a:endParaRPr/>
-          </a:p>
-          <a:p>
-            <a:pPr>
-              <a:lnSpc>
-                <a:spcPct val="140000"/>
-              </a:lnSpc>
-            </a:pPr>
-            <a:endParaRPr/>
-          </a:p>
-          <a:p>
-            <a:pPr>
-              <a:lnSpc>
-                <a:spcPct val="140000"/>
-              </a:lnSpc>
-            </a:pPr>
-            <a:r>
-              <a:rPr sz="863">
-                <a:solidFill>
-                  <a:srgbClr val="E5E7EB"/>
-                </a:solidFill>
-                <a:latin typeface="Menlo"/>
-                <a:ea typeface="Menlo"/>
-              </a:rPr>
-              <a:t>:OrderController  -&gt;  :Order</a:t>
-            </a:r>
-            <a:endParaRPr/>
-          </a:p>
-          <a:p>
-            <a:pPr>
-              <a:lnSpc>
-                <a:spcPct val="140000"/>
-              </a:lnSpc>
-            </a:pPr>
-            <a:r>
-              <a:rPr sz="863">
-                <a:solidFill>
-                  <a:srgbClr val="E5E7EB"/>
-                </a:solidFill>
-                <a:latin typeface="Menlo"/>
-                <a:ea typeface="Menlo"/>
-              </a:rPr>
-              <a:t>        submit(cart)</a:t>
-            </a:r>
-            <a:endParaRPr/>
-          </a:p>
-          <a:p>
-            <a:pPr>
-              <a:lnSpc>
-                <a:spcPct val="140000"/>
-              </a:lnSpc>
-            </a:pPr>
-            <a:endParaRPr/>
-          </a:p>
-          <a:p>
-            <a:pPr>
-              <a:lnSpc>
-                <a:spcPct val="140000"/>
-              </a:lnSpc>
-            </a:pPr>
-            <a:r>
-              <a:rPr sz="863">
-                <a:solidFill>
-                  <a:srgbClr val="E5E7EB"/>
-                </a:solidFill>
-                <a:latin typeface="Menlo"/>
-                <a:ea typeface="Menlo"/>
-              </a:rPr>
-              <a:t>Class OrderController</a:t>
-            </a:r>
-            <a:endParaRPr/>
-          </a:p>
-          <a:p>
-            <a:pPr>
-              <a:lnSpc>
-                <a:spcPct val="140000"/>
-              </a:lnSpc>
-            </a:pPr>
-            <a:r>
-              <a:rPr sz="863">
-                <a:solidFill>
-                  <a:srgbClr val="E5E7EB"/>
-                </a:solidFill>
-                <a:latin typeface="Menlo"/>
-                <a:ea typeface="Menlo"/>
-              </a:rPr>
-              <a:t>    + submit(cart)</a:t>
-            </a:r>
-            <a:endParaRPr/>
-          </a:p>
-          <a:p>
-            <a:pPr>
-              <a:lnSpc>
-                <a:spcPct val="140000"/>
-              </a:lnSpc>
-            </a:pPr>
-            <a:endParaRPr/>
-          </a:p>
-          <a:p>
-            <a:pPr>
-              <a:lnSpc>
-                <a:spcPct val="140000"/>
-              </a:lnSpc>
-            </a:pPr>
-            <a:r>
-              <a:rPr sz="863">
-                <a:solidFill>
-                  <a:srgbClr val="E5E7EB"/>
-                </a:solidFill>
-                <a:latin typeface="Menlo"/>
-                <a:ea typeface="Menlo"/>
-              </a:rPr>
-              <a:t>:Order  -&gt;  :OrderLine</a:t>
-            </a:r>
-            <a:endParaRPr/>
-          </a:p>
-          <a:p>
-            <a:pPr>
-              <a:lnSpc>
-                <a:spcPct val="140000"/>
-              </a:lnSpc>
-            </a:pPr>
-            <a:r>
-              <a:rPr sz="863">
-                <a:solidFill>
-                  <a:srgbClr val="E5E7EB"/>
-                </a:solidFill>
-                <a:latin typeface="Menlo"/>
-                <a:ea typeface="Menlo"/>
-              </a:rPr>
-              <a:t>        create(item, qty)</a:t>
-            </a:r>
-            <a:endParaRPr/>
-          </a:p>
-          <a:p>
-            <a:pPr>
-              <a:lnSpc>
-                <a:spcPct val="140000"/>
-              </a:lnSpc>
-            </a:pPr>
-            <a:endParaRPr/>
-          </a:p>
-          <a:p>
-            <a:pPr>
-              <a:lnSpc>
-                <a:spcPct val="140000"/>
-              </a:lnSpc>
-            </a:pPr>
-            <a:r>
-              <a:rPr sz="863">
-                <a:solidFill>
-                  <a:srgbClr val="E5E7EB"/>
-                </a:solidFill>
-                <a:latin typeface="Menlo"/>
-                <a:ea typeface="Menlo"/>
-              </a:rPr>
-              <a:t>Class Order</a:t>
-            </a:r>
-            <a:endParaRPr/>
-          </a:p>
-          <a:p>
-            <a:pPr>
-              <a:lnSpc>
-                <a:spcPct val="140000"/>
-              </a:lnSpc>
-            </a:pPr>
-            <a:r>
-              <a:rPr sz="863">
-                <a:solidFill>
-                  <a:srgbClr val="E5E7EB"/>
-                </a:solidFill>
-                <a:latin typeface="Menlo"/>
-                <a:ea typeface="Menlo"/>
-              </a:rPr>
-              <a:t>    + create(item, qty) : OrderLine</a:t>
-            </a:r>
-            <a:endParaRPr/>
-          </a:p>
-          <a:p>
-            <a:pPr>
-              <a:lnSpc>
-                <a:spcPct val="140000"/>
-              </a:lnSpc>
-            </a:pPr>
-            <a:endParaRPr/>
-          </a:p>
-          <a:p>
-            <a:pPr>
-              <a:lnSpc>
-                <a:spcPct val="140000"/>
-              </a:lnSpc>
-            </a:pPr>
-            <a:r>
-              <a:rPr sz="863">
-                <a:solidFill>
-                  <a:srgbClr val="E5E7EB"/>
-                </a:solidFill>
-                <a:latin typeface="Menlo"/>
-                <a:ea typeface="Menlo"/>
-              </a:rPr>
-              <a:t>:Order  -&gt;  :Order</a:t>
-            </a:r>
-            <a:endParaRPr/>
-          </a:p>
-          <a:p>
-            <a:pPr>
-              <a:lnSpc>
-                <a:spcPct val="140000"/>
-              </a:lnSpc>
-            </a:pPr>
-            <a:r>
-              <a:rPr sz="863">
-                <a:solidFill>
-                  <a:srgbClr val="E5E7EB"/>
-                </a:solidFill>
-                <a:latin typeface="Menlo"/>
-                <a:ea typeface="Menlo"/>
-              </a:rPr>
-              <a:t>        total() : Money</a:t>
-            </a:r>
-            <a:endParaRPr/>
-          </a:p>
-          <a:p>
-            <a:pPr>
-              <a:lnSpc>
-                <a:spcPct val="140000"/>
-              </a:lnSpc>
-            </a:pPr>
-            <a:endParaRPr/>
-          </a:p>
-          <a:p>
-            <a:pPr>
-              <a:lnSpc>
-                <a:spcPct val="140000"/>
-              </a:lnSpc>
-            </a:pPr>
-            <a:r>
-              <a:rPr sz="863">
-                <a:solidFill>
-                  <a:srgbClr val="E5E7EB"/>
-                </a:solidFill>
-                <a:latin typeface="Menlo"/>
-                <a:ea typeface="Menlo"/>
-              </a:rPr>
-              <a:t>Class Order</a:t>
-            </a:r>
-            <a:endParaRPr/>
-          </a:p>
-          <a:p>
-            <a:pPr>
-              <a:lnSpc>
-                <a:spcPct val="140000"/>
-              </a:lnSpc>
-            </a:pPr>
-            <a:r>
-              <a:rPr sz="863">
-                <a:solidFill>
-                  <a:srgbClr val="E5E7EB"/>
-                </a:solidFill>
-                <a:latin typeface="Menlo"/>
-                <a:ea typeface="Menlo"/>
-              </a:rPr>
-              <a:t>    + total() : Money</a:t>
+              <a:t># Draw the arrow, then write the operation.
+# Every message on the diagram is one
+# operation on the class at the arrow head.
+:OrderController  -&gt;  :Order
+        submit(cart)
+Class OrderController
+    + submit(cart)
+:Order  -&gt;  :OrderLine
+        create(item, qty)
+Class Order
+    + create(item, qty) : OrderLine
+:Order  -&gt;  :Order
+        total() : Money
+Class Order
+    + total() : Money</a:t>
             </a:r>
             <a:endParaRPr/>
           </a:p>
@@ -16922,7 +16632,7 @@
   <p:cSld>
     <p:spTree>
       <p:nvGrpSpPr>
-        <p:cNvPr id="432" name="" descr="&lt;Slide style={{ background: '#FFFFFF', padding: 0 }}&gt;&#10;  &lt;Box style={{ height: 72, background: '#1E4FA8', padding: '0 40px', flexDirection: 'row', alignItems: 'center', justifyContent: 'space-between' }}&gt;&#10;    &lt;Text style={{ fontSize: 15, color: '#B9CDF0', letterSpacing: 1 }}&gt;ISAD · INFORMATION SYSTEMS ANALYSIS &amp;amp; DESIGN&lt;/Text&gt;&#10;    &lt;Text style={{ fontSize: 15, color: '#B9CDF0' }}&gt;W03 · TOOLCHAIN&lt;/Text&gt;&#10;  &lt;/Box&gt;&#10;  &lt;Box style={{ padding: '14px 40px 0 40px', flexDirection: 'row', alignItems: 'center', justifyContent: 'space-between' }}&gt;&#10;    &lt;Text style={{ fontSize: 30, fontWeight: 'bold', color: '#0E3F8C' }}&gt;PlantUML by Example&lt;/Text&gt;&#10;    &lt;Text style={{ fontSize: 14, color: '#1E4FA8', fontWeight: 'bold' }}&gt;28 / 38&lt;/Text&gt;&#10;  &lt;/Box&gt;&#10;  &lt;Box style={{ flex: 1, padding: '8px 40px 0 40px', flexDirection: 'row', gap: 26 }}&gt;&#10;    &lt;Box style={{ flex: 5, justifyContent: 'center' }}&gt;&#10;      &lt;CodeBlock code={`@startuml&#10;class Library {&#10;  - name : String&#10;  + addBook(b : Book) : void&#10;  + findByIsbn(isbn : String) : Book&#10;}&#10;&#10;class Book {&#10;  - isbn : String&#10;  - title : String&#10;  + isAvailable() : boolean&#10;}&#10;&#10;class Member {&#10;  - id : String&#10;  - name : String&#10;  + borrow(b : Book) : void&#10;}&#10;&#10;Library &quot;1&quot; *-- &quot;0..*&quot; Book : holds&#10;Library &quot;1&quot; o-- &quot;0..*&quot; Member : registers&#10;@enduml`} language='text' width={600} fontSize={12.5} /&gt;&#10;    &lt;/Box&gt;&#10;    &lt;Box style={{ flex: 4, flexDirection: 'column', gap: 11, justifyContent: 'center' }}&gt;&#10;      {[&#10;        ['cube', 'class Name { ... }', 'Everything between the braces is the class box — name, attributes, operations, in that order.'],&#10;        ['grip-lines', 'The line between classes', 'Read it left to right: multiplicity, the line style, multiplicity, then a colon and the association name.'],&#10;        ['shapes', '*-- and o--', 'A filled diamond is composition: the parts die with the whole. A hollow one is aggregation. A bare -- is a plain association.'],&#10;      ].map(([icon, t, d]) =&gt; (&#10;        &lt;Box key={t} style={{ flexDirection: 'row', gap: 12, alignItems: 'flex-start', padding: '14px 16px', background: '#F7F9FC', borderRadius: 10, border: '1px solid #E5E7EB' }}&gt;&#10;          &lt;Box style={{ width: 38, height: 38, borderRadius: 9, background: '#E8EFF8', justifyContent: 'center', alignItems: 'center' }}&gt;&#10;            &lt;FAIcon name={icon} style={{ fill: '#1E4FA8', width: 18, height: 18 }} /&gt;&#10;          &lt;/Box&gt;&#10;          &lt;Box style={{ flex: 1, flexDirection: 'column', gap: 3 }}&gt;&#10;            &lt;Text style={{ fontSize: 15.5, fontWeight: 'bold', color: '#0E3F8C' }}&gt;{t}&lt;/Text&gt;&#10;            &lt;Text style={{ fontSize: 13.5, color: '#4A5568', lineHeight: 1.5 }}&gt;{d}&lt;/Text&gt;&#10;          &lt;/Box&gt;&#10;        &lt;/Box&gt;&#10;      ))}&#10;      &lt;Box style={{ padding: '12px 16px', background: '#F0F5FC', borderRadius: 9, borderLeft: '4px solid #1E4FA8' }}&gt;&#10;        &lt;Text style={{ fontSize: 13.5, color: '#0E3F8C', lineHeight: 1.5, fontWeight: 'bold' }}&gt;You will write exactly this file in Exercise 3.2 — with two lines left blank for you to fill in.&lt;/Text&gt;&#10;      &lt;/Box&gt;&#10;    &lt;/Box&gt;&#10;  &lt;/Box&gt;&#10;  &lt;Box style={{ height: 34, padding: '0 40px', flexDirection: 'row', alignItems: 'center', justifyContent: 'space-between' }}&gt;&#10;    &lt;Text style={{ fontSize: 13, color: '#8B97A8' }}&gt;ISAD · Fall 2026 · PlantUML renders in VS Code and on plantuml.com/plantuml&lt;/Text&gt;&#10;    &lt;Text style={{ fontSize: 14, color: '#1E4FA8', fontWeight: 'bold' }}&gt;28 / 38&lt;/Text&gt;&#10;  &lt;/Box&gt;&#10;&lt;/Slide&gt;"/>
+        <p:cNvPr id="432" name="" descr="&lt;Slide style={{ background: '#FFFFFF', padding: 0 }}&gt;&#10;  &lt;Box style={{ height: 72, background: '#1E4FA8', padding: '0 40px', flexDirection: 'row', alignItems: 'center', justifyContent: 'space-between' }}&gt;&#10;    &lt;Text style={{ fontSize: 15, color: '#B9CDF0', letterSpacing: 1 }}&gt;ISAD · INFORMATION SYSTEMS ANALYSIS &amp;amp; DESIGN&lt;/Text&gt;&#10;    &lt;Text style={{ fontSize: 15, color: '#B9CDF0' }}&gt;W03 · TOOLCHAIN&lt;/Text&gt;&#10;  &lt;/Box&gt;&#10;  &lt;Box style={{ padding: '14px 40px 0 40px', flexDirection: 'row', alignItems: 'center', justifyContent: 'space-between' }}&gt;&#10;    &lt;Text style={{ fontSize: 30, fontWeight: 'bold', color: '#0E3F8C' }}&gt;PlantUML by Example&lt;/Text&gt;&#10;    &lt;Text style={{ fontSize: 14, color: '#1E4FA8', fontWeight: 'bold' }}&gt;28 / 38&lt;/Text&gt;&#10;  &lt;/Box&gt;&#10;  &lt;Box style={{ flex: 1, padding: '8px 40px 0 40px', flexDirection: 'row', gap: 26 }}&gt;&#10;    &lt;Box style={{ flex: 5, justifyContent: 'center' }}&gt;&#10;      &lt;CodeBlock theme='one-dark-pro' code={`@startuml&#10;class Library {&#10;  - name : String&#10;  + addBook(b : Book) : void&#10;  + findByIsbn(isbn : String) : Book&#10;}&#10;&#10;class Book {&#10;  - isbn : String&#10;  - title : String&#10;  + isAvailable() : boolean&#10;}&#10;&#10;class Member {&#10;  - id : String&#10;  - name : String&#10;  + borrow(b : Book) : void&#10;}&#10;&#10;Library &quot;1&quot; *-- &quot;0..*&quot; Book : holds&#10;Library &quot;1&quot; o-- &quot;0..*&quot; Member : registers&#10;@enduml`} language='text' width={600} fontSize={12.5} /&gt;&#10;    &lt;/Box&gt;&#10;    &lt;Box style={{ flex: 4, flexDirection: 'column', gap: 11, justifyContent: 'center' }}&gt;&#10;      {[&#10;        ['cube', 'class Name { ... }', 'Everything between the braces is the class box — name, attributes, operations, in that order.'],&#10;        ['grip-lines', 'The line between classes', 'Read it left to right: multiplicity, the line style, multiplicity, then a colon and the association name.'],&#10;        ['shapes', '*-- and o--', 'A filled diamond is composition: the parts die with the whole. A hollow one is aggregation. A bare -- is a plain association.'],&#10;      ].map(([icon, t, d]) =&gt; (&#10;        &lt;Box key={t} style={{ flexDirection: 'row', gap: 12, alignItems: 'flex-start', padding: '14px 16px', background: '#F7F9FC', borderRadius: 10, border: '1px solid #E5E7EB' }}&gt;&#10;          &lt;Box style={{ width: 38, height: 38, borderRadius: 9, background: '#E8EFF8', justifyContent: 'center', alignItems: 'center' }}&gt;&#10;            &lt;FAIcon name={icon} style={{ fill: '#1E4FA8', width: 18, height: 18 }} /&gt;&#10;          &lt;/Box&gt;&#10;          &lt;Box style={{ flex: 1, flexDirection: 'column', gap: 3 }}&gt;&#10;            &lt;Text style={{ fontSize: 15.5, fontWeight: 'bold', color: '#0E3F8C' }}&gt;{t}&lt;/Text&gt;&#10;            &lt;Text style={{ fontSize: 13.5, color: '#4A5568', lineHeight: 1.5 }}&gt;{d}&lt;/Text&gt;&#10;          &lt;/Box&gt;&#10;        &lt;/Box&gt;&#10;      ))}&#10;      &lt;Box style={{ padding: '12px 16px', background: '#F0F5FC', borderRadius: 9, borderLeft: '4px solid #1E4FA8' }}&gt;&#10;        &lt;Text style={{ fontSize: 13.5, color: '#0E3F8C', lineHeight: 1.5, fontWeight: 'bold' }}&gt;You will write exactly this file in Exercise 3.2 — with two lines left blank for you to fill in.&lt;/Text&gt;&#10;      &lt;/Box&gt;&#10;    &lt;/Box&gt;&#10;  &lt;/Box&gt;&#10;  &lt;Box style={{ height: 34, padding: '0 40px', flexDirection: 'row', alignItems: 'center', justifyContent: 'space-between' }}&gt;&#10;    &lt;Text style={{ fontSize: 13, color: '#8B97A8' }}&gt;ISAD · Fall 2026 · PlantUML renders in VS Code and on plantuml.com/plantuml&lt;/Text&gt;&#10;    &lt;Text style={{ fontSize: 14, color: '#1E4FA8', fontWeight: 'bold' }}&gt;28 / 38&lt;/Text&gt;&#10;  &lt;/Box&gt;&#10;&lt;/Slide&gt;"/>
         <p:cNvGrpSpPr/>
         <p:nvPr/>
       </p:nvGrpSpPr>
@@ -17800,16 +17510,16 @@
         </p:nvSpPr>
         <p:spPr>
           <a:xfrm rot="0" flipH="0" flipV="0">
-            <a:off x="381000" y="1552575"/>
-            <a:ext cx="6210300" cy="4667250"/>
+            <a:off x="381000" y="2181225"/>
+            <a:ext cx="6210300" cy="3409950"/>
           </a:xfrm>
           <a:prstGeom prst="roundRect">
             <a:avLst>
-              <a:gd name="adj" fmla="val 1633"/>
+              <a:gd name="adj" fmla="val 2235"/>
             </a:avLst>
           </a:prstGeom>
           <a:solidFill>
-            <a:srgbClr val="F6F8FA"/>
+            <a:srgbClr val="0E1116"/>
           </a:solidFill>
           <a:ln/>
         </p:spPr>
@@ -17826,8 +17536,8 @@
         </p:nvSpPr>
         <p:spPr>
           <a:xfrm rot="0" flipH="0" flipV="0">
-            <a:off x="533400" y="1685925"/>
-            <a:ext cx="5905500" cy="4400550"/>
+            <a:off x="533400" y="2314575"/>
+            <a:ext cx="5905500" cy="3143250"/>
           </a:xfrm>
           <a:prstGeom prst="rect"/>
         </p:spPr>
@@ -17836,11 +17546,7 @@
             <a:normAutofit/>
           </a:bodyPr>
           <a:p>
-            <a:pPr>
-              <a:lnSpc>
-                <a:spcPct val="140000"/>
-              </a:lnSpc>
-            </a:pPr>
+            <a:pPr/>
             <a:r>
               <a:rPr sz="938">
                 <a:solidFill>
@@ -17849,355 +17555,25 @@
                 <a:latin typeface="Menlo"/>
                 <a:ea typeface="Menlo"/>
               </a:rPr>
-              <a:t>@startuml</a:t>
-            </a:r>
-            <a:endParaRPr/>
-          </a:p>
-          <a:p>
-            <a:pPr>
-              <a:lnSpc>
-                <a:spcPct val="140000"/>
-              </a:lnSpc>
-            </a:pPr>
-            <a:r>
-              <a:rPr sz="938">
-                <a:solidFill>
-                  <a:srgbClr val="E5E7EB"/>
-                </a:solidFill>
-                <a:latin typeface="Menlo"/>
-                <a:ea typeface="Menlo"/>
-              </a:rPr>
-              <a:t>class Library {</a:t>
-            </a:r>
-            <a:endParaRPr/>
-          </a:p>
-          <a:p>
-            <a:pPr>
-              <a:lnSpc>
-                <a:spcPct val="140000"/>
-              </a:lnSpc>
-            </a:pPr>
-            <a:r>
-              <a:rPr sz="938">
-                <a:solidFill>
-                  <a:srgbClr val="E5E7EB"/>
-                </a:solidFill>
-                <a:latin typeface="Menlo"/>
-                <a:ea typeface="Menlo"/>
-              </a:rPr>
-              <a:t>  - name : String</a:t>
-            </a:r>
-            <a:endParaRPr/>
-          </a:p>
-          <a:p>
-            <a:pPr>
-              <a:lnSpc>
-                <a:spcPct val="140000"/>
-              </a:lnSpc>
-            </a:pPr>
-            <a:r>
-              <a:rPr sz="938">
-                <a:solidFill>
-                  <a:srgbClr val="E5E7EB"/>
-                </a:solidFill>
-                <a:latin typeface="Menlo"/>
-                <a:ea typeface="Menlo"/>
-              </a:rPr>
-              <a:t>  + addBook(b : Book) : void</a:t>
-            </a:r>
-            <a:endParaRPr/>
-          </a:p>
-          <a:p>
-            <a:pPr>
-              <a:lnSpc>
-                <a:spcPct val="140000"/>
-              </a:lnSpc>
-            </a:pPr>
-            <a:r>
-              <a:rPr sz="938">
-                <a:solidFill>
-                  <a:srgbClr val="E5E7EB"/>
-                </a:solidFill>
-                <a:latin typeface="Menlo"/>
-                <a:ea typeface="Menlo"/>
-              </a:rPr>
-              <a:t>  + findByIsbn(isbn : String) : Book</a:t>
-            </a:r>
-            <a:endParaRPr/>
-          </a:p>
-          <a:p>
-            <a:pPr>
-              <a:lnSpc>
-                <a:spcPct val="140000"/>
-              </a:lnSpc>
-            </a:pPr>
-            <a:r>
-              <a:rPr sz="938">
-                <a:solidFill>
-                  <a:srgbClr val="E5E7EB"/>
-                </a:solidFill>
-                <a:latin typeface="Menlo"/>
-                <a:ea typeface="Menlo"/>
-              </a:rPr>
-              <a:t>}</a:t>
-            </a:r>
-            <a:endParaRPr/>
-          </a:p>
-          <a:p>
-            <a:pPr>
-              <a:lnSpc>
-                <a:spcPct val="140000"/>
-              </a:lnSpc>
-            </a:pPr>
-            <a:endParaRPr/>
-          </a:p>
-          <a:p>
-            <a:pPr>
-              <a:lnSpc>
-                <a:spcPct val="140000"/>
-              </a:lnSpc>
-            </a:pPr>
-            <a:r>
-              <a:rPr sz="938">
-                <a:solidFill>
-                  <a:srgbClr val="E5E7EB"/>
-                </a:solidFill>
-                <a:latin typeface="Menlo"/>
-                <a:ea typeface="Menlo"/>
-              </a:rPr>
-              <a:t>class Book {</a:t>
-            </a:r>
-            <a:endParaRPr/>
-          </a:p>
-          <a:p>
-            <a:pPr>
-              <a:lnSpc>
-                <a:spcPct val="140000"/>
-              </a:lnSpc>
-            </a:pPr>
-            <a:r>
-              <a:rPr sz="938">
-                <a:solidFill>
-                  <a:srgbClr val="E5E7EB"/>
-                </a:solidFill>
-                <a:latin typeface="Menlo"/>
-                <a:ea typeface="Menlo"/>
-              </a:rPr>
-              <a:t>  - isbn : String</a:t>
-            </a:r>
-            <a:endParaRPr/>
-          </a:p>
-          <a:p>
-            <a:pPr>
-              <a:lnSpc>
-                <a:spcPct val="140000"/>
-              </a:lnSpc>
-            </a:pPr>
-            <a:r>
-              <a:rPr sz="938">
-                <a:solidFill>
-                  <a:srgbClr val="E5E7EB"/>
-                </a:solidFill>
-                <a:latin typeface="Menlo"/>
-                <a:ea typeface="Menlo"/>
-              </a:rPr>
-              <a:t>  - title : String</a:t>
-            </a:r>
-            <a:endParaRPr/>
-          </a:p>
-          <a:p>
-            <a:pPr>
-              <a:lnSpc>
-                <a:spcPct val="140000"/>
-              </a:lnSpc>
-            </a:pPr>
-            <a:r>
-              <a:rPr sz="938">
-                <a:solidFill>
-                  <a:srgbClr val="E5E7EB"/>
-                </a:solidFill>
-                <a:latin typeface="Menlo"/>
-                <a:ea typeface="Menlo"/>
-              </a:rPr>
-              <a:t>  + isAvailable() : boolean</a:t>
-            </a:r>
-            <a:endParaRPr/>
-          </a:p>
-          <a:p>
-            <a:pPr>
-              <a:lnSpc>
-                <a:spcPct val="140000"/>
-              </a:lnSpc>
-            </a:pPr>
-            <a:r>
-              <a:rPr sz="938">
-                <a:solidFill>
-                  <a:srgbClr val="E5E7EB"/>
-                </a:solidFill>
-                <a:latin typeface="Menlo"/>
-                <a:ea typeface="Menlo"/>
-              </a:rPr>
-              <a:t>}</a:t>
-            </a:r>
-            <a:endParaRPr/>
-          </a:p>
-          <a:p>
-            <a:pPr>
-              <a:lnSpc>
-                <a:spcPct val="140000"/>
-              </a:lnSpc>
-            </a:pPr>
-            <a:endParaRPr/>
-          </a:p>
-          <a:p>
-            <a:pPr>
-              <a:lnSpc>
-                <a:spcPct val="140000"/>
-              </a:lnSpc>
-            </a:pPr>
-            <a:r>
-              <a:rPr sz="938">
-                <a:solidFill>
-                  <a:srgbClr val="E5E7EB"/>
-                </a:solidFill>
-                <a:latin typeface="Menlo"/>
-                <a:ea typeface="Menlo"/>
-              </a:rPr>
-              <a:t>class Member {</a:t>
-            </a:r>
-            <a:endParaRPr/>
-          </a:p>
-          <a:p>
-            <a:pPr>
-              <a:lnSpc>
-                <a:spcPct val="140000"/>
-              </a:lnSpc>
-            </a:pPr>
-            <a:r>
-              <a:rPr sz="938">
-                <a:solidFill>
-                  <a:srgbClr val="E5E7EB"/>
-                </a:solidFill>
-                <a:latin typeface="Menlo"/>
-                <a:ea typeface="Menlo"/>
-              </a:rPr>
-              <a:t>  - id : String</a:t>
-            </a:r>
-            <a:endParaRPr/>
-          </a:p>
-          <a:p>
-            <a:pPr>
-              <a:lnSpc>
-                <a:spcPct val="140000"/>
-              </a:lnSpc>
-            </a:pPr>
-            <a:r>
-              <a:rPr sz="938">
-                <a:solidFill>
-                  <a:srgbClr val="E5E7EB"/>
-                </a:solidFill>
-                <a:latin typeface="Menlo"/>
-                <a:ea typeface="Menlo"/>
-              </a:rPr>
-              <a:t>  - name : String</a:t>
-            </a:r>
-            <a:endParaRPr/>
-          </a:p>
-          <a:p>
-            <a:pPr>
-              <a:lnSpc>
-                <a:spcPct val="140000"/>
-              </a:lnSpc>
-            </a:pPr>
-            <a:r>
-              <a:rPr sz="938">
-                <a:solidFill>
-                  <a:srgbClr val="E5E7EB"/>
-                </a:solidFill>
-                <a:latin typeface="Menlo"/>
-                <a:ea typeface="Menlo"/>
-              </a:rPr>
-              <a:t>  + borrow(b : Book) : void</a:t>
-            </a:r>
-            <a:endParaRPr/>
-          </a:p>
-          <a:p>
-            <a:pPr>
-              <a:lnSpc>
-                <a:spcPct val="140000"/>
-              </a:lnSpc>
-            </a:pPr>
-            <a:r>
-              <a:rPr sz="938">
-                <a:solidFill>
-                  <a:srgbClr val="E5E7EB"/>
-                </a:solidFill>
-                <a:latin typeface="Menlo"/>
-                <a:ea typeface="Menlo"/>
-              </a:rPr>
-              <a:t>}</a:t>
-            </a:r>
-            <a:endParaRPr/>
-          </a:p>
-          <a:p>
-            <a:pPr>
-              <a:lnSpc>
-                <a:spcPct val="140000"/>
-              </a:lnSpc>
-            </a:pPr>
-            <a:endParaRPr/>
-          </a:p>
-          <a:p>
-            <a:pPr>
-              <a:lnSpc>
-                <a:spcPct val="140000"/>
-              </a:lnSpc>
-            </a:pPr>
-            <a:r>
-              <a:rPr sz="938">
-                <a:solidFill>
-                  <a:srgbClr val="E5E7EB"/>
-                </a:solidFill>
-                <a:latin typeface="Menlo"/>
-                <a:ea typeface="Menlo"/>
-              </a:rPr>
-              <a:t>Library "1" *-- "0..*" Book : holds</a:t>
-            </a:r>
-            <a:endParaRPr/>
-          </a:p>
-          <a:p>
-            <a:pPr>
-              <a:lnSpc>
-                <a:spcPct val="140000"/>
-              </a:lnSpc>
-            </a:pPr>
-            <a:r>
-              <a:rPr sz="938">
-                <a:solidFill>
-                  <a:srgbClr val="E5E7EB"/>
-                </a:solidFill>
-                <a:latin typeface="Menlo"/>
-                <a:ea typeface="Menlo"/>
-              </a:rPr>
-              <a:t>Library "1" o-- "0..*" Member : registers</a:t>
-            </a:r>
-            <a:endParaRPr/>
-          </a:p>
-          <a:p>
-            <a:pPr>
-              <a:lnSpc>
-                <a:spcPct val="140000"/>
-              </a:lnSpc>
-            </a:pPr>
-            <a:r>
-              <a:rPr sz="938">
-                <a:solidFill>
-                  <a:srgbClr val="E5E7EB"/>
-                </a:solidFill>
-                <a:latin typeface="Menlo"/>
-                <a:ea typeface="Menlo"/>
-              </a:rPr>
-              <a:t>@enduml</a:t>
+              <a:t>@startuml
+class Library {
+  - name : String
+  + addBook(b : Book) : void
+  + findByIsbn(isbn : String) : Book
+}
+class Book {
+  - isbn : String
+  - title : String
+  + isAvailable() : boolean
+}
+class Member {
+  - id : String
+  - name : String
+  + borrow(b : Book) : void
+}
+Library "1" *-- "0..*" Book : holds
+Library "1" o-- "0..*" Member : registers
+@enduml</a:t>
             </a:r>
             <a:endParaRPr/>
           </a:p>
@@ -18213,7 +17589,7 @@
   <p:cSld>
     <p:spTree>
       <p:nvGrpSpPr>
-        <p:cNvPr id="461" name="" descr="&lt;Slide style={{ background: '#FFFFFF', padding: 0 }}&gt;&#10;  &lt;Box style={{ height: 72, background: '#1E4FA8', padding: '0 40px', flexDirection: 'row', alignItems: 'center', justifyContent: 'space-between' }}&gt;&#10;    &lt;Text style={{ fontSize: 15, color: '#B9CDF0', letterSpacing: 1 }}&gt;ISAD · INFORMATION SYSTEMS ANALYSIS &amp;amp; DESIGN&lt;/Text&gt;&#10;    &lt;Text style={{ fontSize: 15, color: '#B9CDF0' }}&gt;W03 · TOOLCHAIN&lt;/Text&gt;&#10;  &lt;/Box&gt;&#10;  &lt;Box style={{ padding: '14px 40px 0 40px', flexDirection: 'row', alignItems: 'center', justifyContent: 'space-between' }}&gt;&#10;    &lt;Text style={{ fontSize: 30, fontWeight: 'bold', color: '#0E3F8C' }}&gt;Version-Controlling Diagrams&lt;/Text&gt;&#10;    &lt;Text style={{ fontSize: 14, color: '#1E4FA8', fontWeight: 'bold' }}&gt;29 / 38&lt;/Text&gt;&#10;  &lt;/Box&gt;&#10;  &lt;Box style={{ flex: 1, padding: '8px 40px 0 40px', flexDirection: 'row', gap: 24 }}&gt;&#10;    &lt;Box style={{ flex: 5, flexDirection: 'column', gap: 8, justifyContent: 'center' }}&gt;&#10;      &lt;Box style={{ flexDirection: 'row', alignItems: 'center', gap: 8 }}&gt;&#10;        &lt;Box style={{ padding: '3px 10px', background: '#FDF3F3', borderRadius: 6, border: '1px solid #F0C9C7' }}&gt;&#10;          &lt;Text style={{ fontSize: 12, color: '#D9534F', fontWeight: 'bold' }}&gt;.drawio&lt;/Text&gt;&#10;        &lt;/Box&gt;&#10;        &lt;Text style={{ fontSize: 12.5, color: '#8B97A8' }}&gt;one box moved — 340 lines rewritten&lt;/Text&gt;&#10;      &lt;/Box&gt;&#10;      &lt;CodeBlock code={`-  &lt;mxCell id=&quot;9&quot; value=&quot;Book&quot; style=&quot;rounded=0;&#10;-     whiteSpace=wrap;html=1;&quot; vertex=&quot;1&quot; parent=&quot;1&quot;&gt;&#10;-    &lt;mxGeometry x=&quot;320&quot; y=&quot;80&quot; width=&quot;160&quot;&#10;-       height=&quot;60&quot; as=&quot;geometry&quot; /&gt;&#10;+  &lt;mxCell id=&quot;9&quot; value=&quot;Book&quot; style=&quot;rounded=0;&#10;+     whiteSpace=wrap;html=1;fillColor=#E8EFF8;&quot;&#10;+     vertex=&quot;1&quot; parent=&quot;1&quot;&gt;&#10;+    &lt;mxGeometry x=&quot;320&quot; y=&quot;80&quot; width=&quot;160&quot;&#10;+       height=&quot;86&quot; as=&quot;geometry&quot; /&gt;`} language='text' width={600} fontSize={10.5} /&gt;&#10;      &lt;Box style={{ flexDirection: 'row', alignItems: 'center', gap: 8 }}&gt;&#10;        &lt;Box style={{ padding: '3px 10px', background: '#E8EFF8', borderRadius: 6, border: '1px solid #C9D9F2' }}&gt;&#10;          &lt;Text style={{ fontSize: 12, color: '#1E4FA8', fontWeight: 'bold' }}&gt;.puml&lt;/Text&gt;&#10;        &lt;/Box&gt;&#10;        &lt;Text style={{ fontSize: 12.5, color: '#8B97A8' }}&gt;the same edit — two lines&lt;/Text&gt;&#10;      &lt;/Box&gt;&#10;      &lt;CodeBlock code={`- Member &quot;1&quot;     -- &quot;0..*&quot; Book : borrows&#10;+ Member &quot;0..1&quot;  -- &quot;0..*&quot; Book : borrows&#10;+ Member &quot;1&quot;     -- &quot;0..1&quot; Library : registers`} language='text' width={600} fontSize={11.5} /&gt;&#10;    &lt;/Box&gt;&#10;    &lt;Box style={{ flex: 4, flexDirection: 'column', gap: 11, justifyContent: 'center' }}&gt;&#10;      {[&#10;        ['code-branch', 'A diff you can actually read', 'Two lines instead of three hundred. A reviewer can see what changed and disagree with it in writing.'],&#10;        ['user-clock', 'History becomes evidence', 'The log shows who added the multiplicity and when. That is what makes the contribution review possible at all.'],&#10;        ['users', 'This is why it touches your grade', 'Individual work is 40% of the mark and is assessed from the repository. If your edit is invisible, it cannot be counted.'],&#10;      ].map(([icon, t, d]) =&gt; (&#10;        &lt;Box key={t} style={{ flexDirection: 'row', gap: 12, alignItems: 'flex-start', padding: '13px 16px', background: '#F7F9FC', borderRadius: 10, border: '1px solid #E5E7EB' }}&gt;&#10;          &lt;Box style={{ width: 36, height: 36, borderRadius: 9, background: '#E8EFF8', justifyContent: 'center', alignItems: 'center' }}&gt;&#10;            &lt;FAIcon name={icon} style={{ fill: '#1E4FA8', width: 17, height: 17 }} /&gt;&#10;          &lt;/Box&gt;&#10;          &lt;Box style={{ flex: 1, flexDirection: 'column', gap: 2 }}&gt;&#10;            &lt;Text style={{ fontSize: 15, fontWeight: 'bold', color: '#0E3F8C' }}&gt;{t}&lt;/Text&gt;&#10;            &lt;Text style={{ fontSize: 13, color: '#4A5568', lineHeight: 1.45 }}&gt;{d}&lt;/Text&gt;&#10;          &lt;/Box&gt;&#10;        &lt;/Box&gt;&#10;      ))}&#10;      &lt;Box style={{ padding: '12px 16px', background: '#0E3F8C', borderRadius: 9 }}&gt;&#10;        &lt;Text style={{ fontSize: 13.5, color: '#FFFFFF', lineHeight: 1.5 }}&gt;A PNG with no source file is worth zero. The source is the deliverable; the image is only its shadow.&lt;/Text&gt;&#10;      &lt;/Box&gt;&#10;    &lt;/Box&gt;&#10;  &lt;/Box&gt;&#10;  &lt;Box style={{ height: 32, padding: '0 40px', flexDirection: 'row', alignItems: 'center', justifyContent: 'space-between' }}&gt;&#10;    &lt;Text style={{ fontSize: 13, color: '#8B97A8' }}&gt;ISAD · Fall 2026&lt;/Text&gt;&#10;    &lt;Text style={{ fontSize: 14, color: '#1E4FA8', fontWeight: 'bold' }}&gt;29 / 38&lt;/Text&gt;&#10;  &lt;/Box&gt;&#10;&lt;/Slide&gt;"/>
+        <p:cNvPr id="461" name="" descr="&lt;Slide style={{ background: '#FFFFFF', padding: 0 }}&gt;&#10;  &lt;Box style={{ height: 72, background: '#1E4FA8', padding: '0 40px', flexDirection: 'row', alignItems: 'center', justifyContent: 'space-between' }}&gt;&#10;    &lt;Text style={{ fontSize: 15, color: '#B9CDF0', letterSpacing: 1 }}&gt;ISAD · INFORMATION SYSTEMS ANALYSIS &amp;amp; DESIGN&lt;/Text&gt;&#10;    &lt;Text style={{ fontSize: 15, color: '#B9CDF0' }}&gt;W03 · TOOLCHAIN&lt;/Text&gt;&#10;  &lt;/Box&gt;&#10;  &lt;Box style={{ padding: '14px 40px 0 40px', flexDirection: 'row', alignItems: 'center', justifyContent: 'space-between' }}&gt;&#10;    &lt;Text style={{ fontSize: 30, fontWeight: 'bold', color: '#0E3F8C' }}&gt;Version-Controlling Diagrams&lt;/Text&gt;&#10;    &lt;Text style={{ fontSize: 14, color: '#1E4FA8', fontWeight: 'bold' }}&gt;29 / 38&lt;/Text&gt;&#10;  &lt;/Box&gt;&#10;  &lt;Box style={{ flex: 1, padding: '8px 40px 0 40px', flexDirection: 'row', gap: 24 }}&gt;&#10;    &lt;Box style={{ flex: 5, flexDirection: 'column', gap: 8, justifyContent: 'center' }}&gt;&#10;      &lt;Box style={{ flexDirection: 'row', alignItems: 'center', gap: 8 }}&gt;&#10;        &lt;Box style={{ padding: '3px 10px', background: '#FDF3F3', borderRadius: 6, border: '1px solid #F0C9C7' }}&gt;&#10;          &lt;Text style={{ fontSize: 12, color: '#D9534F', fontWeight: 'bold' }}&gt;.drawio&lt;/Text&gt;&#10;        &lt;/Box&gt;&#10;        &lt;Text style={{ fontSize: 12.5, color: '#8B97A8' }}&gt;one box moved — 340 lines rewritten&lt;/Text&gt;&#10;      &lt;/Box&gt;&#10;      &lt;CodeBlock theme='one-dark-pro' code={`-  &lt;mxCell id=&quot;9&quot; value=&quot;Book&quot; style=&quot;rounded=0;&#10;-     whiteSpace=wrap;html=1;&quot; vertex=&quot;1&quot; parent=&quot;1&quot;&gt;&#10;-    &lt;mxGeometry x=&quot;320&quot; y=&quot;80&quot; width=&quot;160&quot;&#10;-       height=&quot;60&quot; as=&quot;geometry&quot; /&gt;&#10;+  &lt;mxCell id=&quot;9&quot; value=&quot;Book&quot; style=&quot;rounded=0;&#10;+     whiteSpace=wrap;html=1;fillColor=#E8EFF8;&quot;&#10;+     vertex=&quot;1&quot; parent=&quot;1&quot;&gt;&#10;+    &lt;mxGeometry x=&quot;320&quot; y=&quot;80&quot; width=&quot;160&quot;&#10;+       height=&quot;86&quot; as=&quot;geometry&quot; /&gt;`} language='text' width={600} fontSize={10.5} /&gt;&#10;      &lt;Box style={{ flexDirection: 'row', alignItems: 'center', gap: 8 }}&gt;&#10;        &lt;Box style={{ padding: '3px 10px', background: '#E8EFF8', borderRadius: 6, border: '1px solid #C9D9F2' }}&gt;&#10;          &lt;Text style={{ fontSize: 12, color: '#1E4FA8', fontWeight: 'bold' }}&gt;.puml&lt;/Text&gt;&#10;        &lt;/Box&gt;&#10;        &lt;Text style={{ fontSize: 12.5, color: '#8B97A8' }}&gt;the same edit — two lines&lt;/Text&gt;&#10;      &lt;/Box&gt;&#10;      &lt;CodeBlock theme='one-dark-pro' code={`- Member &quot;1&quot;     -- &quot;0..*&quot; Book : borrows&#10;+ Member &quot;0..1&quot;  -- &quot;0..*&quot; Book : borrows&#10;+ Member &quot;1&quot;     -- &quot;0..1&quot; Library : registers`} language='text' width={600} fontSize={11.5} /&gt;&#10;    &lt;/Box&gt;&#10;    &lt;Box style={{ flex: 4, flexDirection: 'column', gap: 11, justifyContent: 'center' }}&gt;&#10;      {[&#10;        ['code-branch', 'A diff you can actually read', 'Two lines instead of three hundred. A reviewer can see what changed and disagree with it in writing.'],&#10;        ['user-clock', 'History becomes evidence', 'The log shows who added the multiplicity and when. That is what makes the contribution review possible at all.'],&#10;        ['users', 'This is why it touches your grade', 'Individual work is 40% of the mark and is assessed from the repository. If your edit is invisible, it cannot be counted.'],&#10;      ].map(([icon, t, d]) =&gt; (&#10;        &lt;Box key={t} style={{ flexDirection: 'row', gap: 12, alignItems: 'flex-start', padding: '13px 16px', background: '#F7F9FC', borderRadius: 10, border: '1px solid #E5E7EB' }}&gt;&#10;          &lt;Box style={{ width: 36, height: 36, borderRadius: 9, background: '#E8EFF8', justifyContent: 'center', alignItems: 'center' }}&gt;&#10;            &lt;FAIcon name={icon} style={{ fill: '#1E4FA8', width: 17, height: 17 }} /&gt;&#10;          &lt;/Box&gt;&#10;          &lt;Box style={{ flex: 1, flexDirection: 'column', gap: 2 }}&gt;&#10;            &lt;Text style={{ fontSize: 15, fontWeight: 'bold', color: '#0E3F8C' }}&gt;{t}&lt;/Text&gt;&#10;            &lt;Text style={{ fontSize: 13, color: '#4A5568', lineHeight: 1.45 }}&gt;{d}&lt;/Text&gt;&#10;          &lt;/Box&gt;&#10;        &lt;/Box&gt;&#10;      ))}&#10;      &lt;Box style={{ padding: '12px 16px', background: '#0E3F8C', borderRadius: 9 }}&gt;&#10;        &lt;Text style={{ fontSize: 13.5, color: '#FFFFFF', lineHeight: 1.5 }}&gt;A PNG with no source file is worth zero. The source is the deliverable; the image is only its shadow.&lt;/Text&gt;&#10;      &lt;/Box&gt;&#10;    &lt;/Box&gt;&#10;  &lt;/Box&gt;&#10;  &lt;Box style={{ height: 32, padding: '0 40px', flexDirection: 'row', alignItems: 'center', justifyContent: 'space-between' }}&gt;&#10;    &lt;Text style={{ fontSize: 13, color: '#8B97A8' }}&gt;ISAD · Fall 2026&lt;/Text&gt;&#10;    &lt;Text style={{ fontSize: 14, color: '#1E4FA8', fontWeight: 'bold' }}&gt;29 / 38&lt;/Text&gt;&#10;  &lt;/Box&gt;&#10;&lt;/Slide&gt;"/>
         <p:cNvGrpSpPr/>
         <p:nvPr/>
       </p:nvGrpSpPr>
@@ -18421,7 +17797,7 @@
         </p:nvSpPr>
         <p:spPr>
           <a:xfrm rot="0" flipH="0" flipV="0">
-            <a:off x="381000" y="2286000"/>
+            <a:off x="381000" y="2571750"/>
             <a:ext cx="600075" cy="200025"/>
           </a:xfrm>
           <a:prstGeom prst="roundRect">
@@ -18452,7 +17828,7 @@
         </p:nvSpPr>
         <p:spPr>
           <a:xfrm rot="0" flipH="0" flipV="0">
-            <a:off x="476250" y="2314575"/>
+            <a:off x="476250" y="2600325"/>
             <a:ext cx="409575" cy="142875"/>
           </a:xfrm>
           <a:prstGeom prst="rect"/>
@@ -18487,7 +17863,7 @@
         </p:nvSpPr>
         <p:spPr>
           <a:xfrm rot="0" flipH="0" flipV="0">
-            <a:off x="1057275" y="2314575"/>
+            <a:off x="1057275" y="2600325"/>
             <a:ext cx="1971675" cy="142875"/>
           </a:xfrm>
           <a:prstGeom prst="rect"/>
@@ -18522,7 +17898,7 @@
         </p:nvSpPr>
         <p:spPr>
           <a:xfrm rot="0" flipH="0" flipV="0">
-            <a:off x="381000" y="4419600"/>
+            <a:off x="381000" y="4276725"/>
             <a:ext cx="495300" cy="200025"/>
           </a:xfrm>
           <a:prstGeom prst="roundRect">
@@ -18553,7 +17929,7 @@
         </p:nvSpPr>
         <p:spPr>
           <a:xfrm rot="0" flipH="0" flipV="0">
-            <a:off x="476250" y="4448175"/>
+            <a:off x="476250" y="4305300"/>
             <a:ext cx="304800" cy="142875"/>
           </a:xfrm>
           <a:prstGeom prst="rect"/>
@@ -18588,7 +17964,7 @@
         </p:nvSpPr>
         <p:spPr>
           <a:xfrm rot="0" flipH="0" flipV="0">
-            <a:off x="952500" y="4448175"/>
+            <a:off x="952500" y="4305300"/>
             <a:ext cx="1371600" cy="142875"/>
           </a:xfrm>
           <a:prstGeom prst="rect"/>
@@ -19236,16 +18612,16 @@
         </p:nvSpPr>
         <p:spPr>
           <a:xfrm rot="0" flipH="0" flipV="0">
-            <a:off x="381000" y="2562225"/>
-            <a:ext cx="6219825" cy="1781175"/>
+            <a:off x="381000" y="2847975"/>
+            <a:ext cx="6219825" cy="1352550"/>
           </a:xfrm>
           <a:prstGeom prst="roundRect">
             <a:avLst>
-              <a:gd name="adj" fmla="val 4278"/>
+              <a:gd name="adj" fmla="val 5634"/>
             </a:avLst>
           </a:prstGeom>
           <a:solidFill>
-            <a:srgbClr val="F6F8FA"/>
+            <a:srgbClr val="0E1116"/>
           </a:solidFill>
           <a:ln/>
         </p:spPr>
@@ -19262,8 +18638,8 @@
         </p:nvSpPr>
         <p:spPr>
           <a:xfrm rot="0" flipH="0" flipV="0">
-            <a:off x="533400" y="2695575"/>
-            <a:ext cx="5915025" cy="1514475"/>
+            <a:off x="533400" y="2981325"/>
+            <a:ext cx="5915025" cy="1085850"/>
           </a:xfrm>
           <a:prstGeom prst="rect"/>
         </p:spPr>
@@ -19272,11 +18648,7 @@
             <a:normAutofit/>
           </a:bodyPr>
           <a:p>
-            <a:pPr>
-              <a:lnSpc>
-                <a:spcPct val="140000"/>
-              </a:lnSpc>
-            </a:pPr>
+            <a:pPr/>
             <a:r>
               <a:rPr sz="788">
                 <a:solidFill>
@@ -19285,151 +18657,15 @@
                 <a:latin typeface="Menlo"/>
                 <a:ea typeface="Menlo"/>
               </a:rPr>
-              <a:t>-  &lt;mxCell id="9" value="Book" style="rounded=0;</a:t>
-            </a:r>
-            <a:endParaRPr/>
-          </a:p>
-          <a:p>
-            <a:pPr>
-              <a:lnSpc>
-                <a:spcPct val="140000"/>
-              </a:lnSpc>
-            </a:pPr>
-            <a:r>
-              <a:rPr sz="788">
-                <a:solidFill>
-                  <a:srgbClr val="E5E7EB"/>
-                </a:solidFill>
-                <a:latin typeface="Menlo"/>
-                <a:ea typeface="Menlo"/>
-              </a:rPr>
-              <a:t>-     whiteSpace=wrap;html=1;" vertex="1" parent="1"&gt;</a:t>
-            </a:r>
-            <a:endParaRPr/>
-          </a:p>
-          <a:p>
-            <a:pPr>
-              <a:lnSpc>
-                <a:spcPct val="140000"/>
-              </a:lnSpc>
-            </a:pPr>
-            <a:r>
-              <a:rPr sz="788">
-                <a:solidFill>
-                  <a:srgbClr val="E5E7EB"/>
-                </a:solidFill>
-                <a:latin typeface="Menlo"/>
-                <a:ea typeface="Menlo"/>
-              </a:rPr>
-              <a:t>-    &lt;mxGeometry x="320" y="80" width="160"</a:t>
-            </a:r>
-            <a:endParaRPr/>
-          </a:p>
-          <a:p>
-            <a:pPr>
-              <a:lnSpc>
-                <a:spcPct val="140000"/>
-              </a:lnSpc>
-            </a:pPr>
-            <a:r>
-              <a:rPr sz="788">
-                <a:solidFill>
-                  <a:srgbClr val="E5E7EB"/>
-                </a:solidFill>
-                <a:latin typeface="Menlo"/>
-                <a:ea typeface="Menlo"/>
-              </a:rPr>
-              <a:t>-       height="60" as="geometry" /&gt;</a:t>
-            </a:r>
-            <a:endParaRPr/>
-          </a:p>
-          <a:p>
-            <a:pPr>
-              <a:lnSpc>
-                <a:spcPct val="140000"/>
-              </a:lnSpc>
-            </a:pPr>
-            <a:r>
-              <a:rPr sz="788">
-                <a:solidFill>
-                  <a:srgbClr val="E5E7EB"/>
-                </a:solidFill>
-                <a:latin typeface="Menlo"/>
-                <a:ea typeface="Menlo"/>
-              </a:rPr>
-              <a:t>+  &lt;mxCell id="9" value="Book" style="rounded=0;</a:t>
-            </a:r>
-            <a:endParaRPr/>
-          </a:p>
-          <a:p>
-            <a:pPr>
-              <a:lnSpc>
-                <a:spcPct val="140000"/>
-              </a:lnSpc>
-            </a:pPr>
-            <a:r>
-              <a:rPr sz="788">
-                <a:solidFill>
-                  <a:srgbClr val="E5E7EB"/>
-                </a:solidFill>
-                <a:latin typeface="Menlo"/>
-                <a:ea typeface="Menlo"/>
-              </a:rPr>
-              <a:t>+     whiteSpace=wrap;html=1;fillColor=#E8EFF8;"</a:t>
-            </a:r>
-            <a:endParaRPr/>
-          </a:p>
-          <a:p>
-            <a:pPr>
-              <a:lnSpc>
-                <a:spcPct val="140000"/>
-              </a:lnSpc>
-            </a:pPr>
-            <a:r>
-              <a:rPr sz="788">
-                <a:solidFill>
-                  <a:srgbClr val="E5E7EB"/>
-                </a:solidFill>
-                <a:latin typeface="Menlo"/>
-                <a:ea typeface="Menlo"/>
-              </a:rPr>
-              <a:t>+     vertex="1" parent="1"&gt;</a:t>
-            </a:r>
-            <a:endParaRPr/>
-          </a:p>
-          <a:p>
-            <a:pPr>
-              <a:lnSpc>
-                <a:spcPct val="140000"/>
-              </a:lnSpc>
-            </a:pPr>
-            <a:r>
-              <a:rPr sz="788">
-                <a:solidFill>
-                  <a:srgbClr val="E5E7EB"/>
-                </a:solidFill>
-                <a:latin typeface="Menlo"/>
-                <a:ea typeface="Menlo"/>
-              </a:rPr>
-              <a:t>+    &lt;mxGeometry x="320" y="80" width="160"</a:t>
-            </a:r>
-            <a:endParaRPr/>
-          </a:p>
-          <a:p>
-            <a:pPr>
-              <a:lnSpc>
-                <a:spcPct val="140000"/>
-              </a:lnSpc>
-            </a:pPr>
-            <a:r>
-              <a:rPr sz="788">
-                <a:solidFill>
-                  <a:srgbClr val="E5E7EB"/>
-                </a:solidFill>
-                <a:latin typeface="Menlo"/>
-                <a:ea typeface="Menlo"/>
-              </a:rPr>
-              <a:t>+       height="86" as="geometry" /&gt;</a:t>
+              <a:t>-  &lt;mxCell id="9" value="Book" style="rounded=0;
+-     whiteSpace=wrap;html=1;" vertex="1" parent="1"&gt;
+-    &lt;mxGeometry x="320" y="80" width="160"
+-       height="60" as="geometry" /&gt;
++  &lt;mxCell id="9" value="Book" style="rounded=0;
++     whiteSpace=wrap;html=1;fillColor=#E8EFF8;"
++     vertex="1" parent="1"&gt;
++    &lt;mxGeometry x="320" y="80" width="160"
++       height="86" as="geometry" /&gt;</a:t>
             </a:r>
             <a:endParaRPr/>
           </a:p>
@@ -19443,16 +18679,16 @@
         </p:nvSpPr>
         <p:spPr>
           <a:xfrm rot="0" flipH="0" flipV="0">
-            <a:off x="381000" y="4695825"/>
-            <a:ext cx="6219825" cy="819150"/>
+            <a:off x="381000" y="4552950"/>
+            <a:ext cx="6219825" cy="666750"/>
           </a:xfrm>
           <a:prstGeom prst="roundRect">
             <a:avLst>
-              <a:gd name="adj" fmla="val 9302"/>
+              <a:gd name="adj" fmla="val 11429"/>
             </a:avLst>
           </a:prstGeom>
           <a:solidFill>
-            <a:srgbClr val="F6F8FA"/>
+            <a:srgbClr val="0E1116"/>
           </a:solidFill>
           <a:ln/>
         </p:spPr>
@@ -19469,8 +18705,8 @@
         </p:nvSpPr>
         <p:spPr>
           <a:xfrm rot="0" flipH="0" flipV="0">
-            <a:off x="533400" y="4829175"/>
-            <a:ext cx="5915025" cy="552450"/>
+            <a:off x="533400" y="4686300"/>
+            <a:ext cx="5915025" cy="400050"/>
           </a:xfrm>
           <a:prstGeom prst="rect"/>
         </p:spPr>
@@ -19479,11 +18715,7 @@
             <a:normAutofit/>
           </a:bodyPr>
           <a:p>
-            <a:pPr>
-              <a:lnSpc>
-                <a:spcPct val="140000"/>
-              </a:lnSpc>
-            </a:pPr>
+            <a:pPr/>
             <a:r>
               <a:rPr sz="863">
                 <a:solidFill>
@@ -19492,43 +18724,9 @@
                 <a:latin typeface="Menlo"/>
                 <a:ea typeface="Menlo"/>
               </a:rPr>
-              <a:t>- Member "1"     -- "0..*" Book : borrows</a:t>
-            </a:r>
-            <a:endParaRPr/>
-          </a:p>
-          <a:p>
-            <a:pPr>
-              <a:lnSpc>
-                <a:spcPct val="140000"/>
-              </a:lnSpc>
-            </a:pPr>
-            <a:r>
-              <a:rPr sz="863">
-                <a:solidFill>
-                  <a:srgbClr val="E5E7EB"/>
-                </a:solidFill>
-                <a:latin typeface="Menlo"/>
-                <a:ea typeface="Menlo"/>
-              </a:rPr>
-              <a:t>+ Member "0..1"  -- "0..*" Book : borrows</a:t>
-            </a:r>
-            <a:endParaRPr/>
-          </a:p>
-          <a:p>
-            <a:pPr>
-              <a:lnSpc>
-                <a:spcPct val="140000"/>
-              </a:lnSpc>
-            </a:pPr>
-            <a:r>
-              <a:rPr sz="863">
-                <a:solidFill>
-                  <a:srgbClr val="E5E7EB"/>
-                </a:solidFill>
-                <a:latin typeface="Menlo"/>
-                <a:ea typeface="Menlo"/>
-              </a:rPr>
-              <a:t>+ Member "1"     -- "0..1" Library : registers</a:t>
+              <a:t>- Member "1"     -- "0..*" Book : borrows
++ Member "0..1"  -- "0..*" Book : borrows
++ Member "1"     -- "0..1" Library : registers</a:t>
             </a:r>
             <a:endParaRPr/>
           </a:p>
@@ -24409,7 +23607,7 @@
   <p:cSld>
     <p:spTree>
       <p:nvGrpSpPr>
-        <p:cNvPr id="621" name="" descr="&lt;Slide style={{ background: '#FFFFFF', padding: 0 }}&gt;&#10;  &lt;Box style={{ height: 72, background: '#1E4FA8', padding: '0 40px', flexDirection: 'row', alignItems: 'center', justifyContent: 'space-between' }}&gt;&#10;    &lt;Text style={{ fontSize: 15, color: '#B9CDF0', letterSpacing: 1 }}&gt;ISAD · INFORMATION SYSTEMS ANALYSIS &amp;amp; DESIGN&lt;/Text&gt;&#10;    &lt;Text style={{ fontSize: 15, color: '#B9CDF0' }}&gt;W03 · LAB&lt;/Text&gt;&#10;  &lt;/Box&gt;&#10;  &lt;Box style={{ padding: '14px 40px 0 40px', flexDirection: 'row', alignItems: 'center', justifyContent: 'space-between' }}&gt;&#10;    &lt;Text style={{ fontSize: 30, fontWeight: 'bold', color: '#0E3F8C' }}&gt;Exercise 3.2 — Library Model&lt;/Text&gt;&#10;    &lt;Text style={{ fontSize: 14, color: '#1E4FA8', fontWeight: 'bold' }}&gt;34 / 38&lt;/Text&gt;&#10;  &lt;/Box&gt;&#10;  &lt;Box style={{ flex: 1, padding: '8px 40px 0 40px', flexDirection: 'row', gap: 26 }}&gt;&#10;    &lt;Box style={{ flex: 5, justifyContent: 'center' }}&gt;&#10;      &lt;CodeBlock code={`@startuml&#10;class Library {&#10;  - name : String&#10;  + addBook(b : Book) : void&#10;}&#10;&#10;class Book {&#10;  - isbn : String&#10;  + isAvailable() : boolean&#10;}&#10;&#10;class Member {&#10;  - name : String&#10;  + borrow(b : Book) : void&#10;}&#10;&#10;' TODO 1  Library holds Books -- a&#10;'         composition. One library,&#10;'         many books. Fill the ???&#10;Library &quot;1&quot; *-- &quot;???&quot; Book : holds&#10;&#10;' TODO 2  A Member may hold zero or more&#10;'         Books. A plain link, no diamond.&#10;Member &quot;???&quot; -- &quot;???&quot; Book : borrows&#10;@enduml`} language='text' width={600} fontSize={11.5} /&gt;&#10;    &lt;/Box&gt;&#10;    &lt;Box style={{ flex: 4, flexDirection: 'column', gap: 9, justifyContent: 'center' }}&gt;&#10;      &lt;Box style={{ padding: '13px 16px', background: '#F0F5FC', borderRadius: 10, borderLeft: '4px solid #1E4FA8' }}&gt;&#10;        &lt;Text style={{ fontSize: 16, fontWeight: 'bold', color: '#0E3F8C', lineHeight: 1.4 }}&gt;Fill in the two question marks — and be ready to defend each number.&lt;/Text&gt;&#10;      &lt;/Box&gt;&#10;      {[&#10;        ['list-ol', 'Work in pairs, one file', 'Pair on the keyboard, not on the conversation. The driver types; the navigator argues about multiplicities.'],&#10;        ['comments', 'A comment is allowed', 'Use a line starting with an apostrophe to record the decision you could not settle. That is worth marks.'],&#10;        ['eye', 'Render before you submit', 'A .puml file that does not render is not a model. Check it in VS Code or on the web renderer first.'],&#10;      ].map(([icon, t, d]) =&gt; (&#10;        &lt;Box key={t} style={{ flexDirection: 'row', gap: 12, alignItems: 'flex-start', padding: '11px 14px', background: '#F7F9FC', borderRadius: 10, border: '1px solid #E5E7EB' }}&gt;&#10;          &lt;Box style={{ width: 33, height: 33, borderRadius: 9, background: '#E8EFF8', justifyContent: 'center', alignItems: 'center' }}&gt;&#10;            &lt;FAIcon name={icon} style={{ fill: '#1E4FA8', width: 16, height: 16 }} /&gt;&#10;          &lt;/Box&gt;&#10;          &lt;Box style={{ flex: 1, flexDirection: 'column', gap: 2 }}&gt;&#10;            &lt;Text style={{ fontSize: 14.5, fontWeight: 'bold', color: '#0E3F8C' }}&gt;{t}&lt;/Text&gt;&#10;            &lt;Text style={{ fontSize: 13, color: '#4A5568', lineHeight: 1.4 }}&gt;{d}&lt;/Text&gt;&#10;          &lt;/Box&gt;&#10;        &lt;/Box&gt;&#10;      ))}&#10;      &lt;Box style={{ padding: '10px 14px', background: '#FFFFFF', borderRadius: 9, border: '1px dashed #D6DCE5' }}&gt;&#10;        &lt;Text style={{ fontSize: 12.5, color: '#8B97A8', lineHeight: 1.45 }}&gt;Submit &lt;Text style={{ fontWeight: 'bold', color: '#0E3F8C' }}&gt;library.puml&lt;/Text&gt; plus the exported PNG, in &lt;Text style={{ fontWeight: 'bold', color: '#0E3F8C' }}&gt;docs/diagrams/&lt;/Text&gt;. Twenty-five minutes.&lt;/Text&gt;&#10;      &lt;/Box&gt;&#10;    &lt;/Box&gt;&#10;  &lt;/Box&gt;&#10;  &lt;Box style={{ height: 34, padding: '0 40px', flexDirection: 'row', alignItems: 'center', justifyContent: 'space-between' }}&gt;&#10;    &lt;Text style={{ fontSize: 13, color: '#8B97A8' }}&gt;ISAD · Fall 2026&lt;/Text&gt;&#10;    &lt;Text style={{ fontSize: 14, color: '#1E4FA8', fontWeight: 'bold' }}&gt;34 / 38&lt;/Text&gt;&#10;  &lt;/Box&gt;&#10;&lt;/Slide&gt;"/>
+        <p:cNvPr id="621" name="" descr="&lt;Slide style={{ background: '#FFFFFF', padding: 0 }}&gt;&#10;  &lt;Box style={{ height: 72, background: '#1E4FA8', padding: '0 40px', flexDirection: 'row', alignItems: 'center', justifyContent: 'space-between' }}&gt;&#10;    &lt;Text style={{ fontSize: 15, color: '#B9CDF0', letterSpacing: 1 }}&gt;ISAD · INFORMATION SYSTEMS ANALYSIS &amp;amp; DESIGN&lt;/Text&gt;&#10;    &lt;Text style={{ fontSize: 15, color: '#B9CDF0' }}&gt;W03 · LAB&lt;/Text&gt;&#10;  &lt;/Box&gt;&#10;  &lt;Box style={{ padding: '14px 40px 0 40px', flexDirection: 'row', alignItems: 'center', justifyContent: 'space-between' }}&gt;&#10;    &lt;Text style={{ fontSize: 30, fontWeight: 'bold', color: '#0E3F8C' }}&gt;Exercise 3.2 — Library Model&lt;/Text&gt;&#10;    &lt;Text style={{ fontSize: 14, color: '#1E4FA8', fontWeight: 'bold' }}&gt;34 / 38&lt;/Text&gt;&#10;  &lt;/Box&gt;&#10;  &lt;Box style={{ flex: 1, padding: '8px 40px 0 40px', flexDirection: 'row', gap: 26 }}&gt;&#10;    &lt;Box style={{ flex: 5, justifyContent: 'center' }}&gt;&#10;      &lt;CodeBlock theme='one-dark-pro' code={`@startuml&#10;class Library {&#10;  - name : String&#10;  + addBook(b : Book) : void&#10;}&#10;&#10;class Book {&#10;  - isbn : String&#10;  + isAvailable() : boolean&#10;}&#10;&#10;class Member {&#10;  - name : String&#10;  + borrow(b : Book) : void&#10;}&#10;&#10;' TODO 1  Library holds Books -- a&#10;'         composition. One library,&#10;'         many books. Fill the ???&#10;Library &quot;1&quot; *-- &quot;???&quot; Book : holds&#10;&#10;' TODO 2  A Member may hold zero or more&#10;'         Books. A plain link, no diamond.&#10;Member &quot;???&quot; -- &quot;???&quot; Book : borrows&#10;@enduml`} language='text' width={600} fontSize={11.5} /&gt;&#10;    &lt;/Box&gt;&#10;    &lt;Box style={{ flex: 4, flexDirection: 'column', gap: 9, justifyContent: 'center' }}&gt;&#10;      &lt;Box style={{ padding: '13px 16px', background: '#F0F5FC', borderRadius: 10, borderLeft: '4px solid #1E4FA8' }}&gt;&#10;        &lt;Text style={{ fontSize: 16, fontWeight: 'bold', color: '#0E3F8C', lineHeight: 1.4 }}&gt;Fill in the two question marks — and be ready to defend each number.&lt;/Text&gt;&#10;      &lt;/Box&gt;&#10;      {[&#10;        ['list-ol', 'Work in pairs, one file', 'Pair on the keyboard, not on the conversation. The driver types; the navigator argues about multiplicities.'],&#10;        ['comments', 'A comment is allowed', 'Use a line starting with an apostrophe to record the decision you could not settle. That is worth marks.'],&#10;        ['eye', 'Render before you submit', 'A .puml file that does not render is not a model. Check it in VS Code or on the web renderer first.'],&#10;      ].map(([icon, t, d]) =&gt; (&#10;        &lt;Box key={t} style={{ flexDirection: 'row', gap: 12, alignItems: 'flex-start', padding: '11px 14px', background: '#F7F9FC', borderRadius: 10, border: '1px solid #E5E7EB' }}&gt;&#10;          &lt;Box style={{ width: 33, height: 33, borderRadius: 9, background: '#E8EFF8', justifyContent: 'center', alignItems: 'center' }}&gt;&#10;            &lt;FAIcon name={icon} style={{ fill: '#1E4FA8', width: 16, height: 16 }} /&gt;&#10;          &lt;/Box&gt;&#10;          &lt;Box style={{ flex: 1, flexDirection: 'column', gap: 2 }}&gt;&#10;            &lt;Text style={{ fontSize: 14.5, fontWeight: 'bold', color: '#0E3F8C' }}&gt;{t}&lt;/Text&gt;&#10;            &lt;Text style={{ fontSize: 13, color: '#4A5568', lineHeight: 1.4 }}&gt;{d}&lt;/Text&gt;&#10;          &lt;/Box&gt;&#10;        &lt;/Box&gt;&#10;      ))}&#10;      &lt;Box style={{ padding: '10px 14px', background: '#FFFFFF', borderRadius: 9, border: '1px dashed #D6DCE5' }}&gt;&#10;        &lt;Text style={{ fontSize: 12.5, color: '#8B97A8', lineHeight: 1.45 }}&gt;Submit &lt;Text style={{ fontWeight: 'bold', color: '#0E3F8C' }}&gt;library.puml&lt;/Text&gt; plus the exported PNG, in &lt;Text style={{ fontWeight: 'bold', color: '#0E3F8C' }}&gt;docs/diagrams/&lt;/Text&gt;. Twenty-five minutes.&lt;/Text&gt;&#10;      &lt;/Box&gt;&#10;    &lt;/Box&gt;&#10;  &lt;/Box&gt;&#10;  &lt;Box style={{ height: 34, padding: '0 40px', flexDirection: 'row', alignItems: 'center', justifyContent: 'space-between' }}&gt;&#10;    &lt;Text style={{ fontSize: 13, color: '#8B97A8' }}&gt;ISAD · Fall 2026&lt;/Text&gt;&#10;    &lt;Text style={{ fontSize: 14, color: '#1E4FA8', fontWeight: 'bold' }}&gt;34 / 38&lt;/Text&gt;&#10;  &lt;/Box&gt;&#10;&lt;/Slide&gt;"/>
         <p:cNvGrpSpPr/>
         <p:nvPr/>
       </p:nvGrpSpPr>
@@ -25393,16 +24591,16 @@
         </p:nvSpPr>
         <p:spPr>
           <a:xfrm rot="0" flipH="0" flipV="0">
-            <a:off x="381000" y="1447800"/>
-            <a:ext cx="6210300" cy="4876800"/>
+            <a:off x="381000" y="2114550"/>
+            <a:ext cx="6210300" cy="3552825"/>
           </a:xfrm>
           <a:prstGeom prst="roundRect">
             <a:avLst>
-              <a:gd name="adj" fmla="val 1563"/>
+              <a:gd name="adj" fmla="val 2145"/>
             </a:avLst>
           </a:prstGeom>
           <a:solidFill>
-            <a:srgbClr val="F6F8FA"/>
+            <a:srgbClr val="0E1116"/>
           </a:solidFill>
           <a:ln/>
         </p:spPr>
@@ -25419,8 +24617,8 @@
         </p:nvSpPr>
         <p:spPr>
           <a:xfrm rot="0" flipH="0" flipV="0">
-            <a:off x="533400" y="1581150"/>
-            <a:ext cx="5905500" cy="4610100"/>
+            <a:off x="533400" y="2247900"/>
+            <a:ext cx="5905500" cy="3286125"/>
           </a:xfrm>
           <a:prstGeom prst="rect"/>
         </p:spPr>
@@ -25429,11 +24627,7 @@
             <a:normAutofit/>
           </a:bodyPr>
           <a:p>
-            <a:pPr>
-              <a:lnSpc>
-                <a:spcPct val="140000"/>
-              </a:lnSpc>
-            </a:pPr>
+            <a:pPr/>
             <a:r>
               <a:rPr sz="863">
                 <a:solidFill>
@@ -25442,399 +24636,27 @@
                 <a:latin typeface="Menlo"/>
                 <a:ea typeface="Menlo"/>
               </a:rPr>
-              <a:t>@startuml</a:t>
-            </a:r>
-            <a:endParaRPr/>
-          </a:p>
-          <a:p>
-            <a:pPr>
-              <a:lnSpc>
-                <a:spcPct val="140000"/>
-              </a:lnSpc>
-            </a:pPr>
-            <a:r>
-              <a:rPr sz="863">
-                <a:solidFill>
-                  <a:srgbClr val="E5E7EB"/>
-                </a:solidFill>
-                <a:latin typeface="Menlo"/>
-                <a:ea typeface="Menlo"/>
-              </a:rPr>
-              <a:t>class Library {</a:t>
-            </a:r>
-            <a:endParaRPr/>
-          </a:p>
-          <a:p>
-            <a:pPr>
-              <a:lnSpc>
-                <a:spcPct val="140000"/>
-              </a:lnSpc>
-            </a:pPr>
-            <a:r>
-              <a:rPr sz="863">
-                <a:solidFill>
-                  <a:srgbClr val="E5E7EB"/>
-                </a:solidFill>
-                <a:latin typeface="Menlo"/>
-                <a:ea typeface="Menlo"/>
-              </a:rPr>
-              <a:t>  - name : String</a:t>
-            </a:r>
-            <a:endParaRPr/>
-          </a:p>
-          <a:p>
-            <a:pPr>
-              <a:lnSpc>
-                <a:spcPct val="140000"/>
-              </a:lnSpc>
-            </a:pPr>
-            <a:r>
-              <a:rPr sz="863">
-                <a:solidFill>
-                  <a:srgbClr val="E5E7EB"/>
-                </a:solidFill>
-                <a:latin typeface="Menlo"/>
-                <a:ea typeface="Menlo"/>
-              </a:rPr>
-              <a:t>  + addBook(b : Book) : void</a:t>
-            </a:r>
-            <a:endParaRPr/>
-          </a:p>
-          <a:p>
-            <a:pPr>
-              <a:lnSpc>
-                <a:spcPct val="140000"/>
-              </a:lnSpc>
-            </a:pPr>
-            <a:r>
-              <a:rPr sz="863">
-                <a:solidFill>
-                  <a:srgbClr val="E5E7EB"/>
-                </a:solidFill>
-                <a:latin typeface="Menlo"/>
-                <a:ea typeface="Menlo"/>
-              </a:rPr>
-              <a:t>}</a:t>
-            </a:r>
-            <a:endParaRPr/>
-          </a:p>
-          <a:p>
-            <a:pPr>
-              <a:lnSpc>
-                <a:spcPct val="140000"/>
-              </a:lnSpc>
-            </a:pPr>
-            <a:endParaRPr/>
-          </a:p>
-          <a:p>
-            <a:pPr>
-              <a:lnSpc>
-                <a:spcPct val="140000"/>
-              </a:lnSpc>
-            </a:pPr>
-            <a:r>
-              <a:rPr sz="863">
-                <a:solidFill>
-                  <a:srgbClr val="E5E7EB"/>
-                </a:solidFill>
-                <a:latin typeface="Menlo"/>
-                <a:ea typeface="Menlo"/>
-              </a:rPr>
-              <a:t>class Book {</a:t>
-            </a:r>
-            <a:endParaRPr/>
-          </a:p>
-          <a:p>
-            <a:pPr>
-              <a:lnSpc>
-                <a:spcPct val="140000"/>
-              </a:lnSpc>
-            </a:pPr>
-            <a:r>
-              <a:rPr sz="863">
-                <a:solidFill>
-                  <a:srgbClr val="E5E7EB"/>
-                </a:solidFill>
-                <a:latin typeface="Menlo"/>
-                <a:ea typeface="Menlo"/>
-              </a:rPr>
-              <a:t>  - isbn : String</a:t>
-            </a:r>
-            <a:endParaRPr/>
-          </a:p>
-          <a:p>
-            <a:pPr>
-              <a:lnSpc>
-                <a:spcPct val="140000"/>
-              </a:lnSpc>
-            </a:pPr>
-            <a:r>
-              <a:rPr sz="863">
-                <a:solidFill>
-                  <a:srgbClr val="E5E7EB"/>
-                </a:solidFill>
-                <a:latin typeface="Menlo"/>
-                <a:ea typeface="Menlo"/>
-              </a:rPr>
-              <a:t>  + isAvailable() : boolean</a:t>
-            </a:r>
-            <a:endParaRPr/>
-          </a:p>
-          <a:p>
-            <a:pPr>
-              <a:lnSpc>
-                <a:spcPct val="140000"/>
-              </a:lnSpc>
-            </a:pPr>
-            <a:r>
-              <a:rPr sz="863">
-                <a:solidFill>
-                  <a:srgbClr val="E5E7EB"/>
-                </a:solidFill>
-                <a:latin typeface="Menlo"/>
-                <a:ea typeface="Menlo"/>
-              </a:rPr>
-              <a:t>}</a:t>
-            </a:r>
-            <a:endParaRPr/>
-          </a:p>
-          <a:p>
-            <a:pPr>
-              <a:lnSpc>
-                <a:spcPct val="140000"/>
-              </a:lnSpc>
-            </a:pPr>
-            <a:endParaRPr/>
-          </a:p>
-          <a:p>
-            <a:pPr>
-              <a:lnSpc>
-                <a:spcPct val="140000"/>
-              </a:lnSpc>
-            </a:pPr>
-            <a:r>
-              <a:rPr sz="863">
-                <a:solidFill>
-                  <a:srgbClr val="E5E7EB"/>
-                </a:solidFill>
-                <a:latin typeface="Menlo"/>
-                <a:ea typeface="Menlo"/>
-              </a:rPr>
-              <a:t>class Member {</a:t>
-            </a:r>
-            <a:endParaRPr/>
-          </a:p>
-          <a:p>
-            <a:pPr>
-              <a:lnSpc>
-                <a:spcPct val="140000"/>
-              </a:lnSpc>
-            </a:pPr>
-            <a:r>
-              <a:rPr sz="863">
-                <a:solidFill>
-                  <a:srgbClr val="E5E7EB"/>
-                </a:solidFill>
-                <a:latin typeface="Menlo"/>
-                <a:ea typeface="Menlo"/>
-              </a:rPr>
-              <a:t>  - name : String</a:t>
-            </a:r>
-            <a:endParaRPr/>
-          </a:p>
-          <a:p>
-            <a:pPr>
-              <a:lnSpc>
-                <a:spcPct val="140000"/>
-              </a:lnSpc>
-            </a:pPr>
-            <a:r>
-              <a:rPr sz="863">
-                <a:solidFill>
-                  <a:srgbClr val="E5E7EB"/>
-                </a:solidFill>
-                <a:latin typeface="Menlo"/>
-                <a:ea typeface="Menlo"/>
-              </a:rPr>
-              <a:t>  + borrow(b : Book) : void</a:t>
-            </a:r>
-            <a:endParaRPr/>
-          </a:p>
-          <a:p>
-            <a:pPr>
-              <a:lnSpc>
-                <a:spcPct val="140000"/>
-              </a:lnSpc>
-            </a:pPr>
-            <a:r>
-              <a:rPr sz="863">
-                <a:solidFill>
-                  <a:srgbClr val="E5E7EB"/>
-                </a:solidFill>
-                <a:latin typeface="Menlo"/>
-                <a:ea typeface="Menlo"/>
-              </a:rPr>
-              <a:t>}</a:t>
-            </a:r>
-            <a:endParaRPr/>
-          </a:p>
-          <a:p>
-            <a:pPr>
-              <a:lnSpc>
-                <a:spcPct val="140000"/>
-              </a:lnSpc>
-            </a:pPr>
-            <a:endParaRPr/>
-          </a:p>
-          <a:p>
-            <a:pPr>
-              <a:lnSpc>
-                <a:spcPct val="140000"/>
-              </a:lnSpc>
-            </a:pPr>
-            <a:r>
-              <a:rPr sz="863">
-                <a:solidFill>
-                  <a:srgbClr val="E5E7EB"/>
-                </a:solidFill>
-                <a:latin typeface="Menlo"/>
-                <a:ea typeface="Menlo"/>
-              </a:rPr>
-              <a:t>' TODO 1  Library holds Books -- a</a:t>
-            </a:r>
-            <a:endParaRPr/>
-          </a:p>
-          <a:p>
-            <a:pPr>
-              <a:lnSpc>
-                <a:spcPct val="140000"/>
-              </a:lnSpc>
-            </a:pPr>
-            <a:r>
-              <a:rPr sz="863">
-                <a:solidFill>
-                  <a:srgbClr val="E5E7EB"/>
-                </a:solidFill>
-                <a:latin typeface="Menlo"/>
-                <a:ea typeface="Menlo"/>
-              </a:rPr>
-              <a:t>'         composition. One library,</a:t>
-            </a:r>
-            <a:endParaRPr/>
-          </a:p>
-          <a:p>
-            <a:pPr>
-              <a:lnSpc>
-                <a:spcPct val="140000"/>
-              </a:lnSpc>
-            </a:pPr>
-            <a:r>
-              <a:rPr sz="863">
-                <a:solidFill>
-                  <a:srgbClr val="E5E7EB"/>
-                </a:solidFill>
-                <a:latin typeface="Menlo"/>
-                <a:ea typeface="Menlo"/>
-              </a:rPr>
-              <a:t>'         many books. Fill the ???</a:t>
-            </a:r>
-            <a:endParaRPr/>
-          </a:p>
-          <a:p>
-            <a:pPr>
-              <a:lnSpc>
-                <a:spcPct val="140000"/>
-              </a:lnSpc>
-            </a:pPr>
-            <a:r>
-              <a:rPr sz="863">
-                <a:solidFill>
-                  <a:srgbClr val="E5E7EB"/>
-                </a:solidFill>
-                <a:latin typeface="Menlo"/>
-                <a:ea typeface="Menlo"/>
-              </a:rPr>
-              <a:t>Library "1" *-- "???" Book : holds</a:t>
-            </a:r>
-            <a:endParaRPr/>
-          </a:p>
-          <a:p>
-            <a:pPr>
-              <a:lnSpc>
-                <a:spcPct val="140000"/>
-              </a:lnSpc>
-            </a:pPr>
-            <a:endParaRPr/>
-          </a:p>
-          <a:p>
-            <a:pPr>
-              <a:lnSpc>
-                <a:spcPct val="140000"/>
-              </a:lnSpc>
-            </a:pPr>
-            <a:r>
-              <a:rPr sz="863">
-                <a:solidFill>
-                  <a:srgbClr val="E5E7EB"/>
-                </a:solidFill>
-                <a:latin typeface="Menlo"/>
-                <a:ea typeface="Menlo"/>
-              </a:rPr>
-              <a:t>' TODO 2  A Member may hold zero or more</a:t>
-            </a:r>
-            <a:endParaRPr/>
-          </a:p>
-          <a:p>
-            <a:pPr>
-              <a:lnSpc>
-                <a:spcPct val="140000"/>
-              </a:lnSpc>
-            </a:pPr>
-            <a:r>
-              <a:rPr sz="863">
-                <a:solidFill>
-                  <a:srgbClr val="E5E7EB"/>
-                </a:solidFill>
-                <a:latin typeface="Menlo"/>
-                <a:ea typeface="Menlo"/>
-              </a:rPr>
-              <a:t>'         Books. A plain link, no diamond.</a:t>
-            </a:r>
-            <a:endParaRPr/>
-          </a:p>
-          <a:p>
-            <a:pPr>
-              <a:lnSpc>
-                <a:spcPct val="140000"/>
-              </a:lnSpc>
-            </a:pPr>
-            <a:r>
-              <a:rPr sz="863">
-                <a:solidFill>
-                  <a:srgbClr val="E5E7EB"/>
-                </a:solidFill>
-                <a:latin typeface="Menlo"/>
-                <a:ea typeface="Menlo"/>
-              </a:rPr>
-              <a:t>Member "???" -- "???" Book : borrows</a:t>
-            </a:r>
-            <a:endParaRPr/>
-          </a:p>
-          <a:p>
-            <a:pPr>
-              <a:lnSpc>
-                <a:spcPct val="140000"/>
-              </a:lnSpc>
-            </a:pPr>
-            <a:r>
-              <a:rPr sz="863">
-                <a:solidFill>
-                  <a:srgbClr val="E5E7EB"/>
-                </a:solidFill>
-                <a:latin typeface="Menlo"/>
-                <a:ea typeface="Menlo"/>
-              </a:rPr>
-              <a:t>@enduml</a:t>
+              <a:t>@startuml
+class Library {
+  - name : String
+  + addBook(b : Book) : void
+}
+class Book {
+  - isbn : String
+  + isAvailable() : boolean
+}
+class Member {
+  - name : String
+  + borrow(b : Book) : void
+}
+' TODO 1  Library holds Books -- a
+'         composition. One library,
+'         many books. Fill the ???
+Library "1" *-- "???" Book : holds
+' TODO 2  A Member may hold zero or more
+'         Books. A plain link, no diamond.
+Member "???" -- "???" Book : borrows
+@enduml</a:t>
             </a:r>
             <a:endParaRPr/>
           </a:p>
@@ -25850,7 +24672,7 @@
   <p:cSld>
     <p:spTree>
       <p:nvGrpSpPr>
-        <p:cNvPr id="652" name="" descr="&lt;Slide style={{ background: '#FFFFFF', padding: 0 }}&gt;&#10;  &lt;Box style={{ height: 72, background: '#1E4FA8', padding: '0 40px', flexDirection: 'row', alignItems: 'center', justifyContent: 'space-between' }}&gt;&#10;    &lt;Text style={{ fontSize: 15, color: '#B9CDF0', letterSpacing: 1 }}&gt;ISAD · INFORMATION SYSTEMS ANALYSIS &amp;amp; DESIGN&lt;/Text&gt;&#10;    &lt;Text style={{ fontSize: 15, color: '#B9CDF0' }}&gt;W03 · LAB&lt;/Text&gt;&#10;  &lt;/Box&gt;&#10;  &lt;Box style={{ padding: '14px 40px 0 40px', flexDirection: 'row', alignItems: 'center', justifyContent: 'space-between' }}&gt;&#10;    &lt;Text style={{ fontSize: 30, fontWeight: 'bold', color: '#0E3F8C' }}&gt;Exercise 3.2 — Reference Solution&lt;/Text&gt;&#10;    &lt;Text style={{ fontSize: 14, color: '#1E4FA8', fontWeight: 'bold' }}&gt;35 / 38&lt;/Text&gt;&#10;  &lt;/Box&gt;&#10;  &lt;Box style={{ flex: 1, padding: '8px 40px 0 40px', flexDirection: 'row', gap: 26 }}&gt;&#10;    &lt;Box style={{ flex: 5, justifyContent: 'center' }}&gt;&#10;      &lt;CodeBlock code={`@startuml&#10;class Library {&#10;  - name : String&#10;  + addBook(b : Book) : void&#10;  + findByIsbn(isbn : String) : Book&#10;}&#10;&#10;class Book {&#10;  - isbn : String&#10;  - title : String&#10;  + isAvailable() : boolean&#10;}&#10;&#10;class Member {&#10;  - id : String&#10;  - name : String&#10;  + borrow(b : Book) : void&#10;}&#10;&#10;Library &quot;1&quot; *-- &quot;0..*&quot; Book : holds&#10;Member &quot;0..1&quot; -- &quot;0..*&quot; Book : borrows&#10;@enduml`} language='text' width={600} fontSize={12} /&gt;&#10;    &lt;/Box&gt;&#10;    &lt;Box style={{ flex: 4, flexDirection: 'column', gap: 10, justifyContent: 'center' }}&gt;&#10;      {[&#10;        ['1', '0..* at the Book end', 'A library with no books yet is still a legal library. Writing 1..* here would force a fake Book into every new branch — that is the kind of error that reaches production.'],&#10;        ['2', '0..1 at the Member end', 'The Book side of a loan is optional: a Book on the shelf is borrowed by nobody. Write 1 and no Book can ever sit on a shelf.'],&#10;        ['3', '*-- and not o--', 'Composition says the Books go when the Library record goes. If your pair disagreed, write the disagreement in the README — the argument is the deliverable, not the symbol.'],&#10;      ].map(([n, t, d]) =&gt; (&#10;        &lt;Box key={n} style={{ flexDirection: 'row', gap: 13, alignItems: 'flex-start', padding: '13px 16px', background: '#F7F9FC', borderRadius: 10, border: '1px solid #E5E7EB' }}&gt;&#10;          &lt;Box style={{ width: 28, height: 28, borderRadius: 14, background: '#1E4FA8', justifyContent: 'center', alignItems: 'center' }}&gt;&#10;            &lt;Text style={{ fontSize: 14, fontWeight: 'bold', color: '#FFFFFF' }}&gt;{n}&lt;/Text&gt;&#10;          &lt;/Box&gt;&#10;          &lt;Box style={{ flex: 1, flexDirection: 'column', gap: 3 }}&gt;&#10;            &lt;Text style={{ fontSize: 15, fontWeight: 'bold', color: '#0E3F8C' }}&gt;{t}&lt;/Text&gt;&#10;            &lt;Text style={{ fontSize: 13, color: '#4A5568', lineHeight: 1.45 }}&gt;{d}&lt;/Text&gt;&#10;          &lt;/Box&gt;&#10;        &lt;/Box&gt;&#10;      ))}&#10;      &lt;Box style={{ padding: '12px 16px', background: '#F0F5FC', borderRadius: 9, borderLeft: '4px solid #1E4FA8' }}&gt;&#10;        &lt;Text style={{ fontSize: 13.5, color: '#0E3F8C', lineHeight: 1.5, fontWeight: 'bold' }}&gt;A different answer can be correct. It stops being correct the moment you cannot say why.&lt;/Text&gt;&#10;      &lt;/Box&gt;&#10;    &lt;/Box&gt;&#10;  &lt;/Box&gt;&#10;  &lt;Box style={{ height: 34, padding: '0 40px', flexDirection: 'row', alignItems: 'center', justifyContent: 'space-between' }}&gt;&#10;    &lt;Text style={{ fontSize: 13, color: '#8B97A8' }}&gt;ISAD · Fall 2026&lt;/Text&gt;&#10;    &lt;Text style={{ fontSize: 14, color: '#1E4FA8', fontWeight: 'bold' }}&gt;35 / 38&lt;/Text&gt;&#10;  &lt;/Box&gt;&#10;&lt;/Slide&gt;"/>
+        <p:cNvPr id="652" name="" descr="&lt;Slide style={{ background: '#FFFFFF', padding: 0 }}&gt;&#10;  &lt;Box style={{ height: 72, background: '#1E4FA8', padding: '0 40px', flexDirection: 'row', alignItems: 'center', justifyContent: 'space-between' }}&gt;&#10;    &lt;Text style={{ fontSize: 15, color: '#B9CDF0', letterSpacing: 1 }}&gt;ISAD · INFORMATION SYSTEMS ANALYSIS &amp;amp; DESIGN&lt;/Text&gt;&#10;    &lt;Text style={{ fontSize: 15, color: '#B9CDF0' }}&gt;W03 · LAB&lt;/Text&gt;&#10;  &lt;/Box&gt;&#10;  &lt;Box style={{ padding: '14px 40px 0 40px', flexDirection: 'row', alignItems: 'center', justifyContent: 'space-between' }}&gt;&#10;    &lt;Text style={{ fontSize: 30, fontWeight: 'bold', color: '#0E3F8C' }}&gt;Exercise 3.2 — Reference Solution&lt;/Text&gt;&#10;    &lt;Text style={{ fontSize: 14, color: '#1E4FA8', fontWeight: 'bold' }}&gt;35 / 38&lt;/Text&gt;&#10;  &lt;/Box&gt;&#10;  &lt;Box style={{ flex: 1, padding: '8px 40px 0 40px', flexDirection: 'row', gap: 26 }}&gt;&#10;    &lt;Box style={{ flex: 5, justifyContent: 'center' }}&gt;&#10;      &lt;CodeBlock theme='one-dark-pro' code={`@startuml&#10;class Library {&#10;  - name : String&#10;  + addBook(b : Book) : void&#10;  + findByIsbn(isbn : String) : Book&#10;}&#10;&#10;class Book {&#10;  - isbn : String&#10;  - title : String&#10;  + isAvailable() : boolean&#10;}&#10;&#10;class Member {&#10;  - id : String&#10;  - name : String&#10;  + borrow(b : Book) : void&#10;}&#10;&#10;Library &quot;1&quot; *-- &quot;0..*&quot; Book : holds&#10;Member &quot;0..1&quot; -- &quot;0..*&quot; Book : borrows&#10;@enduml`} language='text' width={600} fontSize={12} /&gt;&#10;    &lt;/Box&gt;&#10;    &lt;Box style={{ flex: 4, flexDirection: 'column', gap: 10, justifyContent: 'center' }}&gt;&#10;      {[&#10;        ['1', '0..* at the Book end', 'A library with no books yet is still a legal library. Writing 1..* here would force a fake Book into every new branch — that is the kind of error that reaches production.'],&#10;        ['2', '0..1 at the Member end', 'The Book side of a loan is optional: a Book on the shelf is borrowed by nobody. Write 1 and no Book can ever sit on a shelf.'],&#10;        ['3', '*-- and not o--', 'Composition says the Books go when the Library record goes. If your pair disagreed, write the disagreement in the README — the argument is the deliverable, not the symbol.'],&#10;      ].map(([n, t, d]) =&gt; (&#10;        &lt;Box key={n} style={{ flexDirection: 'row', gap: 13, alignItems: 'flex-start', padding: '13px 16px', background: '#F7F9FC', borderRadius: 10, border: '1px solid #E5E7EB' }}&gt;&#10;          &lt;Box style={{ width: 28, height: 28, borderRadius: 14, background: '#1E4FA8', justifyContent: 'center', alignItems: 'center' }}&gt;&#10;            &lt;Text style={{ fontSize: 14, fontWeight: 'bold', color: '#FFFFFF' }}&gt;{n}&lt;/Text&gt;&#10;          &lt;/Box&gt;&#10;          &lt;Box style={{ flex: 1, flexDirection: 'column', gap: 3 }}&gt;&#10;            &lt;Text style={{ fontSize: 15, fontWeight: 'bold', color: '#0E3F8C' }}&gt;{t}&lt;/Text&gt;&#10;            &lt;Text style={{ fontSize: 13, color: '#4A5568', lineHeight: 1.45 }}&gt;{d}&lt;/Text&gt;&#10;          &lt;/Box&gt;&#10;        &lt;/Box&gt;&#10;      ))}&#10;      &lt;Box style={{ padding: '12px 16px', background: '#F0F5FC', borderRadius: 9, borderLeft: '4px solid #1E4FA8' }}&gt;&#10;        &lt;Text style={{ fontSize: 13.5, color: '#0E3F8C', lineHeight: 1.5, fontWeight: 'bold' }}&gt;A different answer can be correct. It stops being correct the moment you cannot say why.&lt;/Text&gt;&#10;      &lt;/Box&gt;&#10;    &lt;/Box&gt;&#10;  &lt;/Box&gt;&#10;  &lt;Box style={{ height: 34, padding: '0 40px', flexDirection: 'row', alignItems: 'center', justifyContent: 'space-between' }}&gt;&#10;    &lt;Text style={{ fontSize: 13, color: '#8B97A8' }}&gt;ISAD · Fall 2026&lt;/Text&gt;&#10;    &lt;Text style={{ fontSize: 14, color: '#1E4FA8', fontWeight: 'bold' }}&gt;35 / 38&lt;/Text&gt;&#10;  &lt;/Box&gt;&#10;&lt;/Slide&gt;"/>
         <p:cNvGrpSpPr/>
         <p:nvPr/>
       </p:nvGrpSpPr>
@@ -26740,16 +25562,16 @@
         </p:nvSpPr>
         <p:spPr>
           <a:xfrm rot="0" flipH="0" flipV="0">
-            <a:off x="381000" y="1638300"/>
-            <a:ext cx="6210300" cy="4495800"/>
+            <a:off x="381000" y="2247900"/>
+            <a:ext cx="6210300" cy="3286125"/>
           </a:xfrm>
           <a:prstGeom prst="roundRect">
             <a:avLst>
-              <a:gd name="adj" fmla="val 1695"/>
+              <a:gd name="adj" fmla="val 2319"/>
             </a:avLst>
           </a:prstGeom>
           <a:solidFill>
-            <a:srgbClr val="F6F8FA"/>
+            <a:srgbClr val="0E1116"/>
           </a:solidFill>
           <a:ln/>
         </p:spPr>
@@ -26766,8 +25588,8 @@
         </p:nvSpPr>
         <p:spPr>
           <a:xfrm rot="0" flipH="0" flipV="0">
-            <a:off x="533400" y="1771650"/>
-            <a:ext cx="5905500" cy="4229100"/>
+            <a:off x="533400" y="2381250"/>
+            <a:ext cx="5905500" cy="3019425"/>
           </a:xfrm>
           <a:prstGeom prst="rect"/>
         </p:spPr>
@@ -26776,11 +25598,7 @@
             <a:normAutofit/>
           </a:bodyPr>
           <a:p>
-            <a:pPr>
-              <a:lnSpc>
-                <a:spcPct val="140000"/>
-              </a:lnSpc>
-            </a:pPr>
+            <a:pPr/>
             <a:r>
               <a:rPr sz="900">
                 <a:solidFill>
@@ -26789,355 +25607,25 @@
                 <a:latin typeface="Menlo"/>
                 <a:ea typeface="Menlo"/>
               </a:rPr>
-              <a:t>@startuml</a:t>
-            </a:r>
-            <a:endParaRPr/>
-          </a:p>
-          <a:p>
-            <a:pPr>
-              <a:lnSpc>
-                <a:spcPct val="140000"/>
-              </a:lnSpc>
-            </a:pPr>
-            <a:r>
-              <a:rPr sz="900">
-                <a:solidFill>
-                  <a:srgbClr val="E5E7EB"/>
-                </a:solidFill>
-                <a:latin typeface="Menlo"/>
-                <a:ea typeface="Menlo"/>
-              </a:rPr>
-              <a:t>class Library {</a:t>
-            </a:r>
-            <a:endParaRPr/>
-          </a:p>
-          <a:p>
-            <a:pPr>
-              <a:lnSpc>
-                <a:spcPct val="140000"/>
-              </a:lnSpc>
-            </a:pPr>
-            <a:r>
-              <a:rPr sz="900">
-                <a:solidFill>
-                  <a:srgbClr val="E5E7EB"/>
-                </a:solidFill>
-                <a:latin typeface="Menlo"/>
-                <a:ea typeface="Menlo"/>
-              </a:rPr>
-              <a:t>  - name : String</a:t>
-            </a:r>
-            <a:endParaRPr/>
-          </a:p>
-          <a:p>
-            <a:pPr>
-              <a:lnSpc>
-                <a:spcPct val="140000"/>
-              </a:lnSpc>
-            </a:pPr>
-            <a:r>
-              <a:rPr sz="900">
-                <a:solidFill>
-                  <a:srgbClr val="E5E7EB"/>
-                </a:solidFill>
-                <a:latin typeface="Menlo"/>
-                <a:ea typeface="Menlo"/>
-              </a:rPr>
-              <a:t>  + addBook(b : Book) : void</a:t>
-            </a:r>
-            <a:endParaRPr/>
-          </a:p>
-          <a:p>
-            <a:pPr>
-              <a:lnSpc>
-                <a:spcPct val="140000"/>
-              </a:lnSpc>
-            </a:pPr>
-            <a:r>
-              <a:rPr sz="900">
-                <a:solidFill>
-                  <a:srgbClr val="E5E7EB"/>
-                </a:solidFill>
-                <a:latin typeface="Menlo"/>
-                <a:ea typeface="Menlo"/>
-              </a:rPr>
-              <a:t>  + findByIsbn(isbn : String) : Book</a:t>
-            </a:r>
-            <a:endParaRPr/>
-          </a:p>
-          <a:p>
-            <a:pPr>
-              <a:lnSpc>
-                <a:spcPct val="140000"/>
-              </a:lnSpc>
-            </a:pPr>
-            <a:r>
-              <a:rPr sz="900">
-                <a:solidFill>
-                  <a:srgbClr val="E5E7EB"/>
-                </a:solidFill>
-                <a:latin typeface="Menlo"/>
-                <a:ea typeface="Menlo"/>
-              </a:rPr>
-              <a:t>}</a:t>
-            </a:r>
-            <a:endParaRPr/>
-          </a:p>
-          <a:p>
-            <a:pPr>
-              <a:lnSpc>
-                <a:spcPct val="140000"/>
-              </a:lnSpc>
-            </a:pPr>
-            <a:endParaRPr/>
-          </a:p>
-          <a:p>
-            <a:pPr>
-              <a:lnSpc>
-                <a:spcPct val="140000"/>
-              </a:lnSpc>
-            </a:pPr>
-            <a:r>
-              <a:rPr sz="900">
-                <a:solidFill>
-                  <a:srgbClr val="E5E7EB"/>
-                </a:solidFill>
-                <a:latin typeface="Menlo"/>
-                <a:ea typeface="Menlo"/>
-              </a:rPr>
-              <a:t>class Book {</a:t>
-            </a:r>
-            <a:endParaRPr/>
-          </a:p>
-          <a:p>
-            <a:pPr>
-              <a:lnSpc>
-                <a:spcPct val="140000"/>
-              </a:lnSpc>
-            </a:pPr>
-            <a:r>
-              <a:rPr sz="900">
-                <a:solidFill>
-                  <a:srgbClr val="E5E7EB"/>
-                </a:solidFill>
-                <a:latin typeface="Menlo"/>
-                <a:ea typeface="Menlo"/>
-              </a:rPr>
-              <a:t>  - isbn : String</a:t>
-            </a:r>
-            <a:endParaRPr/>
-          </a:p>
-          <a:p>
-            <a:pPr>
-              <a:lnSpc>
-                <a:spcPct val="140000"/>
-              </a:lnSpc>
-            </a:pPr>
-            <a:r>
-              <a:rPr sz="900">
-                <a:solidFill>
-                  <a:srgbClr val="E5E7EB"/>
-                </a:solidFill>
-                <a:latin typeface="Menlo"/>
-                <a:ea typeface="Menlo"/>
-              </a:rPr>
-              <a:t>  - title : String</a:t>
-            </a:r>
-            <a:endParaRPr/>
-          </a:p>
-          <a:p>
-            <a:pPr>
-              <a:lnSpc>
-                <a:spcPct val="140000"/>
-              </a:lnSpc>
-            </a:pPr>
-            <a:r>
-              <a:rPr sz="900">
-                <a:solidFill>
-                  <a:srgbClr val="E5E7EB"/>
-                </a:solidFill>
-                <a:latin typeface="Menlo"/>
-                <a:ea typeface="Menlo"/>
-              </a:rPr>
-              <a:t>  + isAvailable() : boolean</a:t>
-            </a:r>
-            <a:endParaRPr/>
-          </a:p>
-          <a:p>
-            <a:pPr>
-              <a:lnSpc>
-                <a:spcPct val="140000"/>
-              </a:lnSpc>
-            </a:pPr>
-            <a:r>
-              <a:rPr sz="900">
-                <a:solidFill>
-                  <a:srgbClr val="E5E7EB"/>
-                </a:solidFill>
-                <a:latin typeface="Menlo"/>
-                <a:ea typeface="Menlo"/>
-              </a:rPr>
-              <a:t>}</a:t>
-            </a:r>
-            <a:endParaRPr/>
-          </a:p>
-          <a:p>
-            <a:pPr>
-              <a:lnSpc>
-                <a:spcPct val="140000"/>
-              </a:lnSpc>
-            </a:pPr>
-            <a:endParaRPr/>
-          </a:p>
-          <a:p>
-            <a:pPr>
-              <a:lnSpc>
-                <a:spcPct val="140000"/>
-              </a:lnSpc>
-            </a:pPr>
-            <a:r>
-              <a:rPr sz="900">
-                <a:solidFill>
-                  <a:srgbClr val="E5E7EB"/>
-                </a:solidFill>
-                <a:latin typeface="Menlo"/>
-                <a:ea typeface="Menlo"/>
-              </a:rPr>
-              <a:t>class Member {</a:t>
-            </a:r>
-            <a:endParaRPr/>
-          </a:p>
-          <a:p>
-            <a:pPr>
-              <a:lnSpc>
-                <a:spcPct val="140000"/>
-              </a:lnSpc>
-            </a:pPr>
-            <a:r>
-              <a:rPr sz="900">
-                <a:solidFill>
-                  <a:srgbClr val="E5E7EB"/>
-                </a:solidFill>
-                <a:latin typeface="Menlo"/>
-                <a:ea typeface="Menlo"/>
-              </a:rPr>
-              <a:t>  - id : String</a:t>
-            </a:r>
-            <a:endParaRPr/>
-          </a:p>
-          <a:p>
-            <a:pPr>
-              <a:lnSpc>
-                <a:spcPct val="140000"/>
-              </a:lnSpc>
-            </a:pPr>
-            <a:r>
-              <a:rPr sz="900">
-                <a:solidFill>
-                  <a:srgbClr val="E5E7EB"/>
-                </a:solidFill>
-                <a:latin typeface="Menlo"/>
-                <a:ea typeface="Menlo"/>
-              </a:rPr>
-              <a:t>  - name : String</a:t>
-            </a:r>
-            <a:endParaRPr/>
-          </a:p>
-          <a:p>
-            <a:pPr>
-              <a:lnSpc>
-                <a:spcPct val="140000"/>
-              </a:lnSpc>
-            </a:pPr>
-            <a:r>
-              <a:rPr sz="900">
-                <a:solidFill>
-                  <a:srgbClr val="E5E7EB"/>
-                </a:solidFill>
-                <a:latin typeface="Menlo"/>
-                <a:ea typeface="Menlo"/>
-              </a:rPr>
-              <a:t>  + borrow(b : Book) : void</a:t>
-            </a:r>
-            <a:endParaRPr/>
-          </a:p>
-          <a:p>
-            <a:pPr>
-              <a:lnSpc>
-                <a:spcPct val="140000"/>
-              </a:lnSpc>
-            </a:pPr>
-            <a:r>
-              <a:rPr sz="900">
-                <a:solidFill>
-                  <a:srgbClr val="E5E7EB"/>
-                </a:solidFill>
-                <a:latin typeface="Menlo"/>
-                <a:ea typeface="Menlo"/>
-              </a:rPr>
-              <a:t>}</a:t>
-            </a:r>
-            <a:endParaRPr/>
-          </a:p>
-          <a:p>
-            <a:pPr>
-              <a:lnSpc>
-                <a:spcPct val="140000"/>
-              </a:lnSpc>
-            </a:pPr>
-            <a:endParaRPr/>
-          </a:p>
-          <a:p>
-            <a:pPr>
-              <a:lnSpc>
-                <a:spcPct val="140000"/>
-              </a:lnSpc>
-            </a:pPr>
-            <a:r>
-              <a:rPr sz="900">
-                <a:solidFill>
-                  <a:srgbClr val="E5E7EB"/>
-                </a:solidFill>
-                <a:latin typeface="Menlo"/>
-                <a:ea typeface="Menlo"/>
-              </a:rPr>
-              <a:t>Library "1" *-- "0..*" Book : holds</a:t>
-            </a:r>
-            <a:endParaRPr/>
-          </a:p>
-          <a:p>
-            <a:pPr>
-              <a:lnSpc>
-                <a:spcPct val="140000"/>
-              </a:lnSpc>
-            </a:pPr>
-            <a:r>
-              <a:rPr sz="900">
-                <a:solidFill>
-                  <a:srgbClr val="E5E7EB"/>
-                </a:solidFill>
-                <a:latin typeface="Menlo"/>
-                <a:ea typeface="Menlo"/>
-              </a:rPr>
-              <a:t>Member "0..1" -- "0..*" Book : borrows</a:t>
-            </a:r>
-            <a:endParaRPr/>
-          </a:p>
-          <a:p>
-            <a:pPr>
-              <a:lnSpc>
-                <a:spcPct val="140000"/>
-              </a:lnSpc>
-            </a:pPr>
-            <a:r>
-              <a:rPr sz="900">
-                <a:solidFill>
-                  <a:srgbClr val="E5E7EB"/>
-                </a:solidFill>
-                <a:latin typeface="Menlo"/>
-                <a:ea typeface="Menlo"/>
-              </a:rPr>
-              <a:t>@enduml</a:t>
+              <a:t>@startuml
+class Library {
+  - name : String
+  + addBook(b : Book) : void
+  + findByIsbn(isbn : String) : Book
+}
+class Book {
+  - isbn : String
+  - title : String
+  + isAvailable() : boolean
+}
+class Member {
+  - id : String
+  - name : String
+  + borrow(b : Book) : void
+}
+Library "1" *-- "0..*" Book : holds
+Member "0..1" -- "0..*" Book : borrows
+@enduml</a:t>
             </a:r>
             <a:endParaRPr/>
           </a:p>
